--- a/Programa Flammam - R&D Propulsion.pptx
+++ b/Programa Flammam - R&D Propulsion.pptx
@@ -5559,11 +5559,11 @@
           <c:showPercent val="0"/>
           <c:showBubbleSize val="0"/>
         </c:dLbls>
-        <c:axId val="25227248"/>
-        <c:axId val="306445112"/>
+        <c:axId val="306710864"/>
+        <c:axId val="306711256"/>
       </c:scatterChart>
       <c:valAx>
-        <c:axId val="25227248"/>
+        <c:axId val="306710864"/>
         <c:scaling>
           <c:orientation val="minMax"/>
           <c:min val="0"/>
@@ -5648,12 +5648,12 @@
             <a:endParaRPr lang="en-US"/>
           </a:p>
         </c:txPr>
-        <c:crossAx val="306445112"/>
+        <c:crossAx val="306711256"/>
         <c:crosses val="autoZero"/>
         <c:crossBetween val="midCat"/>
       </c:valAx>
       <c:valAx>
-        <c:axId val="306445112"/>
+        <c:axId val="306711256"/>
         <c:scaling>
           <c:orientation val="minMax"/>
           <c:min val="0"/>
@@ -5738,7 +5738,7 @@
             <a:endParaRPr lang="en-US"/>
           </a:p>
         </c:txPr>
-        <c:crossAx val="25227248"/>
+        <c:crossAx val="306710864"/>
         <c:crosses val="autoZero"/>
         <c:crossBetween val="midCat"/>
       </c:valAx>
@@ -6675,7 +6675,7 @@
         <p:cNvPr id="1" name="">
           <a:extLst>
             <a:ext uri="{FF2B5EF4-FFF2-40B4-BE49-F238E27FC236}">
-              <a16:creationId xmlns:a16="http://schemas.microsoft.com/office/drawing/2014/main" xmlns="" id="{6EA57328-AAAD-8754-FFAD-71061F97785C}"/>
+              <a16:creationId xmlns="" xmlns:a16="http://schemas.microsoft.com/office/drawing/2014/main" id="{B7B2D333-4ABD-BAA5-69F3-C31FB73D45EF}"/>
             </a:ext>
           </a:extLst>
         </p:cNvPr>
@@ -6695,7 +6695,7 @@
           <p:cNvPr id="2" name="Marcador de imagen de diapositiva 1">
             <a:extLst>
               <a:ext uri="{FF2B5EF4-FFF2-40B4-BE49-F238E27FC236}">
-                <a16:creationId xmlns:a16="http://schemas.microsoft.com/office/drawing/2014/main" xmlns="" id="{441F522B-C9D9-9F56-19DD-C4AB74C55273}"/>
+                <a16:creationId xmlns="" xmlns:a16="http://schemas.microsoft.com/office/drawing/2014/main" id="{C6B6BF19-AEAE-42B5-8FA3-3E9C4D05896C}"/>
               </a:ext>
             </a:extLst>
           </p:cNvPr>
@@ -6713,7 +6713,119 @@
           <p:cNvPr id="3" name="Marcador de notas 2">
             <a:extLst>
               <a:ext uri="{FF2B5EF4-FFF2-40B4-BE49-F238E27FC236}">
-                <a16:creationId xmlns:a16="http://schemas.microsoft.com/office/drawing/2014/main" xmlns="" id="{4373AB38-1F06-0DCC-E3CE-74CA129726D6}"/>
+                <a16:creationId xmlns="" xmlns:a16="http://schemas.microsoft.com/office/drawing/2014/main" id="{A976F343-B24A-5BCF-88EF-90FB29A7C863}"/>
+              </a:ext>
+            </a:extLst>
+          </p:cNvPr>
+          <p:cNvSpPr>
+            <a:spLocks noGrp="1"/>
+          </p:cNvSpPr>
+          <p:nvPr>
+            <p:ph type="body" idx="1"/>
+          </p:nvPr>
+        </p:nvSpPr>
+        <p:spPr/>
+        <p:txBody>
+          <a:bodyPr/>
+          <a:lstStyle/>
+          <a:p>
+            <a:r>
+              <a:rPr lang="en-US" dirty="0"/>
+              <a:t>A large value of propellant mass fraction is desirable as it indicates an efficient use of system mass on the rocket that is directly responsible for thrust production.</a:t>
+            </a:r>
+            <a:endParaRPr lang="es-MX" dirty="0"/>
+          </a:p>
+        </p:txBody>
+      </p:sp>
+      <p:sp>
+        <p:nvSpPr>
+          <p:cNvPr id="4" name="Marcador de número de diapositiva 3">
+            <a:extLst>
+              <a:ext uri="{FF2B5EF4-FFF2-40B4-BE49-F238E27FC236}">
+                <a16:creationId xmlns="" xmlns:a16="http://schemas.microsoft.com/office/drawing/2014/main" id="{9664074F-D602-7BA4-F9BA-23096A9C6A38}"/>
+              </a:ext>
+            </a:extLst>
+          </p:cNvPr>
+          <p:cNvSpPr>
+            <a:spLocks noGrp="1"/>
+          </p:cNvSpPr>
+          <p:nvPr>
+            <p:ph type="sldNum" sz="quarter" idx="5"/>
+          </p:nvPr>
+        </p:nvSpPr>
+        <p:spPr/>
+        <p:txBody>
+          <a:bodyPr/>
+          <a:lstStyle/>
+          <a:p>
+            <a:fld id="{DB28F327-BEE5-45AC-9CE6-84AF0ACB1493}" type="slidenum">
+              <a:rPr lang="es-MX" smtClean="0"/>
+              <a:t>12</a:t>
+            </a:fld>
+            <a:endParaRPr lang="es-MX"/>
+          </a:p>
+        </p:txBody>
+      </p:sp>
+    </p:spTree>
+    <p:extLst>
+      <p:ext uri="{BB962C8B-B14F-4D97-AF65-F5344CB8AC3E}">
+        <p14:creationId xmlns:p14="http://schemas.microsoft.com/office/powerpoint/2010/main" val="1445442328"/>
+      </p:ext>
+    </p:extLst>
+  </p:cSld>
+  <p:clrMapOvr>
+    <a:masterClrMapping/>
+  </p:clrMapOvr>
+</p:notes>
+</file>
+
+<file path=ppt/notesSlides/notesSlide11.xml><?xml version="1.0" encoding="utf-8"?>
+<p:notes xmlns:a="http://schemas.openxmlformats.org/drawingml/2006/main" xmlns:r="http://schemas.openxmlformats.org/officeDocument/2006/relationships" xmlns:p="http://schemas.openxmlformats.org/presentationml/2006/main">
+  <p:cSld>
+    <p:spTree>
+      <p:nvGrpSpPr>
+        <p:cNvPr id="1" name="">
+          <a:extLst>
+            <a:ext uri="{FF2B5EF4-FFF2-40B4-BE49-F238E27FC236}">
+              <a16:creationId xmlns="" xmlns:a16="http://schemas.microsoft.com/office/drawing/2014/main" id="{6EA57328-AAAD-8754-FFAD-71061F97785C}"/>
+            </a:ext>
+          </a:extLst>
+        </p:cNvPr>
+        <p:cNvGrpSpPr/>
+        <p:nvPr/>
+      </p:nvGrpSpPr>
+      <p:grpSpPr>
+        <a:xfrm>
+          <a:off x="0" y="0"/>
+          <a:ext cx="0" cy="0"/>
+          <a:chOff x="0" y="0"/>
+          <a:chExt cx="0" cy="0"/>
+        </a:xfrm>
+      </p:grpSpPr>
+      <p:sp>
+        <p:nvSpPr>
+          <p:cNvPr id="2" name="Marcador de imagen de diapositiva 1">
+            <a:extLst>
+              <a:ext uri="{FF2B5EF4-FFF2-40B4-BE49-F238E27FC236}">
+                <a16:creationId xmlns="" xmlns:a16="http://schemas.microsoft.com/office/drawing/2014/main" id="{441F522B-C9D9-9F56-19DD-C4AB74C55273}"/>
+              </a:ext>
+            </a:extLst>
+          </p:cNvPr>
+          <p:cNvSpPr>
+            <a:spLocks noGrp="1" noRot="1" noChangeAspect="1"/>
+          </p:cNvSpPr>
+          <p:nvPr>
+            <p:ph type="sldImg"/>
+          </p:nvPr>
+        </p:nvSpPr>
+        <p:spPr/>
+      </p:sp>
+      <p:sp>
+        <p:nvSpPr>
+          <p:cNvPr id="3" name="Marcador de notas 2">
+            <a:extLst>
+              <a:ext uri="{FF2B5EF4-FFF2-40B4-BE49-F238E27FC236}">
+                <a16:creationId xmlns="" xmlns:a16="http://schemas.microsoft.com/office/drawing/2014/main" id="{4373AB38-1F06-0DCC-E3CE-74CA129726D6}"/>
               </a:ext>
             </a:extLst>
           </p:cNvPr>
@@ -6738,7 +6850,7 @@
           <p:cNvPr id="4" name="Marcador de número de diapositiva 3">
             <a:extLst>
               <a:ext uri="{FF2B5EF4-FFF2-40B4-BE49-F238E27FC236}">
-                <a16:creationId xmlns:a16="http://schemas.microsoft.com/office/drawing/2014/main" xmlns="" id="{7F45A3EC-518F-4874-4E15-BD41DD47172C}"/>
+                <a16:creationId xmlns="" xmlns:a16="http://schemas.microsoft.com/office/drawing/2014/main" id="{7F45A3EC-518F-4874-4E15-BD41DD47172C}"/>
               </a:ext>
             </a:extLst>
           </p:cNvPr>
@@ -6775,7 +6887,7 @@
 </p:notes>
 </file>
 
-<file path=ppt/notesSlides/notesSlide11.xml><?xml version="1.0" encoding="utf-8"?>
+<file path=ppt/notesSlides/notesSlide12.xml><?xml version="1.0" encoding="utf-8"?>
 <p:notes xmlns:a="http://schemas.openxmlformats.org/drawingml/2006/main" xmlns:r="http://schemas.openxmlformats.org/officeDocument/2006/relationships" xmlns:p="http://schemas.openxmlformats.org/presentationml/2006/main">
   <p:cSld>
     <p:spTree>
@@ -6783,7 +6895,7 @@
         <p:cNvPr id="1" name="">
           <a:extLst>
             <a:ext uri="{FF2B5EF4-FFF2-40B4-BE49-F238E27FC236}">
-              <a16:creationId xmlns:a16="http://schemas.microsoft.com/office/drawing/2014/main" xmlns="" id="{316C1E33-CA39-2193-6148-88F450841C46}"/>
+              <a16:creationId xmlns="" xmlns:a16="http://schemas.microsoft.com/office/drawing/2014/main" id="{316C1E33-CA39-2193-6148-88F450841C46}"/>
             </a:ext>
           </a:extLst>
         </p:cNvPr>
@@ -6803,7 +6915,7 @@
           <p:cNvPr id="2" name="Marcador de imagen de diapositiva 1">
             <a:extLst>
               <a:ext uri="{FF2B5EF4-FFF2-40B4-BE49-F238E27FC236}">
-                <a16:creationId xmlns:a16="http://schemas.microsoft.com/office/drawing/2014/main" xmlns="" id="{6DE77322-52A1-7EBC-B43B-414E28D4A552}"/>
+                <a16:creationId xmlns="" xmlns:a16="http://schemas.microsoft.com/office/drawing/2014/main" id="{6DE77322-52A1-7EBC-B43B-414E28D4A552}"/>
               </a:ext>
             </a:extLst>
           </p:cNvPr>
@@ -6821,7 +6933,7 @@
           <p:cNvPr id="3" name="Marcador de notas 2">
             <a:extLst>
               <a:ext uri="{FF2B5EF4-FFF2-40B4-BE49-F238E27FC236}">
-                <a16:creationId xmlns:a16="http://schemas.microsoft.com/office/drawing/2014/main" xmlns="" id="{424EEB5D-06D9-D802-B502-A1398B1502CB}"/>
+                <a16:creationId xmlns="" xmlns:a16="http://schemas.microsoft.com/office/drawing/2014/main" id="{424EEB5D-06D9-D802-B502-A1398B1502CB}"/>
               </a:ext>
             </a:extLst>
           </p:cNvPr>
@@ -6846,7 +6958,7 @@
           <p:cNvPr id="4" name="Marcador de número de diapositiva 3">
             <a:extLst>
               <a:ext uri="{FF2B5EF4-FFF2-40B4-BE49-F238E27FC236}">
-                <a16:creationId xmlns:a16="http://schemas.microsoft.com/office/drawing/2014/main" xmlns="" id="{9613C39C-8B5F-3765-1484-F2205D391090}"/>
+                <a16:creationId xmlns="" xmlns:a16="http://schemas.microsoft.com/office/drawing/2014/main" id="{9613C39C-8B5F-3765-1484-F2205D391090}"/>
               </a:ext>
             </a:extLst>
           </p:cNvPr>
@@ -6883,7 +6995,7 @@
 </p:notes>
 </file>
 
-<file path=ppt/notesSlides/notesSlide12.xml><?xml version="1.0" encoding="utf-8"?>
+<file path=ppt/notesSlides/notesSlide13.xml><?xml version="1.0" encoding="utf-8"?>
 <p:notes xmlns:a="http://schemas.openxmlformats.org/drawingml/2006/main" xmlns:r="http://schemas.openxmlformats.org/officeDocument/2006/relationships" xmlns:p="http://schemas.openxmlformats.org/presentationml/2006/main">
   <p:cSld>
     <p:spTree>
@@ -6891,7 +7003,7 @@
         <p:cNvPr id="1" name="">
           <a:extLst>
             <a:ext uri="{FF2B5EF4-FFF2-40B4-BE49-F238E27FC236}">
-              <a16:creationId xmlns:a16="http://schemas.microsoft.com/office/drawing/2014/main" xmlns="" id="{AFFD9064-8FEF-37A0-7B1B-B93C0AA936DC}"/>
+              <a16:creationId xmlns="" xmlns:a16="http://schemas.microsoft.com/office/drawing/2014/main" id="{AFFD9064-8FEF-37A0-7B1B-B93C0AA936DC}"/>
             </a:ext>
           </a:extLst>
         </p:cNvPr>
@@ -6911,7 +7023,7 @@
           <p:cNvPr id="2" name="Marcador de imagen de diapositiva 1">
             <a:extLst>
               <a:ext uri="{FF2B5EF4-FFF2-40B4-BE49-F238E27FC236}">
-                <a16:creationId xmlns:a16="http://schemas.microsoft.com/office/drawing/2014/main" xmlns="" id="{1058E621-AF6A-A981-68E8-C1577F3CDD5F}"/>
+                <a16:creationId xmlns="" xmlns:a16="http://schemas.microsoft.com/office/drawing/2014/main" id="{1058E621-AF6A-A981-68E8-C1577F3CDD5F}"/>
               </a:ext>
             </a:extLst>
           </p:cNvPr>
@@ -6929,7 +7041,7 @@
           <p:cNvPr id="3" name="Marcador de notas 2">
             <a:extLst>
               <a:ext uri="{FF2B5EF4-FFF2-40B4-BE49-F238E27FC236}">
-                <a16:creationId xmlns:a16="http://schemas.microsoft.com/office/drawing/2014/main" xmlns="" id="{6046705E-859B-6ABE-8504-161E604A9A55}"/>
+                <a16:creationId xmlns="" xmlns:a16="http://schemas.microsoft.com/office/drawing/2014/main" id="{6046705E-859B-6ABE-8504-161E604A9A55}"/>
               </a:ext>
             </a:extLst>
           </p:cNvPr>
@@ -6954,7 +7066,7 @@
           <p:cNvPr id="4" name="Marcador de número de diapositiva 3">
             <a:extLst>
               <a:ext uri="{FF2B5EF4-FFF2-40B4-BE49-F238E27FC236}">
-                <a16:creationId xmlns:a16="http://schemas.microsoft.com/office/drawing/2014/main" xmlns="" id="{F406BC02-B764-5E67-CBC6-E22C444008BB}"/>
+                <a16:creationId xmlns="" xmlns:a16="http://schemas.microsoft.com/office/drawing/2014/main" id="{F406BC02-B764-5E67-CBC6-E22C444008BB}"/>
               </a:ext>
             </a:extLst>
           </p:cNvPr>
@@ -6991,7 +7103,7 @@
 </p:notes>
 </file>
 
-<file path=ppt/notesSlides/notesSlide13.xml><?xml version="1.0" encoding="utf-8"?>
+<file path=ppt/notesSlides/notesSlide14.xml><?xml version="1.0" encoding="utf-8"?>
 <p:notes xmlns:a="http://schemas.openxmlformats.org/drawingml/2006/main" xmlns:r="http://schemas.openxmlformats.org/officeDocument/2006/relationships" xmlns:p="http://schemas.openxmlformats.org/presentationml/2006/main">
   <p:cSld>
     <p:spTree>
@@ -6999,7 +7111,7 @@
         <p:cNvPr id="1" name="">
           <a:extLst>
             <a:ext uri="{FF2B5EF4-FFF2-40B4-BE49-F238E27FC236}">
-              <a16:creationId xmlns:a16="http://schemas.microsoft.com/office/drawing/2014/main" xmlns="" id="{1FD6FE79-52DE-87B6-07BB-DB2FD527FDBD}"/>
+              <a16:creationId xmlns="" xmlns:a16="http://schemas.microsoft.com/office/drawing/2014/main" id="{1FD6FE79-52DE-87B6-07BB-DB2FD527FDBD}"/>
             </a:ext>
           </a:extLst>
         </p:cNvPr>
@@ -7019,7 +7131,7 @@
           <p:cNvPr id="2" name="Marcador de imagen de diapositiva 1">
             <a:extLst>
               <a:ext uri="{FF2B5EF4-FFF2-40B4-BE49-F238E27FC236}">
-                <a16:creationId xmlns:a16="http://schemas.microsoft.com/office/drawing/2014/main" xmlns="" id="{8150B7FE-5DC3-724C-B676-7F1DBCF623FB}"/>
+                <a16:creationId xmlns="" xmlns:a16="http://schemas.microsoft.com/office/drawing/2014/main" id="{8150B7FE-5DC3-724C-B676-7F1DBCF623FB}"/>
               </a:ext>
             </a:extLst>
           </p:cNvPr>
@@ -7037,7 +7149,7 @@
           <p:cNvPr id="3" name="Marcador de notas 2">
             <a:extLst>
               <a:ext uri="{FF2B5EF4-FFF2-40B4-BE49-F238E27FC236}">
-                <a16:creationId xmlns:a16="http://schemas.microsoft.com/office/drawing/2014/main" xmlns="" id="{8A2CE2C8-03A6-9BB7-6071-FE58737B2151}"/>
+                <a16:creationId xmlns="" xmlns:a16="http://schemas.microsoft.com/office/drawing/2014/main" id="{8A2CE2C8-03A6-9BB7-6071-FE58737B2151}"/>
               </a:ext>
             </a:extLst>
           </p:cNvPr>
@@ -7062,7 +7174,7 @@
           <p:cNvPr id="4" name="Marcador de número de diapositiva 3">
             <a:extLst>
               <a:ext uri="{FF2B5EF4-FFF2-40B4-BE49-F238E27FC236}">
-                <a16:creationId xmlns:a16="http://schemas.microsoft.com/office/drawing/2014/main" xmlns="" id="{652DCEEE-E07C-E210-6E45-2CC589218B89}"/>
+                <a16:creationId xmlns="" xmlns:a16="http://schemas.microsoft.com/office/drawing/2014/main" id="{652DCEEE-E07C-E210-6E45-2CC589218B89}"/>
               </a:ext>
             </a:extLst>
           </p:cNvPr>
@@ -7099,7 +7211,7 @@
 </p:notes>
 </file>
 
-<file path=ppt/notesSlides/notesSlide14.xml><?xml version="1.0" encoding="utf-8"?>
+<file path=ppt/notesSlides/notesSlide15.xml><?xml version="1.0" encoding="utf-8"?>
 <p:notes xmlns:a="http://schemas.openxmlformats.org/drawingml/2006/main" xmlns:r="http://schemas.openxmlformats.org/officeDocument/2006/relationships" xmlns:p="http://schemas.openxmlformats.org/presentationml/2006/main">
   <p:cSld>
     <p:spTree>
@@ -7107,7 +7219,7 @@
         <p:cNvPr id="1" name="">
           <a:extLst>
             <a:ext uri="{FF2B5EF4-FFF2-40B4-BE49-F238E27FC236}">
-              <a16:creationId xmlns:a16="http://schemas.microsoft.com/office/drawing/2014/main" xmlns="" id="{C58933E4-F443-0EF4-A9FE-67833B001336}"/>
+              <a16:creationId xmlns="" xmlns:a16="http://schemas.microsoft.com/office/drawing/2014/main" id="{C58933E4-F443-0EF4-A9FE-67833B001336}"/>
             </a:ext>
           </a:extLst>
         </p:cNvPr>
@@ -7127,7 +7239,7 @@
           <p:cNvPr id="2" name="Marcador de imagen de diapositiva 1">
             <a:extLst>
               <a:ext uri="{FF2B5EF4-FFF2-40B4-BE49-F238E27FC236}">
-                <a16:creationId xmlns:a16="http://schemas.microsoft.com/office/drawing/2014/main" xmlns="" id="{4F70297F-F309-E806-CCA8-D3FCC32ADB6F}"/>
+                <a16:creationId xmlns="" xmlns:a16="http://schemas.microsoft.com/office/drawing/2014/main" id="{4F70297F-F309-E806-CCA8-D3FCC32ADB6F}"/>
               </a:ext>
             </a:extLst>
           </p:cNvPr>
@@ -7145,7 +7257,7 @@
           <p:cNvPr id="3" name="Marcador de notas 2">
             <a:extLst>
               <a:ext uri="{FF2B5EF4-FFF2-40B4-BE49-F238E27FC236}">
-                <a16:creationId xmlns:a16="http://schemas.microsoft.com/office/drawing/2014/main" xmlns="" id="{34ED910F-AB8C-7BE7-43CE-E863C3E2E28F}"/>
+                <a16:creationId xmlns="" xmlns:a16="http://schemas.microsoft.com/office/drawing/2014/main" id="{34ED910F-AB8C-7BE7-43CE-E863C3E2E28F}"/>
               </a:ext>
             </a:extLst>
           </p:cNvPr>
@@ -7170,7 +7282,7 @@
           <p:cNvPr id="4" name="Marcador de número de diapositiva 3">
             <a:extLst>
               <a:ext uri="{FF2B5EF4-FFF2-40B4-BE49-F238E27FC236}">
-                <a16:creationId xmlns:a16="http://schemas.microsoft.com/office/drawing/2014/main" xmlns="" id="{17A06162-F436-5B7E-9088-189F02566719}"/>
+                <a16:creationId xmlns="" xmlns:a16="http://schemas.microsoft.com/office/drawing/2014/main" id="{17A06162-F436-5B7E-9088-189F02566719}"/>
               </a:ext>
             </a:extLst>
           </p:cNvPr>
@@ -7207,7 +7319,7 @@
 </p:notes>
 </file>
 
-<file path=ppt/notesSlides/notesSlide15.xml><?xml version="1.0" encoding="utf-8"?>
+<file path=ppt/notesSlides/notesSlide16.xml><?xml version="1.0" encoding="utf-8"?>
 <p:notes xmlns:a="http://schemas.openxmlformats.org/drawingml/2006/main" xmlns:r="http://schemas.openxmlformats.org/officeDocument/2006/relationships" xmlns:p="http://schemas.openxmlformats.org/presentationml/2006/main">
   <p:cSld>
     <p:spTree>
@@ -7215,7 +7327,7 @@
         <p:cNvPr id="1" name="">
           <a:extLst>
             <a:ext uri="{FF2B5EF4-FFF2-40B4-BE49-F238E27FC236}">
-              <a16:creationId xmlns:a16="http://schemas.microsoft.com/office/drawing/2014/main" xmlns="" id="{26E6BAEC-44C1-5A2E-AD4B-D2838E392C14}"/>
+              <a16:creationId xmlns="" xmlns:a16="http://schemas.microsoft.com/office/drawing/2014/main" id="{26E6BAEC-44C1-5A2E-AD4B-D2838E392C14}"/>
             </a:ext>
           </a:extLst>
         </p:cNvPr>
@@ -7235,7 +7347,7 @@
           <p:cNvPr id="2" name="Marcador de imagen de diapositiva 1">
             <a:extLst>
               <a:ext uri="{FF2B5EF4-FFF2-40B4-BE49-F238E27FC236}">
-                <a16:creationId xmlns:a16="http://schemas.microsoft.com/office/drawing/2014/main" xmlns="" id="{93932EF0-2E00-FC28-3F70-9ECE2F948031}"/>
+                <a16:creationId xmlns="" xmlns:a16="http://schemas.microsoft.com/office/drawing/2014/main" id="{93932EF0-2E00-FC28-3F70-9ECE2F948031}"/>
               </a:ext>
             </a:extLst>
           </p:cNvPr>
@@ -7253,7 +7365,7 @@
           <p:cNvPr id="3" name="Marcador de notas 2">
             <a:extLst>
               <a:ext uri="{FF2B5EF4-FFF2-40B4-BE49-F238E27FC236}">
-                <a16:creationId xmlns:a16="http://schemas.microsoft.com/office/drawing/2014/main" xmlns="" id="{855BBE16-9477-63DA-1B95-46C8F1252043}"/>
+                <a16:creationId xmlns="" xmlns:a16="http://schemas.microsoft.com/office/drawing/2014/main" id="{855BBE16-9477-63DA-1B95-46C8F1252043}"/>
               </a:ext>
             </a:extLst>
           </p:cNvPr>
@@ -7328,7 +7440,7 @@
           <p:cNvPr id="4" name="Marcador de número de diapositiva 3">
             <a:extLst>
               <a:ext uri="{FF2B5EF4-FFF2-40B4-BE49-F238E27FC236}">
-                <a16:creationId xmlns:a16="http://schemas.microsoft.com/office/drawing/2014/main" xmlns="" id="{623A789C-4886-A0E5-19F8-9831EADBA6A6}"/>
+                <a16:creationId xmlns="" xmlns:a16="http://schemas.microsoft.com/office/drawing/2014/main" id="{623A789C-4886-A0E5-19F8-9831EADBA6A6}"/>
               </a:ext>
             </a:extLst>
           </p:cNvPr>
@@ -7365,7 +7477,7 @@
 </p:notes>
 </file>
 
-<file path=ppt/notesSlides/notesSlide16.xml><?xml version="1.0" encoding="utf-8"?>
+<file path=ppt/notesSlides/notesSlide17.xml><?xml version="1.0" encoding="utf-8"?>
 <p:notes xmlns:a="http://schemas.openxmlformats.org/drawingml/2006/main" xmlns:r="http://schemas.openxmlformats.org/officeDocument/2006/relationships" xmlns:p="http://schemas.openxmlformats.org/presentationml/2006/main">
   <p:cSld>
     <p:spTree>
@@ -7373,7 +7485,7 @@
         <p:cNvPr id="1" name="">
           <a:extLst>
             <a:ext uri="{FF2B5EF4-FFF2-40B4-BE49-F238E27FC236}">
-              <a16:creationId xmlns:a16="http://schemas.microsoft.com/office/drawing/2014/main" xmlns="" id="{8B35ABB3-DC78-B13C-12E6-F99E0F3D5315}"/>
+              <a16:creationId xmlns="" xmlns:a16="http://schemas.microsoft.com/office/drawing/2014/main" id="{8B35ABB3-DC78-B13C-12E6-F99E0F3D5315}"/>
             </a:ext>
           </a:extLst>
         </p:cNvPr>
@@ -7393,7 +7505,7 @@
           <p:cNvPr id="2" name="Marcador de imagen de diapositiva 1">
             <a:extLst>
               <a:ext uri="{FF2B5EF4-FFF2-40B4-BE49-F238E27FC236}">
-                <a16:creationId xmlns:a16="http://schemas.microsoft.com/office/drawing/2014/main" xmlns="" id="{D6E884D2-1416-6222-1F04-CE2309F473FC}"/>
+                <a16:creationId xmlns="" xmlns:a16="http://schemas.microsoft.com/office/drawing/2014/main" id="{D6E884D2-1416-6222-1F04-CE2309F473FC}"/>
               </a:ext>
             </a:extLst>
           </p:cNvPr>
@@ -7411,7 +7523,7 @@
           <p:cNvPr id="3" name="Marcador de notas 2">
             <a:extLst>
               <a:ext uri="{FF2B5EF4-FFF2-40B4-BE49-F238E27FC236}">
-                <a16:creationId xmlns:a16="http://schemas.microsoft.com/office/drawing/2014/main" xmlns="" id="{A22EF291-97F7-5901-B05D-C04E44B98C97}"/>
+                <a16:creationId xmlns="" xmlns:a16="http://schemas.microsoft.com/office/drawing/2014/main" id="{A22EF291-97F7-5901-B05D-C04E44B98C97}"/>
               </a:ext>
             </a:extLst>
           </p:cNvPr>
@@ -7436,7 +7548,7 @@
           <p:cNvPr id="4" name="Marcador de número de diapositiva 3">
             <a:extLst>
               <a:ext uri="{FF2B5EF4-FFF2-40B4-BE49-F238E27FC236}">
-                <a16:creationId xmlns:a16="http://schemas.microsoft.com/office/drawing/2014/main" xmlns="" id="{BE456964-3528-D9A1-7629-89B88C0007C0}"/>
+                <a16:creationId xmlns="" xmlns:a16="http://schemas.microsoft.com/office/drawing/2014/main" id="{BE456964-3528-D9A1-7629-89B88C0007C0}"/>
               </a:ext>
             </a:extLst>
           </p:cNvPr>
@@ -7473,7 +7585,7 @@
 </p:notes>
 </file>
 
-<file path=ppt/notesSlides/notesSlide17.xml><?xml version="1.0" encoding="utf-8"?>
+<file path=ppt/notesSlides/notesSlide18.xml><?xml version="1.0" encoding="utf-8"?>
 <p:notes xmlns:a="http://schemas.openxmlformats.org/drawingml/2006/main" xmlns:r="http://schemas.openxmlformats.org/officeDocument/2006/relationships" xmlns:p="http://schemas.openxmlformats.org/presentationml/2006/main">
   <p:cSld>
     <p:spTree>
@@ -7481,7 +7593,7 @@
         <p:cNvPr id="1" name="">
           <a:extLst>
             <a:ext uri="{FF2B5EF4-FFF2-40B4-BE49-F238E27FC236}">
-              <a16:creationId xmlns:a16="http://schemas.microsoft.com/office/drawing/2014/main" xmlns="" id="{97878398-47F3-6B76-039A-0312B0EC30DD}"/>
+              <a16:creationId xmlns="" xmlns:a16="http://schemas.microsoft.com/office/drawing/2014/main" id="{97878398-47F3-6B76-039A-0312B0EC30DD}"/>
             </a:ext>
           </a:extLst>
         </p:cNvPr>
@@ -7501,7 +7613,7 @@
           <p:cNvPr id="2" name="Marcador de imagen de diapositiva 1">
             <a:extLst>
               <a:ext uri="{FF2B5EF4-FFF2-40B4-BE49-F238E27FC236}">
-                <a16:creationId xmlns:a16="http://schemas.microsoft.com/office/drawing/2014/main" xmlns="" id="{23D01E90-C6DA-75BC-82DD-4EB4DF85B0B2}"/>
+                <a16:creationId xmlns="" xmlns:a16="http://schemas.microsoft.com/office/drawing/2014/main" id="{23D01E90-C6DA-75BC-82DD-4EB4DF85B0B2}"/>
               </a:ext>
             </a:extLst>
           </p:cNvPr>
@@ -7519,7 +7631,7 @@
           <p:cNvPr id="3" name="Marcador de notas 2">
             <a:extLst>
               <a:ext uri="{FF2B5EF4-FFF2-40B4-BE49-F238E27FC236}">
-                <a16:creationId xmlns:a16="http://schemas.microsoft.com/office/drawing/2014/main" xmlns="" id="{173F8859-4A73-C438-8F98-421331145002}"/>
+                <a16:creationId xmlns="" xmlns:a16="http://schemas.microsoft.com/office/drawing/2014/main" id="{173F8859-4A73-C438-8F98-421331145002}"/>
               </a:ext>
             </a:extLst>
           </p:cNvPr>
@@ -7544,7 +7656,7 @@
           <p:cNvPr id="4" name="Marcador de número de diapositiva 3">
             <a:extLst>
               <a:ext uri="{FF2B5EF4-FFF2-40B4-BE49-F238E27FC236}">
-                <a16:creationId xmlns:a16="http://schemas.microsoft.com/office/drawing/2014/main" xmlns="" id="{F704A619-3851-BE3A-0E11-A37FFBF75140}"/>
+                <a16:creationId xmlns="" xmlns:a16="http://schemas.microsoft.com/office/drawing/2014/main" id="{F704A619-3851-BE3A-0E11-A37FFBF75140}"/>
               </a:ext>
             </a:extLst>
           </p:cNvPr>
@@ -7581,7 +7693,7 @@
 </p:notes>
 </file>
 
-<file path=ppt/notesSlides/notesSlide18.xml><?xml version="1.0" encoding="utf-8"?>
+<file path=ppt/notesSlides/notesSlide19.xml><?xml version="1.0" encoding="utf-8"?>
 <p:notes xmlns:a="http://schemas.openxmlformats.org/drawingml/2006/main" xmlns:r="http://schemas.openxmlformats.org/officeDocument/2006/relationships" xmlns:p="http://schemas.openxmlformats.org/presentationml/2006/main">
   <p:cSld>
     <p:spTree>
@@ -7589,7 +7701,7 @@
         <p:cNvPr id="1" name="">
           <a:extLst>
             <a:ext uri="{FF2B5EF4-FFF2-40B4-BE49-F238E27FC236}">
-              <a16:creationId xmlns:a16="http://schemas.microsoft.com/office/drawing/2014/main" xmlns="" id="{534B254C-8681-7DD0-2206-1EF9DEAF8090}"/>
+              <a16:creationId xmlns="" xmlns:a16="http://schemas.microsoft.com/office/drawing/2014/main" id="{534B254C-8681-7DD0-2206-1EF9DEAF8090}"/>
             </a:ext>
           </a:extLst>
         </p:cNvPr>
@@ -7609,7 +7721,7 @@
           <p:cNvPr id="2" name="Marcador de imagen de diapositiva 1">
             <a:extLst>
               <a:ext uri="{FF2B5EF4-FFF2-40B4-BE49-F238E27FC236}">
-                <a16:creationId xmlns:a16="http://schemas.microsoft.com/office/drawing/2014/main" xmlns="" id="{495EB01F-D632-0C6D-FC67-82BF617502B5}"/>
+                <a16:creationId xmlns="" xmlns:a16="http://schemas.microsoft.com/office/drawing/2014/main" id="{495EB01F-D632-0C6D-FC67-82BF617502B5}"/>
               </a:ext>
             </a:extLst>
           </p:cNvPr>
@@ -7627,7 +7739,7 @@
           <p:cNvPr id="3" name="Marcador de notas 2">
             <a:extLst>
               <a:ext uri="{FF2B5EF4-FFF2-40B4-BE49-F238E27FC236}">
-                <a16:creationId xmlns:a16="http://schemas.microsoft.com/office/drawing/2014/main" xmlns="" id="{8B34515B-4749-C688-6BA3-185E3ADBBE82}"/>
+                <a16:creationId xmlns="" xmlns:a16="http://schemas.microsoft.com/office/drawing/2014/main" id="{8B34515B-4749-C688-6BA3-185E3ADBBE82}"/>
               </a:ext>
             </a:extLst>
           </p:cNvPr>
@@ -7661,7 +7773,7 @@
           <p:cNvPr id="4" name="Marcador de número de diapositiva 3">
             <a:extLst>
               <a:ext uri="{FF2B5EF4-FFF2-40B4-BE49-F238E27FC236}">
-                <a16:creationId xmlns:a16="http://schemas.microsoft.com/office/drawing/2014/main" xmlns="" id="{1B90464B-C3A1-A13C-0087-D33DBA175332}"/>
+                <a16:creationId xmlns="" xmlns:a16="http://schemas.microsoft.com/office/drawing/2014/main" id="{1B90464B-C3A1-A13C-0087-D33DBA175332}"/>
               </a:ext>
             </a:extLst>
           </p:cNvPr>
@@ -7698,7 +7810,119 @@
 </p:notes>
 </file>
 
-<file path=ppt/notesSlides/notesSlide19.xml><?xml version="1.0" encoding="utf-8"?>
+<file path=ppt/notesSlides/notesSlide2.xml><?xml version="1.0" encoding="utf-8"?>
+<p:notes xmlns:a="http://schemas.openxmlformats.org/drawingml/2006/main" xmlns:r="http://schemas.openxmlformats.org/officeDocument/2006/relationships" xmlns:p="http://schemas.openxmlformats.org/presentationml/2006/main">
+  <p:cSld>
+    <p:spTree>
+      <p:nvGrpSpPr>
+        <p:cNvPr id="1" name=""/>
+        <p:cNvGrpSpPr/>
+        <p:nvPr/>
+      </p:nvGrpSpPr>
+      <p:grpSpPr>
+        <a:xfrm>
+          <a:off x="0" y="0"/>
+          <a:ext cx="0" cy="0"/>
+          <a:chOff x="0" y="0"/>
+          <a:chExt cx="0" cy="0"/>
+        </a:xfrm>
+      </p:grpSpPr>
+      <p:sp>
+        <p:nvSpPr>
+          <p:cNvPr id="2" name="Slide Image Placeholder 1"/>
+          <p:cNvSpPr>
+            <a:spLocks noGrp="1" noRot="1" noChangeAspect="1"/>
+          </p:cNvSpPr>
+          <p:nvPr>
+            <p:ph type="sldImg"/>
+          </p:nvPr>
+        </p:nvSpPr>
+        <p:spPr/>
+      </p:sp>
+      <p:sp>
+        <p:nvSpPr>
+          <p:cNvPr id="3" name="Notes Placeholder 2"/>
+          <p:cNvSpPr>
+            <a:spLocks noGrp="1"/>
+          </p:cNvSpPr>
+          <p:nvPr>
+            <p:ph type="body" idx="1"/>
+          </p:nvPr>
+        </p:nvSpPr>
+        <p:spPr/>
+        <p:txBody>
+          <a:bodyPr/>
+          <a:lstStyle/>
+          <a:p>
+            <a:r>
+              <a:rPr lang="es-ES" b="1" dirty="0" smtClean="0"/>
+              <a:t>Antecedentes:</a:t>
+            </a:r>
+            <a:r>
+              <a:rPr lang="es-ES" dirty="0" smtClean="0"/>
+              <a:t> Cuenta la historia y el contexto </a:t>
+            </a:r>
+          </a:p>
+          <a:p>
+            <a:r>
+              <a:rPr lang="es-ES" b="1" dirty="0" smtClean="0"/>
+              <a:t>Marco Teórico:</a:t>
+            </a:r>
+            <a:r>
+              <a:rPr lang="es-ES" dirty="0" smtClean="0"/>
+              <a:t> Explica los conceptos y teorías </a:t>
+            </a:r>
+          </a:p>
+          <a:p>
+            <a:r>
+              <a:rPr lang="es-ES" b="1" dirty="0" smtClean="0"/>
+              <a:t>Estado del Arte:</a:t>
+            </a:r>
+            <a:r>
+              <a:rPr lang="es-ES" dirty="0" smtClean="0"/>
+              <a:t> Analiza qué se ha investigado</a:t>
+            </a:r>
+            <a:endParaRPr lang="en-US" dirty="0"/>
+          </a:p>
+        </p:txBody>
+      </p:sp>
+      <p:sp>
+        <p:nvSpPr>
+          <p:cNvPr id="4" name="Slide Number Placeholder 3"/>
+          <p:cNvSpPr>
+            <a:spLocks noGrp="1"/>
+          </p:cNvSpPr>
+          <p:nvPr>
+            <p:ph type="sldNum" sz="quarter" idx="10"/>
+          </p:nvPr>
+        </p:nvSpPr>
+        <p:spPr/>
+        <p:txBody>
+          <a:bodyPr/>
+          <a:lstStyle/>
+          <a:p>
+            <a:fld id="{DB28F327-BEE5-45AC-9CE6-84AF0ACB1493}" type="slidenum">
+              <a:rPr lang="es-MX" smtClean="0"/>
+              <a:t>2</a:t>
+            </a:fld>
+            <a:endParaRPr lang="es-MX"/>
+          </a:p>
+        </p:txBody>
+      </p:sp>
+    </p:spTree>
+    <p:extLst>
+      <p:ext uri="{BB962C8B-B14F-4D97-AF65-F5344CB8AC3E}">
+        <p14:creationId xmlns:p14="http://schemas.microsoft.com/office/powerpoint/2010/main" val="4217959708"/>
+      </p:ext>
+    </p:extLst>
+  </p:cSld>
+  <p:clrMapOvr>
+    <a:masterClrMapping/>
+  </p:clrMapOvr>
+</p:notes>
+</file>
+
+<file path=ppt/notesSlides/notesSlide20.xml><?xml version="1.0" encoding="utf-8"?>
 <p:notes xmlns:a="http://schemas.openxmlformats.org/drawingml/2006/main" xmlns:r="http://schemas.openxmlformats.org/officeDocument/2006/relationships" xmlns:p="http://schemas.openxmlformats.org/presentationml/2006/main">
   <p:cSld>
     <p:spTree>
@@ -7706,7 +7930,7 @@
         <p:cNvPr id="1" name="">
           <a:extLst>
             <a:ext uri="{FF2B5EF4-FFF2-40B4-BE49-F238E27FC236}">
-              <a16:creationId xmlns:a16="http://schemas.microsoft.com/office/drawing/2014/main" xmlns="" id="{C0D59012-3832-5D39-8183-F46236CD5AD5}"/>
+              <a16:creationId xmlns="" xmlns:a16="http://schemas.microsoft.com/office/drawing/2014/main" id="{C0D59012-3832-5D39-8183-F46236CD5AD5}"/>
             </a:ext>
           </a:extLst>
         </p:cNvPr>
@@ -7726,7 +7950,7 @@
           <p:cNvPr id="2" name="Marcador de imagen de diapositiva 1">
             <a:extLst>
               <a:ext uri="{FF2B5EF4-FFF2-40B4-BE49-F238E27FC236}">
-                <a16:creationId xmlns:a16="http://schemas.microsoft.com/office/drawing/2014/main" xmlns="" id="{9753D9C3-71BE-8F24-834A-06238E64A70D}"/>
+                <a16:creationId xmlns="" xmlns:a16="http://schemas.microsoft.com/office/drawing/2014/main" id="{9753D9C3-71BE-8F24-834A-06238E64A70D}"/>
               </a:ext>
             </a:extLst>
           </p:cNvPr>
@@ -7744,7 +7968,7 @@
           <p:cNvPr id="3" name="Marcador de notas 2">
             <a:extLst>
               <a:ext uri="{FF2B5EF4-FFF2-40B4-BE49-F238E27FC236}">
-                <a16:creationId xmlns:a16="http://schemas.microsoft.com/office/drawing/2014/main" xmlns="" id="{E5792187-2B12-7F64-67E7-53D3908B9982}"/>
+                <a16:creationId xmlns="" xmlns:a16="http://schemas.microsoft.com/office/drawing/2014/main" id="{E5792187-2B12-7F64-67E7-53D3908B9982}"/>
               </a:ext>
             </a:extLst>
           </p:cNvPr>
@@ -7778,7 +8002,7 @@
           <p:cNvPr id="4" name="Marcador de número de diapositiva 3">
             <a:extLst>
               <a:ext uri="{FF2B5EF4-FFF2-40B4-BE49-F238E27FC236}">
-                <a16:creationId xmlns:a16="http://schemas.microsoft.com/office/drawing/2014/main" xmlns="" id="{923C1211-D21A-F39B-CA9C-2B2EBF97B8F1}"/>
+                <a16:creationId xmlns="" xmlns:a16="http://schemas.microsoft.com/office/drawing/2014/main" id="{923C1211-D21A-F39B-CA9C-2B2EBF97B8F1}"/>
               </a:ext>
             </a:extLst>
           </p:cNvPr>
@@ -7815,7 +8039,565 @@
 </p:notes>
 </file>
 
-<file path=ppt/notesSlides/notesSlide2.xml><?xml version="1.0" encoding="utf-8"?>
+<file path=ppt/notesSlides/notesSlide21.xml><?xml version="1.0" encoding="utf-8"?>
+<p:notes xmlns:a="http://schemas.openxmlformats.org/drawingml/2006/main" xmlns:r="http://schemas.openxmlformats.org/officeDocument/2006/relationships" xmlns:p="http://schemas.openxmlformats.org/presentationml/2006/main">
+  <p:cSld>
+    <p:spTree>
+      <p:nvGrpSpPr>
+        <p:cNvPr id="1" name="">
+          <a:extLst>
+            <a:ext uri="{FF2B5EF4-FFF2-40B4-BE49-F238E27FC236}">
+              <a16:creationId xmlns="" xmlns:a16="http://schemas.microsoft.com/office/drawing/2014/main" id="{7512AD98-B880-11B4-D1A2-5C54E2D3DB95}"/>
+            </a:ext>
+          </a:extLst>
+        </p:cNvPr>
+        <p:cNvGrpSpPr/>
+        <p:nvPr/>
+      </p:nvGrpSpPr>
+      <p:grpSpPr>
+        <a:xfrm>
+          <a:off x="0" y="0"/>
+          <a:ext cx="0" cy="0"/>
+          <a:chOff x="0" y="0"/>
+          <a:chExt cx="0" cy="0"/>
+        </a:xfrm>
+      </p:grpSpPr>
+      <p:sp>
+        <p:nvSpPr>
+          <p:cNvPr id="2" name="Marcador de imagen de diapositiva 1">
+            <a:extLst>
+              <a:ext uri="{FF2B5EF4-FFF2-40B4-BE49-F238E27FC236}">
+                <a16:creationId xmlns="" xmlns:a16="http://schemas.microsoft.com/office/drawing/2014/main" id="{9BD5A377-84D8-34B7-CF11-802F2A877DBD}"/>
+              </a:ext>
+            </a:extLst>
+          </p:cNvPr>
+          <p:cNvSpPr>
+            <a:spLocks noGrp="1" noRot="1" noChangeAspect="1"/>
+          </p:cNvSpPr>
+          <p:nvPr>
+            <p:ph type="sldImg"/>
+          </p:nvPr>
+        </p:nvSpPr>
+        <p:spPr/>
+      </p:sp>
+      <p:sp>
+        <p:nvSpPr>
+          <p:cNvPr id="3" name="Marcador de notas 2">
+            <a:extLst>
+              <a:ext uri="{FF2B5EF4-FFF2-40B4-BE49-F238E27FC236}">
+                <a16:creationId xmlns="" xmlns:a16="http://schemas.microsoft.com/office/drawing/2014/main" id="{819F0629-F99B-BE20-02D9-C8F59F9B2BDB}"/>
+              </a:ext>
+            </a:extLst>
+          </p:cNvPr>
+          <p:cNvSpPr>
+            <a:spLocks noGrp="1"/>
+          </p:cNvSpPr>
+          <p:nvPr>
+            <p:ph type="body" idx="1"/>
+          </p:nvPr>
+        </p:nvSpPr>
+        <p:spPr/>
+        <p:txBody>
+          <a:bodyPr/>
+          <a:lstStyle/>
+          <a:p>
+            <a:r>
+              <a:rPr lang="es-MX" dirty="0"/>
+              <a:t>Análisis de balance de energía y temperatura de flama para KNSU</a:t>
+            </a:r>
+          </a:p>
+          <a:p>
+            <a:endParaRPr lang="es-MX" dirty="0"/>
+          </a:p>
+          <a:p>
+            <a:endParaRPr lang="es-MX" dirty="0"/>
+          </a:p>
+        </p:txBody>
+      </p:sp>
+      <p:sp>
+        <p:nvSpPr>
+          <p:cNvPr id="4" name="Marcador de número de diapositiva 3">
+            <a:extLst>
+              <a:ext uri="{FF2B5EF4-FFF2-40B4-BE49-F238E27FC236}">
+                <a16:creationId xmlns="" xmlns:a16="http://schemas.microsoft.com/office/drawing/2014/main" id="{1E01E37A-A885-024B-3CE1-005FB890C64A}"/>
+              </a:ext>
+            </a:extLst>
+          </p:cNvPr>
+          <p:cNvSpPr>
+            <a:spLocks noGrp="1"/>
+          </p:cNvSpPr>
+          <p:nvPr>
+            <p:ph type="sldNum" sz="quarter" idx="5"/>
+          </p:nvPr>
+        </p:nvSpPr>
+        <p:spPr/>
+        <p:txBody>
+          <a:bodyPr/>
+          <a:lstStyle/>
+          <a:p>
+            <a:fld id="{DB28F327-BEE5-45AC-9CE6-84AF0ACB1493}" type="slidenum">
+              <a:rPr lang="es-MX" smtClean="0"/>
+              <a:t>23</a:t>
+            </a:fld>
+            <a:endParaRPr lang="es-MX"/>
+          </a:p>
+        </p:txBody>
+      </p:sp>
+    </p:spTree>
+    <p:extLst>
+      <p:ext uri="{BB962C8B-B14F-4D97-AF65-F5344CB8AC3E}">
+        <p14:creationId xmlns:p14="http://schemas.microsoft.com/office/powerpoint/2010/main" val="1384627753"/>
+      </p:ext>
+    </p:extLst>
+  </p:cSld>
+  <p:clrMapOvr>
+    <a:masterClrMapping/>
+  </p:clrMapOvr>
+</p:notes>
+</file>
+
+<file path=ppt/notesSlides/notesSlide22.xml><?xml version="1.0" encoding="utf-8"?>
+<p:notes xmlns:a="http://schemas.openxmlformats.org/drawingml/2006/main" xmlns:r="http://schemas.openxmlformats.org/officeDocument/2006/relationships" xmlns:p="http://schemas.openxmlformats.org/presentationml/2006/main">
+  <p:cSld>
+    <p:spTree>
+      <p:nvGrpSpPr>
+        <p:cNvPr id="1" name="">
+          <a:extLst>
+            <a:ext uri="{FF2B5EF4-FFF2-40B4-BE49-F238E27FC236}">
+              <a16:creationId xmlns="" xmlns:a16="http://schemas.microsoft.com/office/drawing/2014/main" id="{D19C022C-D24C-FABF-B7F3-F78A28C9E5E9}"/>
+            </a:ext>
+          </a:extLst>
+        </p:cNvPr>
+        <p:cNvGrpSpPr/>
+        <p:nvPr/>
+      </p:nvGrpSpPr>
+      <p:grpSpPr>
+        <a:xfrm>
+          <a:off x="0" y="0"/>
+          <a:ext cx="0" cy="0"/>
+          <a:chOff x="0" y="0"/>
+          <a:chExt cx="0" cy="0"/>
+        </a:xfrm>
+      </p:grpSpPr>
+      <p:sp>
+        <p:nvSpPr>
+          <p:cNvPr id="2" name="Marcador de imagen de diapositiva 1">
+            <a:extLst>
+              <a:ext uri="{FF2B5EF4-FFF2-40B4-BE49-F238E27FC236}">
+                <a16:creationId xmlns="" xmlns:a16="http://schemas.microsoft.com/office/drawing/2014/main" id="{968C4A17-1DC5-FE7A-FAEE-6645F3C452EF}"/>
+              </a:ext>
+            </a:extLst>
+          </p:cNvPr>
+          <p:cNvSpPr>
+            <a:spLocks noGrp="1" noRot="1" noChangeAspect="1"/>
+          </p:cNvSpPr>
+          <p:nvPr>
+            <p:ph type="sldImg"/>
+          </p:nvPr>
+        </p:nvSpPr>
+        <p:spPr/>
+      </p:sp>
+      <p:sp>
+        <p:nvSpPr>
+          <p:cNvPr id="3" name="Marcador de notas 2">
+            <a:extLst>
+              <a:ext uri="{FF2B5EF4-FFF2-40B4-BE49-F238E27FC236}">
+                <a16:creationId xmlns="" xmlns:a16="http://schemas.microsoft.com/office/drawing/2014/main" id="{EA4D180A-CB92-EDDF-D75A-DCD6BC2CA479}"/>
+              </a:ext>
+            </a:extLst>
+          </p:cNvPr>
+          <p:cNvSpPr>
+            <a:spLocks noGrp="1"/>
+          </p:cNvSpPr>
+          <p:nvPr>
+            <p:ph type="body" idx="1"/>
+          </p:nvPr>
+        </p:nvSpPr>
+        <p:spPr/>
+        <p:txBody>
+          <a:bodyPr/>
+          <a:lstStyle/>
+          <a:p>
+            <a:endParaRPr lang="es-MX" dirty="0"/>
+          </a:p>
+        </p:txBody>
+      </p:sp>
+      <p:sp>
+        <p:nvSpPr>
+          <p:cNvPr id="4" name="Marcador de número de diapositiva 3">
+            <a:extLst>
+              <a:ext uri="{FF2B5EF4-FFF2-40B4-BE49-F238E27FC236}">
+                <a16:creationId xmlns="" xmlns:a16="http://schemas.microsoft.com/office/drawing/2014/main" id="{03598296-8EC7-E502-6F68-E99DAF522D72}"/>
+              </a:ext>
+            </a:extLst>
+          </p:cNvPr>
+          <p:cNvSpPr>
+            <a:spLocks noGrp="1"/>
+          </p:cNvSpPr>
+          <p:nvPr>
+            <p:ph type="sldNum" sz="quarter" idx="5"/>
+          </p:nvPr>
+        </p:nvSpPr>
+        <p:spPr/>
+        <p:txBody>
+          <a:bodyPr/>
+          <a:lstStyle/>
+          <a:p>
+            <a:fld id="{DB28F327-BEE5-45AC-9CE6-84AF0ACB1493}" type="slidenum">
+              <a:rPr lang="es-MX" smtClean="0"/>
+              <a:t>24</a:t>
+            </a:fld>
+            <a:endParaRPr lang="es-MX"/>
+          </a:p>
+        </p:txBody>
+      </p:sp>
+    </p:spTree>
+    <p:extLst>
+      <p:ext uri="{BB962C8B-B14F-4D97-AF65-F5344CB8AC3E}">
+        <p14:creationId xmlns:p14="http://schemas.microsoft.com/office/powerpoint/2010/main" val="1683334012"/>
+      </p:ext>
+    </p:extLst>
+  </p:cSld>
+  <p:clrMapOvr>
+    <a:masterClrMapping/>
+  </p:clrMapOvr>
+</p:notes>
+</file>
+
+<file path=ppt/notesSlides/notesSlide23.xml><?xml version="1.0" encoding="utf-8"?>
+<p:notes xmlns:a="http://schemas.openxmlformats.org/drawingml/2006/main" xmlns:r="http://schemas.openxmlformats.org/officeDocument/2006/relationships" xmlns:p="http://schemas.openxmlformats.org/presentationml/2006/main">
+  <p:cSld>
+    <p:spTree>
+      <p:nvGrpSpPr>
+        <p:cNvPr id="1" name="">
+          <a:extLst>
+            <a:ext uri="{FF2B5EF4-FFF2-40B4-BE49-F238E27FC236}">
+              <a16:creationId xmlns="" xmlns:a16="http://schemas.microsoft.com/office/drawing/2014/main" id="{6112B8E2-70FA-9A01-D7E7-9765C246F9E6}"/>
+            </a:ext>
+          </a:extLst>
+        </p:cNvPr>
+        <p:cNvGrpSpPr/>
+        <p:nvPr/>
+      </p:nvGrpSpPr>
+      <p:grpSpPr>
+        <a:xfrm>
+          <a:off x="0" y="0"/>
+          <a:ext cx="0" cy="0"/>
+          <a:chOff x="0" y="0"/>
+          <a:chExt cx="0" cy="0"/>
+        </a:xfrm>
+      </p:grpSpPr>
+      <p:sp>
+        <p:nvSpPr>
+          <p:cNvPr id="2" name="Marcador de imagen de diapositiva 1">
+            <a:extLst>
+              <a:ext uri="{FF2B5EF4-FFF2-40B4-BE49-F238E27FC236}">
+                <a16:creationId xmlns="" xmlns:a16="http://schemas.microsoft.com/office/drawing/2014/main" id="{317CA1FE-53AB-A4A2-1AD4-174898DCD96B}"/>
+              </a:ext>
+            </a:extLst>
+          </p:cNvPr>
+          <p:cNvSpPr>
+            <a:spLocks noGrp="1" noRot="1" noChangeAspect="1"/>
+          </p:cNvSpPr>
+          <p:nvPr>
+            <p:ph type="sldImg"/>
+          </p:nvPr>
+        </p:nvSpPr>
+        <p:spPr/>
+      </p:sp>
+      <p:sp>
+        <p:nvSpPr>
+          <p:cNvPr id="3" name="Marcador de notas 2">
+            <a:extLst>
+              <a:ext uri="{FF2B5EF4-FFF2-40B4-BE49-F238E27FC236}">
+                <a16:creationId xmlns="" xmlns:a16="http://schemas.microsoft.com/office/drawing/2014/main" id="{09AC5D18-CF8D-B897-1704-07CA7E6F4DD9}"/>
+              </a:ext>
+            </a:extLst>
+          </p:cNvPr>
+          <p:cNvSpPr>
+            <a:spLocks noGrp="1"/>
+          </p:cNvSpPr>
+          <p:nvPr>
+            <p:ph type="body" idx="1"/>
+          </p:nvPr>
+        </p:nvSpPr>
+        <p:spPr/>
+        <p:txBody>
+          <a:bodyPr/>
+          <a:lstStyle/>
+          <a:p>
+            <a:r>
+              <a:rPr lang="es-MX" dirty="0"/>
+              <a:t>Análisis de balance de energía y temperatura de flama para KNSU</a:t>
+            </a:r>
+          </a:p>
+          <a:p>
+            <a:endParaRPr lang="es-MX" dirty="0"/>
+          </a:p>
+          <a:p>
+            <a:endParaRPr lang="es-MX" dirty="0"/>
+          </a:p>
+        </p:txBody>
+      </p:sp>
+      <p:sp>
+        <p:nvSpPr>
+          <p:cNvPr id="4" name="Marcador de número de diapositiva 3">
+            <a:extLst>
+              <a:ext uri="{FF2B5EF4-FFF2-40B4-BE49-F238E27FC236}">
+                <a16:creationId xmlns="" xmlns:a16="http://schemas.microsoft.com/office/drawing/2014/main" id="{94609BF8-7980-12F8-2456-9CB5C9E586DC}"/>
+              </a:ext>
+            </a:extLst>
+          </p:cNvPr>
+          <p:cNvSpPr>
+            <a:spLocks noGrp="1"/>
+          </p:cNvSpPr>
+          <p:nvPr>
+            <p:ph type="sldNum" sz="quarter" idx="5"/>
+          </p:nvPr>
+        </p:nvSpPr>
+        <p:spPr/>
+        <p:txBody>
+          <a:bodyPr/>
+          <a:lstStyle/>
+          <a:p>
+            <a:fld id="{DB28F327-BEE5-45AC-9CE6-84AF0ACB1493}" type="slidenum">
+              <a:rPr lang="es-MX" smtClean="0"/>
+              <a:t>25</a:t>
+            </a:fld>
+            <a:endParaRPr lang="es-MX"/>
+          </a:p>
+        </p:txBody>
+      </p:sp>
+    </p:spTree>
+    <p:extLst>
+      <p:ext uri="{BB962C8B-B14F-4D97-AF65-F5344CB8AC3E}">
+        <p14:creationId xmlns:p14="http://schemas.microsoft.com/office/powerpoint/2010/main" val="1631063155"/>
+      </p:ext>
+    </p:extLst>
+  </p:cSld>
+  <p:clrMapOvr>
+    <a:masterClrMapping/>
+  </p:clrMapOvr>
+</p:notes>
+</file>
+
+<file path=ppt/notesSlides/notesSlide24.xml><?xml version="1.0" encoding="utf-8"?>
+<p:notes xmlns:a="http://schemas.openxmlformats.org/drawingml/2006/main" xmlns:r="http://schemas.openxmlformats.org/officeDocument/2006/relationships" xmlns:p="http://schemas.openxmlformats.org/presentationml/2006/main">
+  <p:cSld>
+    <p:spTree>
+      <p:nvGrpSpPr>
+        <p:cNvPr id="1" name="">
+          <a:extLst>
+            <a:ext uri="{FF2B5EF4-FFF2-40B4-BE49-F238E27FC236}">
+              <a16:creationId xmlns="" xmlns:a16="http://schemas.microsoft.com/office/drawing/2014/main" id="{C6ACAD4D-95C8-24AB-EB07-78F5E35C29CB}"/>
+            </a:ext>
+          </a:extLst>
+        </p:cNvPr>
+        <p:cNvGrpSpPr/>
+        <p:nvPr/>
+      </p:nvGrpSpPr>
+      <p:grpSpPr>
+        <a:xfrm>
+          <a:off x="0" y="0"/>
+          <a:ext cx="0" cy="0"/>
+          <a:chOff x="0" y="0"/>
+          <a:chExt cx="0" cy="0"/>
+        </a:xfrm>
+      </p:grpSpPr>
+      <p:sp>
+        <p:nvSpPr>
+          <p:cNvPr id="2" name="Marcador de imagen de diapositiva 1">
+            <a:extLst>
+              <a:ext uri="{FF2B5EF4-FFF2-40B4-BE49-F238E27FC236}">
+                <a16:creationId xmlns="" xmlns:a16="http://schemas.microsoft.com/office/drawing/2014/main" id="{E8AB616C-6AE6-F3D5-D09B-F824DDB1C384}"/>
+              </a:ext>
+            </a:extLst>
+          </p:cNvPr>
+          <p:cNvSpPr>
+            <a:spLocks noGrp="1" noRot="1" noChangeAspect="1"/>
+          </p:cNvSpPr>
+          <p:nvPr>
+            <p:ph type="sldImg"/>
+          </p:nvPr>
+        </p:nvSpPr>
+        <p:spPr/>
+      </p:sp>
+      <p:sp>
+        <p:nvSpPr>
+          <p:cNvPr id="3" name="Marcador de notas 2">
+            <a:extLst>
+              <a:ext uri="{FF2B5EF4-FFF2-40B4-BE49-F238E27FC236}">
+                <a16:creationId xmlns="" xmlns:a16="http://schemas.microsoft.com/office/drawing/2014/main" id="{403EE9D3-D6A1-43F4-6078-9A1CF02B0691}"/>
+              </a:ext>
+            </a:extLst>
+          </p:cNvPr>
+          <p:cNvSpPr>
+            <a:spLocks noGrp="1"/>
+          </p:cNvSpPr>
+          <p:nvPr>
+            <p:ph type="body" idx="1"/>
+          </p:nvPr>
+        </p:nvSpPr>
+        <p:spPr/>
+        <p:txBody>
+          <a:bodyPr/>
+          <a:lstStyle/>
+          <a:p>
+            <a:endParaRPr lang="es-MX" dirty="0"/>
+          </a:p>
+        </p:txBody>
+      </p:sp>
+      <p:sp>
+        <p:nvSpPr>
+          <p:cNvPr id="4" name="Marcador de número de diapositiva 3">
+            <a:extLst>
+              <a:ext uri="{FF2B5EF4-FFF2-40B4-BE49-F238E27FC236}">
+                <a16:creationId xmlns="" xmlns:a16="http://schemas.microsoft.com/office/drawing/2014/main" id="{E125C349-FDA0-328B-61A4-41A3D521F7BE}"/>
+              </a:ext>
+            </a:extLst>
+          </p:cNvPr>
+          <p:cNvSpPr>
+            <a:spLocks noGrp="1"/>
+          </p:cNvSpPr>
+          <p:nvPr>
+            <p:ph type="sldNum" sz="quarter" idx="5"/>
+          </p:nvPr>
+        </p:nvSpPr>
+        <p:spPr/>
+        <p:txBody>
+          <a:bodyPr/>
+          <a:lstStyle/>
+          <a:p>
+            <a:fld id="{DB28F327-BEE5-45AC-9CE6-84AF0ACB1493}" type="slidenum">
+              <a:rPr lang="es-MX" smtClean="0"/>
+              <a:t>26</a:t>
+            </a:fld>
+            <a:endParaRPr lang="es-MX"/>
+          </a:p>
+        </p:txBody>
+      </p:sp>
+    </p:spTree>
+    <p:extLst>
+      <p:ext uri="{BB962C8B-B14F-4D97-AF65-F5344CB8AC3E}">
+        <p14:creationId xmlns:p14="http://schemas.microsoft.com/office/powerpoint/2010/main" val="2594154573"/>
+      </p:ext>
+    </p:extLst>
+  </p:cSld>
+  <p:clrMapOvr>
+    <a:masterClrMapping/>
+  </p:clrMapOvr>
+</p:notes>
+</file>
+
+<file path=ppt/notesSlides/notesSlide25.xml><?xml version="1.0" encoding="utf-8"?>
+<p:notes xmlns:a="http://schemas.openxmlformats.org/drawingml/2006/main" xmlns:r="http://schemas.openxmlformats.org/officeDocument/2006/relationships" xmlns:p="http://schemas.openxmlformats.org/presentationml/2006/main">
+  <p:cSld>
+    <p:spTree>
+      <p:nvGrpSpPr>
+        <p:cNvPr id="1" name="">
+          <a:extLst>
+            <a:ext uri="{FF2B5EF4-FFF2-40B4-BE49-F238E27FC236}">
+              <a16:creationId xmlns="" xmlns:a16="http://schemas.microsoft.com/office/drawing/2014/main" id="{CB5C3160-33F1-A4F6-072B-7FA42FE32C41}"/>
+            </a:ext>
+          </a:extLst>
+        </p:cNvPr>
+        <p:cNvGrpSpPr/>
+        <p:nvPr/>
+      </p:nvGrpSpPr>
+      <p:grpSpPr>
+        <a:xfrm>
+          <a:off x="0" y="0"/>
+          <a:ext cx="0" cy="0"/>
+          <a:chOff x="0" y="0"/>
+          <a:chExt cx="0" cy="0"/>
+        </a:xfrm>
+      </p:grpSpPr>
+      <p:sp>
+        <p:nvSpPr>
+          <p:cNvPr id="2" name="Marcador de imagen de diapositiva 1">
+            <a:extLst>
+              <a:ext uri="{FF2B5EF4-FFF2-40B4-BE49-F238E27FC236}">
+                <a16:creationId xmlns="" xmlns:a16="http://schemas.microsoft.com/office/drawing/2014/main" id="{6FF6A0B3-A051-16C6-69A9-1D69634C93BB}"/>
+              </a:ext>
+            </a:extLst>
+          </p:cNvPr>
+          <p:cNvSpPr>
+            <a:spLocks noGrp="1" noRot="1" noChangeAspect="1"/>
+          </p:cNvSpPr>
+          <p:nvPr>
+            <p:ph type="sldImg"/>
+          </p:nvPr>
+        </p:nvSpPr>
+        <p:spPr/>
+      </p:sp>
+      <p:sp>
+        <p:nvSpPr>
+          <p:cNvPr id="3" name="Marcador de notas 2">
+            <a:extLst>
+              <a:ext uri="{FF2B5EF4-FFF2-40B4-BE49-F238E27FC236}">
+                <a16:creationId xmlns="" xmlns:a16="http://schemas.microsoft.com/office/drawing/2014/main" id="{275BE463-6DDD-D960-5693-02C74BED994E}"/>
+              </a:ext>
+            </a:extLst>
+          </p:cNvPr>
+          <p:cNvSpPr>
+            <a:spLocks noGrp="1"/>
+          </p:cNvSpPr>
+          <p:nvPr>
+            <p:ph type="body" idx="1"/>
+          </p:nvPr>
+        </p:nvSpPr>
+        <p:spPr/>
+        <p:txBody>
+          <a:bodyPr/>
+          <a:lstStyle/>
+          <a:p>
+            <a:endParaRPr lang="es-MX" dirty="0"/>
+          </a:p>
+        </p:txBody>
+      </p:sp>
+      <p:sp>
+        <p:nvSpPr>
+          <p:cNvPr id="4" name="Marcador de número de diapositiva 3">
+            <a:extLst>
+              <a:ext uri="{FF2B5EF4-FFF2-40B4-BE49-F238E27FC236}">
+                <a16:creationId xmlns="" xmlns:a16="http://schemas.microsoft.com/office/drawing/2014/main" id="{897523A9-CFD7-7340-FF11-FB4447A3F7A3}"/>
+              </a:ext>
+            </a:extLst>
+          </p:cNvPr>
+          <p:cNvSpPr>
+            <a:spLocks noGrp="1"/>
+          </p:cNvSpPr>
+          <p:nvPr>
+            <p:ph type="sldNum" sz="quarter" idx="5"/>
+          </p:nvPr>
+        </p:nvSpPr>
+        <p:spPr/>
+        <p:txBody>
+          <a:bodyPr/>
+          <a:lstStyle/>
+          <a:p>
+            <a:fld id="{DB28F327-BEE5-45AC-9CE6-84AF0ACB1493}" type="slidenum">
+              <a:rPr lang="es-MX" smtClean="0"/>
+              <a:t>27</a:t>
+            </a:fld>
+            <a:endParaRPr lang="es-MX"/>
+          </a:p>
+        </p:txBody>
+      </p:sp>
+    </p:spTree>
+    <p:extLst>
+      <p:ext uri="{BB962C8B-B14F-4D97-AF65-F5344CB8AC3E}">
+        <p14:creationId xmlns:p14="http://schemas.microsoft.com/office/powerpoint/2010/main" val="3226125170"/>
+      </p:ext>
+    </p:extLst>
+  </p:cSld>
+  <p:clrMapOvr>
+    <a:masterClrMapping/>
+  </p:clrMapOvr>
+</p:notes>
+</file>
+
+<file path=ppt/notesSlides/notesSlide3.xml><?xml version="1.0" encoding="utf-8"?>
 <p:notes xmlns:a="http://schemas.openxmlformats.org/drawingml/2006/main" xmlns:r="http://schemas.openxmlformats.org/officeDocument/2006/relationships" xmlns:p="http://schemas.openxmlformats.org/presentationml/2006/main">
   <p:cSld>
     <p:spTree>
@@ -7903,7 +8685,7 @@
 </p:notes>
 </file>
 
-<file path=ppt/notesSlides/notesSlide20.xml><?xml version="1.0" encoding="utf-8"?>
+<file path=ppt/notesSlides/notesSlide4.xml><?xml version="1.0" encoding="utf-8"?>
 <p:notes xmlns:a="http://schemas.openxmlformats.org/drawingml/2006/main" xmlns:r="http://schemas.openxmlformats.org/officeDocument/2006/relationships" xmlns:p="http://schemas.openxmlformats.org/presentationml/2006/main">
   <p:cSld>
     <p:spTree>
@@ -7911,7 +8693,7 @@
         <p:cNvPr id="1" name="">
           <a:extLst>
             <a:ext uri="{FF2B5EF4-FFF2-40B4-BE49-F238E27FC236}">
-              <a16:creationId xmlns:a16="http://schemas.microsoft.com/office/drawing/2014/main" xmlns="" id="{7512AD98-B880-11B4-D1A2-5C54E2D3DB95}"/>
+              <a16:creationId xmlns="" xmlns:a16="http://schemas.microsoft.com/office/drawing/2014/main" id="{AF305D52-49A3-5848-37E4-4904591C29A4}"/>
             </a:ext>
           </a:extLst>
         </p:cNvPr>
@@ -7931,7 +8713,7 @@
           <p:cNvPr id="2" name="Marcador de imagen de diapositiva 1">
             <a:extLst>
               <a:ext uri="{FF2B5EF4-FFF2-40B4-BE49-F238E27FC236}">
-                <a16:creationId xmlns:a16="http://schemas.microsoft.com/office/drawing/2014/main" xmlns="" id="{9BD5A377-84D8-34B7-CF11-802F2A877DBD}"/>
+                <a16:creationId xmlns="" xmlns:a16="http://schemas.microsoft.com/office/drawing/2014/main" id="{264DE7F8-C010-2EA7-80BB-E2F7E0354C50}"/>
               </a:ext>
             </a:extLst>
           </p:cNvPr>
@@ -7949,565 +8731,7 @@
           <p:cNvPr id="3" name="Marcador de notas 2">
             <a:extLst>
               <a:ext uri="{FF2B5EF4-FFF2-40B4-BE49-F238E27FC236}">
-                <a16:creationId xmlns:a16="http://schemas.microsoft.com/office/drawing/2014/main" xmlns="" id="{819F0629-F99B-BE20-02D9-C8F59F9B2BDB}"/>
-              </a:ext>
-            </a:extLst>
-          </p:cNvPr>
-          <p:cNvSpPr>
-            <a:spLocks noGrp="1"/>
-          </p:cNvSpPr>
-          <p:nvPr>
-            <p:ph type="body" idx="1"/>
-          </p:nvPr>
-        </p:nvSpPr>
-        <p:spPr/>
-        <p:txBody>
-          <a:bodyPr/>
-          <a:lstStyle/>
-          <a:p>
-            <a:r>
-              <a:rPr lang="es-MX" dirty="0"/>
-              <a:t>Análisis de balance de energía y temperatura de flama para KNSU</a:t>
-            </a:r>
-          </a:p>
-          <a:p>
-            <a:endParaRPr lang="es-MX" dirty="0"/>
-          </a:p>
-          <a:p>
-            <a:endParaRPr lang="es-MX" dirty="0"/>
-          </a:p>
-        </p:txBody>
-      </p:sp>
-      <p:sp>
-        <p:nvSpPr>
-          <p:cNvPr id="4" name="Marcador de número de diapositiva 3">
-            <a:extLst>
-              <a:ext uri="{FF2B5EF4-FFF2-40B4-BE49-F238E27FC236}">
-                <a16:creationId xmlns:a16="http://schemas.microsoft.com/office/drawing/2014/main" xmlns="" id="{1E01E37A-A885-024B-3CE1-005FB890C64A}"/>
-              </a:ext>
-            </a:extLst>
-          </p:cNvPr>
-          <p:cNvSpPr>
-            <a:spLocks noGrp="1"/>
-          </p:cNvSpPr>
-          <p:nvPr>
-            <p:ph type="sldNum" sz="quarter" idx="5"/>
-          </p:nvPr>
-        </p:nvSpPr>
-        <p:spPr/>
-        <p:txBody>
-          <a:bodyPr/>
-          <a:lstStyle/>
-          <a:p>
-            <a:fld id="{DB28F327-BEE5-45AC-9CE6-84AF0ACB1493}" type="slidenum">
-              <a:rPr lang="es-MX" smtClean="0"/>
-              <a:t>23</a:t>
-            </a:fld>
-            <a:endParaRPr lang="es-MX"/>
-          </a:p>
-        </p:txBody>
-      </p:sp>
-    </p:spTree>
-    <p:extLst>
-      <p:ext uri="{BB962C8B-B14F-4D97-AF65-F5344CB8AC3E}">
-        <p14:creationId xmlns:p14="http://schemas.microsoft.com/office/powerpoint/2010/main" val="1384627753"/>
-      </p:ext>
-    </p:extLst>
-  </p:cSld>
-  <p:clrMapOvr>
-    <a:masterClrMapping/>
-  </p:clrMapOvr>
-</p:notes>
-</file>
-
-<file path=ppt/notesSlides/notesSlide21.xml><?xml version="1.0" encoding="utf-8"?>
-<p:notes xmlns:a="http://schemas.openxmlformats.org/drawingml/2006/main" xmlns:r="http://schemas.openxmlformats.org/officeDocument/2006/relationships" xmlns:p="http://schemas.openxmlformats.org/presentationml/2006/main">
-  <p:cSld>
-    <p:spTree>
-      <p:nvGrpSpPr>
-        <p:cNvPr id="1" name="">
-          <a:extLst>
-            <a:ext uri="{FF2B5EF4-FFF2-40B4-BE49-F238E27FC236}">
-              <a16:creationId xmlns:a16="http://schemas.microsoft.com/office/drawing/2014/main" xmlns="" id="{D19C022C-D24C-FABF-B7F3-F78A28C9E5E9}"/>
-            </a:ext>
-          </a:extLst>
-        </p:cNvPr>
-        <p:cNvGrpSpPr/>
-        <p:nvPr/>
-      </p:nvGrpSpPr>
-      <p:grpSpPr>
-        <a:xfrm>
-          <a:off x="0" y="0"/>
-          <a:ext cx="0" cy="0"/>
-          <a:chOff x="0" y="0"/>
-          <a:chExt cx="0" cy="0"/>
-        </a:xfrm>
-      </p:grpSpPr>
-      <p:sp>
-        <p:nvSpPr>
-          <p:cNvPr id="2" name="Marcador de imagen de diapositiva 1">
-            <a:extLst>
-              <a:ext uri="{FF2B5EF4-FFF2-40B4-BE49-F238E27FC236}">
-                <a16:creationId xmlns:a16="http://schemas.microsoft.com/office/drawing/2014/main" xmlns="" id="{968C4A17-1DC5-FE7A-FAEE-6645F3C452EF}"/>
-              </a:ext>
-            </a:extLst>
-          </p:cNvPr>
-          <p:cNvSpPr>
-            <a:spLocks noGrp="1" noRot="1" noChangeAspect="1"/>
-          </p:cNvSpPr>
-          <p:nvPr>
-            <p:ph type="sldImg"/>
-          </p:nvPr>
-        </p:nvSpPr>
-        <p:spPr/>
-      </p:sp>
-      <p:sp>
-        <p:nvSpPr>
-          <p:cNvPr id="3" name="Marcador de notas 2">
-            <a:extLst>
-              <a:ext uri="{FF2B5EF4-FFF2-40B4-BE49-F238E27FC236}">
-                <a16:creationId xmlns:a16="http://schemas.microsoft.com/office/drawing/2014/main" xmlns="" id="{EA4D180A-CB92-EDDF-D75A-DCD6BC2CA479}"/>
-              </a:ext>
-            </a:extLst>
-          </p:cNvPr>
-          <p:cNvSpPr>
-            <a:spLocks noGrp="1"/>
-          </p:cNvSpPr>
-          <p:nvPr>
-            <p:ph type="body" idx="1"/>
-          </p:nvPr>
-        </p:nvSpPr>
-        <p:spPr/>
-        <p:txBody>
-          <a:bodyPr/>
-          <a:lstStyle/>
-          <a:p>
-            <a:endParaRPr lang="es-MX" dirty="0"/>
-          </a:p>
-        </p:txBody>
-      </p:sp>
-      <p:sp>
-        <p:nvSpPr>
-          <p:cNvPr id="4" name="Marcador de número de diapositiva 3">
-            <a:extLst>
-              <a:ext uri="{FF2B5EF4-FFF2-40B4-BE49-F238E27FC236}">
-                <a16:creationId xmlns:a16="http://schemas.microsoft.com/office/drawing/2014/main" xmlns="" id="{03598296-8EC7-E502-6F68-E99DAF522D72}"/>
-              </a:ext>
-            </a:extLst>
-          </p:cNvPr>
-          <p:cNvSpPr>
-            <a:spLocks noGrp="1"/>
-          </p:cNvSpPr>
-          <p:nvPr>
-            <p:ph type="sldNum" sz="quarter" idx="5"/>
-          </p:nvPr>
-        </p:nvSpPr>
-        <p:spPr/>
-        <p:txBody>
-          <a:bodyPr/>
-          <a:lstStyle/>
-          <a:p>
-            <a:fld id="{DB28F327-BEE5-45AC-9CE6-84AF0ACB1493}" type="slidenum">
-              <a:rPr lang="es-MX" smtClean="0"/>
-              <a:t>24</a:t>
-            </a:fld>
-            <a:endParaRPr lang="es-MX"/>
-          </a:p>
-        </p:txBody>
-      </p:sp>
-    </p:spTree>
-    <p:extLst>
-      <p:ext uri="{BB962C8B-B14F-4D97-AF65-F5344CB8AC3E}">
-        <p14:creationId xmlns:p14="http://schemas.microsoft.com/office/powerpoint/2010/main" val="1683334012"/>
-      </p:ext>
-    </p:extLst>
-  </p:cSld>
-  <p:clrMapOvr>
-    <a:masterClrMapping/>
-  </p:clrMapOvr>
-</p:notes>
-</file>
-
-<file path=ppt/notesSlides/notesSlide22.xml><?xml version="1.0" encoding="utf-8"?>
-<p:notes xmlns:a="http://schemas.openxmlformats.org/drawingml/2006/main" xmlns:r="http://schemas.openxmlformats.org/officeDocument/2006/relationships" xmlns:p="http://schemas.openxmlformats.org/presentationml/2006/main">
-  <p:cSld>
-    <p:spTree>
-      <p:nvGrpSpPr>
-        <p:cNvPr id="1" name="">
-          <a:extLst>
-            <a:ext uri="{FF2B5EF4-FFF2-40B4-BE49-F238E27FC236}">
-              <a16:creationId xmlns:a16="http://schemas.microsoft.com/office/drawing/2014/main" xmlns="" id="{6112B8E2-70FA-9A01-D7E7-9765C246F9E6}"/>
-            </a:ext>
-          </a:extLst>
-        </p:cNvPr>
-        <p:cNvGrpSpPr/>
-        <p:nvPr/>
-      </p:nvGrpSpPr>
-      <p:grpSpPr>
-        <a:xfrm>
-          <a:off x="0" y="0"/>
-          <a:ext cx="0" cy="0"/>
-          <a:chOff x="0" y="0"/>
-          <a:chExt cx="0" cy="0"/>
-        </a:xfrm>
-      </p:grpSpPr>
-      <p:sp>
-        <p:nvSpPr>
-          <p:cNvPr id="2" name="Marcador de imagen de diapositiva 1">
-            <a:extLst>
-              <a:ext uri="{FF2B5EF4-FFF2-40B4-BE49-F238E27FC236}">
-                <a16:creationId xmlns:a16="http://schemas.microsoft.com/office/drawing/2014/main" xmlns="" id="{317CA1FE-53AB-A4A2-1AD4-174898DCD96B}"/>
-              </a:ext>
-            </a:extLst>
-          </p:cNvPr>
-          <p:cNvSpPr>
-            <a:spLocks noGrp="1" noRot="1" noChangeAspect="1"/>
-          </p:cNvSpPr>
-          <p:nvPr>
-            <p:ph type="sldImg"/>
-          </p:nvPr>
-        </p:nvSpPr>
-        <p:spPr/>
-      </p:sp>
-      <p:sp>
-        <p:nvSpPr>
-          <p:cNvPr id="3" name="Marcador de notas 2">
-            <a:extLst>
-              <a:ext uri="{FF2B5EF4-FFF2-40B4-BE49-F238E27FC236}">
-                <a16:creationId xmlns:a16="http://schemas.microsoft.com/office/drawing/2014/main" xmlns="" id="{09AC5D18-CF8D-B897-1704-07CA7E6F4DD9}"/>
-              </a:ext>
-            </a:extLst>
-          </p:cNvPr>
-          <p:cNvSpPr>
-            <a:spLocks noGrp="1"/>
-          </p:cNvSpPr>
-          <p:nvPr>
-            <p:ph type="body" idx="1"/>
-          </p:nvPr>
-        </p:nvSpPr>
-        <p:spPr/>
-        <p:txBody>
-          <a:bodyPr/>
-          <a:lstStyle/>
-          <a:p>
-            <a:r>
-              <a:rPr lang="es-MX" dirty="0"/>
-              <a:t>Análisis de balance de energía y temperatura de flama para KNSU</a:t>
-            </a:r>
-          </a:p>
-          <a:p>
-            <a:endParaRPr lang="es-MX" dirty="0"/>
-          </a:p>
-          <a:p>
-            <a:endParaRPr lang="es-MX" dirty="0"/>
-          </a:p>
-        </p:txBody>
-      </p:sp>
-      <p:sp>
-        <p:nvSpPr>
-          <p:cNvPr id="4" name="Marcador de número de diapositiva 3">
-            <a:extLst>
-              <a:ext uri="{FF2B5EF4-FFF2-40B4-BE49-F238E27FC236}">
-                <a16:creationId xmlns:a16="http://schemas.microsoft.com/office/drawing/2014/main" xmlns="" id="{94609BF8-7980-12F8-2456-9CB5C9E586DC}"/>
-              </a:ext>
-            </a:extLst>
-          </p:cNvPr>
-          <p:cNvSpPr>
-            <a:spLocks noGrp="1"/>
-          </p:cNvSpPr>
-          <p:nvPr>
-            <p:ph type="sldNum" sz="quarter" idx="5"/>
-          </p:nvPr>
-        </p:nvSpPr>
-        <p:spPr/>
-        <p:txBody>
-          <a:bodyPr/>
-          <a:lstStyle/>
-          <a:p>
-            <a:fld id="{DB28F327-BEE5-45AC-9CE6-84AF0ACB1493}" type="slidenum">
-              <a:rPr lang="es-MX" smtClean="0"/>
-              <a:t>25</a:t>
-            </a:fld>
-            <a:endParaRPr lang="es-MX"/>
-          </a:p>
-        </p:txBody>
-      </p:sp>
-    </p:spTree>
-    <p:extLst>
-      <p:ext uri="{BB962C8B-B14F-4D97-AF65-F5344CB8AC3E}">
-        <p14:creationId xmlns:p14="http://schemas.microsoft.com/office/powerpoint/2010/main" val="1631063155"/>
-      </p:ext>
-    </p:extLst>
-  </p:cSld>
-  <p:clrMapOvr>
-    <a:masterClrMapping/>
-  </p:clrMapOvr>
-</p:notes>
-</file>
-
-<file path=ppt/notesSlides/notesSlide23.xml><?xml version="1.0" encoding="utf-8"?>
-<p:notes xmlns:a="http://schemas.openxmlformats.org/drawingml/2006/main" xmlns:r="http://schemas.openxmlformats.org/officeDocument/2006/relationships" xmlns:p="http://schemas.openxmlformats.org/presentationml/2006/main">
-  <p:cSld>
-    <p:spTree>
-      <p:nvGrpSpPr>
-        <p:cNvPr id="1" name="">
-          <a:extLst>
-            <a:ext uri="{FF2B5EF4-FFF2-40B4-BE49-F238E27FC236}">
-              <a16:creationId xmlns:a16="http://schemas.microsoft.com/office/drawing/2014/main" xmlns="" id="{C6ACAD4D-95C8-24AB-EB07-78F5E35C29CB}"/>
-            </a:ext>
-          </a:extLst>
-        </p:cNvPr>
-        <p:cNvGrpSpPr/>
-        <p:nvPr/>
-      </p:nvGrpSpPr>
-      <p:grpSpPr>
-        <a:xfrm>
-          <a:off x="0" y="0"/>
-          <a:ext cx="0" cy="0"/>
-          <a:chOff x="0" y="0"/>
-          <a:chExt cx="0" cy="0"/>
-        </a:xfrm>
-      </p:grpSpPr>
-      <p:sp>
-        <p:nvSpPr>
-          <p:cNvPr id="2" name="Marcador de imagen de diapositiva 1">
-            <a:extLst>
-              <a:ext uri="{FF2B5EF4-FFF2-40B4-BE49-F238E27FC236}">
-                <a16:creationId xmlns:a16="http://schemas.microsoft.com/office/drawing/2014/main" xmlns="" id="{E8AB616C-6AE6-F3D5-D09B-F824DDB1C384}"/>
-              </a:ext>
-            </a:extLst>
-          </p:cNvPr>
-          <p:cNvSpPr>
-            <a:spLocks noGrp="1" noRot="1" noChangeAspect="1"/>
-          </p:cNvSpPr>
-          <p:nvPr>
-            <p:ph type="sldImg"/>
-          </p:nvPr>
-        </p:nvSpPr>
-        <p:spPr/>
-      </p:sp>
-      <p:sp>
-        <p:nvSpPr>
-          <p:cNvPr id="3" name="Marcador de notas 2">
-            <a:extLst>
-              <a:ext uri="{FF2B5EF4-FFF2-40B4-BE49-F238E27FC236}">
-                <a16:creationId xmlns:a16="http://schemas.microsoft.com/office/drawing/2014/main" xmlns="" id="{403EE9D3-D6A1-43F4-6078-9A1CF02B0691}"/>
-              </a:ext>
-            </a:extLst>
-          </p:cNvPr>
-          <p:cNvSpPr>
-            <a:spLocks noGrp="1"/>
-          </p:cNvSpPr>
-          <p:nvPr>
-            <p:ph type="body" idx="1"/>
-          </p:nvPr>
-        </p:nvSpPr>
-        <p:spPr/>
-        <p:txBody>
-          <a:bodyPr/>
-          <a:lstStyle/>
-          <a:p>
-            <a:endParaRPr lang="es-MX" dirty="0"/>
-          </a:p>
-        </p:txBody>
-      </p:sp>
-      <p:sp>
-        <p:nvSpPr>
-          <p:cNvPr id="4" name="Marcador de número de diapositiva 3">
-            <a:extLst>
-              <a:ext uri="{FF2B5EF4-FFF2-40B4-BE49-F238E27FC236}">
-                <a16:creationId xmlns:a16="http://schemas.microsoft.com/office/drawing/2014/main" xmlns="" id="{E125C349-FDA0-328B-61A4-41A3D521F7BE}"/>
-              </a:ext>
-            </a:extLst>
-          </p:cNvPr>
-          <p:cNvSpPr>
-            <a:spLocks noGrp="1"/>
-          </p:cNvSpPr>
-          <p:nvPr>
-            <p:ph type="sldNum" sz="quarter" idx="5"/>
-          </p:nvPr>
-        </p:nvSpPr>
-        <p:spPr/>
-        <p:txBody>
-          <a:bodyPr/>
-          <a:lstStyle/>
-          <a:p>
-            <a:fld id="{DB28F327-BEE5-45AC-9CE6-84AF0ACB1493}" type="slidenum">
-              <a:rPr lang="es-MX" smtClean="0"/>
-              <a:t>26</a:t>
-            </a:fld>
-            <a:endParaRPr lang="es-MX"/>
-          </a:p>
-        </p:txBody>
-      </p:sp>
-    </p:spTree>
-    <p:extLst>
-      <p:ext uri="{BB962C8B-B14F-4D97-AF65-F5344CB8AC3E}">
-        <p14:creationId xmlns:p14="http://schemas.microsoft.com/office/powerpoint/2010/main" val="2594154573"/>
-      </p:ext>
-    </p:extLst>
-  </p:cSld>
-  <p:clrMapOvr>
-    <a:masterClrMapping/>
-  </p:clrMapOvr>
-</p:notes>
-</file>
-
-<file path=ppt/notesSlides/notesSlide24.xml><?xml version="1.0" encoding="utf-8"?>
-<p:notes xmlns:a="http://schemas.openxmlformats.org/drawingml/2006/main" xmlns:r="http://schemas.openxmlformats.org/officeDocument/2006/relationships" xmlns:p="http://schemas.openxmlformats.org/presentationml/2006/main">
-  <p:cSld>
-    <p:spTree>
-      <p:nvGrpSpPr>
-        <p:cNvPr id="1" name="">
-          <a:extLst>
-            <a:ext uri="{FF2B5EF4-FFF2-40B4-BE49-F238E27FC236}">
-              <a16:creationId xmlns:a16="http://schemas.microsoft.com/office/drawing/2014/main" xmlns="" id="{CB5C3160-33F1-A4F6-072B-7FA42FE32C41}"/>
-            </a:ext>
-          </a:extLst>
-        </p:cNvPr>
-        <p:cNvGrpSpPr/>
-        <p:nvPr/>
-      </p:nvGrpSpPr>
-      <p:grpSpPr>
-        <a:xfrm>
-          <a:off x="0" y="0"/>
-          <a:ext cx="0" cy="0"/>
-          <a:chOff x="0" y="0"/>
-          <a:chExt cx="0" cy="0"/>
-        </a:xfrm>
-      </p:grpSpPr>
-      <p:sp>
-        <p:nvSpPr>
-          <p:cNvPr id="2" name="Marcador de imagen de diapositiva 1">
-            <a:extLst>
-              <a:ext uri="{FF2B5EF4-FFF2-40B4-BE49-F238E27FC236}">
-                <a16:creationId xmlns:a16="http://schemas.microsoft.com/office/drawing/2014/main" xmlns="" id="{6FF6A0B3-A051-16C6-69A9-1D69634C93BB}"/>
-              </a:ext>
-            </a:extLst>
-          </p:cNvPr>
-          <p:cNvSpPr>
-            <a:spLocks noGrp="1" noRot="1" noChangeAspect="1"/>
-          </p:cNvSpPr>
-          <p:nvPr>
-            <p:ph type="sldImg"/>
-          </p:nvPr>
-        </p:nvSpPr>
-        <p:spPr/>
-      </p:sp>
-      <p:sp>
-        <p:nvSpPr>
-          <p:cNvPr id="3" name="Marcador de notas 2">
-            <a:extLst>
-              <a:ext uri="{FF2B5EF4-FFF2-40B4-BE49-F238E27FC236}">
-                <a16:creationId xmlns:a16="http://schemas.microsoft.com/office/drawing/2014/main" xmlns="" id="{275BE463-6DDD-D960-5693-02C74BED994E}"/>
-              </a:ext>
-            </a:extLst>
-          </p:cNvPr>
-          <p:cNvSpPr>
-            <a:spLocks noGrp="1"/>
-          </p:cNvSpPr>
-          <p:nvPr>
-            <p:ph type="body" idx="1"/>
-          </p:nvPr>
-        </p:nvSpPr>
-        <p:spPr/>
-        <p:txBody>
-          <a:bodyPr/>
-          <a:lstStyle/>
-          <a:p>
-            <a:endParaRPr lang="es-MX" dirty="0"/>
-          </a:p>
-        </p:txBody>
-      </p:sp>
-      <p:sp>
-        <p:nvSpPr>
-          <p:cNvPr id="4" name="Marcador de número de diapositiva 3">
-            <a:extLst>
-              <a:ext uri="{FF2B5EF4-FFF2-40B4-BE49-F238E27FC236}">
-                <a16:creationId xmlns:a16="http://schemas.microsoft.com/office/drawing/2014/main" xmlns="" id="{897523A9-CFD7-7340-FF11-FB4447A3F7A3}"/>
-              </a:ext>
-            </a:extLst>
-          </p:cNvPr>
-          <p:cNvSpPr>
-            <a:spLocks noGrp="1"/>
-          </p:cNvSpPr>
-          <p:nvPr>
-            <p:ph type="sldNum" sz="quarter" idx="5"/>
-          </p:nvPr>
-        </p:nvSpPr>
-        <p:spPr/>
-        <p:txBody>
-          <a:bodyPr/>
-          <a:lstStyle/>
-          <a:p>
-            <a:fld id="{DB28F327-BEE5-45AC-9CE6-84AF0ACB1493}" type="slidenum">
-              <a:rPr lang="es-MX" smtClean="0"/>
-              <a:t>27</a:t>
-            </a:fld>
-            <a:endParaRPr lang="es-MX"/>
-          </a:p>
-        </p:txBody>
-      </p:sp>
-    </p:spTree>
-    <p:extLst>
-      <p:ext uri="{BB962C8B-B14F-4D97-AF65-F5344CB8AC3E}">
-        <p14:creationId xmlns:p14="http://schemas.microsoft.com/office/powerpoint/2010/main" val="3226125170"/>
-      </p:ext>
-    </p:extLst>
-  </p:cSld>
-  <p:clrMapOvr>
-    <a:masterClrMapping/>
-  </p:clrMapOvr>
-</p:notes>
-</file>
-
-<file path=ppt/notesSlides/notesSlide3.xml><?xml version="1.0" encoding="utf-8"?>
-<p:notes xmlns:a="http://schemas.openxmlformats.org/drawingml/2006/main" xmlns:r="http://schemas.openxmlformats.org/officeDocument/2006/relationships" xmlns:p="http://schemas.openxmlformats.org/presentationml/2006/main">
-  <p:cSld>
-    <p:spTree>
-      <p:nvGrpSpPr>
-        <p:cNvPr id="1" name="">
-          <a:extLst>
-            <a:ext uri="{FF2B5EF4-FFF2-40B4-BE49-F238E27FC236}">
-              <a16:creationId xmlns:a16="http://schemas.microsoft.com/office/drawing/2014/main" xmlns="" id="{AF305D52-49A3-5848-37E4-4904591C29A4}"/>
-            </a:ext>
-          </a:extLst>
-        </p:cNvPr>
-        <p:cNvGrpSpPr/>
-        <p:nvPr/>
-      </p:nvGrpSpPr>
-      <p:grpSpPr>
-        <a:xfrm>
-          <a:off x="0" y="0"/>
-          <a:ext cx="0" cy="0"/>
-          <a:chOff x="0" y="0"/>
-          <a:chExt cx="0" cy="0"/>
-        </a:xfrm>
-      </p:grpSpPr>
-      <p:sp>
-        <p:nvSpPr>
-          <p:cNvPr id="2" name="Marcador de imagen de diapositiva 1">
-            <a:extLst>
-              <a:ext uri="{FF2B5EF4-FFF2-40B4-BE49-F238E27FC236}">
-                <a16:creationId xmlns:a16="http://schemas.microsoft.com/office/drawing/2014/main" xmlns="" id="{264DE7F8-C010-2EA7-80BB-E2F7E0354C50}"/>
-              </a:ext>
-            </a:extLst>
-          </p:cNvPr>
-          <p:cNvSpPr>
-            <a:spLocks noGrp="1" noRot="1" noChangeAspect="1"/>
-          </p:cNvSpPr>
-          <p:nvPr>
-            <p:ph type="sldImg"/>
-          </p:nvPr>
-        </p:nvSpPr>
-        <p:spPr/>
-      </p:sp>
-      <p:sp>
-        <p:nvSpPr>
-          <p:cNvPr id="3" name="Marcador de notas 2">
-            <a:extLst>
-              <a:ext uri="{FF2B5EF4-FFF2-40B4-BE49-F238E27FC236}">
-                <a16:creationId xmlns:a16="http://schemas.microsoft.com/office/drawing/2014/main" xmlns="" id="{D23D33F0-7C0F-A6CD-9B2B-96A2E0BB3FCA}"/>
+                <a16:creationId xmlns="" xmlns:a16="http://schemas.microsoft.com/office/drawing/2014/main" id="{D23D33F0-7C0F-A6CD-9B2B-96A2E0BB3FCA}"/>
               </a:ext>
             </a:extLst>
           </p:cNvPr>
@@ -8536,7 +8760,7 @@
           <p:cNvPr id="4" name="Marcador de número de diapositiva 3">
             <a:extLst>
               <a:ext uri="{FF2B5EF4-FFF2-40B4-BE49-F238E27FC236}">
-                <a16:creationId xmlns:a16="http://schemas.microsoft.com/office/drawing/2014/main" xmlns="" id="{32BDB245-CECD-89CE-B664-2CC8D187A9BC}"/>
+                <a16:creationId xmlns="" xmlns:a16="http://schemas.microsoft.com/office/drawing/2014/main" id="{32BDB245-CECD-89CE-B664-2CC8D187A9BC}"/>
               </a:ext>
             </a:extLst>
           </p:cNvPr>
@@ -8573,7 +8797,7 @@
 </p:notes>
 </file>
 
-<file path=ppt/notesSlides/notesSlide4.xml><?xml version="1.0" encoding="utf-8"?>
+<file path=ppt/notesSlides/notesSlide5.xml><?xml version="1.0" encoding="utf-8"?>
 <p:notes xmlns:a="http://schemas.openxmlformats.org/drawingml/2006/main" xmlns:r="http://schemas.openxmlformats.org/officeDocument/2006/relationships" xmlns:p="http://schemas.openxmlformats.org/presentationml/2006/main">
   <p:cSld>
     <p:spTree>
@@ -8581,7 +8805,7 @@
         <p:cNvPr id="1" name="">
           <a:extLst>
             <a:ext uri="{FF2B5EF4-FFF2-40B4-BE49-F238E27FC236}">
-              <a16:creationId xmlns:a16="http://schemas.microsoft.com/office/drawing/2014/main" xmlns="" id="{16CB22E1-7082-2BF6-8BFA-B27D3CB332F1}"/>
+              <a16:creationId xmlns="" xmlns:a16="http://schemas.microsoft.com/office/drawing/2014/main" id="{16CB22E1-7082-2BF6-8BFA-B27D3CB332F1}"/>
             </a:ext>
           </a:extLst>
         </p:cNvPr>
@@ -8601,7 +8825,7 @@
           <p:cNvPr id="2" name="Marcador de imagen de diapositiva 1">
             <a:extLst>
               <a:ext uri="{FF2B5EF4-FFF2-40B4-BE49-F238E27FC236}">
-                <a16:creationId xmlns:a16="http://schemas.microsoft.com/office/drawing/2014/main" xmlns="" id="{A9D483EF-8E9E-6817-54D4-FA50E58AA5BC}"/>
+                <a16:creationId xmlns="" xmlns:a16="http://schemas.microsoft.com/office/drawing/2014/main" id="{A9D483EF-8E9E-6817-54D4-FA50E58AA5BC}"/>
               </a:ext>
             </a:extLst>
           </p:cNvPr>
@@ -8619,7 +8843,7 @@
           <p:cNvPr id="3" name="Marcador de notas 2">
             <a:extLst>
               <a:ext uri="{FF2B5EF4-FFF2-40B4-BE49-F238E27FC236}">
-                <a16:creationId xmlns:a16="http://schemas.microsoft.com/office/drawing/2014/main" xmlns="" id="{D35F5B89-C158-E21C-4D67-D43A902F131E}"/>
+                <a16:creationId xmlns="" xmlns:a16="http://schemas.microsoft.com/office/drawing/2014/main" id="{D35F5B89-C158-E21C-4D67-D43A902F131E}"/>
               </a:ext>
             </a:extLst>
           </p:cNvPr>
@@ -8652,7 +8876,7 @@
           <p:cNvPr id="4" name="Marcador de número de diapositiva 3">
             <a:extLst>
               <a:ext uri="{FF2B5EF4-FFF2-40B4-BE49-F238E27FC236}">
-                <a16:creationId xmlns:a16="http://schemas.microsoft.com/office/drawing/2014/main" xmlns="" id="{A7F57656-A1B3-EA52-D886-4E6C01672D26}"/>
+                <a16:creationId xmlns="" xmlns:a16="http://schemas.microsoft.com/office/drawing/2014/main" id="{A7F57656-A1B3-EA52-D886-4E6C01672D26}"/>
               </a:ext>
             </a:extLst>
           </p:cNvPr>
@@ -8689,7 +8913,7 @@
 </p:notes>
 </file>
 
-<file path=ppt/notesSlides/notesSlide5.xml><?xml version="1.0" encoding="utf-8"?>
+<file path=ppt/notesSlides/notesSlide6.xml><?xml version="1.0" encoding="utf-8"?>
 <p:notes xmlns:a="http://schemas.openxmlformats.org/drawingml/2006/main" xmlns:r="http://schemas.openxmlformats.org/officeDocument/2006/relationships" xmlns:p="http://schemas.openxmlformats.org/presentationml/2006/main">
   <p:cSld>
     <p:spTree>
@@ -8697,7 +8921,7 @@
         <p:cNvPr id="1" name="">
           <a:extLst>
             <a:ext uri="{FF2B5EF4-FFF2-40B4-BE49-F238E27FC236}">
-              <a16:creationId xmlns:a16="http://schemas.microsoft.com/office/drawing/2014/main" xmlns="" id="{E7BAF0A4-D7F0-120A-DC00-57022741514D}"/>
+              <a16:creationId xmlns="" xmlns:a16="http://schemas.microsoft.com/office/drawing/2014/main" id="{E7BAF0A4-D7F0-120A-DC00-57022741514D}"/>
             </a:ext>
           </a:extLst>
         </p:cNvPr>
@@ -8717,7 +8941,7 @@
           <p:cNvPr id="2" name="Marcador de imagen de diapositiva 1">
             <a:extLst>
               <a:ext uri="{FF2B5EF4-FFF2-40B4-BE49-F238E27FC236}">
-                <a16:creationId xmlns:a16="http://schemas.microsoft.com/office/drawing/2014/main" xmlns="" id="{2298E802-686D-6A55-2724-1FC73CDBE2B5}"/>
+                <a16:creationId xmlns="" xmlns:a16="http://schemas.microsoft.com/office/drawing/2014/main" id="{2298E802-686D-6A55-2724-1FC73CDBE2B5}"/>
               </a:ext>
             </a:extLst>
           </p:cNvPr>
@@ -8735,7 +8959,7 @@
           <p:cNvPr id="3" name="Marcador de notas 2">
             <a:extLst>
               <a:ext uri="{FF2B5EF4-FFF2-40B4-BE49-F238E27FC236}">
-                <a16:creationId xmlns:a16="http://schemas.microsoft.com/office/drawing/2014/main" xmlns="" id="{B05DA440-2AAA-0D1C-806F-E672C3841747}"/>
+                <a16:creationId xmlns="" xmlns:a16="http://schemas.microsoft.com/office/drawing/2014/main" id="{B05DA440-2AAA-0D1C-806F-E672C3841747}"/>
               </a:ext>
             </a:extLst>
           </p:cNvPr>
@@ -8764,7 +8988,7 @@
           <p:cNvPr id="4" name="Marcador de número de diapositiva 3">
             <a:extLst>
               <a:ext uri="{FF2B5EF4-FFF2-40B4-BE49-F238E27FC236}">
-                <a16:creationId xmlns:a16="http://schemas.microsoft.com/office/drawing/2014/main" xmlns="" id="{3CA16216-C1B7-06B6-1C48-21A033CE44B4}"/>
+                <a16:creationId xmlns="" xmlns:a16="http://schemas.microsoft.com/office/drawing/2014/main" id="{3CA16216-C1B7-06B6-1C48-21A033CE44B4}"/>
               </a:ext>
             </a:extLst>
           </p:cNvPr>
@@ -8801,7 +9025,7 @@
 </p:notes>
 </file>
 
-<file path=ppt/notesSlides/notesSlide6.xml><?xml version="1.0" encoding="utf-8"?>
+<file path=ppt/notesSlides/notesSlide7.xml><?xml version="1.0" encoding="utf-8"?>
 <p:notes xmlns:a="http://schemas.openxmlformats.org/drawingml/2006/main" xmlns:r="http://schemas.openxmlformats.org/officeDocument/2006/relationships" xmlns:p="http://schemas.openxmlformats.org/presentationml/2006/main">
   <p:cSld>
     <p:spTree>
@@ -8809,7 +9033,7 @@
         <p:cNvPr id="1" name="">
           <a:extLst>
             <a:ext uri="{FF2B5EF4-FFF2-40B4-BE49-F238E27FC236}">
-              <a16:creationId xmlns:a16="http://schemas.microsoft.com/office/drawing/2014/main" xmlns="" id="{C250F8F7-84C2-5B45-37A6-1153B56AFDEA}"/>
+              <a16:creationId xmlns="" xmlns:a16="http://schemas.microsoft.com/office/drawing/2014/main" id="{C250F8F7-84C2-5B45-37A6-1153B56AFDEA}"/>
             </a:ext>
           </a:extLst>
         </p:cNvPr>
@@ -8829,7 +9053,7 @@
           <p:cNvPr id="2" name="Marcador de imagen de diapositiva 1">
             <a:extLst>
               <a:ext uri="{FF2B5EF4-FFF2-40B4-BE49-F238E27FC236}">
-                <a16:creationId xmlns:a16="http://schemas.microsoft.com/office/drawing/2014/main" xmlns="" id="{AF7EA74B-D8FD-7F31-387C-C7BA1287BC62}"/>
+                <a16:creationId xmlns="" xmlns:a16="http://schemas.microsoft.com/office/drawing/2014/main" id="{AF7EA74B-D8FD-7F31-387C-C7BA1287BC62}"/>
               </a:ext>
             </a:extLst>
           </p:cNvPr>
@@ -8847,7 +9071,7 @@
           <p:cNvPr id="3" name="Marcador de notas 2">
             <a:extLst>
               <a:ext uri="{FF2B5EF4-FFF2-40B4-BE49-F238E27FC236}">
-                <a16:creationId xmlns:a16="http://schemas.microsoft.com/office/drawing/2014/main" xmlns="" id="{E4689AB9-36E7-32BB-898E-5D5AE93664F9}"/>
+                <a16:creationId xmlns="" xmlns:a16="http://schemas.microsoft.com/office/drawing/2014/main" id="{E4689AB9-36E7-32BB-898E-5D5AE93664F9}"/>
               </a:ext>
             </a:extLst>
           </p:cNvPr>
@@ -8876,7 +9100,7 @@
           <p:cNvPr id="4" name="Marcador de número de diapositiva 3">
             <a:extLst>
               <a:ext uri="{FF2B5EF4-FFF2-40B4-BE49-F238E27FC236}">
-                <a16:creationId xmlns:a16="http://schemas.microsoft.com/office/drawing/2014/main" xmlns="" id="{2A9A8C79-6B0F-1272-769E-1604E7A38E7E}"/>
+                <a16:creationId xmlns="" xmlns:a16="http://schemas.microsoft.com/office/drawing/2014/main" id="{2A9A8C79-6B0F-1272-769E-1604E7A38E7E}"/>
               </a:ext>
             </a:extLst>
           </p:cNvPr>
@@ -8913,7 +9137,7 @@
 </p:notes>
 </file>
 
-<file path=ppt/notesSlides/notesSlide7.xml><?xml version="1.0" encoding="utf-8"?>
+<file path=ppt/notesSlides/notesSlide8.xml><?xml version="1.0" encoding="utf-8"?>
 <p:notes xmlns:a="http://schemas.openxmlformats.org/drawingml/2006/main" xmlns:r="http://schemas.openxmlformats.org/officeDocument/2006/relationships" xmlns:p="http://schemas.openxmlformats.org/presentationml/2006/main">
   <p:cSld>
     <p:spTree>
@@ -8921,7 +9145,7 @@
         <p:cNvPr id="1" name="">
           <a:extLst>
             <a:ext uri="{FF2B5EF4-FFF2-40B4-BE49-F238E27FC236}">
-              <a16:creationId xmlns:a16="http://schemas.microsoft.com/office/drawing/2014/main" xmlns="" id="{36D94D25-0505-EC87-FB19-515369FCDAAF}"/>
+              <a16:creationId xmlns="" xmlns:a16="http://schemas.microsoft.com/office/drawing/2014/main" id="{36D94D25-0505-EC87-FB19-515369FCDAAF}"/>
             </a:ext>
           </a:extLst>
         </p:cNvPr>
@@ -8941,7 +9165,7 @@
           <p:cNvPr id="2" name="Marcador de imagen de diapositiva 1">
             <a:extLst>
               <a:ext uri="{FF2B5EF4-FFF2-40B4-BE49-F238E27FC236}">
-                <a16:creationId xmlns:a16="http://schemas.microsoft.com/office/drawing/2014/main" xmlns="" id="{FB4DEB8D-A6E9-F9BC-F753-D7B1974C1434}"/>
+                <a16:creationId xmlns="" xmlns:a16="http://schemas.microsoft.com/office/drawing/2014/main" id="{FB4DEB8D-A6E9-F9BC-F753-D7B1974C1434}"/>
               </a:ext>
             </a:extLst>
           </p:cNvPr>
@@ -8959,7 +9183,7 @@
           <p:cNvPr id="3" name="Marcador de notas 2">
             <a:extLst>
               <a:ext uri="{FF2B5EF4-FFF2-40B4-BE49-F238E27FC236}">
-                <a16:creationId xmlns:a16="http://schemas.microsoft.com/office/drawing/2014/main" xmlns="" id="{D7A48737-222A-462B-E619-ADE82C67BB96}"/>
+                <a16:creationId xmlns="" xmlns:a16="http://schemas.microsoft.com/office/drawing/2014/main" id="{D7A48737-222A-462B-E619-ADE82C67BB96}"/>
               </a:ext>
             </a:extLst>
           </p:cNvPr>
@@ -9000,7 +9224,7 @@
           <p:cNvPr id="4" name="Marcador de número de diapositiva 3">
             <a:extLst>
               <a:ext uri="{FF2B5EF4-FFF2-40B4-BE49-F238E27FC236}">
-                <a16:creationId xmlns:a16="http://schemas.microsoft.com/office/drawing/2014/main" xmlns="" id="{E07417BD-5542-D618-A913-46D99F70A70D}"/>
+                <a16:creationId xmlns="" xmlns:a16="http://schemas.microsoft.com/office/drawing/2014/main" id="{E07417BD-5542-D618-A913-46D99F70A70D}"/>
               </a:ext>
             </a:extLst>
           </p:cNvPr>
@@ -9037,7 +9261,7 @@
 </p:notes>
 </file>
 
-<file path=ppt/notesSlides/notesSlide8.xml><?xml version="1.0" encoding="utf-8"?>
+<file path=ppt/notesSlides/notesSlide9.xml><?xml version="1.0" encoding="utf-8"?>
 <p:notes xmlns:a="http://schemas.openxmlformats.org/drawingml/2006/main" xmlns:r="http://schemas.openxmlformats.org/officeDocument/2006/relationships" xmlns:p="http://schemas.openxmlformats.org/presentationml/2006/main">
   <p:cSld>
     <p:spTree>
@@ -9045,7 +9269,7 @@
         <p:cNvPr id="1" name="">
           <a:extLst>
             <a:ext uri="{FF2B5EF4-FFF2-40B4-BE49-F238E27FC236}">
-              <a16:creationId xmlns:a16="http://schemas.microsoft.com/office/drawing/2014/main" xmlns="" id="{5D017DBE-8451-9A1C-F60E-AF8B55230D8D}"/>
+              <a16:creationId xmlns="" xmlns:a16="http://schemas.microsoft.com/office/drawing/2014/main" id="{5D017DBE-8451-9A1C-F60E-AF8B55230D8D}"/>
             </a:ext>
           </a:extLst>
         </p:cNvPr>
@@ -9065,7 +9289,7 @@
           <p:cNvPr id="2" name="Marcador de imagen de diapositiva 1">
             <a:extLst>
               <a:ext uri="{FF2B5EF4-FFF2-40B4-BE49-F238E27FC236}">
-                <a16:creationId xmlns:a16="http://schemas.microsoft.com/office/drawing/2014/main" xmlns="" id="{300C1553-ADEF-A25E-05FB-925B79791913}"/>
+                <a16:creationId xmlns="" xmlns:a16="http://schemas.microsoft.com/office/drawing/2014/main" id="{300C1553-ADEF-A25E-05FB-925B79791913}"/>
               </a:ext>
             </a:extLst>
           </p:cNvPr>
@@ -9083,7 +9307,7 @@
           <p:cNvPr id="3" name="Marcador de notas 2">
             <a:extLst>
               <a:ext uri="{FF2B5EF4-FFF2-40B4-BE49-F238E27FC236}">
-                <a16:creationId xmlns:a16="http://schemas.microsoft.com/office/drawing/2014/main" xmlns="" id="{C2884912-1AAB-A1F9-FAE2-0F45818B7E12}"/>
+                <a16:creationId xmlns="" xmlns:a16="http://schemas.microsoft.com/office/drawing/2014/main" id="{C2884912-1AAB-A1F9-FAE2-0F45818B7E12}"/>
               </a:ext>
             </a:extLst>
           </p:cNvPr>
@@ -9124,7 +9348,7 @@
           <p:cNvPr id="4" name="Marcador de número de diapositiva 3">
             <a:extLst>
               <a:ext uri="{FF2B5EF4-FFF2-40B4-BE49-F238E27FC236}">
-                <a16:creationId xmlns:a16="http://schemas.microsoft.com/office/drawing/2014/main" xmlns="" id="{A08AA826-DE5D-8987-747F-54A3BB500240}"/>
+                <a16:creationId xmlns="" xmlns:a16="http://schemas.microsoft.com/office/drawing/2014/main" id="{A08AA826-DE5D-8987-747F-54A3BB500240}"/>
               </a:ext>
             </a:extLst>
           </p:cNvPr>
@@ -9161,118 +9385,6 @@
 </p:notes>
 </file>
 
-<file path=ppt/notesSlides/notesSlide9.xml><?xml version="1.0" encoding="utf-8"?>
-<p:notes xmlns:a="http://schemas.openxmlformats.org/drawingml/2006/main" xmlns:r="http://schemas.openxmlformats.org/officeDocument/2006/relationships" xmlns:p="http://schemas.openxmlformats.org/presentationml/2006/main">
-  <p:cSld>
-    <p:spTree>
-      <p:nvGrpSpPr>
-        <p:cNvPr id="1" name="">
-          <a:extLst>
-            <a:ext uri="{FF2B5EF4-FFF2-40B4-BE49-F238E27FC236}">
-              <a16:creationId xmlns:a16="http://schemas.microsoft.com/office/drawing/2014/main" xmlns="" id="{B7B2D333-4ABD-BAA5-69F3-C31FB73D45EF}"/>
-            </a:ext>
-          </a:extLst>
-        </p:cNvPr>
-        <p:cNvGrpSpPr/>
-        <p:nvPr/>
-      </p:nvGrpSpPr>
-      <p:grpSpPr>
-        <a:xfrm>
-          <a:off x="0" y="0"/>
-          <a:ext cx="0" cy="0"/>
-          <a:chOff x="0" y="0"/>
-          <a:chExt cx="0" cy="0"/>
-        </a:xfrm>
-      </p:grpSpPr>
-      <p:sp>
-        <p:nvSpPr>
-          <p:cNvPr id="2" name="Marcador de imagen de diapositiva 1">
-            <a:extLst>
-              <a:ext uri="{FF2B5EF4-FFF2-40B4-BE49-F238E27FC236}">
-                <a16:creationId xmlns:a16="http://schemas.microsoft.com/office/drawing/2014/main" xmlns="" id="{C6B6BF19-AEAE-42B5-8FA3-3E9C4D05896C}"/>
-              </a:ext>
-            </a:extLst>
-          </p:cNvPr>
-          <p:cNvSpPr>
-            <a:spLocks noGrp="1" noRot="1" noChangeAspect="1"/>
-          </p:cNvSpPr>
-          <p:nvPr>
-            <p:ph type="sldImg"/>
-          </p:nvPr>
-        </p:nvSpPr>
-        <p:spPr/>
-      </p:sp>
-      <p:sp>
-        <p:nvSpPr>
-          <p:cNvPr id="3" name="Marcador de notas 2">
-            <a:extLst>
-              <a:ext uri="{FF2B5EF4-FFF2-40B4-BE49-F238E27FC236}">
-                <a16:creationId xmlns:a16="http://schemas.microsoft.com/office/drawing/2014/main" xmlns="" id="{A976F343-B24A-5BCF-88EF-90FB29A7C863}"/>
-              </a:ext>
-            </a:extLst>
-          </p:cNvPr>
-          <p:cNvSpPr>
-            <a:spLocks noGrp="1"/>
-          </p:cNvSpPr>
-          <p:nvPr>
-            <p:ph type="body" idx="1"/>
-          </p:nvPr>
-        </p:nvSpPr>
-        <p:spPr/>
-        <p:txBody>
-          <a:bodyPr/>
-          <a:lstStyle/>
-          <a:p>
-            <a:r>
-              <a:rPr lang="en-US" dirty="0"/>
-              <a:t>A large value of propellant mass fraction is desirable as it indicates an efficient use of system mass on the rocket that is directly responsible for thrust production.</a:t>
-            </a:r>
-            <a:endParaRPr lang="es-MX" dirty="0"/>
-          </a:p>
-        </p:txBody>
-      </p:sp>
-      <p:sp>
-        <p:nvSpPr>
-          <p:cNvPr id="4" name="Marcador de número de diapositiva 3">
-            <a:extLst>
-              <a:ext uri="{FF2B5EF4-FFF2-40B4-BE49-F238E27FC236}">
-                <a16:creationId xmlns:a16="http://schemas.microsoft.com/office/drawing/2014/main" xmlns="" id="{9664074F-D602-7BA4-F9BA-23096A9C6A38}"/>
-              </a:ext>
-            </a:extLst>
-          </p:cNvPr>
-          <p:cNvSpPr>
-            <a:spLocks noGrp="1"/>
-          </p:cNvSpPr>
-          <p:nvPr>
-            <p:ph type="sldNum" sz="quarter" idx="5"/>
-          </p:nvPr>
-        </p:nvSpPr>
-        <p:spPr/>
-        <p:txBody>
-          <a:bodyPr/>
-          <a:lstStyle/>
-          <a:p>
-            <a:fld id="{DB28F327-BEE5-45AC-9CE6-84AF0ACB1493}" type="slidenum">
-              <a:rPr lang="es-MX" smtClean="0"/>
-              <a:t>12</a:t>
-            </a:fld>
-            <a:endParaRPr lang="es-MX"/>
-          </a:p>
-        </p:txBody>
-      </p:sp>
-    </p:spTree>
-    <p:extLst>
-      <p:ext uri="{BB962C8B-B14F-4D97-AF65-F5344CB8AC3E}">
-        <p14:creationId xmlns:p14="http://schemas.microsoft.com/office/powerpoint/2010/main" val="1445442328"/>
-      </p:ext>
-    </p:extLst>
-  </p:cSld>
-  <p:clrMapOvr>
-    <a:masterClrMapping/>
-  </p:clrMapOvr>
-</p:notes>
-</file>
-
 <file path=ppt/slideLayouts/slideLayout1.xml><?xml version="1.0" encoding="utf-8"?>
 <p:sldLayout xmlns:a="http://schemas.openxmlformats.org/drawingml/2006/main" xmlns:r="http://schemas.openxmlformats.org/officeDocument/2006/relationships" xmlns:p="http://schemas.openxmlformats.org/presentationml/2006/main" type="title" preserve="1">
   <p:cSld name="Diapositiva de título">
@@ -9295,7 +9407,7 @@
           <p:cNvPr id="2" name="Título 1">
             <a:extLst>
               <a:ext uri="{FF2B5EF4-FFF2-40B4-BE49-F238E27FC236}">
-                <a16:creationId xmlns:a16="http://schemas.microsoft.com/office/drawing/2014/main" xmlns="" id="{C68F5251-D223-BC64-D677-1BEF02B6E87F}"/>
+                <a16:creationId xmlns="" xmlns:a16="http://schemas.microsoft.com/office/drawing/2014/main" id="{C68F5251-D223-BC64-D677-1BEF02B6E87F}"/>
               </a:ext>
             </a:extLst>
           </p:cNvPr>
@@ -9333,7 +9445,7 @@
           <p:cNvPr id="3" name="Subtítulo 2">
             <a:extLst>
               <a:ext uri="{FF2B5EF4-FFF2-40B4-BE49-F238E27FC236}">
-                <a16:creationId xmlns:a16="http://schemas.microsoft.com/office/drawing/2014/main" xmlns="" id="{3F4A65FE-8D2A-DD67-B7B2-6214BCC7FFB3}"/>
+                <a16:creationId xmlns="" xmlns:a16="http://schemas.microsoft.com/office/drawing/2014/main" id="{3F4A65FE-8D2A-DD67-B7B2-6214BCC7FFB3}"/>
               </a:ext>
             </a:extLst>
           </p:cNvPr>
@@ -9404,7 +9516,7 @@
           <p:cNvPr id="4" name="Marcador de fecha 3">
             <a:extLst>
               <a:ext uri="{FF2B5EF4-FFF2-40B4-BE49-F238E27FC236}">
-                <a16:creationId xmlns:a16="http://schemas.microsoft.com/office/drawing/2014/main" xmlns="" id="{464258EB-91E8-2924-CBD4-96B87E7215B3}"/>
+                <a16:creationId xmlns="" xmlns:a16="http://schemas.microsoft.com/office/drawing/2014/main" id="{464258EB-91E8-2924-CBD4-96B87E7215B3}"/>
               </a:ext>
             </a:extLst>
           </p:cNvPr>
@@ -9433,7 +9545,7 @@
           <p:cNvPr id="5" name="Marcador de pie de página 4">
             <a:extLst>
               <a:ext uri="{FF2B5EF4-FFF2-40B4-BE49-F238E27FC236}">
-                <a16:creationId xmlns:a16="http://schemas.microsoft.com/office/drawing/2014/main" xmlns="" id="{DE84EB14-DDAA-D28A-7BDC-5CA4FD1477E1}"/>
+                <a16:creationId xmlns="" xmlns:a16="http://schemas.microsoft.com/office/drawing/2014/main" id="{DE84EB14-DDAA-D28A-7BDC-5CA4FD1477E1}"/>
               </a:ext>
             </a:extLst>
           </p:cNvPr>
@@ -9458,7 +9570,7 @@
           <p:cNvPr id="6" name="Marcador de número de diapositiva 5">
             <a:extLst>
               <a:ext uri="{FF2B5EF4-FFF2-40B4-BE49-F238E27FC236}">
-                <a16:creationId xmlns:a16="http://schemas.microsoft.com/office/drawing/2014/main" xmlns="" id="{020C777D-DB97-B69E-A018-FD1F6A2F2EA2}"/>
+                <a16:creationId xmlns="" xmlns:a16="http://schemas.microsoft.com/office/drawing/2014/main" id="{020C777D-DB97-B69E-A018-FD1F6A2F2EA2}"/>
               </a:ext>
             </a:extLst>
           </p:cNvPr>
@@ -9517,7 +9629,7 @@
           <p:cNvPr id="2" name="Título 1">
             <a:extLst>
               <a:ext uri="{FF2B5EF4-FFF2-40B4-BE49-F238E27FC236}">
-                <a16:creationId xmlns:a16="http://schemas.microsoft.com/office/drawing/2014/main" xmlns="" id="{885B19B8-5854-260F-CB96-1B6829523669}"/>
+                <a16:creationId xmlns="" xmlns:a16="http://schemas.microsoft.com/office/drawing/2014/main" id="{885B19B8-5854-260F-CB96-1B6829523669}"/>
               </a:ext>
             </a:extLst>
           </p:cNvPr>
@@ -9546,7 +9658,7 @@
           <p:cNvPr id="3" name="Marcador de texto vertical 2">
             <a:extLst>
               <a:ext uri="{FF2B5EF4-FFF2-40B4-BE49-F238E27FC236}">
-                <a16:creationId xmlns:a16="http://schemas.microsoft.com/office/drawing/2014/main" xmlns="" id="{EA8F2339-935A-BA50-6D17-C11D9A50303F}"/>
+                <a16:creationId xmlns="" xmlns:a16="http://schemas.microsoft.com/office/drawing/2014/main" id="{EA8F2339-935A-BA50-6D17-C11D9A50303F}"/>
               </a:ext>
             </a:extLst>
           </p:cNvPr>
@@ -9604,7 +9716,7 @@
           <p:cNvPr id="4" name="Marcador de fecha 3">
             <a:extLst>
               <a:ext uri="{FF2B5EF4-FFF2-40B4-BE49-F238E27FC236}">
-                <a16:creationId xmlns:a16="http://schemas.microsoft.com/office/drawing/2014/main" xmlns="" id="{C0D93516-4160-7AF2-1AD2-1717A1759DF3}"/>
+                <a16:creationId xmlns="" xmlns:a16="http://schemas.microsoft.com/office/drawing/2014/main" id="{C0D93516-4160-7AF2-1AD2-1717A1759DF3}"/>
               </a:ext>
             </a:extLst>
           </p:cNvPr>
@@ -9633,7 +9745,7 @@
           <p:cNvPr id="5" name="Marcador de pie de página 4">
             <a:extLst>
               <a:ext uri="{FF2B5EF4-FFF2-40B4-BE49-F238E27FC236}">
-                <a16:creationId xmlns:a16="http://schemas.microsoft.com/office/drawing/2014/main" xmlns="" id="{18C2BD7C-43C5-6A6A-2A56-049FECED01E8}"/>
+                <a16:creationId xmlns="" xmlns:a16="http://schemas.microsoft.com/office/drawing/2014/main" id="{18C2BD7C-43C5-6A6A-2A56-049FECED01E8}"/>
               </a:ext>
             </a:extLst>
           </p:cNvPr>
@@ -9658,7 +9770,7 @@
           <p:cNvPr id="6" name="Marcador de número de diapositiva 5">
             <a:extLst>
               <a:ext uri="{FF2B5EF4-FFF2-40B4-BE49-F238E27FC236}">
-                <a16:creationId xmlns:a16="http://schemas.microsoft.com/office/drawing/2014/main" xmlns="" id="{C702C113-1630-F4FE-6B7A-DE6028EAF0DC}"/>
+                <a16:creationId xmlns="" xmlns:a16="http://schemas.microsoft.com/office/drawing/2014/main" id="{C702C113-1630-F4FE-6B7A-DE6028EAF0DC}"/>
               </a:ext>
             </a:extLst>
           </p:cNvPr>
@@ -9717,7 +9829,7 @@
           <p:cNvPr id="2" name="Título vertical 1">
             <a:extLst>
               <a:ext uri="{FF2B5EF4-FFF2-40B4-BE49-F238E27FC236}">
-                <a16:creationId xmlns:a16="http://schemas.microsoft.com/office/drawing/2014/main" xmlns="" id="{35FD6614-0E5D-8F5D-E64C-B2F5267FAFB7}"/>
+                <a16:creationId xmlns="" xmlns:a16="http://schemas.microsoft.com/office/drawing/2014/main" id="{35FD6614-0E5D-8F5D-E64C-B2F5267FAFB7}"/>
               </a:ext>
             </a:extLst>
           </p:cNvPr>
@@ -9751,7 +9863,7 @@
           <p:cNvPr id="3" name="Marcador de texto vertical 2">
             <a:extLst>
               <a:ext uri="{FF2B5EF4-FFF2-40B4-BE49-F238E27FC236}">
-                <a16:creationId xmlns:a16="http://schemas.microsoft.com/office/drawing/2014/main" xmlns="" id="{CF0EED13-C02A-F3ED-C589-DF5EF8C49BD7}"/>
+                <a16:creationId xmlns="" xmlns:a16="http://schemas.microsoft.com/office/drawing/2014/main" id="{CF0EED13-C02A-F3ED-C589-DF5EF8C49BD7}"/>
               </a:ext>
             </a:extLst>
           </p:cNvPr>
@@ -9814,7 +9926,7 @@
           <p:cNvPr id="4" name="Marcador de fecha 3">
             <a:extLst>
               <a:ext uri="{FF2B5EF4-FFF2-40B4-BE49-F238E27FC236}">
-                <a16:creationId xmlns:a16="http://schemas.microsoft.com/office/drawing/2014/main" xmlns="" id="{EB7BDC0A-C2D7-3843-E6F7-DF6981CF3BDF}"/>
+                <a16:creationId xmlns="" xmlns:a16="http://schemas.microsoft.com/office/drawing/2014/main" id="{EB7BDC0A-C2D7-3843-E6F7-DF6981CF3BDF}"/>
               </a:ext>
             </a:extLst>
           </p:cNvPr>
@@ -9843,7 +9955,7 @@
           <p:cNvPr id="5" name="Marcador de pie de página 4">
             <a:extLst>
               <a:ext uri="{FF2B5EF4-FFF2-40B4-BE49-F238E27FC236}">
-                <a16:creationId xmlns:a16="http://schemas.microsoft.com/office/drawing/2014/main" xmlns="" id="{9F55993D-DADC-BB7C-FB1A-9828BFA237F6}"/>
+                <a16:creationId xmlns="" xmlns:a16="http://schemas.microsoft.com/office/drawing/2014/main" id="{9F55993D-DADC-BB7C-FB1A-9828BFA237F6}"/>
               </a:ext>
             </a:extLst>
           </p:cNvPr>
@@ -9868,7 +9980,7 @@
           <p:cNvPr id="6" name="Marcador de número de diapositiva 5">
             <a:extLst>
               <a:ext uri="{FF2B5EF4-FFF2-40B4-BE49-F238E27FC236}">
-                <a16:creationId xmlns:a16="http://schemas.microsoft.com/office/drawing/2014/main" xmlns="" id="{3BAFEC26-7124-8F71-80CD-4C6F3E3DC2A2}"/>
+                <a16:creationId xmlns="" xmlns:a16="http://schemas.microsoft.com/office/drawing/2014/main" id="{3BAFEC26-7124-8F71-80CD-4C6F3E3DC2A2}"/>
               </a:ext>
             </a:extLst>
           </p:cNvPr>
@@ -9927,7 +10039,7 @@
           <p:cNvPr id="2" name="Título 1">
             <a:extLst>
               <a:ext uri="{FF2B5EF4-FFF2-40B4-BE49-F238E27FC236}">
-                <a16:creationId xmlns:a16="http://schemas.microsoft.com/office/drawing/2014/main" xmlns="" id="{7D2E4EE2-F889-3074-9997-AF6C4F9D6A83}"/>
+                <a16:creationId xmlns="" xmlns:a16="http://schemas.microsoft.com/office/drawing/2014/main" id="{7D2E4EE2-F889-3074-9997-AF6C4F9D6A83}"/>
               </a:ext>
             </a:extLst>
           </p:cNvPr>
@@ -9956,7 +10068,7 @@
           <p:cNvPr id="3" name="Marcador de contenido 2">
             <a:extLst>
               <a:ext uri="{FF2B5EF4-FFF2-40B4-BE49-F238E27FC236}">
-                <a16:creationId xmlns:a16="http://schemas.microsoft.com/office/drawing/2014/main" xmlns="" id="{C236082A-49F3-8097-81BB-B8BDD75B747C}"/>
+                <a16:creationId xmlns="" xmlns:a16="http://schemas.microsoft.com/office/drawing/2014/main" id="{C236082A-49F3-8097-81BB-B8BDD75B747C}"/>
               </a:ext>
             </a:extLst>
           </p:cNvPr>
@@ -10014,7 +10126,7 @@
           <p:cNvPr id="4" name="Marcador de fecha 3">
             <a:extLst>
               <a:ext uri="{FF2B5EF4-FFF2-40B4-BE49-F238E27FC236}">
-                <a16:creationId xmlns:a16="http://schemas.microsoft.com/office/drawing/2014/main" xmlns="" id="{1FBF5EA1-958A-FE14-14ED-F5DDBBF4E116}"/>
+                <a16:creationId xmlns="" xmlns:a16="http://schemas.microsoft.com/office/drawing/2014/main" id="{1FBF5EA1-958A-FE14-14ED-F5DDBBF4E116}"/>
               </a:ext>
             </a:extLst>
           </p:cNvPr>
@@ -10043,7 +10155,7 @@
           <p:cNvPr id="5" name="Marcador de pie de página 4">
             <a:extLst>
               <a:ext uri="{FF2B5EF4-FFF2-40B4-BE49-F238E27FC236}">
-                <a16:creationId xmlns:a16="http://schemas.microsoft.com/office/drawing/2014/main" xmlns="" id="{DBB1B2F9-BA97-397C-0A95-CF66A84143A0}"/>
+                <a16:creationId xmlns="" xmlns:a16="http://schemas.microsoft.com/office/drawing/2014/main" id="{DBB1B2F9-BA97-397C-0A95-CF66A84143A0}"/>
               </a:ext>
             </a:extLst>
           </p:cNvPr>
@@ -10068,7 +10180,7 @@
           <p:cNvPr id="6" name="Marcador de número de diapositiva 5">
             <a:extLst>
               <a:ext uri="{FF2B5EF4-FFF2-40B4-BE49-F238E27FC236}">
-                <a16:creationId xmlns:a16="http://schemas.microsoft.com/office/drawing/2014/main" xmlns="" id="{DE2F542E-A793-5753-EA04-A2D047EE8D73}"/>
+                <a16:creationId xmlns="" xmlns:a16="http://schemas.microsoft.com/office/drawing/2014/main" id="{DE2F542E-A793-5753-EA04-A2D047EE8D73}"/>
               </a:ext>
             </a:extLst>
           </p:cNvPr>
@@ -10127,7 +10239,7 @@
           <p:cNvPr id="2" name="Título 1">
             <a:extLst>
               <a:ext uri="{FF2B5EF4-FFF2-40B4-BE49-F238E27FC236}">
-                <a16:creationId xmlns:a16="http://schemas.microsoft.com/office/drawing/2014/main" xmlns="" id="{C12F8EC0-6FE4-21EE-0999-41500DA69A5D}"/>
+                <a16:creationId xmlns="" xmlns:a16="http://schemas.microsoft.com/office/drawing/2014/main" id="{C12F8EC0-6FE4-21EE-0999-41500DA69A5D}"/>
               </a:ext>
             </a:extLst>
           </p:cNvPr>
@@ -10165,7 +10277,7 @@
           <p:cNvPr id="3" name="Marcador de texto 2">
             <a:extLst>
               <a:ext uri="{FF2B5EF4-FFF2-40B4-BE49-F238E27FC236}">
-                <a16:creationId xmlns:a16="http://schemas.microsoft.com/office/drawing/2014/main" xmlns="" id="{AAFEFE82-C496-46BF-24AD-3A2E4C024B34}"/>
+                <a16:creationId xmlns="" xmlns:a16="http://schemas.microsoft.com/office/drawing/2014/main" id="{AAFEFE82-C496-46BF-24AD-3A2E4C024B34}"/>
               </a:ext>
             </a:extLst>
           </p:cNvPr>
@@ -10290,7 +10402,7 @@
           <p:cNvPr id="4" name="Marcador de fecha 3">
             <a:extLst>
               <a:ext uri="{FF2B5EF4-FFF2-40B4-BE49-F238E27FC236}">
-                <a16:creationId xmlns:a16="http://schemas.microsoft.com/office/drawing/2014/main" xmlns="" id="{66983407-AB5D-BF9A-FBAB-084762521C54}"/>
+                <a16:creationId xmlns="" xmlns:a16="http://schemas.microsoft.com/office/drawing/2014/main" id="{66983407-AB5D-BF9A-FBAB-084762521C54}"/>
               </a:ext>
             </a:extLst>
           </p:cNvPr>
@@ -10319,7 +10431,7 @@
           <p:cNvPr id="5" name="Marcador de pie de página 4">
             <a:extLst>
               <a:ext uri="{FF2B5EF4-FFF2-40B4-BE49-F238E27FC236}">
-                <a16:creationId xmlns:a16="http://schemas.microsoft.com/office/drawing/2014/main" xmlns="" id="{A4091B16-700E-54A4-365B-884593DAECF3}"/>
+                <a16:creationId xmlns="" xmlns:a16="http://schemas.microsoft.com/office/drawing/2014/main" id="{A4091B16-700E-54A4-365B-884593DAECF3}"/>
               </a:ext>
             </a:extLst>
           </p:cNvPr>
@@ -10344,7 +10456,7 @@
           <p:cNvPr id="6" name="Marcador de número de diapositiva 5">
             <a:extLst>
               <a:ext uri="{FF2B5EF4-FFF2-40B4-BE49-F238E27FC236}">
-                <a16:creationId xmlns:a16="http://schemas.microsoft.com/office/drawing/2014/main" xmlns="" id="{617E1B6B-5F0B-DA12-3F53-D096E1224374}"/>
+                <a16:creationId xmlns="" xmlns:a16="http://schemas.microsoft.com/office/drawing/2014/main" id="{617E1B6B-5F0B-DA12-3F53-D096E1224374}"/>
               </a:ext>
             </a:extLst>
           </p:cNvPr>
@@ -10403,7 +10515,7 @@
           <p:cNvPr id="2" name="Título 1">
             <a:extLst>
               <a:ext uri="{FF2B5EF4-FFF2-40B4-BE49-F238E27FC236}">
-                <a16:creationId xmlns:a16="http://schemas.microsoft.com/office/drawing/2014/main" xmlns="" id="{917BE101-93AD-A4F6-2218-966EEAA06938}"/>
+                <a16:creationId xmlns="" xmlns:a16="http://schemas.microsoft.com/office/drawing/2014/main" id="{917BE101-93AD-A4F6-2218-966EEAA06938}"/>
               </a:ext>
             </a:extLst>
           </p:cNvPr>
@@ -10432,7 +10544,7 @@
           <p:cNvPr id="3" name="Marcador de contenido 2">
             <a:extLst>
               <a:ext uri="{FF2B5EF4-FFF2-40B4-BE49-F238E27FC236}">
-                <a16:creationId xmlns:a16="http://schemas.microsoft.com/office/drawing/2014/main" xmlns="" id="{D927AB96-2137-7115-C296-851F579A94C7}"/>
+                <a16:creationId xmlns="" xmlns:a16="http://schemas.microsoft.com/office/drawing/2014/main" id="{D927AB96-2137-7115-C296-851F579A94C7}"/>
               </a:ext>
             </a:extLst>
           </p:cNvPr>
@@ -10495,7 +10607,7 @@
           <p:cNvPr id="4" name="Marcador de contenido 3">
             <a:extLst>
               <a:ext uri="{FF2B5EF4-FFF2-40B4-BE49-F238E27FC236}">
-                <a16:creationId xmlns:a16="http://schemas.microsoft.com/office/drawing/2014/main" xmlns="" id="{85653190-5E9F-C666-A5CA-E5400CDB9916}"/>
+                <a16:creationId xmlns="" xmlns:a16="http://schemas.microsoft.com/office/drawing/2014/main" id="{85653190-5E9F-C666-A5CA-E5400CDB9916}"/>
               </a:ext>
             </a:extLst>
           </p:cNvPr>
@@ -10558,7 +10670,7 @@
           <p:cNvPr id="5" name="Marcador de fecha 4">
             <a:extLst>
               <a:ext uri="{FF2B5EF4-FFF2-40B4-BE49-F238E27FC236}">
-                <a16:creationId xmlns:a16="http://schemas.microsoft.com/office/drawing/2014/main" xmlns="" id="{2287A35D-19C4-6423-2182-6F7AEF7D868A}"/>
+                <a16:creationId xmlns="" xmlns:a16="http://schemas.microsoft.com/office/drawing/2014/main" id="{2287A35D-19C4-6423-2182-6F7AEF7D868A}"/>
               </a:ext>
             </a:extLst>
           </p:cNvPr>
@@ -10587,7 +10699,7 @@
           <p:cNvPr id="6" name="Marcador de pie de página 5">
             <a:extLst>
               <a:ext uri="{FF2B5EF4-FFF2-40B4-BE49-F238E27FC236}">
-                <a16:creationId xmlns:a16="http://schemas.microsoft.com/office/drawing/2014/main" xmlns="" id="{6A20EBBC-FFE4-BF34-584D-1103DDD1E59B}"/>
+                <a16:creationId xmlns="" xmlns:a16="http://schemas.microsoft.com/office/drawing/2014/main" id="{6A20EBBC-FFE4-BF34-584D-1103DDD1E59B}"/>
               </a:ext>
             </a:extLst>
           </p:cNvPr>
@@ -10612,7 +10724,7 @@
           <p:cNvPr id="7" name="Marcador de número de diapositiva 6">
             <a:extLst>
               <a:ext uri="{FF2B5EF4-FFF2-40B4-BE49-F238E27FC236}">
-                <a16:creationId xmlns:a16="http://schemas.microsoft.com/office/drawing/2014/main" xmlns="" id="{32069CD5-9784-24F5-FD3F-2CE7FEEEAFA5}"/>
+                <a16:creationId xmlns="" xmlns:a16="http://schemas.microsoft.com/office/drawing/2014/main" id="{32069CD5-9784-24F5-FD3F-2CE7FEEEAFA5}"/>
               </a:ext>
             </a:extLst>
           </p:cNvPr>
@@ -10671,7 +10783,7 @@
           <p:cNvPr id="2" name="Título 1">
             <a:extLst>
               <a:ext uri="{FF2B5EF4-FFF2-40B4-BE49-F238E27FC236}">
-                <a16:creationId xmlns:a16="http://schemas.microsoft.com/office/drawing/2014/main" xmlns="" id="{0AC6574D-AD08-47C4-E8FA-8F244F9BFAFD}"/>
+                <a16:creationId xmlns="" xmlns:a16="http://schemas.microsoft.com/office/drawing/2014/main" id="{0AC6574D-AD08-47C4-E8FA-8F244F9BFAFD}"/>
               </a:ext>
             </a:extLst>
           </p:cNvPr>
@@ -10705,7 +10817,7 @@
           <p:cNvPr id="3" name="Marcador de texto 2">
             <a:extLst>
               <a:ext uri="{FF2B5EF4-FFF2-40B4-BE49-F238E27FC236}">
-                <a16:creationId xmlns:a16="http://schemas.microsoft.com/office/drawing/2014/main" xmlns="" id="{20EF632E-3FF8-7DD5-F21D-8CB63B8FEDFA}"/>
+                <a16:creationId xmlns="" xmlns:a16="http://schemas.microsoft.com/office/drawing/2014/main" id="{20EF632E-3FF8-7DD5-F21D-8CB63B8FEDFA}"/>
               </a:ext>
             </a:extLst>
           </p:cNvPr>
@@ -10776,7 +10888,7 @@
           <p:cNvPr id="4" name="Marcador de contenido 3">
             <a:extLst>
               <a:ext uri="{FF2B5EF4-FFF2-40B4-BE49-F238E27FC236}">
-                <a16:creationId xmlns:a16="http://schemas.microsoft.com/office/drawing/2014/main" xmlns="" id="{AFA83C99-17BF-FB92-B9A6-6B9D02FA248F}"/>
+                <a16:creationId xmlns="" xmlns:a16="http://schemas.microsoft.com/office/drawing/2014/main" id="{AFA83C99-17BF-FB92-B9A6-6B9D02FA248F}"/>
               </a:ext>
             </a:extLst>
           </p:cNvPr>
@@ -10839,7 +10951,7 @@
           <p:cNvPr id="5" name="Marcador de texto 4">
             <a:extLst>
               <a:ext uri="{FF2B5EF4-FFF2-40B4-BE49-F238E27FC236}">
-                <a16:creationId xmlns:a16="http://schemas.microsoft.com/office/drawing/2014/main" xmlns="" id="{5FE508B0-6C5A-C9B0-FC6B-343EBA1D78DE}"/>
+                <a16:creationId xmlns="" xmlns:a16="http://schemas.microsoft.com/office/drawing/2014/main" id="{5FE508B0-6C5A-C9B0-FC6B-343EBA1D78DE}"/>
               </a:ext>
             </a:extLst>
           </p:cNvPr>
@@ -10910,7 +11022,7 @@
           <p:cNvPr id="6" name="Marcador de contenido 5">
             <a:extLst>
               <a:ext uri="{FF2B5EF4-FFF2-40B4-BE49-F238E27FC236}">
-                <a16:creationId xmlns:a16="http://schemas.microsoft.com/office/drawing/2014/main" xmlns="" id="{10B9C372-15AA-19D9-9B22-DB1573661A8F}"/>
+                <a16:creationId xmlns="" xmlns:a16="http://schemas.microsoft.com/office/drawing/2014/main" id="{10B9C372-15AA-19D9-9B22-DB1573661A8F}"/>
               </a:ext>
             </a:extLst>
           </p:cNvPr>
@@ -10973,7 +11085,7 @@
           <p:cNvPr id="7" name="Marcador de fecha 6">
             <a:extLst>
               <a:ext uri="{FF2B5EF4-FFF2-40B4-BE49-F238E27FC236}">
-                <a16:creationId xmlns:a16="http://schemas.microsoft.com/office/drawing/2014/main" xmlns="" id="{46408DFA-ED9B-85E0-43F4-D76EC22CA284}"/>
+                <a16:creationId xmlns="" xmlns:a16="http://schemas.microsoft.com/office/drawing/2014/main" id="{46408DFA-ED9B-85E0-43F4-D76EC22CA284}"/>
               </a:ext>
             </a:extLst>
           </p:cNvPr>
@@ -11002,7 +11114,7 @@
           <p:cNvPr id="8" name="Marcador de pie de página 7">
             <a:extLst>
               <a:ext uri="{FF2B5EF4-FFF2-40B4-BE49-F238E27FC236}">
-                <a16:creationId xmlns:a16="http://schemas.microsoft.com/office/drawing/2014/main" xmlns="" id="{B616F6DF-AA3E-072D-4717-93B1D48354DD}"/>
+                <a16:creationId xmlns="" xmlns:a16="http://schemas.microsoft.com/office/drawing/2014/main" id="{B616F6DF-AA3E-072D-4717-93B1D48354DD}"/>
               </a:ext>
             </a:extLst>
           </p:cNvPr>
@@ -11027,7 +11139,7 @@
           <p:cNvPr id="9" name="Marcador de número de diapositiva 8">
             <a:extLst>
               <a:ext uri="{FF2B5EF4-FFF2-40B4-BE49-F238E27FC236}">
-                <a16:creationId xmlns:a16="http://schemas.microsoft.com/office/drawing/2014/main" xmlns="" id="{09AB09DC-E5C6-7D7D-977D-8340C0737E4D}"/>
+                <a16:creationId xmlns="" xmlns:a16="http://schemas.microsoft.com/office/drawing/2014/main" id="{09AB09DC-E5C6-7D7D-977D-8340C0737E4D}"/>
               </a:ext>
             </a:extLst>
           </p:cNvPr>
@@ -11086,7 +11198,7 @@
           <p:cNvPr id="2" name="Título 1">
             <a:extLst>
               <a:ext uri="{FF2B5EF4-FFF2-40B4-BE49-F238E27FC236}">
-                <a16:creationId xmlns:a16="http://schemas.microsoft.com/office/drawing/2014/main" xmlns="" id="{08011C47-A5E1-52D3-713F-69DAB3CBE5A3}"/>
+                <a16:creationId xmlns="" xmlns:a16="http://schemas.microsoft.com/office/drawing/2014/main" id="{08011C47-A5E1-52D3-713F-69DAB3CBE5A3}"/>
               </a:ext>
             </a:extLst>
           </p:cNvPr>
@@ -11115,7 +11227,7 @@
           <p:cNvPr id="3" name="Marcador de fecha 2">
             <a:extLst>
               <a:ext uri="{FF2B5EF4-FFF2-40B4-BE49-F238E27FC236}">
-                <a16:creationId xmlns:a16="http://schemas.microsoft.com/office/drawing/2014/main" xmlns="" id="{1C518C19-B858-A8DC-36D3-86800D8685BC}"/>
+                <a16:creationId xmlns="" xmlns:a16="http://schemas.microsoft.com/office/drawing/2014/main" id="{1C518C19-B858-A8DC-36D3-86800D8685BC}"/>
               </a:ext>
             </a:extLst>
           </p:cNvPr>
@@ -11144,7 +11256,7 @@
           <p:cNvPr id="4" name="Marcador de pie de página 3">
             <a:extLst>
               <a:ext uri="{FF2B5EF4-FFF2-40B4-BE49-F238E27FC236}">
-                <a16:creationId xmlns:a16="http://schemas.microsoft.com/office/drawing/2014/main" xmlns="" id="{41F53B55-5D75-1FD8-7305-4050FDD68411}"/>
+                <a16:creationId xmlns="" xmlns:a16="http://schemas.microsoft.com/office/drawing/2014/main" id="{41F53B55-5D75-1FD8-7305-4050FDD68411}"/>
               </a:ext>
             </a:extLst>
           </p:cNvPr>
@@ -11169,7 +11281,7 @@
           <p:cNvPr id="5" name="Marcador de número de diapositiva 4">
             <a:extLst>
               <a:ext uri="{FF2B5EF4-FFF2-40B4-BE49-F238E27FC236}">
-                <a16:creationId xmlns:a16="http://schemas.microsoft.com/office/drawing/2014/main" xmlns="" id="{500FEE24-67A8-7C20-546D-BCEB3EEE2CC7}"/>
+                <a16:creationId xmlns="" xmlns:a16="http://schemas.microsoft.com/office/drawing/2014/main" id="{500FEE24-67A8-7C20-546D-BCEB3EEE2CC7}"/>
               </a:ext>
             </a:extLst>
           </p:cNvPr>
@@ -11228,7 +11340,7 @@
           <p:cNvPr id="2" name="Marcador de fecha 1">
             <a:extLst>
               <a:ext uri="{FF2B5EF4-FFF2-40B4-BE49-F238E27FC236}">
-                <a16:creationId xmlns:a16="http://schemas.microsoft.com/office/drawing/2014/main" xmlns="" id="{DE40A591-B9B4-C1D0-2520-DB39CAD388E6}"/>
+                <a16:creationId xmlns="" xmlns:a16="http://schemas.microsoft.com/office/drawing/2014/main" id="{DE40A591-B9B4-C1D0-2520-DB39CAD388E6}"/>
               </a:ext>
             </a:extLst>
           </p:cNvPr>
@@ -11257,7 +11369,7 @@
           <p:cNvPr id="3" name="Marcador de pie de página 2">
             <a:extLst>
               <a:ext uri="{FF2B5EF4-FFF2-40B4-BE49-F238E27FC236}">
-                <a16:creationId xmlns:a16="http://schemas.microsoft.com/office/drawing/2014/main" xmlns="" id="{59DB7BC8-513F-96E7-0F35-8CDD700E2FC2}"/>
+                <a16:creationId xmlns="" xmlns:a16="http://schemas.microsoft.com/office/drawing/2014/main" id="{59DB7BC8-513F-96E7-0F35-8CDD700E2FC2}"/>
               </a:ext>
             </a:extLst>
           </p:cNvPr>
@@ -11282,7 +11394,7 @@
           <p:cNvPr id="4" name="Marcador de número de diapositiva 3">
             <a:extLst>
               <a:ext uri="{FF2B5EF4-FFF2-40B4-BE49-F238E27FC236}">
-                <a16:creationId xmlns:a16="http://schemas.microsoft.com/office/drawing/2014/main" xmlns="" id="{7AE4AC45-E002-BEEB-8B8E-44514FE6BF11}"/>
+                <a16:creationId xmlns="" xmlns:a16="http://schemas.microsoft.com/office/drawing/2014/main" id="{7AE4AC45-E002-BEEB-8B8E-44514FE6BF11}"/>
               </a:ext>
             </a:extLst>
           </p:cNvPr>
@@ -11341,7 +11453,7 @@
           <p:cNvPr id="2" name="Título 1">
             <a:extLst>
               <a:ext uri="{FF2B5EF4-FFF2-40B4-BE49-F238E27FC236}">
-                <a16:creationId xmlns:a16="http://schemas.microsoft.com/office/drawing/2014/main" xmlns="" id="{A6FC0222-34BC-EBA6-7A21-952CD9074429}"/>
+                <a16:creationId xmlns="" xmlns:a16="http://schemas.microsoft.com/office/drawing/2014/main" id="{A6FC0222-34BC-EBA6-7A21-952CD9074429}"/>
               </a:ext>
             </a:extLst>
           </p:cNvPr>
@@ -11379,7 +11491,7 @@
           <p:cNvPr id="3" name="Marcador de contenido 2">
             <a:extLst>
               <a:ext uri="{FF2B5EF4-FFF2-40B4-BE49-F238E27FC236}">
-                <a16:creationId xmlns:a16="http://schemas.microsoft.com/office/drawing/2014/main" xmlns="" id="{1B2DED37-96F5-2838-76FF-E8FC4633590A}"/>
+                <a16:creationId xmlns="" xmlns:a16="http://schemas.microsoft.com/office/drawing/2014/main" id="{1B2DED37-96F5-2838-76FF-E8FC4633590A}"/>
               </a:ext>
             </a:extLst>
           </p:cNvPr>
@@ -11470,7 +11582,7 @@
           <p:cNvPr id="4" name="Marcador de texto 3">
             <a:extLst>
               <a:ext uri="{FF2B5EF4-FFF2-40B4-BE49-F238E27FC236}">
-                <a16:creationId xmlns:a16="http://schemas.microsoft.com/office/drawing/2014/main" xmlns="" id="{F7204234-1783-9477-4B7F-9E1C2285F215}"/>
+                <a16:creationId xmlns="" xmlns:a16="http://schemas.microsoft.com/office/drawing/2014/main" id="{F7204234-1783-9477-4B7F-9E1C2285F215}"/>
               </a:ext>
             </a:extLst>
           </p:cNvPr>
@@ -11541,7 +11653,7 @@
           <p:cNvPr id="5" name="Marcador de fecha 4">
             <a:extLst>
               <a:ext uri="{FF2B5EF4-FFF2-40B4-BE49-F238E27FC236}">
-                <a16:creationId xmlns:a16="http://schemas.microsoft.com/office/drawing/2014/main" xmlns="" id="{E4AB8F47-7E0B-AC5B-B99B-1397BBF4E1B0}"/>
+                <a16:creationId xmlns="" xmlns:a16="http://schemas.microsoft.com/office/drawing/2014/main" id="{E4AB8F47-7E0B-AC5B-B99B-1397BBF4E1B0}"/>
               </a:ext>
             </a:extLst>
           </p:cNvPr>
@@ -11570,7 +11682,7 @@
           <p:cNvPr id="6" name="Marcador de pie de página 5">
             <a:extLst>
               <a:ext uri="{FF2B5EF4-FFF2-40B4-BE49-F238E27FC236}">
-                <a16:creationId xmlns:a16="http://schemas.microsoft.com/office/drawing/2014/main" xmlns="" id="{27444E72-2B34-6E35-EB8C-540D1757191F}"/>
+                <a16:creationId xmlns="" xmlns:a16="http://schemas.microsoft.com/office/drawing/2014/main" id="{27444E72-2B34-6E35-EB8C-540D1757191F}"/>
               </a:ext>
             </a:extLst>
           </p:cNvPr>
@@ -11595,7 +11707,7 @@
           <p:cNvPr id="7" name="Marcador de número de diapositiva 6">
             <a:extLst>
               <a:ext uri="{FF2B5EF4-FFF2-40B4-BE49-F238E27FC236}">
-                <a16:creationId xmlns:a16="http://schemas.microsoft.com/office/drawing/2014/main" xmlns="" id="{BA0BA796-5219-8949-D532-E68CFCD5B791}"/>
+                <a16:creationId xmlns="" xmlns:a16="http://schemas.microsoft.com/office/drawing/2014/main" id="{BA0BA796-5219-8949-D532-E68CFCD5B791}"/>
               </a:ext>
             </a:extLst>
           </p:cNvPr>
@@ -11654,7 +11766,7 @@
           <p:cNvPr id="2" name="Título 1">
             <a:extLst>
               <a:ext uri="{FF2B5EF4-FFF2-40B4-BE49-F238E27FC236}">
-                <a16:creationId xmlns:a16="http://schemas.microsoft.com/office/drawing/2014/main" xmlns="" id="{DF931805-E0DF-1EF9-C110-CAC93E17C24B}"/>
+                <a16:creationId xmlns="" xmlns:a16="http://schemas.microsoft.com/office/drawing/2014/main" id="{DF931805-E0DF-1EF9-C110-CAC93E17C24B}"/>
               </a:ext>
             </a:extLst>
           </p:cNvPr>
@@ -11692,7 +11804,7 @@
           <p:cNvPr id="3" name="Marcador de posición de imagen 2">
             <a:extLst>
               <a:ext uri="{FF2B5EF4-FFF2-40B4-BE49-F238E27FC236}">
-                <a16:creationId xmlns:a16="http://schemas.microsoft.com/office/drawing/2014/main" xmlns="" id="{D13ACECD-8E37-357C-8FBF-04124CEBC472}"/>
+                <a16:creationId xmlns="" xmlns:a16="http://schemas.microsoft.com/office/drawing/2014/main" id="{D13ACECD-8E37-357C-8FBF-04124CEBC472}"/>
               </a:ext>
             </a:extLst>
           </p:cNvPr>
@@ -11759,7 +11871,7 @@
           <p:cNvPr id="4" name="Marcador de texto 3">
             <a:extLst>
               <a:ext uri="{FF2B5EF4-FFF2-40B4-BE49-F238E27FC236}">
-                <a16:creationId xmlns:a16="http://schemas.microsoft.com/office/drawing/2014/main" xmlns="" id="{A76933F9-CE62-7A51-2526-EF47F52B49CD}"/>
+                <a16:creationId xmlns="" xmlns:a16="http://schemas.microsoft.com/office/drawing/2014/main" id="{A76933F9-CE62-7A51-2526-EF47F52B49CD}"/>
               </a:ext>
             </a:extLst>
           </p:cNvPr>
@@ -11830,7 +11942,7 @@
           <p:cNvPr id="5" name="Marcador de fecha 4">
             <a:extLst>
               <a:ext uri="{FF2B5EF4-FFF2-40B4-BE49-F238E27FC236}">
-                <a16:creationId xmlns:a16="http://schemas.microsoft.com/office/drawing/2014/main" xmlns="" id="{61295AB3-0527-0650-4A5E-8E39C3FEBC5F}"/>
+                <a16:creationId xmlns="" xmlns:a16="http://schemas.microsoft.com/office/drawing/2014/main" id="{61295AB3-0527-0650-4A5E-8E39C3FEBC5F}"/>
               </a:ext>
             </a:extLst>
           </p:cNvPr>
@@ -11859,7 +11971,7 @@
           <p:cNvPr id="6" name="Marcador de pie de página 5">
             <a:extLst>
               <a:ext uri="{FF2B5EF4-FFF2-40B4-BE49-F238E27FC236}">
-                <a16:creationId xmlns:a16="http://schemas.microsoft.com/office/drawing/2014/main" xmlns="" id="{EC74B01D-04E3-41D7-9835-5139255EA9B1}"/>
+                <a16:creationId xmlns="" xmlns:a16="http://schemas.microsoft.com/office/drawing/2014/main" id="{EC74B01D-04E3-41D7-9835-5139255EA9B1}"/>
               </a:ext>
             </a:extLst>
           </p:cNvPr>
@@ -11884,7 +11996,7 @@
           <p:cNvPr id="7" name="Marcador de número de diapositiva 6">
             <a:extLst>
               <a:ext uri="{FF2B5EF4-FFF2-40B4-BE49-F238E27FC236}">
-                <a16:creationId xmlns:a16="http://schemas.microsoft.com/office/drawing/2014/main" xmlns="" id="{09D3E2DD-D6F1-4D4F-8C0B-D77DCA7B4F41}"/>
+                <a16:creationId xmlns="" xmlns:a16="http://schemas.microsoft.com/office/drawing/2014/main" id="{09D3E2DD-D6F1-4D4F-8C0B-D77DCA7B4F41}"/>
               </a:ext>
             </a:extLst>
           </p:cNvPr>
@@ -11948,7 +12060,7 @@
           <p:cNvPr id="2" name="Marcador de título 1">
             <a:extLst>
               <a:ext uri="{FF2B5EF4-FFF2-40B4-BE49-F238E27FC236}">
-                <a16:creationId xmlns:a16="http://schemas.microsoft.com/office/drawing/2014/main" xmlns="" id="{D700FFC7-6AF2-7718-31AD-61B3B9EAFA0E}"/>
+                <a16:creationId xmlns="" xmlns:a16="http://schemas.microsoft.com/office/drawing/2014/main" id="{D700FFC7-6AF2-7718-31AD-61B3B9EAFA0E}"/>
               </a:ext>
             </a:extLst>
           </p:cNvPr>
@@ -11987,7 +12099,7 @@
           <p:cNvPr id="3" name="Marcador de texto 2">
             <a:extLst>
               <a:ext uri="{FF2B5EF4-FFF2-40B4-BE49-F238E27FC236}">
-                <a16:creationId xmlns:a16="http://schemas.microsoft.com/office/drawing/2014/main" xmlns="" id="{D0845A47-E640-38C6-B77C-4374D64C3E73}"/>
+                <a16:creationId xmlns="" xmlns:a16="http://schemas.microsoft.com/office/drawing/2014/main" id="{D0845A47-E640-38C6-B77C-4374D64C3E73}"/>
               </a:ext>
             </a:extLst>
           </p:cNvPr>
@@ -12055,7 +12167,7 @@
           <p:cNvPr id="4" name="Marcador de fecha 3">
             <a:extLst>
               <a:ext uri="{FF2B5EF4-FFF2-40B4-BE49-F238E27FC236}">
-                <a16:creationId xmlns:a16="http://schemas.microsoft.com/office/drawing/2014/main" xmlns="" id="{BA621615-6EE4-8999-4974-FC8345B0F043}"/>
+                <a16:creationId xmlns="" xmlns:a16="http://schemas.microsoft.com/office/drawing/2014/main" id="{BA621615-6EE4-8999-4974-FC8345B0F043}"/>
               </a:ext>
             </a:extLst>
           </p:cNvPr>
@@ -12102,7 +12214,7 @@
           <p:cNvPr id="5" name="Marcador de pie de página 4">
             <a:extLst>
               <a:ext uri="{FF2B5EF4-FFF2-40B4-BE49-F238E27FC236}">
-                <a16:creationId xmlns:a16="http://schemas.microsoft.com/office/drawing/2014/main" xmlns="" id="{1453D141-D99F-08DF-89A5-CE133A10F331}"/>
+                <a16:creationId xmlns="" xmlns:a16="http://schemas.microsoft.com/office/drawing/2014/main" id="{1453D141-D99F-08DF-89A5-CE133A10F331}"/>
               </a:ext>
             </a:extLst>
           </p:cNvPr>
@@ -12145,7 +12257,7 @@
           <p:cNvPr id="6" name="Marcador de número de diapositiva 5">
             <a:extLst>
               <a:ext uri="{FF2B5EF4-FFF2-40B4-BE49-F238E27FC236}">
-                <a16:creationId xmlns:a16="http://schemas.microsoft.com/office/drawing/2014/main" xmlns="" id="{E4B33CF8-1115-CD03-F7AD-24C3565823E7}"/>
+                <a16:creationId xmlns="" xmlns:a16="http://schemas.microsoft.com/office/drawing/2014/main" id="{E4B33CF8-1115-CD03-F7AD-24C3565823E7}"/>
               </a:ext>
             </a:extLst>
           </p:cNvPr>
@@ -12513,7 +12625,7 @@
           <p:cNvPr id="2" name="Título 1">
             <a:extLst>
               <a:ext uri="{FF2B5EF4-FFF2-40B4-BE49-F238E27FC236}">
-                <a16:creationId xmlns:a16="http://schemas.microsoft.com/office/drawing/2014/main" xmlns="" id="{5EF8233C-F3DA-2ABC-9288-4BCD7433344C}"/>
+                <a16:creationId xmlns="" xmlns:a16="http://schemas.microsoft.com/office/drawing/2014/main" id="{5EF8233C-F3DA-2ABC-9288-4BCD7433344C}"/>
               </a:ext>
             </a:extLst>
           </p:cNvPr>
@@ -12588,7 +12700,7 @@
           <p:cNvPr id="3" name="Subtítulo 2">
             <a:extLst>
               <a:ext uri="{FF2B5EF4-FFF2-40B4-BE49-F238E27FC236}">
-                <a16:creationId xmlns:a16="http://schemas.microsoft.com/office/drawing/2014/main" xmlns="" id="{EC6C3CBE-087A-6EFC-794A-BF6D55DB7543}"/>
+                <a16:creationId xmlns="" xmlns:a16="http://schemas.microsoft.com/office/drawing/2014/main" id="{EC6C3CBE-087A-6EFC-794A-BF6D55DB7543}"/>
               </a:ext>
             </a:extLst>
           </p:cNvPr>
@@ -12625,7 +12737,14 @@
                 <a:latin typeface="Times New Roman" panose="02020603050405020304" pitchFamily="18" charset="0"/>
                 <a:cs typeface="Times New Roman" panose="02020603050405020304" pitchFamily="18" charset="0"/>
               </a:rPr>
-              <a:t>“Evaluar </a:t>
+              <a:t>“</a:t>
+            </a:r>
+            <a:r>
+              <a:rPr lang="es-ES" sz="3400" dirty="0" smtClean="0">
+                <a:latin typeface="Times New Roman" panose="02020603050405020304" pitchFamily="18" charset="0"/>
+                <a:cs typeface="Times New Roman" panose="02020603050405020304" pitchFamily="18" charset="0"/>
+              </a:rPr>
+              <a:t>Evaluación de </a:t>
             </a:r>
             <a:r>
               <a:rPr lang="es-ES" sz="3400" dirty="0">
@@ -12639,7 +12758,14 @@
                 <a:latin typeface="Times New Roman" panose="02020603050405020304" pitchFamily="18" charset="0"/>
                 <a:cs typeface="Times New Roman" panose="02020603050405020304" pitchFamily="18" charset="0"/>
               </a:rPr>
-              <a:t>de un MCS </a:t>
+              <a:t>en un </a:t>
+            </a:r>
+            <a:r>
+              <a:rPr lang="es-ES" sz="3400" dirty="0" smtClean="0">
+                <a:latin typeface="Times New Roman" panose="02020603050405020304" pitchFamily="18" charset="0"/>
+                <a:cs typeface="Times New Roman" panose="02020603050405020304" pitchFamily="18" charset="0"/>
+              </a:rPr>
+              <a:t>MCS </a:t>
             </a:r>
             <a:r>
               <a:rPr lang="es-ES" sz="3400" dirty="0">
@@ -12674,7 +12800,7 @@
           <p:cNvPr id="12" name="Subtítulo 2">
             <a:extLst>
               <a:ext uri="{FF2B5EF4-FFF2-40B4-BE49-F238E27FC236}">
-                <a16:creationId xmlns:a16="http://schemas.microsoft.com/office/drawing/2014/main" xmlns="" id="{ECC718EC-22DC-2FC1-E7BF-660F4465FB20}"/>
+                <a16:creationId xmlns="" xmlns:a16="http://schemas.microsoft.com/office/drawing/2014/main" id="{ECC718EC-22DC-2FC1-E7BF-660F4465FB20}"/>
               </a:ext>
             </a:extLst>
           </p:cNvPr>
@@ -12877,7 +13003,7 @@
           <p:cNvPr id="1028" name="Picture 4" descr="Uanl vector logo - Uanl logo vector free download">
             <a:extLst>
               <a:ext uri="{FF2B5EF4-FFF2-40B4-BE49-F238E27FC236}">
-                <a16:creationId xmlns:a16="http://schemas.microsoft.com/office/drawing/2014/main" xmlns="" id="{A1EF89F4-4576-B62D-20F9-D2FF8A2E246A}"/>
+                <a16:creationId xmlns="" xmlns:a16="http://schemas.microsoft.com/office/drawing/2014/main" id="{A1EF89F4-4576-B62D-20F9-D2FF8A2E246A}"/>
               </a:ext>
             </a:extLst>
           </p:cNvPr>
@@ -12938,7 +13064,7 @@
             <p:cNvPr id="14" name="Grupo 13">
               <a:extLst>
                 <a:ext uri="{FF2B5EF4-FFF2-40B4-BE49-F238E27FC236}">
-                  <a16:creationId xmlns:a16="http://schemas.microsoft.com/office/drawing/2014/main" xmlns="" id="{7618CDC3-6984-FA21-1D90-EF5639665330}"/>
+                  <a16:creationId xmlns="" xmlns:a16="http://schemas.microsoft.com/office/drawing/2014/main" id="{7618CDC3-6984-FA21-1D90-EF5639665330}"/>
                 </a:ext>
               </a:extLst>
             </p:cNvPr>
@@ -12958,7 +13084,7 @@
               <p:cNvPr id="1034" name="Picture 10" descr="Universidad Autónoma de Nuevo León">
                 <a:extLst>
                   <a:ext uri="{FF2B5EF4-FFF2-40B4-BE49-F238E27FC236}">
-                    <a16:creationId xmlns:a16="http://schemas.microsoft.com/office/drawing/2014/main" xmlns="" id="{614962FF-F8BC-8C60-D531-371C411ED902}"/>
+                    <a16:creationId xmlns="" xmlns:a16="http://schemas.microsoft.com/office/drawing/2014/main" id="{614962FF-F8BC-8C60-D531-371C411ED902}"/>
                   </a:ext>
                 </a:extLst>
               </p:cNvPr>
@@ -13005,7 +13131,7 @@
               <p:cNvPr id="1036" name="Picture 12" descr="Fisico Matematico Logo Símbolos Coloridos De La Matemáticas 3d Stock">
                 <a:extLst>
                   <a:ext uri="{FF2B5EF4-FFF2-40B4-BE49-F238E27FC236}">
-                    <a16:creationId xmlns:a16="http://schemas.microsoft.com/office/drawing/2014/main" xmlns="" id="{9DCF93C1-4712-9517-4CC0-A6074B26C461}"/>
+                    <a16:creationId xmlns="" xmlns:a16="http://schemas.microsoft.com/office/drawing/2014/main" id="{9DCF93C1-4712-9517-4CC0-A6074B26C461}"/>
                   </a:ext>
                 </a:extLst>
               </p:cNvPr>
@@ -13098,7 +13224,7 @@
         <p:cNvPr id="1" name="">
           <a:extLst>
             <a:ext uri="{FF2B5EF4-FFF2-40B4-BE49-F238E27FC236}">
-              <a16:creationId xmlns:a16="http://schemas.microsoft.com/office/drawing/2014/main" xmlns="" id="{4D7F802C-9985-E39C-3166-A9DE4568D2F3}"/>
+              <a16:creationId xmlns="" xmlns:a16="http://schemas.microsoft.com/office/drawing/2014/main" id="{4D7F802C-9985-E39C-3166-A9DE4568D2F3}"/>
             </a:ext>
           </a:extLst>
         </p:cNvPr>
@@ -13118,7 +13244,7 @@
           <p:cNvPr id="2" name="Título 1">
             <a:extLst>
               <a:ext uri="{FF2B5EF4-FFF2-40B4-BE49-F238E27FC236}">
-                <a16:creationId xmlns:a16="http://schemas.microsoft.com/office/drawing/2014/main" xmlns="" id="{54661051-D6C8-5EF7-AE78-BC87B2E49557}"/>
+                <a16:creationId xmlns="" xmlns:a16="http://schemas.microsoft.com/office/drawing/2014/main" id="{54661051-D6C8-5EF7-AE78-BC87B2E49557}"/>
               </a:ext>
             </a:extLst>
           </p:cNvPr>
@@ -13141,8 +13267,12 @@
                 <a:latin typeface="Times New Roman" panose="02020603050405020304" pitchFamily="18" charset="0"/>
                 <a:cs typeface="Times New Roman" panose="02020603050405020304" pitchFamily="18" charset="0"/>
               </a:rPr>
-              <a:t>Estado del arte</a:t>
+              <a:t>Marco Teórico</a:t>
             </a:r>
+            <a:endParaRPr lang="es-MX" sz="3400" dirty="0">
+              <a:latin typeface="Times New Roman" panose="02020603050405020304" pitchFamily="18" charset="0"/>
+              <a:cs typeface="Times New Roman" panose="02020603050405020304" pitchFamily="18" charset="0"/>
+            </a:endParaRPr>
           </a:p>
         </p:txBody>
       </p:sp>
@@ -13153,7 +13283,7 @@
               <p:cNvPr id="3" name="Marcador de contenido 2">
                 <a:extLst>
                   <a:ext uri="{FF2B5EF4-FFF2-40B4-BE49-F238E27FC236}">
-                    <a16:creationId xmlns:a16="http://schemas.microsoft.com/office/drawing/2014/main" xmlns="" id="{46707DE8-11C3-8B57-F04C-4C7467D2ED0E}"/>
+                    <a16:creationId xmlns="" xmlns:a16="http://schemas.microsoft.com/office/drawing/2014/main" id="{46707DE8-11C3-8B57-F04C-4C7467D2ED0E}"/>
                   </a:ext>
                 </a:extLst>
               </p:cNvPr>
@@ -13700,7 +13830,7 @@
               <p:cNvPr id="4" name="Marcador de contenido 3">
                 <a:extLst>
                   <a:ext uri="{FF2B5EF4-FFF2-40B4-BE49-F238E27FC236}">
-                    <a16:creationId xmlns:a16="http://schemas.microsoft.com/office/drawing/2014/main" xmlns="" id="{E19B05D6-E926-16DE-FD81-C0A20F518F61}"/>
+                    <a16:creationId xmlns="" xmlns:a16="http://schemas.microsoft.com/office/drawing/2014/main" id="{E19B05D6-E926-16DE-FD81-C0A20F518F61}"/>
                   </a:ext>
                 </a:extLst>
               </p:cNvPr>
@@ -14605,7 +14735,7 @@
         <p:cNvPr id="1" name="">
           <a:extLst>
             <a:ext uri="{FF2B5EF4-FFF2-40B4-BE49-F238E27FC236}">
-              <a16:creationId xmlns:a16="http://schemas.microsoft.com/office/drawing/2014/main" xmlns="" id="{7C374489-8331-1CFD-B27B-DF0CF689C590}"/>
+              <a16:creationId xmlns="" xmlns:a16="http://schemas.microsoft.com/office/drawing/2014/main" id="{7C374489-8331-1CFD-B27B-DF0CF689C590}"/>
             </a:ext>
           </a:extLst>
         </p:cNvPr>
@@ -14625,7 +14755,7 @@
           <p:cNvPr id="2" name="Título 1">
             <a:extLst>
               <a:ext uri="{FF2B5EF4-FFF2-40B4-BE49-F238E27FC236}">
-                <a16:creationId xmlns:a16="http://schemas.microsoft.com/office/drawing/2014/main" xmlns="" id="{8ECDA3B6-5D21-455F-E26A-C1D0E028FFB1}"/>
+                <a16:creationId xmlns="" xmlns:a16="http://schemas.microsoft.com/office/drawing/2014/main" id="{8ECDA3B6-5D21-455F-E26A-C1D0E028FFB1}"/>
               </a:ext>
             </a:extLst>
           </p:cNvPr>
@@ -14648,8 +14778,12 @@
                 <a:latin typeface="Times New Roman" panose="02020603050405020304" pitchFamily="18" charset="0"/>
                 <a:cs typeface="Times New Roman" panose="02020603050405020304" pitchFamily="18" charset="0"/>
               </a:rPr>
-              <a:t>Estado del arte</a:t>
+              <a:t>Marco Teórico</a:t>
             </a:r>
+            <a:endParaRPr lang="es-MX" sz="3400" dirty="0">
+              <a:latin typeface="Times New Roman" panose="02020603050405020304" pitchFamily="18" charset="0"/>
+              <a:cs typeface="Times New Roman" panose="02020603050405020304" pitchFamily="18" charset="0"/>
+            </a:endParaRPr>
           </a:p>
         </p:txBody>
       </p:sp>
@@ -14658,7 +14792,7 @@
           <p:cNvPr id="12" name="Imagen 11">
             <a:extLst>
               <a:ext uri="{FF2B5EF4-FFF2-40B4-BE49-F238E27FC236}">
-                <a16:creationId xmlns:a16="http://schemas.microsoft.com/office/drawing/2014/main" xmlns="" id="{23D2F379-93E7-C9CE-5619-30DB95B49FB2}"/>
+                <a16:creationId xmlns="" xmlns:a16="http://schemas.microsoft.com/office/drawing/2014/main" id="{23D2F379-93E7-C9CE-5619-30DB95B49FB2}"/>
               </a:ext>
             </a:extLst>
           </p:cNvPr>
@@ -14688,7 +14822,7 @@
           <p:cNvPr id="13" name="CuadroTexto 12">
             <a:extLst>
               <a:ext uri="{FF2B5EF4-FFF2-40B4-BE49-F238E27FC236}">
-                <a16:creationId xmlns:a16="http://schemas.microsoft.com/office/drawing/2014/main" xmlns="" id="{F0821036-0DB9-2DFB-FC0B-B1828674F195}"/>
+                <a16:creationId xmlns="" xmlns:a16="http://schemas.microsoft.com/office/drawing/2014/main" id="{F0821036-0DB9-2DFB-FC0B-B1828674F195}"/>
               </a:ext>
             </a:extLst>
           </p:cNvPr>
@@ -14723,7 +14857,7 @@
           <p:cNvPr id="14" name="CuadroTexto 13">
             <a:extLst>
               <a:ext uri="{FF2B5EF4-FFF2-40B4-BE49-F238E27FC236}">
-                <a16:creationId xmlns:a16="http://schemas.microsoft.com/office/drawing/2014/main" xmlns="" id="{6F4A7D8F-58F3-B39F-60ED-ACEE03328BD1}"/>
+                <a16:creationId xmlns="" xmlns:a16="http://schemas.microsoft.com/office/drawing/2014/main" id="{6F4A7D8F-58F3-B39F-60ED-ACEE03328BD1}"/>
               </a:ext>
             </a:extLst>
           </p:cNvPr>
@@ -14782,7 +14916,7 @@
         <p:cNvPr id="1" name="">
           <a:extLst>
             <a:ext uri="{FF2B5EF4-FFF2-40B4-BE49-F238E27FC236}">
-              <a16:creationId xmlns:a16="http://schemas.microsoft.com/office/drawing/2014/main" xmlns="" id="{96916980-537E-4F36-DE1F-8C339DEFA61A}"/>
+              <a16:creationId xmlns="" xmlns:a16="http://schemas.microsoft.com/office/drawing/2014/main" id="{96916980-537E-4F36-DE1F-8C339DEFA61A}"/>
             </a:ext>
           </a:extLst>
         </p:cNvPr>
@@ -14802,7 +14936,7 @@
           <p:cNvPr id="2" name="Título 1">
             <a:extLst>
               <a:ext uri="{FF2B5EF4-FFF2-40B4-BE49-F238E27FC236}">
-                <a16:creationId xmlns:a16="http://schemas.microsoft.com/office/drawing/2014/main" xmlns="" id="{44448DF7-245D-58B1-5FD8-77845915E9DC}"/>
+                <a16:creationId xmlns="" xmlns:a16="http://schemas.microsoft.com/office/drawing/2014/main" id="{44448DF7-245D-58B1-5FD8-77845915E9DC}"/>
               </a:ext>
             </a:extLst>
           </p:cNvPr>
@@ -14825,8 +14959,12 @@
                 <a:latin typeface="Times New Roman" panose="02020603050405020304" pitchFamily="18" charset="0"/>
                 <a:cs typeface="Times New Roman" panose="02020603050405020304" pitchFamily="18" charset="0"/>
               </a:rPr>
-              <a:t>Estado del arte</a:t>
+              <a:t>Marco Teórico</a:t>
             </a:r>
+            <a:endParaRPr lang="es-MX" sz="3400" dirty="0">
+              <a:latin typeface="Times New Roman" panose="02020603050405020304" pitchFamily="18" charset="0"/>
+              <a:cs typeface="Times New Roman" panose="02020603050405020304" pitchFamily="18" charset="0"/>
+            </a:endParaRPr>
           </a:p>
         </p:txBody>
       </p:sp>
@@ -14837,7 +14975,7 @@
               <p:cNvPr id="3" name="Marcador de contenido 2">
                 <a:extLst>
                   <a:ext uri="{FF2B5EF4-FFF2-40B4-BE49-F238E27FC236}">
-                    <a16:creationId xmlns:a16="http://schemas.microsoft.com/office/drawing/2014/main" xmlns="" id="{22FCC1EE-000B-93B4-D8C4-8B112FC5E6F0}"/>
+                    <a16:creationId xmlns="" xmlns:a16="http://schemas.microsoft.com/office/drawing/2014/main" id="{22FCC1EE-000B-93B4-D8C4-8B112FC5E6F0}"/>
                   </a:ext>
                 </a:extLst>
               </p:cNvPr>
@@ -15029,7 +15167,7 @@
           <p:cNvPr id="5" name="Imagen 4">
             <a:extLst>
               <a:ext uri="{FF2B5EF4-FFF2-40B4-BE49-F238E27FC236}">
-                <a16:creationId xmlns:a16="http://schemas.microsoft.com/office/drawing/2014/main" xmlns="" id="{3154A138-58CC-81B6-506F-D38524745AD8}"/>
+                <a16:creationId xmlns="" xmlns:a16="http://schemas.microsoft.com/office/drawing/2014/main" id="{3154A138-58CC-81B6-506F-D38524745AD8}"/>
               </a:ext>
             </a:extLst>
           </p:cNvPr>
@@ -15059,7 +15197,7 @@
           <p:cNvPr id="8" name="Grupo 7">
             <a:extLst>
               <a:ext uri="{FF2B5EF4-FFF2-40B4-BE49-F238E27FC236}">
-                <a16:creationId xmlns:a16="http://schemas.microsoft.com/office/drawing/2014/main" xmlns="" id="{C20DA293-F6A0-7252-FF38-05022AFA986A}"/>
+                <a16:creationId xmlns="" xmlns:a16="http://schemas.microsoft.com/office/drawing/2014/main" id="{C20DA293-F6A0-7252-FF38-05022AFA986A}"/>
               </a:ext>
             </a:extLst>
           </p:cNvPr>
@@ -15079,7 +15217,7 @@
             <p:cNvPr id="6" name="Elipse 5">
               <a:extLst>
                 <a:ext uri="{FF2B5EF4-FFF2-40B4-BE49-F238E27FC236}">
-                  <a16:creationId xmlns:a16="http://schemas.microsoft.com/office/drawing/2014/main" xmlns="" id="{F36C48D9-E20B-4E74-7BB8-68534A2217D7}"/>
+                  <a16:creationId xmlns="" xmlns:a16="http://schemas.microsoft.com/office/drawing/2014/main" id="{F36C48D9-E20B-4E74-7BB8-68534A2217D7}"/>
                 </a:ext>
               </a:extLst>
             </p:cNvPr>
@@ -15131,7 +15269,7 @@
             <p:cNvPr id="7" name="Elipse 6">
               <a:extLst>
                 <a:ext uri="{FF2B5EF4-FFF2-40B4-BE49-F238E27FC236}">
-                  <a16:creationId xmlns:a16="http://schemas.microsoft.com/office/drawing/2014/main" xmlns="" id="{F78D14EC-7BE1-CCC8-AF03-B9A7D44E6E42}"/>
+                  <a16:creationId xmlns="" xmlns:a16="http://schemas.microsoft.com/office/drawing/2014/main" id="{F78D14EC-7BE1-CCC8-AF03-B9A7D44E6E42}"/>
                 </a:ext>
               </a:extLst>
             </p:cNvPr>
@@ -15181,7 +15319,7 @@
           <p:cNvPr id="16" name="Grupo 15">
             <a:extLst>
               <a:ext uri="{FF2B5EF4-FFF2-40B4-BE49-F238E27FC236}">
-                <a16:creationId xmlns:a16="http://schemas.microsoft.com/office/drawing/2014/main" xmlns="" id="{D66C3BD7-8A9B-3D45-8BB7-2E1E3AE64D47}"/>
+                <a16:creationId xmlns="" xmlns:a16="http://schemas.microsoft.com/office/drawing/2014/main" id="{D66C3BD7-8A9B-3D45-8BB7-2E1E3AE64D47}"/>
               </a:ext>
             </a:extLst>
           </p:cNvPr>
@@ -15201,7 +15339,7 @@
             <p:cNvPr id="9" name="Grupo 8">
               <a:extLst>
                 <a:ext uri="{FF2B5EF4-FFF2-40B4-BE49-F238E27FC236}">
-                  <a16:creationId xmlns:a16="http://schemas.microsoft.com/office/drawing/2014/main" xmlns="" id="{FB0680F6-606C-DACE-C857-C0E097108A5B}"/>
+                  <a16:creationId xmlns="" xmlns:a16="http://schemas.microsoft.com/office/drawing/2014/main" id="{FB0680F6-606C-DACE-C857-C0E097108A5B}"/>
                 </a:ext>
               </a:extLst>
             </p:cNvPr>
@@ -15221,7 +15359,7 @@
               <p:cNvPr id="10" name="Elipse 9">
                 <a:extLst>
                   <a:ext uri="{FF2B5EF4-FFF2-40B4-BE49-F238E27FC236}">
-                    <a16:creationId xmlns:a16="http://schemas.microsoft.com/office/drawing/2014/main" xmlns="" id="{295B2FE9-4906-65BA-41C5-42E3FA2B9FDA}"/>
+                    <a16:creationId xmlns="" xmlns:a16="http://schemas.microsoft.com/office/drawing/2014/main" id="{295B2FE9-4906-65BA-41C5-42E3FA2B9FDA}"/>
                   </a:ext>
                 </a:extLst>
               </p:cNvPr>
@@ -15273,7 +15411,7 @@
               <p:cNvPr id="11" name="Elipse 10">
                 <a:extLst>
                   <a:ext uri="{FF2B5EF4-FFF2-40B4-BE49-F238E27FC236}">
-                    <a16:creationId xmlns:a16="http://schemas.microsoft.com/office/drawing/2014/main" xmlns="" id="{8B43B637-5983-1EE3-620E-83FE18829586}"/>
+                    <a16:creationId xmlns="" xmlns:a16="http://schemas.microsoft.com/office/drawing/2014/main" id="{8B43B637-5983-1EE3-620E-83FE18829586}"/>
                   </a:ext>
                 </a:extLst>
               </p:cNvPr>
@@ -15323,7 +15461,7 @@
             <p:cNvPr id="14" name="Elipse 13">
               <a:extLst>
                 <a:ext uri="{FF2B5EF4-FFF2-40B4-BE49-F238E27FC236}">
-                  <a16:creationId xmlns:a16="http://schemas.microsoft.com/office/drawing/2014/main" xmlns="" id="{4FAD522E-6176-96CF-3142-2F5D03892BBE}"/>
+                  <a16:creationId xmlns="" xmlns:a16="http://schemas.microsoft.com/office/drawing/2014/main" id="{4FAD522E-6176-96CF-3142-2F5D03892BBE}"/>
                 </a:ext>
               </a:extLst>
             </p:cNvPr>
@@ -15376,7 +15514,7 @@
           <p:cNvPr id="15" name="Elipse 14">
             <a:extLst>
               <a:ext uri="{FF2B5EF4-FFF2-40B4-BE49-F238E27FC236}">
-                <a16:creationId xmlns:a16="http://schemas.microsoft.com/office/drawing/2014/main" xmlns="" id="{12AE98A3-9730-A385-CBEC-390D09989E8F}"/>
+                <a16:creationId xmlns="" xmlns:a16="http://schemas.microsoft.com/office/drawing/2014/main" id="{12AE98A3-9730-A385-CBEC-390D09989E8F}"/>
               </a:ext>
             </a:extLst>
           </p:cNvPr>
@@ -15428,7 +15566,7 @@
           <p:cNvPr id="17" name="Elipse 16">
             <a:extLst>
               <a:ext uri="{FF2B5EF4-FFF2-40B4-BE49-F238E27FC236}">
-                <a16:creationId xmlns:a16="http://schemas.microsoft.com/office/drawing/2014/main" xmlns="" id="{CBFD50D6-894B-F004-DD30-A0F9B51F5780}"/>
+                <a16:creationId xmlns="" xmlns:a16="http://schemas.microsoft.com/office/drawing/2014/main" id="{CBFD50D6-894B-F004-DD30-A0F9B51F5780}"/>
               </a:ext>
             </a:extLst>
           </p:cNvPr>
@@ -15480,7 +15618,7 @@
           <p:cNvPr id="23" name="Grupo 22">
             <a:extLst>
               <a:ext uri="{FF2B5EF4-FFF2-40B4-BE49-F238E27FC236}">
-                <a16:creationId xmlns:a16="http://schemas.microsoft.com/office/drawing/2014/main" xmlns="" id="{612454BF-824F-1FC3-4A01-AF5398ACEA96}"/>
+                <a16:creationId xmlns="" xmlns:a16="http://schemas.microsoft.com/office/drawing/2014/main" id="{612454BF-824F-1FC3-4A01-AF5398ACEA96}"/>
               </a:ext>
             </a:extLst>
           </p:cNvPr>
@@ -15500,7 +15638,7 @@
             <p:cNvPr id="18" name="Rectángulo 17">
               <a:extLst>
                 <a:ext uri="{FF2B5EF4-FFF2-40B4-BE49-F238E27FC236}">
-                  <a16:creationId xmlns:a16="http://schemas.microsoft.com/office/drawing/2014/main" xmlns="" id="{9693F3AF-6A29-C251-9F91-87718945BA0E}"/>
+                  <a16:creationId xmlns="" xmlns:a16="http://schemas.microsoft.com/office/drawing/2014/main" id="{9693F3AF-6A29-C251-9F91-87718945BA0E}"/>
                 </a:ext>
               </a:extLst>
             </p:cNvPr>
@@ -15554,7 +15692,7 @@
             <p:cNvPr id="20" name="Rectángulo 19">
               <a:extLst>
                 <a:ext uri="{FF2B5EF4-FFF2-40B4-BE49-F238E27FC236}">
-                  <a16:creationId xmlns:a16="http://schemas.microsoft.com/office/drawing/2014/main" xmlns="" id="{E564E907-B303-A4E9-DBF3-305E17B230FE}"/>
+                  <a16:creationId xmlns="" xmlns:a16="http://schemas.microsoft.com/office/drawing/2014/main" id="{E564E907-B303-A4E9-DBF3-305E17B230FE}"/>
                 </a:ext>
               </a:extLst>
             </p:cNvPr>
@@ -15608,7 +15746,7 @@
             <p:cNvPr id="21" name="Rectángulo 20">
               <a:extLst>
                 <a:ext uri="{FF2B5EF4-FFF2-40B4-BE49-F238E27FC236}">
-                  <a16:creationId xmlns:a16="http://schemas.microsoft.com/office/drawing/2014/main" xmlns="" id="{EDA15384-A510-1544-C9CE-D2DCAC39911A}"/>
+                  <a16:creationId xmlns="" xmlns:a16="http://schemas.microsoft.com/office/drawing/2014/main" id="{EDA15384-A510-1544-C9CE-D2DCAC39911A}"/>
                 </a:ext>
               </a:extLst>
             </p:cNvPr>
@@ -15662,7 +15800,7 @@
             <p:cNvPr id="22" name="Rectángulo 21">
               <a:extLst>
                 <a:ext uri="{FF2B5EF4-FFF2-40B4-BE49-F238E27FC236}">
-                  <a16:creationId xmlns:a16="http://schemas.microsoft.com/office/drawing/2014/main" xmlns="" id="{2AF5DDF6-281B-417B-1299-032A02A21904}"/>
+                  <a16:creationId xmlns="" xmlns:a16="http://schemas.microsoft.com/office/drawing/2014/main" id="{2AF5DDF6-281B-417B-1299-032A02A21904}"/>
                 </a:ext>
               </a:extLst>
             </p:cNvPr>
@@ -15717,7 +15855,7 @@
           <p:cNvPr id="24" name="CuadroTexto 23">
             <a:extLst>
               <a:ext uri="{FF2B5EF4-FFF2-40B4-BE49-F238E27FC236}">
-                <a16:creationId xmlns:a16="http://schemas.microsoft.com/office/drawing/2014/main" xmlns="" id="{C44CD5A1-5962-3D7B-5621-0D9EAD6F17BD}"/>
+                <a16:creationId xmlns="" xmlns:a16="http://schemas.microsoft.com/office/drawing/2014/main" id="{C44CD5A1-5962-3D7B-5621-0D9EAD6F17BD}"/>
               </a:ext>
             </a:extLst>
           </p:cNvPr>
@@ -15756,7 +15894,7 @@
           <p:cNvPr id="25" name="CuadroTexto 24">
             <a:extLst>
               <a:ext uri="{FF2B5EF4-FFF2-40B4-BE49-F238E27FC236}">
-                <a16:creationId xmlns:a16="http://schemas.microsoft.com/office/drawing/2014/main" xmlns="" id="{455A544C-557B-8616-8C90-2C15053742F2}"/>
+                <a16:creationId xmlns="" xmlns:a16="http://schemas.microsoft.com/office/drawing/2014/main" id="{455A544C-557B-8616-8C90-2C15053742F2}"/>
               </a:ext>
             </a:extLst>
           </p:cNvPr>
@@ -15795,7 +15933,7 @@
           <p:cNvPr id="26" name="CuadroTexto 25">
             <a:extLst>
               <a:ext uri="{FF2B5EF4-FFF2-40B4-BE49-F238E27FC236}">
-                <a16:creationId xmlns:a16="http://schemas.microsoft.com/office/drawing/2014/main" xmlns="" id="{BA155C18-CE85-FA64-3421-BD20A62031AE}"/>
+                <a16:creationId xmlns="" xmlns:a16="http://schemas.microsoft.com/office/drawing/2014/main" id="{BA155C18-CE85-FA64-3421-BD20A62031AE}"/>
               </a:ext>
             </a:extLst>
           </p:cNvPr>
@@ -15834,7 +15972,7 @@
           <p:cNvPr id="27" name="CuadroTexto 26">
             <a:extLst>
               <a:ext uri="{FF2B5EF4-FFF2-40B4-BE49-F238E27FC236}">
-                <a16:creationId xmlns:a16="http://schemas.microsoft.com/office/drawing/2014/main" xmlns="" id="{76EE765D-7086-62AF-86FE-3039F821CEFC}"/>
+                <a16:creationId xmlns="" xmlns:a16="http://schemas.microsoft.com/office/drawing/2014/main" id="{76EE765D-7086-62AF-86FE-3039F821CEFC}"/>
               </a:ext>
             </a:extLst>
           </p:cNvPr>
@@ -15900,7 +16038,7 @@
         <p:cNvPr id="1" name="">
           <a:extLst>
             <a:ext uri="{FF2B5EF4-FFF2-40B4-BE49-F238E27FC236}">
-              <a16:creationId xmlns:a16="http://schemas.microsoft.com/office/drawing/2014/main" xmlns="" id="{FC37CF23-0FAC-907A-6008-F8DFBCF7DD3B}"/>
+              <a16:creationId xmlns="" xmlns:a16="http://schemas.microsoft.com/office/drawing/2014/main" id="{FC37CF23-0FAC-907A-6008-F8DFBCF7DD3B}"/>
             </a:ext>
           </a:extLst>
         </p:cNvPr>
@@ -15920,7 +16058,7 @@
           <p:cNvPr id="2" name="Título 1">
             <a:extLst>
               <a:ext uri="{FF2B5EF4-FFF2-40B4-BE49-F238E27FC236}">
-                <a16:creationId xmlns:a16="http://schemas.microsoft.com/office/drawing/2014/main" xmlns="" id="{E895940F-7496-C6DB-CF42-F5FB3B59DB42}"/>
+                <a16:creationId xmlns="" xmlns:a16="http://schemas.microsoft.com/office/drawing/2014/main" id="{E895940F-7496-C6DB-CF42-F5FB3B59DB42}"/>
               </a:ext>
             </a:extLst>
           </p:cNvPr>
@@ -15943,8 +16081,12 @@
                 <a:latin typeface="Times New Roman" panose="02020603050405020304" pitchFamily="18" charset="0"/>
                 <a:cs typeface="Times New Roman" panose="02020603050405020304" pitchFamily="18" charset="0"/>
               </a:rPr>
-              <a:t>Estado del arte</a:t>
+              <a:t>Marco Teórico</a:t>
             </a:r>
+            <a:endParaRPr lang="es-MX" sz="3400" dirty="0">
+              <a:latin typeface="Times New Roman" panose="02020603050405020304" pitchFamily="18" charset="0"/>
+              <a:cs typeface="Times New Roman" panose="02020603050405020304" pitchFamily="18" charset="0"/>
+            </a:endParaRPr>
           </a:p>
         </p:txBody>
       </p:sp>
@@ -15955,7 +16097,7 @@
               <p:cNvPr id="3" name="Marcador de contenido 2">
                 <a:extLst>
                   <a:ext uri="{FF2B5EF4-FFF2-40B4-BE49-F238E27FC236}">
-                    <a16:creationId xmlns:a16="http://schemas.microsoft.com/office/drawing/2014/main" xmlns="" id="{79A613D5-7D0F-EC06-12D0-9065AA7C307B}"/>
+                    <a16:creationId xmlns="" xmlns:a16="http://schemas.microsoft.com/office/drawing/2014/main" id="{79A613D5-7D0F-EC06-12D0-9065AA7C307B}"/>
                   </a:ext>
                 </a:extLst>
               </p:cNvPr>
@@ -16327,7 +16469,7 @@
           <p:cNvPr id="33" name="Grupo 32">
             <a:extLst>
               <a:ext uri="{FF2B5EF4-FFF2-40B4-BE49-F238E27FC236}">
-                <a16:creationId xmlns:a16="http://schemas.microsoft.com/office/drawing/2014/main" xmlns="" id="{729909A0-43AF-DCAD-8F35-1ECDFE9C2433}"/>
+                <a16:creationId xmlns="" xmlns:a16="http://schemas.microsoft.com/office/drawing/2014/main" id="{729909A0-43AF-DCAD-8F35-1ECDFE9C2433}"/>
               </a:ext>
             </a:extLst>
           </p:cNvPr>
@@ -16347,7 +16489,7 @@
             <p:cNvPr id="6" name="Grupo 5">
               <a:extLst>
                 <a:ext uri="{FF2B5EF4-FFF2-40B4-BE49-F238E27FC236}">
-                  <a16:creationId xmlns:a16="http://schemas.microsoft.com/office/drawing/2014/main" xmlns="" id="{C322A4B0-8410-32BE-3649-6DDB27EFFA0B}"/>
+                  <a16:creationId xmlns="" xmlns:a16="http://schemas.microsoft.com/office/drawing/2014/main" id="{C322A4B0-8410-32BE-3649-6DDB27EFFA0B}"/>
                 </a:ext>
               </a:extLst>
             </p:cNvPr>
@@ -16367,7 +16509,7 @@
               <p:cNvPr id="4" name="Elipse 3">
                 <a:extLst>
                   <a:ext uri="{FF2B5EF4-FFF2-40B4-BE49-F238E27FC236}">
-                    <a16:creationId xmlns:a16="http://schemas.microsoft.com/office/drawing/2014/main" xmlns="" id="{406CC21C-47A8-E918-EEEA-F86BB7F900F6}"/>
+                    <a16:creationId xmlns="" xmlns:a16="http://schemas.microsoft.com/office/drawing/2014/main" id="{406CC21C-47A8-E918-EEEA-F86BB7F900F6}"/>
                   </a:ext>
                 </a:extLst>
               </p:cNvPr>
@@ -16413,7 +16555,7 @@
               <p:cNvPr id="5" name="Elipse 4">
                 <a:extLst>
                   <a:ext uri="{FF2B5EF4-FFF2-40B4-BE49-F238E27FC236}">
-                    <a16:creationId xmlns:a16="http://schemas.microsoft.com/office/drawing/2014/main" xmlns="" id="{45A5DD1C-D040-6AA2-54D6-0DDF876E6DD1}"/>
+                    <a16:creationId xmlns="" xmlns:a16="http://schemas.microsoft.com/office/drawing/2014/main" id="{45A5DD1C-D040-6AA2-54D6-0DDF876E6DD1}"/>
                   </a:ext>
                 </a:extLst>
               </p:cNvPr>
@@ -16463,7 +16605,7 @@
             <p:cNvPr id="8" name="Conector recto 7">
               <a:extLst>
                 <a:ext uri="{FF2B5EF4-FFF2-40B4-BE49-F238E27FC236}">
-                  <a16:creationId xmlns:a16="http://schemas.microsoft.com/office/drawing/2014/main" xmlns="" id="{DBC34E55-DF1A-B3D3-AB7E-C0A405CFD042}"/>
+                  <a16:creationId xmlns="" xmlns:a16="http://schemas.microsoft.com/office/drawing/2014/main" id="{DBC34E55-DF1A-B3D3-AB7E-C0A405CFD042}"/>
                 </a:ext>
               </a:extLst>
             </p:cNvPr>
@@ -16508,7 +16650,7 @@
             <p:cNvPr id="9" name="Conector recto 8">
               <a:extLst>
                 <a:ext uri="{FF2B5EF4-FFF2-40B4-BE49-F238E27FC236}">
-                  <a16:creationId xmlns:a16="http://schemas.microsoft.com/office/drawing/2014/main" xmlns="" id="{1D3971AF-F728-520C-7A40-13249ABEE709}"/>
+                  <a16:creationId xmlns="" xmlns:a16="http://schemas.microsoft.com/office/drawing/2014/main" id="{1D3971AF-F728-520C-7A40-13249ABEE709}"/>
                 </a:ext>
               </a:extLst>
             </p:cNvPr>
@@ -16553,7 +16695,7 @@
             <p:cNvPr id="14" name="Conector recto 13">
               <a:extLst>
                 <a:ext uri="{FF2B5EF4-FFF2-40B4-BE49-F238E27FC236}">
-                  <a16:creationId xmlns:a16="http://schemas.microsoft.com/office/drawing/2014/main" xmlns="" id="{C2C340D0-7A17-7E3F-227D-AA53C49A33CA}"/>
+                  <a16:creationId xmlns="" xmlns:a16="http://schemas.microsoft.com/office/drawing/2014/main" id="{C2C340D0-7A17-7E3F-227D-AA53C49A33CA}"/>
                 </a:ext>
               </a:extLst>
             </p:cNvPr>
@@ -16598,7 +16740,7 @@
             <p:cNvPr id="17" name="Conector recto 16">
               <a:extLst>
                 <a:ext uri="{FF2B5EF4-FFF2-40B4-BE49-F238E27FC236}">
-                  <a16:creationId xmlns:a16="http://schemas.microsoft.com/office/drawing/2014/main" xmlns="" id="{9C6A866E-8E9D-E197-7C1F-4066849E880F}"/>
+                  <a16:creationId xmlns="" xmlns:a16="http://schemas.microsoft.com/office/drawing/2014/main" id="{9C6A866E-8E9D-E197-7C1F-4066849E880F}"/>
                 </a:ext>
               </a:extLst>
             </p:cNvPr>
@@ -16643,7 +16785,7 @@
             <p:cNvPr id="20" name="Conector recto 19">
               <a:extLst>
                 <a:ext uri="{FF2B5EF4-FFF2-40B4-BE49-F238E27FC236}">
-                  <a16:creationId xmlns:a16="http://schemas.microsoft.com/office/drawing/2014/main" xmlns="" id="{4B0F83E2-5093-6ACB-233C-1421186CF403}"/>
+                  <a16:creationId xmlns="" xmlns:a16="http://schemas.microsoft.com/office/drawing/2014/main" id="{4B0F83E2-5093-6ACB-233C-1421186CF403}"/>
                 </a:ext>
               </a:extLst>
             </p:cNvPr>
@@ -16687,7 +16829,7 @@
             <p:cNvPr id="25" name="Conector recto 24">
               <a:extLst>
                 <a:ext uri="{FF2B5EF4-FFF2-40B4-BE49-F238E27FC236}">
-                  <a16:creationId xmlns:a16="http://schemas.microsoft.com/office/drawing/2014/main" xmlns="" id="{88FFA493-5365-E1A4-1907-6EA3CBD9508C}"/>
+                  <a16:creationId xmlns="" xmlns:a16="http://schemas.microsoft.com/office/drawing/2014/main" id="{88FFA493-5365-E1A4-1907-6EA3CBD9508C}"/>
                 </a:ext>
               </a:extLst>
             </p:cNvPr>
@@ -16734,7 +16876,7 @@
               <p:cNvPr id="28" name="CuadroTexto 27">
                 <a:extLst>
                   <a:ext uri="{FF2B5EF4-FFF2-40B4-BE49-F238E27FC236}">
-                    <a16:creationId xmlns:a16="http://schemas.microsoft.com/office/drawing/2014/main" xmlns="" id="{114BFBBF-29B3-AAFC-A3E9-C0D72A4C4D73}"/>
+                    <a16:creationId xmlns="" xmlns:a16="http://schemas.microsoft.com/office/drawing/2014/main" id="{114BFBBF-29B3-AAFC-A3E9-C0D72A4C4D73}"/>
                   </a:ext>
                 </a:extLst>
               </p:cNvPr>
@@ -16861,7 +17003,7 @@
               <p:cNvPr id="29" name="CuadroTexto 28">
                 <a:extLst>
                   <a:ext uri="{FF2B5EF4-FFF2-40B4-BE49-F238E27FC236}">
-                    <a16:creationId xmlns:a16="http://schemas.microsoft.com/office/drawing/2014/main" xmlns="" id="{54CD28E3-2FB2-FAC5-695F-97F8FFFBA523}"/>
+                    <a16:creationId xmlns="" xmlns:a16="http://schemas.microsoft.com/office/drawing/2014/main" id="{54CD28E3-2FB2-FAC5-695F-97F8FFFBA523}"/>
                   </a:ext>
                 </a:extLst>
               </p:cNvPr>
@@ -16986,7 +17128,7 @@
           <p:cNvPr id="34" name="Rectángulo 33">
             <a:extLst>
               <a:ext uri="{FF2B5EF4-FFF2-40B4-BE49-F238E27FC236}">
-                <a16:creationId xmlns:a16="http://schemas.microsoft.com/office/drawing/2014/main" xmlns="" id="{F1C69102-67B9-D084-840B-0059C5A33502}"/>
+                <a16:creationId xmlns="" xmlns:a16="http://schemas.microsoft.com/office/drawing/2014/main" id="{F1C69102-67B9-D084-840B-0059C5A33502}"/>
               </a:ext>
             </a:extLst>
           </p:cNvPr>
@@ -17032,7 +17174,7 @@
           <p:cNvPr id="35" name="Conector recto 34">
             <a:extLst>
               <a:ext uri="{FF2B5EF4-FFF2-40B4-BE49-F238E27FC236}">
-                <a16:creationId xmlns:a16="http://schemas.microsoft.com/office/drawing/2014/main" xmlns="" id="{A66DBDFD-7922-25A0-2802-9BAB5211EA81}"/>
+                <a16:creationId xmlns="" xmlns:a16="http://schemas.microsoft.com/office/drawing/2014/main" id="{A66DBDFD-7922-25A0-2802-9BAB5211EA81}"/>
               </a:ext>
             </a:extLst>
           </p:cNvPr>
@@ -17076,7 +17218,7 @@
           <p:cNvPr id="38" name="Conector recto 37">
             <a:extLst>
               <a:ext uri="{FF2B5EF4-FFF2-40B4-BE49-F238E27FC236}">
-                <a16:creationId xmlns:a16="http://schemas.microsoft.com/office/drawing/2014/main" xmlns="" id="{E7EF7746-C4A0-B3AA-DB22-665BF5B5750B}"/>
+                <a16:creationId xmlns="" xmlns:a16="http://schemas.microsoft.com/office/drawing/2014/main" id="{E7EF7746-C4A0-B3AA-DB22-665BF5B5750B}"/>
               </a:ext>
             </a:extLst>
           </p:cNvPr>
@@ -17120,7 +17262,7 @@
           <p:cNvPr id="39" name="Conector recto 38">
             <a:extLst>
               <a:ext uri="{FF2B5EF4-FFF2-40B4-BE49-F238E27FC236}">
-                <a16:creationId xmlns:a16="http://schemas.microsoft.com/office/drawing/2014/main" xmlns="" id="{5CEC78D8-8B50-E361-9AE7-0C36E5DB32D5}"/>
+                <a16:creationId xmlns="" xmlns:a16="http://schemas.microsoft.com/office/drawing/2014/main" id="{5CEC78D8-8B50-E361-9AE7-0C36E5DB32D5}"/>
               </a:ext>
             </a:extLst>
           </p:cNvPr>
@@ -17166,7 +17308,7 @@
               <p:cNvPr id="43" name="CuadroTexto 42">
                 <a:extLst>
                   <a:ext uri="{FF2B5EF4-FFF2-40B4-BE49-F238E27FC236}">
-                    <a16:creationId xmlns:a16="http://schemas.microsoft.com/office/drawing/2014/main" xmlns="" id="{F8FC5420-2043-F36A-81C7-06A76704E7F1}"/>
+                    <a16:creationId xmlns="" xmlns:a16="http://schemas.microsoft.com/office/drawing/2014/main" id="{F8FC5420-2043-F36A-81C7-06A76704E7F1}"/>
                   </a:ext>
                 </a:extLst>
               </p:cNvPr>
@@ -17293,7 +17435,7 @@
               <p:cNvPr id="44" name="CuadroTexto 43">
                 <a:extLst>
                   <a:ext uri="{FF2B5EF4-FFF2-40B4-BE49-F238E27FC236}">
-                    <a16:creationId xmlns:a16="http://schemas.microsoft.com/office/drawing/2014/main" xmlns="" id="{CC727B9C-2147-12F8-D394-76D6C2AD971A}"/>
+                    <a16:creationId xmlns="" xmlns:a16="http://schemas.microsoft.com/office/drawing/2014/main" id="{CC727B9C-2147-12F8-D394-76D6C2AD971A}"/>
                   </a:ext>
                 </a:extLst>
               </p:cNvPr>
@@ -17676,7 +17818,7 @@
         <p:cNvPr id="1" name="">
           <a:extLst>
             <a:ext uri="{FF2B5EF4-FFF2-40B4-BE49-F238E27FC236}">
-              <a16:creationId xmlns:a16="http://schemas.microsoft.com/office/drawing/2014/main" xmlns="" id="{8236AFA5-78C1-B396-92A0-1491ABD70AE0}"/>
+              <a16:creationId xmlns="" xmlns:a16="http://schemas.microsoft.com/office/drawing/2014/main" id="{8236AFA5-78C1-B396-92A0-1491ABD70AE0}"/>
             </a:ext>
           </a:extLst>
         </p:cNvPr>
@@ -17696,7 +17838,7 @@
           <p:cNvPr id="2" name="Título 1">
             <a:extLst>
               <a:ext uri="{FF2B5EF4-FFF2-40B4-BE49-F238E27FC236}">
-                <a16:creationId xmlns:a16="http://schemas.microsoft.com/office/drawing/2014/main" xmlns="" id="{847D2639-CA01-9D90-EAEE-6FA119CC485F}"/>
+                <a16:creationId xmlns="" xmlns:a16="http://schemas.microsoft.com/office/drawing/2014/main" id="{847D2639-CA01-9D90-EAEE-6FA119CC485F}"/>
               </a:ext>
             </a:extLst>
           </p:cNvPr>
@@ -17719,8 +17861,12 @@
                 <a:latin typeface="Times New Roman" panose="02020603050405020304" pitchFamily="18" charset="0"/>
                 <a:cs typeface="Times New Roman" panose="02020603050405020304" pitchFamily="18" charset="0"/>
               </a:rPr>
-              <a:t>Estado del arte</a:t>
+              <a:t>Marco Teórico</a:t>
             </a:r>
+            <a:endParaRPr lang="es-MX" sz="3400" dirty="0">
+              <a:latin typeface="Times New Roman" panose="02020603050405020304" pitchFamily="18" charset="0"/>
+              <a:cs typeface="Times New Roman" panose="02020603050405020304" pitchFamily="18" charset="0"/>
+            </a:endParaRPr>
           </a:p>
         </p:txBody>
       </p:sp>
@@ -17731,7 +17877,7 @@
               <p:cNvPr id="3" name="Marcador de contenido 2">
                 <a:extLst>
                   <a:ext uri="{FF2B5EF4-FFF2-40B4-BE49-F238E27FC236}">
-                    <a16:creationId xmlns:a16="http://schemas.microsoft.com/office/drawing/2014/main" xmlns="" id="{4729AEC0-EA8F-DE0E-608A-99BC36065ABE}"/>
+                    <a16:creationId xmlns="" xmlns:a16="http://schemas.microsoft.com/office/drawing/2014/main" id="{4729AEC0-EA8F-DE0E-608A-99BC36065ABE}"/>
                   </a:ext>
                 </a:extLst>
               </p:cNvPr>
@@ -18306,7 +18452,7 @@
           <p:cNvPr id="33" name="Grupo 32">
             <a:extLst>
               <a:ext uri="{FF2B5EF4-FFF2-40B4-BE49-F238E27FC236}">
-                <a16:creationId xmlns:a16="http://schemas.microsoft.com/office/drawing/2014/main" xmlns="" id="{48A6B34F-2C3F-D991-200D-C98CC7F65B74}"/>
+                <a16:creationId xmlns="" xmlns:a16="http://schemas.microsoft.com/office/drawing/2014/main" id="{48A6B34F-2C3F-D991-200D-C98CC7F65B74}"/>
               </a:ext>
             </a:extLst>
           </p:cNvPr>
@@ -18326,7 +18472,7 @@
             <p:cNvPr id="6" name="Grupo 5">
               <a:extLst>
                 <a:ext uri="{FF2B5EF4-FFF2-40B4-BE49-F238E27FC236}">
-                  <a16:creationId xmlns:a16="http://schemas.microsoft.com/office/drawing/2014/main" xmlns="" id="{CAE1C86C-0495-CDE8-6EEE-0C2450ADDD06}"/>
+                  <a16:creationId xmlns="" xmlns:a16="http://schemas.microsoft.com/office/drawing/2014/main" id="{CAE1C86C-0495-CDE8-6EEE-0C2450ADDD06}"/>
                 </a:ext>
               </a:extLst>
             </p:cNvPr>
@@ -18346,7 +18492,7 @@
               <p:cNvPr id="4" name="Elipse 3">
                 <a:extLst>
                   <a:ext uri="{FF2B5EF4-FFF2-40B4-BE49-F238E27FC236}">
-                    <a16:creationId xmlns:a16="http://schemas.microsoft.com/office/drawing/2014/main" xmlns="" id="{619E826A-24D4-94FE-AAEE-1A6091242565}"/>
+                    <a16:creationId xmlns="" xmlns:a16="http://schemas.microsoft.com/office/drawing/2014/main" id="{619E826A-24D4-94FE-AAEE-1A6091242565}"/>
                   </a:ext>
                 </a:extLst>
               </p:cNvPr>
@@ -18392,7 +18538,7 @@
               <p:cNvPr id="5" name="Elipse 4">
                 <a:extLst>
                   <a:ext uri="{FF2B5EF4-FFF2-40B4-BE49-F238E27FC236}">
-                    <a16:creationId xmlns:a16="http://schemas.microsoft.com/office/drawing/2014/main" xmlns="" id="{33088DFD-AEE8-BAD1-B753-53A9612C4BD6}"/>
+                    <a16:creationId xmlns="" xmlns:a16="http://schemas.microsoft.com/office/drawing/2014/main" id="{33088DFD-AEE8-BAD1-B753-53A9612C4BD6}"/>
                   </a:ext>
                 </a:extLst>
               </p:cNvPr>
@@ -18442,7 +18588,7 @@
             <p:cNvPr id="8" name="Conector recto 7">
               <a:extLst>
                 <a:ext uri="{FF2B5EF4-FFF2-40B4-BE49-F238E27FC236}">
-                  <a16:creationId xmlns:a16="http://schemas.microsoft.com/office/drawing/2014/main" xmlns="" id="{296E30CB-B5EA-E569-5C77-857F0B1E1BFF}"/>
+                  <a16:creationId xmlns="" xmlns:a16="http://schemas.microsoft.com/office/drawing/2014/main" id="{296E30CB-B5EA-E569-5C77-857F0B1E1BFF}"/>
                 </a:ext>
               </a:extLst>
             </p:cNvPr>
@@ -18487,7 +18633,7 @@
             <p:cNvPr id="9" name="Conector recto 8">
               <a:extLst>
                 <a:ext uri="{FF2B5EF4-FFF2-40B4-BE49-F238E27FC236}">
-                  <a16:creationId xmlns:a16="http://schemas.microsoft.com/office/drawing/2014/main" xmlns="" id="{57F25721-136D-2222-4D07-F6C3714240AD}"/>
+                  <a16:creationId xmlns="" xmlns:a16="http://schemas.microsoft.com/office/drawing/2014/main" id="{57F25721-136D-2222-4D07-F6C3714240AD}"/>
                 </a:ext>
               </a:extLst>
             </p:cNvPr>
@@ -18532,7 +18678,7 @@
             <p:cNvPr id="14" name="Conector recto 13">
               <a:extLst>
                 <a:ext uri="{FF2B5EF4-FFF2-40B4-BE49-F238E27FC236}">
-                  <a16:creationId xmlns:a16="http://schemas.microsoft.com/office/drawing/2014/main" xmlns="" id="{8535C2CA-14F9-A2FF-CC2B-B3C44A143273}"/>
+                  <a16:creationId xmlns="" xmlns:a16="http://schemas.microsoft.com/office/drawing/2014/main" id="{8535C2CA-14F9-A2FF-CC2B-B3C44A143273}"/>
                 </a:ext>
               </a:extLst>
             </p:cNvPr>
@@ -18577,7 +18723,7 @@
             <p:cNvPr id="17" name="Conector recto 16">
               <a:extLst>
                 <a:ext uri="{FF2B5EF4-FFF2-40B4-BE49-F238E27FC236}">
-                  <a16:creationId xmlns:a16="http://schemas.microsoft.com/office/drawing/2014/main" xmlns="" id="{378EA80B-D2A2-AE2B-15BD-01469C9F79FC}"/>
+                  <a16:creationId xmlns="" xmlns:a16="http://schemas.microsoft.com/office/drawing/2014/main" id="{378EA80B-D2A2-AE2B-15BD-01469C9F79FC}"/>
                 </a:ext>
               </a:extLst>
             </p:cNvPr>
@@ -18622,7 +18768,7 @@
             <p:cNvPr id="20" name="Conector recto 19">
               <a:extLst>
                 <a:ext uri="{FF2B5EF4-FFF2-40B4-BE49-F238E27FC236}">
-                  <a16:creationId xmlns:a16="http://schemas.microsoft.com/office/drawing/2014/main" xmlns="" id="{C4E1B510-2FF6-CBF0-CAAF-BF790468063F}"/>
+                  <a16:creationId xmlns="" xmlns:a16="http://schemas.microsoft.com/office/drawing/2014/main" id="{C4E1B510-2FF6-CBF0-CAAF-BF790468063F}"/>
                 </a:ext>
               </a:extLst>
             </p:cNvPr>
@@ -18666,7 +18812,7 @@
             <p:cNvPr id="25" name="Conector recto 24">
               <a:extLst>
                 <a:ext uri="{FF2B5EF4-FFF2-40B4-BE49-F238E27FC236}">
-                  <a16:creationId xmlns:a16="http://schemas.microsoft.com/office/drawing/2014/main" xmlns="" id="{78861B87-697F-57C3-F3C4-F52CD7294C41}"/>
+                  <a16:creationId xmlns="" xmlns:a16="http://schemas.microsoft.com/office/drawing/2014/main" id="{78861B87-697F-57C3-F3C4-F52CD7294C41}"/>
                 </a:ext>
               </a:extLst>
             </p:cNvPr>
@@ -18713,7 +18859,7 @@
               <p:cNvPr id="28" name="CuadroTexto 27">
                 <a:extLst>
                   <a:ext uri="{FF2B5EF4-FFF2-40B4-BE49-F238E27FC236}">
-                    <a16:creationId xmlns:a16="http://schemas.microsoft.com/office/drawing/2014/main" xmlns="" id="{E53635F7-A349-E5DB-1283-028431B4881A}"/>
+                    <a16:creationId xmlns="" xmlns:a16="http://schemas.microsoft.com/office/drawing/2014/main" id="{E53635F7-A349-E5DB-1283-028431B4881A}"/>
                   </a:ext>
                 </a:extLst>
               </p:cNvPr>
@@ -18840,7 +18986,7 @@
               <p:cNvPr id="29" name="CuadroTexto 28">
                 <a:extLst>
                   <a:ext uri="{FF2B5EF4-FFF2-40B4-BE49-F238E27FC236}">
-                    <a16:creationId xmlns:a16="http://schemas.microsoft.com/office/drawing/2014/main" xmlns="" id="{43C872DB-553E-2FBC-6987-5E915F0F5712}"/>
+                    <a16:creationId xmlns="" xmlns:a16="http://schemas.microsoft.com/office/drawing/2014/main" id="{43C872DB-553E-2FBC-6987-5E915F0F5712}"/>
                   </a:ext>
                 </a:extLst>
               </p:cNvPr>
@@ -18965,7 +19111,7 @@
           <p:cNvPr id="34" name="Rectángulo 33">
             <a:extLst>
               <a:ext uri="{FF2B5EF4-FFF2-40B4-BE49-F238E27FC236}">
-                <a16:creationId xmlns:a16="http://schemas.microsoft.com/office/drawing/2014/main" xmlns="" id="{BD1D1DC0-6D4E-86A2-DF3E-52D95462AA36}"/>
+                <a16:creationId xmlns="" xmlns:a16="http://schemas.microsoft.com/office/drawing/2014/main" id="{BD1D1DC0-6D4E-86A2-DF3E-52D95462AA36}"/>
               </a:ext>
             </a:extLst>
           </p:cNvPr>
@@ -19011,7 +19157,7 @@
           <p:cNvPr id="35" name="Conector recto 34">
             <a:extLst>
               <a:ext uri="{FF2B5EF4-FFF2-40B4-BE49-F238E27FC236}">
-                <a16:creationId xmlns:a16="http://schemas.microsoft.com/office/drawing/2014/main" xmlns="" id="{AACD2680-7136-4104-7901-70530F891E36}"/>
+                <a16:creationId xmlns="" xmlns:a16="http://schemas.microsoft.com/office/drawing/2014/main" id="{AACD2680-7136-4104-7901-70530F891E36}"/>
               </a:ext>
             </a:extLst>
           </p:cNvPr>
@@ -19055,7 +19201,7 @@
           <p:cNvPr id="38" name="Conector recto 37">
             <a:extLst>
               <a:ext uri="{FF2B5EF4-FFF2-40B4-BE49-F238E27FC236}">
-                <a16:creationId xmlns:a16="http://schemas.microsoft.com/office/drawing/2014/main" xmlns="" id="{F554DE12-06EF-0677-439B-C5EAB4671027}"/>
+                <a16:creationId xmlns="" xmlns:a16="http://schemas.microsoft.com/office/drawing/2014/main" id="{F554DE12-06EF-0677-439B-C5EAB4671027}"/>
               </a:ext>
             </a:extLst>
           </p:cNvPr>
@@ -19099,7 +19245,7 @@
           <p:cNvPr id="39" name="Conector recto 38">
             <a:extLst>
               <a:ext uri="{FF2B5EF4-FFF2-40B4-BE49-F238E27FC236}">
-                <a16:creationId xmlns:a16="http://schemas.microsoft.com/office/drawing/2014/main" xmlns="" id="{A0F5EC36-DCCD-EC90-1DF2-60930C5C61B7}"/>
+                <a16:creationId xmlns="" xmlns:a16="http://schemas.microsoft.com/office/drawing/2014/main" id="{A0F5EC36-DCCD-EC90-1DF2-60930C5C61B7}"/>
               </a:ext>
             </a:extLst>
           </p:cNvPr>
@@ -19145,7 +19291,7 @@
               <p:cNvPr id="43" name="CuadroTexto 42">
                 <a:extLst>
                   <a:ext uri="{FF2B5EF4-FFF2-40B4-BE49-F238E27FC236}">
-                    <a16:creationId xmlns:a16="http://schemas.microsoft.com/office/drawing/2014/main" xmlns="" id="{ACFA556C-C2BA-157B-3729-D990E2A3C95E}"/>
+                    <a16:creationId xmlns="" xmlns:a16="http://schemas.microsoft.com/office/drawing/2014/main" id="{ACFA556C-C2BA-157B-3729-D990E2A3C95E}"/>
                   </a:ext>
                 </a:extLst>
               </p:cNvPr>
@@ -19272,7 +19418,7 @@
               <p:cNvPr id="44" name="CuadroTexto 43">
                 <a:extLst>
                   <a:ext uri="{FF2B5EF4-FFF2-40B4-BE49-F238E27FC236}">
-                    <a16:creationId xmlns:a16="http://schemas.microsoft.com/office/drawing/2014/main" xmlns="" id="{16988A87-F30C-FF89-FFA3-416CE2094286}"/>
+                    <a16:creationId xmlns="" xmlns:a16="http://schemas.microsoft.com/office/drawing/2014/main" id="{16988A87-F30C-FF89-FFA3-416CE2094286}"/>
                   </a:ext>
                 </a:extLst>
               </p:cNvPr>
@@ -19600,7 +19746,7 @@
         <p:cNvPr id="1" name="">
           <a:extLst>
             <a:ext uri="{FF2B5EF4-FFF2-40B4-BE49-F238E27FC236}">
-              <a16:creationId xmlns:a16="http://schemas.microsoft.com/office/drawing/2014/main" xmlns="" id="{3EE1A028-1138-C444-7482-74B232A83DC6}"/>
+              <a16:creationId xmlns="" xmlns:a16="http://schemas.microsoft.com/office/drawing/2014/main" id="{3EE1A028-1138-C444-7482-74B232A83DC6}"/>
             </a:ext>
           </a:extLst>
         </p:cNvPr>
@@ -19620,7 +19766,7 @@
           <p:cNvPr id="2" name="Título 1">
             <a:extLst>
               <a:ext uri="{FF2B5EF4-FFF2-40B4-BE49-F238E27FC236}">
-                <a16:creationId xmlns:a16="http://schemas.microsoft.com/office/drawing/2014/main" xmlns="" id="{B1554601-AC38-C717-7D39-E7B3415308F2}"/>
+                <a16:creationId xmlns="" xmlns:a16="http://schemas.microsoft.com/office/drawing/2014/main" id="{B1554601-AC38-C717-7D39-E7B3415308F2}"/>
               </a:ext>
             </a:extLst>
           </p:cNvPr>
@@ -19643,8 +19789,12 @@
                 <a:latin typeface="Times New Roman" panose="02020603050405020304" pitchFamily="18" charset="0"/>
                 <a:cs typeface="Times New Roman" panose="02020603050405020304" pitchFamily="18" charset="0"/>
               </a:rPr>
-              <a:t>Estado del arte</a:t>
+              <a:t>Marco Teórico</a:t>
             </a:r>
+            <a:endParaRPr lang="es-MX" sz="3400" dirty="0">
+              <a:latin typeface="Times New Roman" panose="02020603050405020304" pitchFamily="18" charset="0"/>
+              <a:cs typeface="Times New Roman" panose="02020603050405020304" pitchFamily="18" charset="0"/>
+            </a:endParaRPr>
           </a:p>
         </p:txBody>
       </p:sp>
@@ -19655,7 +19805,7 @@
               <p:cNvPr id="3" name="Marcador de contenido 2">
                 <a:extLst>
                   <a:ext uri="{FF2B5EF4-FFF2-40B4-BE49-F238E27FC236}">
-                    <a16:creationId xmlns:a16="http://schemas.microsoft.com/office/drawing/2014/main" xmlns="" id="{32DBFBD8-0BE6-7BF5-E76B-6672EF6CD383}"/>
+                    <a16:creationId xmlns="" xmlns:a16="http://schemas.microsoft.com/office/drawing/2014/main" id="{32DBFBD8-0BE6-7BF5-E76B-6672EF6CD383}"/>
                   </a:ext>
                 </a:extLst>
               </p:cNvPr>
@@ -19881,7 +20031,7 @@
           <p:cNvPr id="48" name="Grupo 47">
             <a:extLst>
               <a:ext uri="{FF2B5EF4-FFF2-40B4-BE49-F238E27FC236}">
-                <a16:creationId xmlns:a16="http://schemas.microsoft.com/office/drawing/2014/main" xmlns="" id="{A6E9F6B6-0E0E-009F-1588-108C84CDB06A}"/>
+                <a16:creationId xmlns="" xmlns:a16="http://schemas.microsoft.com/office/drawing/2014/main" id="{A6E9F6B6-0E0E-009F-1588-108C84CDB06A}"/>
               </a:ext>
             </a:extLst>
           </p:cNvPr>
@@ -19901,7 +20051,7 @@
             <p:cNvPr id="11" name="Grupo 10">
               <a:extLst>
                 <a:ext uri="{FF2B5EF4-FFF2-40B4-BE49-F238E27FC236}">
-                  <a16:creationId xmlns:a16="http://schemas.microsoft.com/office/drawing/2014/main" xmlns="" id="{9CC24A00-877F-8DD3-84F3-31634A959DE5}"/>
+                  <a16:creationId xmlns="" xmlns:a16="http://schemas.microsoft.com/office/drawing/2014/main" id="{9CC24A00-877F-8DD3-84F3-31634A959DE5}"/>
                 </a:ext>
               </a:extLst>
             </p:cNvPr>
@@ -19921,7 +20071,7 @@
               <p:cNvPr id="7" name="Elipse 6">
                 <a:extLst>
                   <a:ext uri="{FF2B5EF4-FFF2-40B4-BE49-F238E27FC236}">
-                    <a16:creationId xmlns:a16="http://schemas.microsoft.com/office/drawing/2014/main" xmlns="" id="{683A4578-7D06-3414-BD0B-5C3118487E9D}"/>
+                    <a16:creationId xmlns="" xmlns:a16="http://schemas.microsoft.com/office/drawing/2014/main" id="{683A4578-7D06-3414-BD0B-5C3118487E9D}"/>
                   </a:ext>
                 </a:extLst>
               </p:cNvPr>
@@ -19973,7 +20123,7 @@
               <p:cNvPr id="10" name="Elipse 9">
                 <a:extLst>
                   <a:ext uri="{FF2B5EF4-FFF2-40B4-BE49-F238E27FC236}">
-                    <a16:creationId xmlns:a16="http://schemas.microsoft.com/office/drawing/2014/main" xmlns="" id="{9AC5537B-21E3-D703-8884-6D3A88A5DDD4}"/>
+                    <a16:creationId xmlns="" xmlns:a16="http://schemas.microsoft.com/office/drawing/2014/main" id="{9AC5537B-21E3-D703-8884-6D3A88A5DDD4}"/>
                   </a:ext>
                 </a:extLst>
               </p:cNvPr>
@@ -20023,7 +20173,7 @@
             <p:cNvPr id="13" name="Conector recto de flecha 12">
               <a:extLst>
                 <a:ext uri="{FF2B5EF4-FFF2-40B4-BE49-F238E27FC236}">
-                  <a16:creationId xmlns:a16="http://schemas.microsoft.com/office/drawing/2014/main" xmlns="" id="{C8318ADC-763C-743D-3DE6-FA95BE3096D1}"/>
+                  <a16:creationId xmlns="" xmlns:a16="http://schemas.microsoft.com/office/drawing/2014/main" id="{C8318ADC-763C-743D-3DE6-FA95BE3096D1}"/>
                 </a:ext>
               </a:extLst>
             </p:cNvPr>
@@ -20064,7 +20214,7 @@
             <p:cNvPr id="15" name="Conector recto de flecha 14">
               <a:extLst>
                 <a:ext uri="{FF2B5EF4-FFF2-40B4-BE49-F238E27FC236}">
-                  <a16:creationId xmlns:a16="http://schemas.microsoft.com/office/drawing/2014/main" xmlns="" id="{BDF186F1-5FA0-6A35-8735-B4DF89C27C8A}"/>
+                  <a16:creationId xmlns="" xmlns:a16="http://schemas.microsoft.com/office/drawing/2014/main" id="{BDF186F1-5FA0-6A35-8735-B4DF89C27C8A}"/>
                 </a:ext>
               </a:extLst>
             </p:cNvPr>
@@ -20105,7 +20255,7 @@
             <p:cNvPr id="19" name="Conector recto de flecha 18">
               <a:extLst>
                 <a:ext uri="{FF2B5EF4-FFF2-40B4-BE49-F238E27FC236}">
-                  <a16:creationId xmlns:a16="http://schemas.microsoft.com/office/drawing/2014/main" xmlns="" id="{2322A9E0-1674-6C04-0D36-385C2F322DC3}"/>
+                  <a16:creationId xmlns="" xmlns:a16="http://schemas.microsoft.com/office/drawing/2014/main" id="{2322A9E0-1674-6C04-0D36-385C2F322DC3}"/>
                 </a:ext>
               </a:extLst>
             </p:cNvPr>
@@ -20147,7 +20297,7 @@
             <p:cNvPr id="23" name="Conector recto de flecha 22">
               <a:extLst>
                 <a:ext uri="{FF2B5EF4-FFF2-40B4-BE49-F238E27FC236}">
-                  <a16:creationId xmlns:a16="http://schemas.microsoft.com/office/drawing/2014/main" xmlns="" id="{396F2035-2172-AF96-B6D9-053965EEB092}"/>
+                  <a16:creationId xmlns="" xmlns:a16="http://schemas.microsoft.com/office/drawing/2014/main" id="{396F2035-2172-AF96-B6D9-053965EEB092}"/>
                 </a:ext>
               </a:extLst>
             </p:cNvPr>
@@ -20189,7 +20339,7 @@
             <p:cNvPr id="27" name="Conector recto de flecha 26">
               <a:extLst>
                 <a:ext uri="{FF2B5EF4-FFF2-40B4-BE49-F238E27FC236}">
-                  <a16:creationId xmlns:a16="http://schemas.microsoft.com/office/drawing/2014/main" xmlns="" id="{D2FA65A6-12BF-F19B-F2D1-AC3E3044C4B5}"/>
+                  <a16:creationId xmlns="" xmlns:a16="http://schemas.microsoft.com/office/drawing/2014/main" id="{D2FA65A6-12BF-F19B-F2D1-AC3E3044C4B5}"/>
                 </a:ext>
               </a:extLst>
             </p:cNvPr>
@@ -20231,7 +20381,7 @@
             <p:cNvPr id="32" name="Conector recto de flecha 31">
               <a:extLst>
                 <a:ext uri="{FF2B5EF4-FFF2-40B4-BE49-F238E27FC236}">
-                  <a16:creationId xmlns:a16="http://schemas.microsoft.com/office/drawing/2014/main" xmlns="" id="{133649C1-BB8F-6B2B-D5C4-3B7D97EB40C4}"/>
+                  <a16:creationId xmlns="" xmlns:a16="http://schemas.microsoft.com/office/drawing/2014/main" id="{133649C1-BB8F-6B2B-D5C4-3B7D97EB40C4}"/>
                 </a:ext>
               </a:extLst>
             </p:cNvPr>
@@ -20273,7 +20423,7 @@
             <p:cNvPr id="40" name="Conector recto de flecha 39">
               <a:extLst>
                 <a:ext uri="{FF2B5EF4-FFF2-40B4-BE49-F238E27FC236}">
-                  <a16:creationId xmlns:a16="http://schemas.microsoft.com/office/drawing/2014/main" xmlns="" id="{C1E921D8-840D-B937-4486-1A0A5E56BD44}"/>
+                  <a16:creationId xmlns="" xmlns:a16="http://schemas.microsoft.com/office/drawing/2014/main" id="{C1E921D8-840D-B937-4486-1A0A5E56BD44}"/>
                 </a:ext>
               </a:extLst>
             </p:cNvPr>
@@ -20315,7 +20465,7 @@
             <p:cNvPr id="45" name="Conector recto de flecha 44">
               <a:extLst>
                 <a:ext uri="{FF2B5EF4-FFF2-40B4-BE49-F238E27FC236}">
-                  <a16:creationId xmlns:a16="http://schemas.microsoft.com/office/drawing/2014/main" xmlns="" id="{17C7A299-8885-D54C-0DAB-67B31ED4118F}"/>
+                  <a16:creationId xmlns="" xmlns:a16="http://schemas.microsoft.com/office/drawing/2014/main" id="{17C7A299-8885-D54C-0DAB-67B31ED4118F}"/>
                 </a:ext>
               </a:extLst>
             </p:cNvPr>
@@ -20358,7 +20508,7 @@
           <p:cNvPr id="49" name="Grupo 48">
             <a:extLst>
               <a:ext uri="{FF2B5EF4-FFF2-40B4-BE49-F238E27FC236}">
-                <a16:creationId xmlns:a16="http://schemas.microsoft.com/office/drawing/2014/main" xmlns="" id="{57D7CF8D-DCD2-4613-BF7C-52C07C597045}"/>
+                <a16:creationId xmlns="" xmlns:a16="http://schemas.microsoft.com/office/drawing/2014/main" id="{57D7CF8D-DCD2-4613-BF7C-52C07C597045}"/>
               </a:ext>
             </a:extLst>
           </p:cNvPr>
@@ -20378,7 +20528,7 @@
             <p:cNvPr id="50" name="Grupo 49">
               <a:extLst>
                 <a:ext uri="{FF2B5EF4-FFF2-40B4-BE49-F238E27FC236}">
-                  <a16:creationId xmlns:a16="http://schemas.microsoft.com/office/drawing/2014/main" xmlns="" id="{76FF5E40-DFC9-679E-2CCF-FC55CD7D751C}"/>
+                  <a16:creationId xmlns="" xmlns:a16="http://schemas.microsoft.com/office/drawing/2014/main" id="{76FF5E40-DFC9-679E-2CCF-FC55CD7D751C}"/>
                 </a:ext>
               </a:extLst>
             </p:cNvPr>
@@ -20398,7 +20548,7 @@
               <p:cNvPr id="59" name="Elipse 58">
                 <a:extLst>
                   <a:ext uri="{FF2B5EF4-FFF2-40B4-BE49-F238E27FC236}">
-                    <a16:creationId xmlns:a16="http://schemas.microsoft.com/office/drawing/2014/main" xmlns="" id="{03D95388-09F4-662D-9CAF-09C8CD8C5B58}"/>
+                    <a16:creationId xmlns="" xmlns:a16="http://schemas.microsoft.com/office/drawing/2014/main" id="{03D95388-09F4-662D-9CAF-09C8CD8C5B58}"/>
                   </a:ext>
                 </a:extLst>
               </p:cNvPr>
@@ -20455,7 +20605,7 @@
               <p:cNvPr id="60" name="Elipse 59">
                 <a:extLst>
                   <a:ext uri="{FF2B5EF4-FFF2-40B4-BE49-F238E27FC236}">
-                    <a16:creationId xmlns:a16="http://schemas.microsoft.com/office/drawing/2014/main" xmlns="" id="{DBB89719-3B13-6C15-BF86-D37DC770D5D2}"/>
+                    <a16:creationId xmlns="" xmlns:a16="http://schemas.microsoft.com/office/drawing/2014/main" id="{DBB89719-3B13-6C15-BF86-D37DC770D5D2}"/>
                   </a:ext>
                 </a:extLst>
               </p:cNvPr>
@@ -20505,7 +20655,7 @@
             <p:cNvPr id="51" name="Conector recto de flecha 50">
               <a:extLst>
                 <a:ext uri="{FF2B5EF4-FFF2-40B4-BE49-F238E27FC236}">
-                  <a16:creationId xmlns:a16="http://schemas.microsoft.com/office/drawing/2014/main" xmlns="" id="{C41CD6E7-1ADC-B33F-1385-631F88ADF285}"/>
+                  <a16:creationId xmlns="" xmlns:a16="http://schemas.microsoft.com/office/drawing/2014/main" id="{C41CD6E7-1ADC-B33F-1385-631F88ADF285}"/>
                 </a:ext>
               </a:extLst>
             </p:cNvPr>
@@ -20546,7 +20696,7 @@
             <p:cNvPr id="52" name="Conector recto de flecha 51">
               <a:extLst>
                 <a:ext uri="{FF2B5EF4-FFF2-40B4-BE49-F238E27FC236}">
-                  <a16:creationId xmlns:a16="http://schemas.microsoft.com/office/drawing/2014/main" xmlns="" id="{47254287-6AF5-2A49-27D4-BA9D4362C793}"/>
+                  <a16:creationId xmlns="" xmlns:a16="http://schemas.microsoft.com/office/drawing/2014/main" id="{47254287-6AF5-2A49-27D4-BA9D4362C793}"/>
                 </a:ext>
               </a:extLst>
             </p:cNvPr>
@@ -20587,7 +20737,7 @@
             <p:cNvPr id="53" name="Conector recto de flecha 52">
               <a:extLst>
                 <a:ext uri="{FF2B5EF4-FFF2-40B4-BE49-F238E27FC236}">
-                  <a16:creationId xmlns:a16="http://schemas.microsoft.com/office/drawing/2014/main" xmlns="" id="{ED52F063-804C-304E-4004-B1A35D450E98}"/>
+                  <a16:creationId xmlns="" xmlns:a16="http://schemas.microsoft.com/office/drawing/2014/main" id="{ED52F063-804C-304E-4004-B1A35D450E98}"/>
                 </a:ext>
               </a:extLst>
             </p:cNvPr>
@@ -20629,7 +20779,7 @@
             <p:cNvPr id="54" name="Conector recto de flecha 53">
               <a:extLst>
                 <a:ext uri="{FF2B5EF4-FFF2-40B4-BE49-F238E27FC236}">
-                  <a16:creationId xmlns:a16="http://schemas.microsoft.com/office/drawing/2014/main" xmlns="" id="{281AF653-3C47-2D75-BBA3-0DE0EEE6BFE7}"/>
+                  <a16:creationId xmlns="" xmlns:a16="http://schemas.microsoft.com/office/drawing/2014/main" id="{281AF653-3C47-2D75-BBA3-0DE0EEE6BFE7}"/>
                 </a:ext>
               </a:extLst>
             </p:cNvPr>
@@ -20671,7 +20821,7 @@
             <p:cNvPr id="55" name="Conector recto de flecha 54">
               <a:extLst>
                 <a:ext uri="{FF2B5EF4-FFF2-40B4-BE49-F238E27FC236}">
-                  <a16:creationId xmlns:a16="http://schemas.microsoft.com/office/drawing/2014/main" xmlns="" id="{1F7D575C-B1BC-15F6-611C-907C542D4A53}"/>
+                  <a16:creationId xmlns="" xmlns:a16="http://schemas.microsoft.com/office/drawing/2014/main" id="{1F7D575C-B1BC-15F6-611C-907C542D4A53}"/>
                 </a:ext>
               </a:extLst>
             </p:cNvPr>
@@ -20713,7 +20863,7 @@
             <p:cNvPr id="56" name="Conector recto de flecha 55">
               <a:extLst>
                 <a:ext uri="{FF2B5EF4-FFF2-40B4-BE49-F238E27FC236}">
-                  <a16:creationId xmlns:a16="http://schemas.microsoft.com/office/drawing/2014/main" xmlns="" id="{A5E1FB5E-4FDC-2AE0-894D-22C9E512B801}"/>
+                  <a16:creationId xmlns="" xmlns:a16="http://schemas.microsoft.com/office/drawing/2014/main" id="{A5E1FB5E-4FDC-2AE0-894D-22C9E512B801}"/>
                 </a:ext>
               </a:extLst>
             </p:cNvPr>
@@ -20755,7 +20905,7 @@
             <p:cNvPr id="57" name="Conector recto de flecha 56">
               <a:extLst>
                 <a:ext uri="{FF2B5EF4-FFF2-40B4-BE49-F238E27FC236}">
-                  <a16:creationId xmlns:a16="http://schemas.microsoft.com/office/drawing/2014/main" xmlns="" id="{98681D02-91E8-56AA-333C-205AEF6E173B}"/>
+                  <a16:creationId xmlns="" xmlns:a16="http://schemas.microsoft.com/office/drawing/2014/main" id="{98681D02-91E8-56AA-333C-205AEF6E173B}"/>
                 </a:ext>
               </a:extLst>
             </p:cNvPr>
@@ -20797,7 +20947,7 @@
             <p:cNvPr id="58" name="Conector recto de flecha 57">
               <a:extLst>
                 <a:ext uri="{FF2B5EF4-FFF2-40B4-BE49-F238E27FC236}">
-                  <a16:creationId xmlns:a16="http://schemas.microsoft.com/office/drawing/2014/main" xmlns="" id="{6698F533-9AC4-7E78-9A7E-F50427C0772E}"/>
+                  <a16:creationId xmlns="" xmlns:a16="http://schemas.microsoft.com/office/drawing/2014/main" id="{6698F533-9AC4-7E78-9A7E-F50427C0772E}"/>
                 </a:ext>
               </a:extLst>
             </p:cNvPr>
@@ -20842,7 +20992,7 @@
               <p14:cNvPr id="61" name="Entrada de lápiz 60">
                 <a:extLst>
                   <a:ext uri="{FF2B5EF4-FFF2-40B4-BE49-F238E27FC236}">
-                    <a16:creationId xmlns:a16="http://schemas.microsoft.com/office/drawing/2014/main" xmlns="" id="{5F606C9B-B813-AB27-A76A-B626235E29ED}"/>
+                    <a16:creationId xmlns="" xmlns:a16="http://schemas.microsoft.com/office/drawing/2014/main" id="{5F606C9B-B813-AB27-A76A-B626235E29ED}"/>
                   </a:ext>
                 </a:extLst>
               </p14:cNvPr>
@@ -20893,7 +21043,7 @@
               <p14:cNvPr id="62" name="Entrada de lápiz 61">
                 <a:extLst>
                   <a:ext uri="{FF2B5EF4-FFF2-40B4-BE49-F238E27FC236}">
-                    <a16:creationId xmlns:a16="http://schemas.microsoft.com/office/drawing/2014/main" xmlns="" id="{C8FBE21F-90F0-424D-96D2-4D4C55B2EFEA}"/>
+                    <a16:creationId xmlns="" xmlns:a16="http://schemas.microsoft.com/office/drawing/2014/main" id="{C8FBE21F-90F0-424D-96D2-4D4C55B2EFEA}"/>
                   </a:ext>
                 </a:extLst>
               </p14:cNvPr>
@@ -20944,7 +21094,7 @@
               <p14:cNvPr id="63" name="Entrada de lápiz 62">
                 <a:extLst>
                   <a:ext uri="{FF2B5EF4-FFF2-40B4-BE49-F238E27FC236}">
-                    <a16:creationId xmlns:a16="http://schemas.microsoft.com/office/drawing/2014/main" xmlns="" id="{46BE6239-16E2-2CE5-0C52-5A9D36C31885}"/>
+                    <a16:creationId xmlns="" xmlns:a16="http://schemas.microsoft.com/office/drawing/2014/main" id="{46BE6239-16E2-2CE5-0C52-5A9D36C31885}"/>
                   </a:ext>
                 </a:extLst>
               </p14:cNvPr>
@@ -20995,7 +21145,7 @@
               <p14:cNvPr id="64" name="Entrada de lápiz 63">
                 <a:extLst>
                   <a:ext uri="{FF2B5EF4-FFF2-40B4-BE49-F238E27FC236}">
-                    <a16:creationId xmlns:a16="http://schemas.microsoft.com/office/drawing/2014/main" xmlns="" id="{B8671239-130D-2A68-7100-ED048E868722}"/>
+                    <a16:creationId xmlns="" xmlns:a16="http://schemas.microsoft.com/office/drawing/2014/main" id="{B8671239-130D-2A68-7100-ED048E868722}"/>
                   </a:ext>
                 </a:extLst>
               </p14:cNvPr>
@@ -21046,7 +21196,7 @@
               <p14:cNvPr id="65" name="Entrada de lápiz 64">
                 <a:extLst>
                   <a:ext uri="{FF2B5EF4-FFF2-40B4-BE49-F238E27FC236}">
-                    <a16:creationId xmlns:a16="http://schemas.microsoft.com/office/drawing/2014/main" xmlns="" id="{EF3E710C-B0FF-769C-F352-740748E7AC2E}"/>
+                    <a16:creationId xmlns="" xmlns:a16="http://schemas.microsoft.com/office/drawing/2014/main" id="{EF3E710C-B0FF-769C-F352-740748E7AC2E}"/>
                   </a:ext>
                 </a:extLst>
               </p14:cNvPr>
@@ -21097,7 +21247,7 @@
               <p14:cNvPr id="68" name="Entrada de lápiz 67">
                 <a:extLst>
                   <a:ext uri="{FF2B5EF4-FFF2-40B4-BE49-F238E27FC236}">
-                    <a16:creationId xmlns:a16="http://schemas.microsoft.com/office/drawing/2014/main" xmlns="" id="{47249D8F-3481-1E1F-D6FD-EC295AF6678E}"/>
+                    <a16:creationId xmlns="" xmlns:a16="http://schemas.microsoft.com/office/drawing/2014/main" id="{47249D8F-3481-1E1F-D6FD-EC295AF6678E}"/>
                   </a:ext>
                 </a:extLst>
               </p14:cNvPr>
@@ -21148,7 +21298,7 @@
               <p14:cNvPr id="69" name="Entrada de lápiz 68">
                 <a:extLst>
                   <a:ext uri="{FF2B5EF4-FFF2-40B4-BE49-F238E27FC236}">
-                    <a16:creationId xmlns:a16="http://schemas.microsoft.com/office/drawing/2014/main" xmlns="" id="{EC6F2039-C493-4496-ACB0-D68C2C274874}"/>
+                    <a16:creationId xmlns="" xmlns:a16="http://schemas.microsoft.com/office/drawing/2014/main" id="{EC6F2039-C493-4496-ACB0-D68C2C274874}"/>
                   </a:ext>
                 </a:extLst>
               </p14:cNvPr>
@@ -21199,7 +21349,7 @@
               <p14:cNvPr id="70" name="Entrada de lápiz 69">
                 <a:extLst>
                   <a:ext uri="{FF2B5EF4-FFF2-40B4-BE49-F238E27FC236}">
-                    <a16:creationId xmlns:a16="http://schemas.microsoft.com/office/drawing/2014/main" xmlns="" id="{4D57B29B-5AEF-0C95-6B00-CB58F5AB5F02}"/>
+                    <a16:creationId xmlns="" xmlns:a16="http://schemas.microsoft.com/office/drawing/2014/main" id="{4D57B29B-5AEF-0C95-6B00-CB58F5AB5F02}"/>
                   </a:ext>
                 </a:extLst>
               </p14:cNvPr>
@@ -21248,7 +21398,7 @@
           <p:cNvPr id="74" name="Grupo 73">
             <a:extLst>
               <a:ext uri="{FF2B5EF4-FFF2-40B4-BE49-F238E27FC236}">
-                <a16:creationId xmlns:a16="http://schemas.microsoft.com/office/drawing/2014/main" xmlns="" id="{A78D307C-30B2-D673-F2E4-F0AFCA22E19D}"/>
+                <a16:creationId xmlns="" xmlns:a16="http://schemas.microsoft.com/office/drawing/2014/main" id="{A78D307C-30B2-D673-F2E4-F0AFCA22E19D}"/>
               </a:ext>
             </a:extLst>
           </p:cNvPr>
@@ -21270,7 +21420,7 @@
                 <p14:cNvPr id="71" name="Entrada de lápiz 70">
                   <a:extLst>
                     <a:ext uri="{FF2B5EF4-FFF2-40B4-BE49-F238E27FC236}">
-                      <a16:creationId xmlns:a16="http://schemas.microsoft.com/office/drawing/2014/main" xmlns="" id="{373C35D5-1983-AA44-264F-29D2A91B330E}"/>
+                      <a16:creationId xmlns="" xmlns:a16="http://schemas.microsoft.com/office/drawing/2014/main" id="{373C35D5-1983-AA44-264F-29D2A91B330E}"/>
                     </a:ext>
                   </a:extLst>
                 </p14:cNvPr>
@@ -21321,7 +21471,7 @@
                 <p14:cNvPr id="73" name="Entrada de lápiz 72">
                   <a:extLst>
                     <a:ext uri="{FF2B5EF4-FFF2-40B4-BE49-F238E27FC236}">
-                      <a16:creationId xmlns:a16="http://schemas.microsoft.com/office/drawing/2014/main" xmlns="" id="{30F477BA-A462-D9EE-981B-49EE431F66A0}"/>
+                      <a16:creationId xmlns="" xmlns:a16="http://schemas.microsoft.com/office/drawing/2014/main" id="{30F477BA-A462-D9EE-981B-49EE431F66A0}"/>
                     </a:ext>
                   </a:extLst>
                 </p14:cNvPr>
@@ -21373,7 +21523,7 @@
               <p14:cNvPr id="75" name="Entrada de lápiz 74">
                 <a:extLst>
                   <a:ext uri="{FF2B5EF4-FFF2-40B4-BE49-F238E27FC236}">
-                    <a16:creationId xmlns:a16="http://schemas.microsoft.com/office/drawing/2014/main" xmlns="" id="{A6468CA9-DFE5-6F02-6F52-950ED601FBFB}"/>
+                    <a16:creationId xmlns="" xmlns:a16="http://schemas.microsoft.com/office/drawing/2014/main" id="{A6468CA9-DFE5-6F02-6F52-950ED601FBFB}"/>
                   </a:ext>
                 </a:extLst>
               </p14:cNvPr>
@@ -21422,7 +21572,7 @@
           <p:cNvPr id="76" name="CuadroTexto 75">
             <a:extLst>
               <a:ext uri="{FF2B5EF4-FFF2-40B4-BE49-F238E27FC236}">
-                <a16:creationId xmlns:a16="http://schemas.microsoft.com/office/drawing/2014/main" xmlns="" id="{3001B39D-289F-3799-FE00-65CFAB18A7B8}"/>
+                <a16:creationId xmlns="" xmlns:a16="http://schemas.microsoft.com/office/drawing/2014/main" id="{3001B39D-289F-3799-FE00-65CFAB18A7B8}"/>
               </a:ext>
             </a:extLst>
           </p:cNvPr>
@@ -21457,7 +21607,7 @@
           <p:cNvPr id="77" name="CuadroTexto 76">
             <a:extLst>
               <a:ext uri="{FF2B5EF4-FFF2-40B4-BE49-F238E27FC236}">
-                <a16:creationId xmlns:a16="http://schemas.microsoft.com/office/drawing/2014/main" xmlns="" id="{A3949245-3422-5AAC-63E1-71FC5FE116AB}"/>
+                <a16:creationId xmlns="" xmlns:a16="http://schemas.microsoft.com/office/drawing/2014/main" id="{A3949245-3422-5AAC-63E1-71FC5FE116AB}"/>
               </a:ext>
             </a:extLst>
           </p:cNvPr>
@@ -21511,7 +21661,7 @@
         <p:cNvPr id="1" name="">
           <a:extLst>
             <a:ext uri="{FF2B5EF4-FFF2-40B4-BE49-F238E27FC236}">
-              <a16:creationId xmlns:a16="http://schemas.microsoft.com/office/drawing/2014/main" xmlns="" id="{8EF6E3A8-A20F-41FE-CE2F-E41CB9C719DD}"/>
+              <a16:creationId xmlns="" xmlns:a16="http://schemas.microsoft.com/office/drawing/2014/main" id="{8EF6E3A8-A20F-41FE-CE2F-E41CB9C719DD}"/>
             </a:ext>
           </a:extLst>
         </p:cNvPr>
@@ -21531,7 +21681,7 @@
           <p:cNvPr id="2" name="Título 1">
             <a:extLst>
               <a:ext uri="{FF2B5EF4-FFF2-40B4-BE49-F238E27FC236}">
-                <a16:creationId xmlns:a16="http://schemas.microsoft.com/office/drawing/2014/main" xmlns="" id="{C408B789-2790-FA25-6D7A-A13BCD2B733B}"/>
+                <a16:creationId xmlns="" xmlns:a16="http://schemas.microsoft.com/office/drawing/2014/main" id="{C408B789-2790-FA25-6D7A-A13BCD2B733B}"/>
               </a:ext>
             </a:extLst>
           </p:cNvPr>
@@ -21554,8 +21704,12 @@
                 <a:latin typeface="Times New Roman" panose="02020603050405020304" pitchFamily="18" charset="0"/>
                 <a:cs typeface="Times New Roman" panose="02020603050405020304" pitchFamily="18" charset="0"/>
               </a:rPr>
-              <a:t>Estado del arte</a:t>
+              <a:t>Marco Teórico</a:t>
             </a:r>
+            <a:endParaRPr lang="es-MX" sz="3400" dirty="0">
+              <a:latin typeface="Times New Roman" panose="02020603050405020304" pitchFamily="18" charset="0"/>
+              <a:cs typeface="Times New Roman" panose="02020603050405020304" pitchFamily="18" charset="0"/>
+            </a:endParaRPr>
           </a:p>
         </p:txBody>
       </p:sp>
@@ -21566,7 +21720,7 @@
               <p:cNvPr id="3" name="Marcador de contenido 2">
                 <a:extLst>
                   <a:ext uri="{FF2B5EF4-FFF2-40B4-BE49-F238E27FC236}">
-                    <a16:creationId xmlns:a16="http://schemas.microsoft.com/office/drawing/2014/main" xmlns="" id="{B77C90E1-E28C-17D2-D8CA-835C4E9D7B32}"/>
+                    <a16:creationId xmlns="" xmlns:a16="http://schemas.microsoft.com/office/drawing/2014/main" id="{B77C90E1-E28C-17D2-D8CA-835C4E9D7B32}"/>
                   </a:ext>
                 </a:extLst>
               </p:cNvPr>
@@ -21813,7 +21967,7 @@
           <p:cNvPr id="76" name="CuadroTexto 75">
             <a:extLst>
               <a:ext uri="{FF2B5EF4-FFF2-40B4-BE49-F238E27FC236}">
-                <a16:creationId xmlns:a16="http://schemas.microsoft.com/office/drawing/2014/main" xmlns="" id="{85341AD9-73AC-76AD-7FEF-A724F2954B92}"/>
+                <a16:creationId xmlns="" xmlns:a16="http://schemas.microsoft.com/office/drawing/2014/main" id="{85341AD9-73AC-76AD-7FEF-A724F2954B92}"/>
               </a:ext>
             </a:extLst>
           </p:cNvPr>
@@ -21848,7 +22002,7 @@
           <p:cNvPr id="5" name="Imagen 4">
             <a:extLst>
               <a:ext uri="{FF2B5EF4-FFF2-40B4-BE49-F238E27FC236}">
-                <a16:creationId xmlns:a16="http://schemas.microsoft.com/office/drawing/2014/main" xmlns="" id="{EC66955D-A453-81B3-6BF3-7070C457D9DE}"/>
+                <a16:creationId xmlns="" xmlns:a16="http://schemas.microsoft.com/office/drawing/2014/main" id="{EC66955D-A453-81B3-6BF3-7070C457D9DE}"/>
               </a:ext>
             </a:extLst>
           </p:cNvPr>
@@ -21877,7 +22031,7 @@
           <p:cNvPr id="8" name="Conector recto de flecha 7">
             <a:extLst>
               <a:ext uri="{FF2B5EF4-FFF2-40B4-BE49-F238E27FC236}">
-                <a16:creationId xmlns:a16="http://schemas.microsoft.com/office/drawing/2014/main" xmlns="" id="{FFE5B972-5CDF-8667-BE3C-0A1717D33741}"/>
+                <a16:creationId xmlns="" xmlns:a16="http://schemas.microsoft.com/office/drawing/2014/main" id="{FFE5B972-5CDF-8667-BE3C-0A1717D33741}"/>
               </a:ext>
             </a:extLst>
           </p:cNvPr>
@@ -21919,7 +22073,7 @@
           <p:cNvPr id="16" name="CuadroTexto 15">
             <a:extLst>
               <a:ext uri="{FF2B5EF4-FFF2-40B4-BE49-F238E27FC236}">
-                <a16:creationId xmlns:a16="http://schemas.microsoft.com/office/drawing/2014/main" xmlns="" id="{827B3C96-474D-1A78-A316-5C4556A1CFEE}"/>
+                <a16:creationId xmlns="" xmlns:a16="http://schemas.microsoft.com/office/drawing/2014/main" id="{827B3C96-474D-1A78-A316-5C4556A1CFEE}"/>
               </a:ext>
             </a:extLst>
           </p:cNvPr>
@@ -21961,7 +22115,7 @@
           <p:cNvPr id="21" name="Conector recto 20">
             <a:extLst>
               <a:ext uri="{FF2B5EF4-FFF2-40B4-BE49-F238E27FC236}">
-                <a16:creationId xmlns:a16="http://schemas.microsoft.com/office/drawing/2014/main" xmlns="" id="{A2A92B1B-C007-A2D7-0899-602898882524}"/>
+                <a16:creationId xmlns="" xmlns:a16="http://schemas.microsoft.com/office/drawing/2014/main" id="{A2A92B1B-C007-A2D7-0899-602898882524}"/>
               </a:ext>
             </a:extLst>
           </p:cNvPr>
@@ -22002,7 +22156,7 @@
           <p:cNvPr id="25" name="Conector recto 24">
             <a:extLst>
               <a:ext uri="{FF2B5EF4-FFF2-40B4-BE49-F238E27FC236}">
-                <a16:creationId xmlns:a16="http://schemas.microsoft.com/office/drawing/2014/main" xmlns="" id="{1123AA89-3ACE-A3FD-9840-7A5542544E54}"/>
+                <a16:creationId xmlns="" xmlns:a16="http://schemas.microsoft.com/office/drawing/2014/main" id="{1123AA89-3ACE-A3FD-9840-7A5542544E54}"/>
               </a:ext>
             </a:extLst>
           </p:cNvPr>
@@ -22043,7 +22197,7 @@
           <p:cNvPr id="26" name="Conector recto 25">
             <a:extLst>
               <a:ext uri="{FF2B5EF4-FFF2-40B4-BE49-F238E27FC236}">
-                <a16:creationId xmlns:a16="http://schemas.microsoft.com/office/drawing/2014/main" xmlns="" id="{45686287-9191-252C-4861-8E6A7EC50275}"/>
+                <a16:creationId xmlns="" xmlns:a16="http://schemas.microsoft.com/office/drawing/2014/main" id="{45686287-9191-252C-4861-8E6A7EC50275}"/>
               </a:ext>
             </a:extLst>
           </p:cNvPr>
@@ -22082,7 +22236,7 @@
           <p:cNvPr id="30" name="Conector recto 29">
             <a:extLst>
               <a:ext uri="{FF2B5EF4-FFF2-40B4-BE49-F238E27FC236}">
-                <a16:creationId xmlns:a16="http://schemas.microsoft.com/office/drawing/2014/main" xmlns="" id="{ED94BEE9-F032-116F-6106-0861FA8D6690}"/>
+                <a16:creationId xmlns="" xmlns:a16="http://schemas.microsoft.com/office/drawing/2014/main" id="{ED94BEE9-F032-116F-6106-0861FA8D6690}"/>
               </a:ext>
             </a:extLst>
           </p:cNvPr>
@@ -22137,7 +22291,7 @@
         <p:cNvPr id="1" name="">
           <a:extLst>
             <a:ext uri="{FF2B5EF4-FFF2-40B4-BE49-F238E27FC236}">
-              <a16:creationId xmlns:a16="http://schemas.microsoft.com/office/drawing/2014/main" xmlns="" id="{001FAEB8-235F-BFE3-6CF1-1EE0D5D2F79B}"/>
+              <a16:creationId xmlns="" xmlns:a16="http://schemas.microsoft.com/office/drawing/2014/main" id="{001FAEB8-235F-BFE3-6CF1-1EE0D5D2F79B}"/>
             </a:ext>
           </a:extLst>
         </p:cNvPr>
@@ -22157,7 +22311,7 @@
           <p:cNvPr id="2" name="Título 1">
             <a:extLst>
               <a:ext uri="{FF2B5EF4-FFF2-40B4-BE49-F238E27FC236}">
-                <a16:creationId xmlns:a16="http://schemas.microsoft.com/office/drawing/2014/main" xmlns="" id="{8BD85E92-E51D-1409-8BDE-695196A2F71A}"/>
+                <a16:creationId xmlns="" xmlns:a16="http://schemas.microsoft.com/office/drawing/2014/main" id="{8BD85E92-E51D-1409-8BDE-695196A2F71A}"/>
               </a:ext>
             </a:extLst>
           </p:cNvPr>
@@ -22180,8 +22334,12 @@
                 <a:latin typeface="Times New Roman" panose="02020603050405020304" pitchFamily="18" charset="0"/>
                 <a:cs typeface="Times New Roman" panose="02020603050405020304" pitchFamily="18" charset="0"/>
               </a:rPr>
-              <a:t>Estado del arte</a:t>
+              <a:t>Marco Teórico</a:t>
             </a:r>
+            <a:endParaRPr lang="es-MX" sz="3400" dirty="0">
+              <a:latin typeface="Times New Roman" panose="02020603050405020304" pitchFamily="18" charset="0"/>
+              <a:cs typeface="Times New Roman" panose="02020603050405020304" pitchFamily="18" charset="0"/>
+            </a:endParaRPr>
           </a:p>
         </p:txBody>
       </p:sp>
@@ -22190,7 +22348,7 @@
           <p:cNvPr id="3" name="Marcador de contenido 2">
             <a:extLst>
               <a:ext uri="{FF2B5EF4-FFF2-40B4-BE49-F238E27FC236}">
-                <a16:creationId xmlns:a16="http://schemas.microsoft.com/office/drawing/2014/main" xmlns="" id="{5DADD9D4-34ED-A09A-78DE-7B724CB5A8D8}"/>
+                <a16:creationId xmlns="" xmlns:a16="http://schemas.microsoft.com/office/drawing/2014/main" id="{5DADD9D4-34ED-A09A-78DE-7B724CB5A8D8}"/>
               </a:ext>
             </a:extLst>
           </p:cNvPr>
@@ -22233,7 +22391,7 @@
               <p:cNvPr id="10" name="CuadroTexto 9">
                 <a:extLst>
                   <a:ext uri="{FF2B5EF4-FFF2-40B4-BE49-F238E27FC236}">
-                    <a16:creationId xmlns:a16="http://schemas.microsoft.com/office/drawing/2014/main" xmlns="" id="{9E84CA75-77BD-A5E6-8789-CA11B68A5F3B}"/>
+                    <a16:creationId xmlns="" xmlns:a16="http://schemas.microsoft.com/office/drawing/2014/main" id="{9E84CA75-77BD-A5E6-8789-CA11B68A5F3B}"/>
                   </a:ext>
                 </a:extLst>
               </p:cNvPr>
@@ -23403,7 +23561,7 @@
           <p:cNvPr id="36" name="Grupo 35">
             <a:extLst>
               <a:ext uri="{FF2B5EF4-FFF2-40B4-BE49-F238E27FC236}">
-                <a16:creationId xmlns:a16="http://schemas.microsoft.com/office/drawing/2014/main" xmlns="" id="{0CB35D51-5F33-F9CC-8FA9-B719FA06D453}"/>
+                <a16:creationId xmlns="" xmlns:a16="http://schemas.microsoft.com/office/drawing/2014/main" id="{0CB35D51-5F33-F9CC-8FA9-B719FA06D453}"/>
               </a:ext>
             </a:extLst>
           </p:cNvPr>
@@ -23423,7 +23581,7 @@
             <p:cNvPr id="19" name="Grupo 18">
               <a:extLst>
                 <a:ext uri="{FF2B5EF4-FFF2-40B4-BE49-F238E27FC236}">
-                  <a16:creationId xmlns:a16="http://schemas.microsoft.com/office/drawing/2014/main" xmlns="" id="{50B02D32-675D-2262-13AE-6371A58BC9AA}"/>
+                  <a16:creationId xmlns="" xmlns:a16="http://schemas.microsoft.com/office/drawing/2014/main" id="{50B02D32-675D-2262-13AE-6371A58BC9AA}"/>
                 </a:ext>
               </a:extLst>
             </p:cNvPr>
@@ -23443,7 +23601,7 @@
               <p:cNvPr id="30" name="Elipse 29">
                 <a:extLst>
                   <a:ext uri="{FF2B5EF4-FFF2-40B4-BE49-F238E27FC236}">
-                    <a16:creationId xmlns:a16="http://schemas.microsoft.com/office/drawing/2014/main" xmlns="" id="{3D79C08D-A197-42D4-B28C-6E89E5FCEB0E}"/>
+                    <a16:creationId xmlns="" xmlns:a16="http://schemas.microsoft.com/office/drawing/2014/main" id="{3D79C08D-A197-42D4-B28C-6E89E5FCEB0E}"/>
                   </a:ext>
                 </a:extLst>
               </p:cNvPr>
@@ -23489,7 +23647,7 @@
               <p:cNvPr id="31" name="Elipse 30">
                 <a:extLst>
                   <a:ext uri="{FF2B5EF4-FFF2-40B4-BE49-F238E27FC236}">
-                    <a16:creationId xmlns:a16="http://schemas.microsoft.com/office/drawing/2014/main" xmlns="" id="{E9EB805D-62E6-9629-9E5D-FA936909AFF5}"/>
+                    <a16:creationId xmlns="" xmlns:a16="http://schemas.microsoft.com/office/drawing/2014/main" id="{E9EB805D-62E6-9629-9E5D-FA936909AFF5}"/>
                   </a:ext>
                 </a:extLst>
               </p:cNvPr>
@@ -23539,7 +23697,7 @@
             <p:cNvPr id="32" name="Rectángulo 31">
               <a:extLst>
                 <a:ext uri="{FF2B5EF4-FFF2-40B4-BE49-F238E27FC236}">
-                  <a16:creationId xmlns:a16="http://schemas.microsoft.com/office/drawing/2014/main" xmlns="" id="{4A573487-10CB-C0BE-89D2-5399693DDCBA}"/>
+                  <a16:creationId xmlns="" xmlns:a16="http://schemas.microsoft.com/office/drawing/2014/main" id="{4A573487-10CB-C0BE-89D2-5399693DDCBA}"/>
                 </a:ext>
               </a:extLst>
             </p:cNvPr>
@@ -23586,7 +23744,7 @@
           <p:cNvPr id="37" name="Grupo 36">
             <a:extLst>
               <a:ext uri="{FF2B5EF4-FFF2-40B4-BE49-F238E27FC236}">
-                <a16:creationId xmlns:a16="http://schemas.microsoft.com/office/drawing/2014/main" xmlns="" id="{39B1D98E-1049-2F22-16CA-7D13D1909A1C}"/>
+                <a16:creationId xmlns="" xmlns:a16="http://schemas.microsoft.com/office/drawing/2014/main" id="{39B1D98E-1049-2F22-16CA-7D13D1909A1C}"/>
               </a:ext>
             </a:extLst>
           </p:cNvPr>
@@ -23606,7 +23764,7 @@
             <p:cNvPr id="40" name="Grupo 39">
               <a:extLst>
                 <a:ext uri="{FF2B5EF4-FFF2-40B4-BE49-F238E27FC236}">
-                  <a16:creationId xmlns:a16="http://schemas.microsoft.com/office/drawing/2014/main" xmlns="" id="{12A34D48-24EC-0D66-0240-012CFB03DB74}"/>
+                  <a16:creationId xmlns="" xmlns:a16="http://schemas.microsoft.com/office/drawing/2014/main" id="{12A34D48-24EC-0D66-0240-012CFB03DB74}"/>
                 </a:ext>
               </a:extLst>
             </p:cNvPr>
@@ -23626,7 +23784,7 @@
               <p:cNvPr id="42" name="Elipse 41">
                 <a:extLst>
                   <a:ext uri="{FF2B5EF4-FFF2-40B4-BE49-F238E27FC236}">
-                    <a16:creationId xmlns:a16="http://schemas.microsoft.com/office/drawing/2014/main" xmlns="" id="{E224C2A6-F1F2-CC42-6167-D312CC4B4A5F}"/>
+                    <a16:creationId xmlns="" xmlns:a16="http://schemas.microsoft.com/office/drawing/2014/main" id="{E224C2A6-F1F2-CC42-6167-D312CC4B4A5F}"/>
                   </a:ext>
                 </a:extLst>
               </p:cNvPr>
@@ -23672,7 +23830,7 @@
               <p:cNvPr id="44" name="Elipse 43">
                 <a:extLst>
                   <a:ext uri="{FF2B5EF4-FFF2-40B4-BE49-F238E27FC236}">
-                    <a16:creationId xmlns:a16="http://schemas.microsoft.com/office/drawing/2014/main" xmlns="" id="{EC9E1C03-4AD3-1214-71F4-3A0462F71691}"/>
+                    <a16:creationId xmlns="" xmlns:a16="http://schemas.microsoft.com/office/drawing/2014/main" id="{EC9E1C03-4AD3-1214-71F4-3A0462F71691}"/>
                   </a:ext>
                 </a:extLst>
               </p:cNvPr>
@@ -23722,7 +23880,7 @@
             <p:cNvPr id="41" name="Rectángulo 40">
               <a:extLst>
                 <a:ext uri="{FF2B5EF4-FFF2-40B4-BE49-F238E27FC236}">
-                  <a16:creationId xmlns:a16="http://schemas.microsoft.com/office/drawing/2014/main" xmlns="" id="{09B92FA5-437B-93A7-7E92-94EE2A804412}"/>
+                  <a16:creationId xmlns="" xmlns:a16="http://schemas.microsoft.com/office/drawing/2014/main" id="{09B92FA5-437B-93A7-7E92-94EE2A804412}"/>
                 </a:ext>
               </a:extLst>
             </p:cNvPr>
@@ -23777,7 +23935,7 @@
           <p:cNvPr id="45" name="Grupo 44">
             <a:extLst>
               <a:ext uri="{FF2B5EF4-FFF2-40B4-BE49-F238E27FC236}">
-                <a16:creationId xmlns:a16="http://schemas.microsoft.com/office/drawing/2014/main" xmlns="" id="{6AB3828B-44F4-4A8C-3109-838F17D39E99}"/>
+                <a16:creationId xmlns="" xmlns:a16="http://schemas.microsoft.com/office/drawing/2014/main" id="{6AB3828B-44F4-4A8C-3109-838F17D39E99}"/>
               </a:ext>
             </a:extLst>
           </p:cNvPr>
@@ -23797,7 +23955,7 @@
             <p:cNvPr id="46" name="Grupo 45">
               <a:extLst>
                 <a:ext uri="{FF2B5EF4-FFF2-40B4-BE49-F238E27FC236}">
-                  <a16:creationId xmlns:a16="http://schemas.microsoft.com/office/drawing/2014/main" xmlns="" id="{D69BC071-721C-D409-2442-4A0447CB59A7}"/>
+                  <a16:creationId xmlns="" xmlns:a16="http://schemas.microsoft.com/office/drawing/2014/main" id="{D69BC071-721C-D409-2442-4A0447CB59A7}"/>
                 </a:ext>
               </a:extLst>
             </p:cNvPr>
@@ -23817,7 +23975,7 @@
               <p:cNvPr id="48" name="Elipse 47">
                 <a:extLst>
                   <a:ext uri="{FF2B5EF4-FFF2-40B4-BE49-F238E27FC236}">
-                    <a16:creationId xmlns:a16="http://schemas.microsoft.com/office/drawing/2014/main" xmlns="" id="{B1D7482B-3DC7-438F-184E-7B6D1F18E6FF}"/>
+                    <a16:creationId xmlns="" xmlns:a16="http://schemas.microsoft.com/office/drawing/2014/main" id="{B1D7482B-3DC7-438F-184E-7B6D1F18E6FF}"/>
                   </a:ext>
                 </a:extLst>
               </p:cNvPr>
@@ -23866,7 +24024,7 @@
               <p:cNvPr id="49" name="Elipse 48">
                 <a:extLst>
                   <a:ext uri="{FF2B5EF4-FFF2-40B4-BE49-F238E27FC236}">
-                    <a16:creationId xmlns:a16="http://schemas.microsoft.com/office/drawing/2014/main" xmlns="" id="{4D7D1C7A-581A-9D58-9132-F50D66C1DE3E}"/>
+                    <a16:creationId xmlns="" xmlns:a16="http://schemas.microsoft.com/office/drawing/2014/main" id="{4D7D1C7A-581A-9D58-9132-F50D66C1DE3E}"/>
                   </a:ext>
                 </a:extLst>
               </p:cNvPr>
@@ -23916,7 +24074,7 @@
             <p:cNvPr id="47" name="Rectángulo 46">
               <a:extLst>
                 <a:ext uri="{FF2B5EF4-FFF2-40B4-BE49-F238E27FC236}">
-                  <a16:creationId xmlns:a16="http://schemas.microsoft.com/office/drawing/2014/main" xmlns="" id="{1D3A0EF4-1FE8-E0A9-85AD-B9C5B4FDF4CF}"/>
+                  <a16:creationId xmlns="" xmlns:a16="http://schemas.microsoft.com/office/drawing/2014/main" id="{1D3A0EF4-1FE8-E0A9-85AD-B9C5B4FDF4CF}"/>
                 </a:ext>
               </a:extLst>
             </p:cNvPr>
@@ -23963,7 +24121,7 @@
           <p:cNvPr id="50" name="Elipse 49">
             <a:extLst>
               <a:ext uri="{FF2B5EF4-FFF2-40B4-BE49-F238E27FC236}">
-                <a16:creationId xmlns:a16="http://schemas.microsoft.com/office/drawing/2014/main" xmlns="" id="{071A2876-B523-6A0B-72FE-3AE7AB51CE42}"/>
+                <a16:creationId xmlns="" xmlns:a16="http://schemas.microsoft.com/office/drawing/2014/main" id="{071A2876-B523-6A0B-72FE-3AE7AB51CE42}"/>
               </a:ext>
             </a:extLst>
           </p:cNvPr>
@@ -24024,7 +24182,7 @@
           <p:cNvPr id="51" name="Elipse 50">
             <a:extLst>
               <a:ext uri="{FF2B5EF4-FFF2-40B4-BE49-F238E27FC236}">
-                <a16:creationId xmlns:a16="http://schemas.microsoft.com/office/drawing/2014/main" xmlns="" id="{3276C69E-EF12-912E-0644-AB781765031D}"/>
+                <a16:creationId xmlns="" xmlns:a16="http://schemas.microsoft.com/office/drawing/2014/main" id="{3276C69E-EF12-912E-0644-AB781765031D}"/>
               </a:ext>
             </a:extLst>
           </p:cNvPr>
@@ -24085,7 +24243,7 @@
           <p:cNvPr id="52" name="Elipse 51">
             <a:extLst>
               <a:ext uri="{FF2B5EF4-FFF2-40B4-BE49-F238E27FC236}">
-                <a16:creationId xmlns:a16="http://schemas.microsoft.com/office/drawing/2014/main" xmlns="" id="{25F5EAD9-0640-C865-A4BA-01B99E6E9793}"/>
+                <a16:creationId xmlns="" xmlns:a16="http://schemas.microsoft.com/office/drawing/2014/main" id="{25F5EAD9-0640-C865-A4BA-01B99E6E9793}"/>
               </a:ext>
             </a:extLst>
           </p:cNvPr>
@@ -24162,7 +24320,7 @@
         <p:cNvPr id="1" name="">
           <a:extLst>
             <a:ext uri="{FF2B5EF4-FFF2-40B4-BE49-F238E27FC236}">
-              <a16:creationId xmlns:a16="http://schemas.microsoft.com/office/drawing/2014/main" xmlns="" id="{373E9166-F06D-1BDA-3058-6689F24A8B2D}"/>
+              <a16:creationId xmlns="" xmlns:a16="http://schemas.microsoft.com/office/drawing/2014/main" id="{373E9166-F06D-1BDA-3058-6689F24A8B2D}"/>
             </a:ext>
           </a:extLst>
         </p:cNvPr>
@@ -24182,7 +24340,7 @@
           <p:cNvPr id="2" name="Título 1">
             <a:extLst>
               <a:ext uri="{FF2B5EF4-FFF2-40B4-BE49-F238E27FC236}">
-                <a16:creationId xmlns:a16="http://schemas.microsoft.com/office/drawing/2014/main" xmlns="" id="{19676135-9C73-7CEA-A849-661EB03FB5C5}"/>
+                <a16:creationId xmlns="" xmlns:a16="http://schemas.microsoft.com/office/drawing/2014/main" id="{19676135-9C73-7CEA-A849-661EB03FB5C5}"/>
               </a:ext>
             </a:extLst>
           </p:cNvPr>
@@ -24205,8 +24363,12 @@
                 <a:latin typeface="Times New Roman" panose="02020603050405020304" pitchFamily="18" charset="0"/>
                 <a:cs typeface="Times New Roman" panose="02020603050405020304" pitchFamily="18" charset="0"/>
               </a:rPr>
-              <a:t>Estado del arte</a:t>
+              <a:t>Marco Teórico</a:t>
             </a:r>
+            <a:endParaRPr lang="es-MX" sz="3400" dirty="0">
+              <a:latin typeface="Times New Roman" panose="02020603050405020304" pitchFamily="18" charset="0"/>
+              <a:cs typeface="Times New Roman" panose="02020603050405020304" pitchFamily="18" charset="0"/>
+            </a:endParaRPr>
           </a:p>
         </p:txBody>
       </p:sp>
@@ -24215,7 +24377,7 @@
           <p:cNvPr id="3" name="Marcador de contenido 2">
             <a:extLst>
               <a:ext uri="{FF2B5EF4-FFF2-40B4-BE49-F238E27FC236}">
-                <a16:creationId xmlns:a16="http://schemas.microsoft.com/office/drawing/2014/main" xmlns="" id="{BBD21FC4-3055-A691-0C29-D19DAAB4AE16}"/>
+                <a16:creationId xmlns="" xmlns:a16="http://schemas.microsoft.com/office/drawing/2014/main" id="{BBD21FC4-3055-A691-0C29-D19DAAB4AE16}"/>
               </a:ext>
             </a:extLst>
           </p:cNvPr>
@@ -24322,7 +24484,7 @@
               <p:cNvPr id="7" name="Tabla 6">
                 <a:extLst>
                   <a:ext uri="{FF2B5EF4-FFF2-40B4-BE49-F238E27FC236}">
-                    <a16:creationId xmlns:a16="http://schemas.microsoft.com/office/drawing/2014/main" xmlns="" id="{5FAE4B14-C983-221B-CAAC-EE8907FA23B1}"/>
+                    <a16:creationId xmlns="" xmlns:a16="http://schemas.microsoft.com/office/drawing/2014/main" id="{5FAE4B14-C983-221B-CAAC-EE8907FA23B1}"/>
                   </a:ext>
                 </a:extLst>
               </p:cNvPr>
@@ -24351,14 +24513,14 @@
                     <a:gridCol w="1159050">
                       <a:extLst>
                         <a:ext uri="{9D8B030D-6E8A-4147-A177-3AD203B41FA5}">
-                          <a16:colId xmlns:a16="http://schemas.microsoft.com/office/drawing/2014/main" xmlns="" val="2002694834"/>
+                          <a16:colId xmlns="" xmlns:a16="http://schemas.microsoft.com/office/drawing/2014/main" val="2002694834"/>
                         </a:ext>
                       </a:extLst>
                     </a:gridCol>
                     <a:gridCol w="2389876">
                       <a:extLst>
                         <a:ext uri="{9D8B030D-6E8A-4147-A177-3AD203B41FA5}">
-                          <a16:colId xmlns:a16="http://schemas.microsoft.com/office/drawing/2014/main" xmlns="" val="1831911072"/>
+                          <a16:colId xmlns="" xmlns:a16="http://schemas.microsoft.com/office/drawing/2014/main" val="1831911072"/>
                         </a:ext>
                       </a:extLst>
                     </a:gridCol>
@@ -24430,7 +24592,7 @@
                     </a:tc>
                     <a:extLst>
                       <a:ext uri="{0D108BD9-81ED-4DB2-BD59-A6C34878D82A}">
-                        <a16:rowId xmlns:a16="http://schemas.microsoft.com/office/drawing/2014/main" xmlns="" val="180083076"/>
+                        <a16:rowId xmlns="" xmlns:a16="http://schemas.microsoft.com/office/drawing/2014/main" val="180083076"/>
                       </a:ext>
                     </a:extLst>
                   </a:tr>
@@ -24553,7 +24715,7 @@
                     </a:tc>
                     <a:extLst>
                       <a:ext uri="{0D108BD9-81ED-4DB2-BD59-A6C34878D82A}">
-                        <a16:rowId xmlns:a16="http://schemas.microsoft.com/office/drawing/2014/main" xmlns="" val="3047016321"/>
+                        <a16:rowId xmlns="" xmlns:a16="http://schemas.microsoft.com/office/drawing/2014/main" val="3047016321"/>
                       </a:ext>
                     </a:extLst>
                   </a:tr>
@@ -24645,7 +24807,7 @@
                     </a:tc>
                     <a:extLst>
                       <a:ext uri="{0D108BD9-81ED-4DB2-BD59-A6C34878D82A}">
-                        <a16:rowId xmlns:a16="http://schemas.microsoft.com/office/drawing/2014/main" xmlns="" val="839298315"/>
+                        <a16:rowId xmlns="" xmlns:a16="http://schemas.microsoft.com/office/drawing/2014/main" val="839298315"/>
                       </a:ext>
                     </a:extLst>
                   </a:tr>
@@ -24737,7 +24899,7 @@
                     </a:tc>
                     <a:extLst>
                       <a:ext uri="{0D108BD9-81ED-4DB2-BD59-A6C34878D82A}">
-                        <a16:rowId xmlns:a16="http://schemas.microsoft.com/office/drawing/2014/main" xmlns="" val="2325501072"/>
+                        <a16:rowId xmlns="" xmlns:a16="http://schemas.microsoft.com/office/drawing/2014/main" val="2325501072"/>
                       </a:ext>
                     </a:extLst>
                   </a:tr>
@@ -24784,7 +24946,7 @@
                     </a:tc>
                     <a:extLst>
                       <a:ext uri="{0D108BD9-81ED-4DB2-BD59-A6C34878D82A}">
-                        <a16:rowId xmlns:a16="http://schemas.microsoft.com/office/drawing/2014/main" xmlns="" val="2300178154"/>
+                        <a16:rowId xmlns="" xmlns:a16="http://schemas.microsoft.com/office/drawing/2014/main" val="2300178154"/>
                       </a:ext>
                     </a:extLst>
                   </a:tr>
@@ -24856,7 +25018,7 @@
                     </a:tc>
                     <a:extLst>
                       <a:ext uri="{0D108BD9-81ED-4DB2-BD59-A6C34878D82A}">
-                        <a16:rowId xmlns:a16="http://schemas.microsoft.com/office/drawing/2014/main" xmlns="" val="3725229813"/>
+                        <a16:rowId xmlns="" xmlns:a16="http://schemas.microsoft.com/office/drawing/2014/main" val="3725229813"/>
                       </a:ext>
                     </a:extLst>
                   </a:tr>
@@ -24922,7 +25084,7 @@
                     </a:tc>
                     <a:extLst>
                       <a:ext uri="{0D108BD9-81ED-4DB2-BD59-A6C34878D82A}">
-                        <a16:rowId xmlns:a16="http://schemas.microsoft.com/office/drawing/2014/main" xmlns="" val="3644019166"/>
+                        <a16:rowId xmlns="" xmlns:a16="http://schemas.microsoft.com/office/drawing/2014/main" val="3644019166"/>
                       </a:ext>
                     </a:extLst>
                   </a:tr>
@@ -24988,7 +25150,7 @@
                     </a:tc>
                     <a:extLst>
                       <a:ext uri="{0D108BD9-81ED-4DB2-BD59-A6C34878D82A}">
-                        <a16:rowId xmlns:a16="http://schemas.microsoft.com/office/drawing/2014/main" xmlns="" val="693629496"/>
+                        <a16:rowId xmlns="" xmlns:a16="http://schemas.microsoft.com/office/drawing/2014/main" val="693629496"/>
                       </a:ext>
                     </a:extLst>
                   </a:tr>
@@ -25099,7 +25261,7 @@
                     </a:tc>
                     <a:extLst>
                       <a:ext uri="{0D108BD9-81ED-4DB2-BD59-A6C34878D82A}">
-                        <a16:rowId xmlns:a16="http://schemas.microsoft.com/office/drawing/2014/main" xmlns="" val="2630223487"/>
+                        <a16:rowId xmlns="" xmlns:a16="http://schemas.microsoft.com/office/drawing/2014/main" val="2630223487"/>
                       </a:ext>
                     </a:extLst>
                   </a:tr>
@@ -25160,7 +25322,7 @@
                     </a:tc>
                     <a:extLst>
                       <a:ext uri="{0D108BD9-81ED-4DB2-BD59-A6C34878D82A}">
-                        <a16:rowId xmlns:a16="http://schemas.microsoft.com/office/drawing/2014/main" xmlns="" val="704981190"/>
+                        <a16:rowId xmlns="" xmlns:a16="http://schemas.microsoft.com/office/drawing/2014/main" val="704981190"/>
                       </a:ext>
                     </a:extLst>
                   </a:tr>
@@ -25713,7 +25875,7 @@
               <p:cNvPr id="10" name="CuadroTexto 9">
                 <a:extLst>
                   <a:ext uri="{FF2B5EF4-FFF2-40B4-BE49-F238E27FC236}">
-                    <a16:creationId xmlns:a16="http://schemas.microsoft.com/office/drawing/2014/main" xmlns="" id="{EB8D88CF-3781-2E52-2248-F7A8D1256E11}"/>
+                    <a16:creationId xmlns="" xmlns:a16="http://schemas.microsoft.com/office/drawing/2014/main" id="{EB8D88CF-3781-2E52-2248-F7A8D1256E11}"/>
                   </a:ext>
                 </a:extLst>
               </p:cNvPr>
@@ -26315,7 +26477,7 @@
           <p:cNvPr id="11" name="Abrir llave 10">
             <a:extLst>
               <a:ext uri="{FF2B5EF4-FFF2-40B4-BE49-F238E27FC236}">
-                <a16:creationId xmlns:a16="http://schemas.microsoft.com/office/drawing/2014/main" xmlns="" id="{78F781D1-2D3A-739B-8B5F-E05B0625A185}"/>
+                <a16:creationId xmlns="" xmlns:a16="http://schemas.microsoft.com/office/drawing/2014/main" id="{78F781D1-2D3A-739B-8B5F-E05B0625A185}"/>
               </a:ext>
             </a:extLst>
           </p:cNvPr>
@@ -26359,7 +26521,7 @@
           <p:cNvPr id="12" name="Abrir llave 11">
             <a:extLst>
               <a:ext uri="{FF2B5EF4-FFF2-40B4-BE49-F238E27FC236}">
-                <a16:creationId xmlns:a16="http://schemas.microsoft.com/office/drawing/2014/main" xmlns="" id="{BA7CB6ED-A2FD-6AA9-8D97-607586E664B9}"/>
+                <a16:creationId xmlns="" xmlns:a16="http://schemas.microsoft.com/office/drawing/2014/main" id="{BA7CB6ED-A2FD-6AA9-8D97-607586E664B9}"/>
               </a:ext>
             </a:extLst>
           </p:cNvPr>
@@ -26403,7 +26565,7 @@
           <p:cNvPr id="13" name="CuadroTexto 12">
             <a:extLst>
               <a:ext uri="{FF2B5EF4-FFF2-40B4-BE49-F238E27FC236}">
-                <a16:creationId xmlns:a16="http://schemas.microsoft.com/office/drawing/2014/main" xmlns="" id="{D06B4813-FAC5-8AEF-6F6F-7825340048EC}"/>
+                <a16:creationId xmlns="" xmlns:a16="http://schemas.microsoft.com/office/drawing/2014/main" id="{D06B4813-FAC5-8AEF-6F6F-7825340048EC}"/>
               </a:ext>
             </a:extLst>
           </p:cNvPr>
@@ -26438,7 +26600,7 @@
           <p:cNvPr id="14" name="CuadroTexto 13">
             <a:extLst>
               <a:ext uri="{FF2B5EF4-FFF2-40B4-BE49-F238E27FC236}">
-                <a16:creationId xmlns:a16="http://schemas.microsoft.com/office/drawing/2014/main" xmlns="" id="{2D084D82-3BD1-347D-82D6-A0C47CC9379D}"/>
+                <a16:creationId xmlns="" xmlns:a16="http://schemas.microsoft.com/office/drawing/2014/main" id="{2D084D82-3BD1-347D-82D6-A0C47CC9379D}"/>
               </a:ext>
             </a:extLst>
           </p:cNvPr>
@@ -26489,7 +26651,7 @@
         <p:cNvPr id="1" name="">
           <a:extLst>
             <a:ext uri="{FF2B5EF4-FFF2-40B4-BE49-F238E27FC236}">
-              <a16:creationId xmlns:a16="http://schemas.microsoft.com/office/drawing/2014/main" xmlns="" id="{037E6E0F-E2C6-46AC-C179-61DED6A5A2E2}"/>
+              <a16:creationId xmlns="" xmlns:a16="http://schemas.microsoft.com/office/drawing/2014/main" id="{037E6E0F-E2C6-46AC-C179-61DED6A5A2E2}"/>
             </a:ext>
           </a:extLst>
         </p:cNvPr>
@@ -26509,7 +26671,7 @@
           <p:cNvPr id="2" name="Título 1">
             <a:extLst>
               <a:ext uri="{FF2B5EF4-FFF2-40B4-BE49-F238E27FC236}">
-                <a16:creationId xmlns:a16="http://schemas.microsoft.com/office/drawing/2014/main" xmlns="" id="{2C1F3DEF-ECB9-332B-0466-50C72B03EC10}"/>
+                <a16:creationId xmlns="" xmlns:a16="http://schemas.microsoft.com/office/drawing/2014/main" id="{2C1F3DEF-ECB9-332B-0466-50C72B03EC10}"/>
               </a:ext>
             </a:extLst>
           </p:cNvPr>
@@ -26532,8 +26694,12 @@
                 <a:latin typeface="Times New Roman" panose="02020603050405020304" pitchFamily="18" charset="0"/>
                 <a:cs typeface="Times New Roman" panose="02020603050405020304" pitchFamily="18" charset="0"/>
               </a:rPr>
-              <a:t>Estado del arte</a:t>
+              <a:t>Marco Teórico</a:t>
             </a:r>
+            <a:endParaRPr lang="es-MX" sz="3400" dirty="0">
+              <a:latin typeface="Times New Roman" panose="02020603050405020304" pitchFamily="18" charset="0"/>
+              <a:cs typeface="Times New Roman" panose="02020603050405020304" pitchFamily="18" charset="0"/>
+            </a:endParaRPr>
           </a:p>
         </p:txBody>
       </p:sp>
@@ -26544,7 +26710,7 @@
               <p:cNvPr id="3" name="Marcador de contenido 2">
                 <a:extLst>
                   <a:ext uri="{FF2B5EF4-FFF2-40B4-BE49-F238E27FC236}">
-                    <a16:creationId xmlns:a16="http://schemas.microsoft.com/office/drawing/2014/main" xmlns="" id="{E47C5000-3649-D7BB-8C9F-908F7A56CCEE}"/>
+                    <a16:creationId xmlns="" xmlns:a16="http://schemas.microsoft.com/office/drawing/2014/main" id="{E47C5000-3649-D7BB-8C9F-908F7A56CCEE}"/>
                   </a:ext>
                 </a:extLst>
               </p:cNvPr>
@@ -26760,7 +26926,7 @@
               <p:cNvPr id="10" name="CuadroTexto 9">
                 <a:extLst>
                   <a:ext uri="{FF2B5EF4-FFF2-40B4-BE49-F238E27FC236}">
-                    <a16:creationId xmlns:a16="http://schemas.microsoft.com/office/drawing/2014/main" xmlns="" id="{4EC9B546-838D-8A31-FE27-521AF264E985}"/>
+                    <a16:creationId xmlns="" xmlns:a16="http://schemas.microsoft.com/office/drawing/2014/main" id="{4EC9B546-838D-8A31-FE27-521AF264E985}"/>
                   </a:ext>
                 </a:extLst>
               </p:cNvPr>
@@ -27357,7 +27523,7 @@
           <p:cNvPr id="11" name="Abrir llave 10">
             <a:extLst>
               <a:ext uri="{FF2B5EF4-FFF2-40B4-BE49-F238E27FC236}">
-                <a16:creationId xmlns:a16="http://schemas.microsoft.com/office/drawing/2014/main" xmlns="" id="{700A52E3-D599-14DB-F372-95B30F4E1EA4}"/>
+                <a16:creationId xmlns="" xmlns:a16="http://schemas.microsoft.com/office/drawing/2014/main" id="{700A52E3-D599-14DB-F372-95B30F4E1EA4}"/>
               </a:ext>
             </a:extLst>
           </p:cNvPr>
@@ -27401,7 +27567,7 @@
           <p:cNvPr id="12" name="Abrir llave 11">
             <a:extLst>
               <a:ext uri="{FF2B5EF4-FFF2-40B4-BE49-F238E27FC236}">
-                <a16:creationId xmlns:a16="http://schemas.microsoft.com/office/drawing/2014/main" xmlns="" id="{8BF49794-6FE1-9A04-B38D-02E812971C9B}"/>
+                <a16:creationId xmlns="" xmlns:a16="http://schemas.microsoft.com/office/drawing/2014/main" id="{8BF49794-6FE1-9A04-B38D-02E812971C9B}"/>
               </a:ext>
             </a:extLst>
           </p:cNvPr>
@@ -27445,7 +27611,7 @@
           <p:cNvPr id="13" name="CuadroTexto 12">
             <a:extLst>
               <a:ext uri="{FF2B5EF4-FFF2-40B4-BE49-F238E27FC236}">
-                <a16:creationId xmlns:a16="http://schemas.microsoft.com/office/drawing/2014/main" xmlns="" id="{18496643-F82F-739D-9BAA-E5B36EC64F59}"/>
+                <a16:creationId xmlns="" xmlns:a16="http://schemas.microsoft.com/office/drawing/2014/main" id="{18496643-F82F-739D-9BAA-E5B36EC64F59}"/>
               </a:ext>
             </a:extLst>
           </p:cNvPr>
@@ -27480,7 +27646,7 @@
           <p:cNvPr id="14" name="CuadroTexto 13">
             <a:extLst>
               <a:ext uri="{FF2B5EF4-FFF2-40B4-BE49-F238E27FC236}">
-                <a16:creationId xmlns:a16="http://schemas.microsoft.com/office/drawing/2014/main" xmlns="" id="{1745AE60-80CC-7D9B-A46F-839547A8762A}"/>
+                <a16:creationId xmlns="" xmlns:a16="http://schemas.microsoft.com/office/drawing/2014/main" id="{1745AE60-80CC-7D9B-A46F-839547A8762A}"/>
               </a:ext>
             </a:extLst>
           </p:cNvPr>
@@ -27517,7 +27683,7 @@
               <p:cNvPr id="4" name="CuadroTexto 3">
                 <a:extLst>
                   <a:ext uri="{FF2B5EF4-FFF2-40B4-BE49-F238E27FC236}">
-                    <a16:creationId xmlns:a16="http://schemas.microsoft.com/office/drawing/2014/main" xmlns="" id="{9189F0BF-11D0-B233-13F8-7089C6D4AB1A}"/>
+                    <a16:creationId xmlns="" xmlns:a16="http://schemas.microsoft.com/office/drawing/2014/main" id="{9189F0BF-11D0-B233-13F8-7089C6D4AB1A}"/>
                   </a:ext>
                 </a:extLst>
               </p:cNvPr>
@@ -27637,7 +27803,7 @@
               <p:cNvPr id="5" name="CuadroTexto 4">
                 <a:extLst>
                   <a:ext uri="{FF2B5EF4-FFF2-40B4-BE49-F238E27FC236}">
-                    <a16:creationId xmlns:a16="http://schemas.microsoft.com/office/drawing/2014/main" xmlns="" id="{0BF7FC9D-C50F-7411-DC6E-05C87E35B77B}"/>
+                    <a16:creationId xmlns="" xmlns:a16="http://schemas.microsoft.com/office/drawing/2014/main" id="{0BF7FC9D-C50F-7411-DC6E-05C87E35B77B}"/>
                   </a:ext>
                 </a:extLst>
               </p:cNvPr>
@@ -27887,7 +28053,7 @@
           <p:cNvPr id="2" name="Título 1">
             <a:extLst>
               <a:ext uri="{FF2B5EF4-FFF2-40B4-BE49-F238E27FC236}">
-                <a16:creationId xmlns:a16="http://schemas.microsoft.com/office/drawing/2014/main" xmlns="" id="{7C97405F-E812-8ECA-0FBF-DE395633D086}"/>
+                <a16:creationId xmlns="" xmlns:a16="http://schemas.microsoft.com/office/drawing/2014/main" id="{7C97405F-E812-8ECA-0FBF-DE395633D086}"/>
               </a:ext>
             </a:extLst>
           </p:cNvPr>
@@ -27920,7 +28086,7 @@
           <p:cNvPr id="3" name="Marcador de contenido 2">
             <a:extLst>
               <a:ext uri="{FF2B5EF4-FFF2-40B4-BE49-F238E27FC236}">
-                <a16:creationId xmlns:a16="http://schemas.microsoft.com/office/drawing/2014/main" xmlns="" id="{4895F9A4-5583-A4D7-2C26-2C99E36AFD03}"/>
+                <a16:creationId xmlns="" xmlns:a16="http://schemas.microsoft.com/office/drawing/2014/main" id="{4895F9A4-5583-A4D7-2C26-2C99E36AFD03}"/>
               </a:ext>
             </a:extLst>
           </p:cNvPr>
@@ -27948,11 +28114,11 @@
               <a:buAutoNum type="romanUcPeriod"/>
             </a:pPr>
             <a:r>
-              <a:rPr lang="es-MX" sz="2400" dirty="0">
+              <a:rPr lang="es-MX" sz="2400" dirty="0" smtClean="0">
                 <a:latin typeface="Times New Roman" panose="02020603050405020304" pitchFamily="18" charset="0"/>
                 <a:cs typeface="Times New Roman" panose="02020603050405020304" pitchFamily="18" charset="0"/>
               </a:rPr>
-              <a:t>Resumen ejecutivo </a:t>
+              <a:t>Resumen</a:t>
             </a:r>
           </a:p>
           <a:p>
@@ -27961,12 +28127,16 @@
               <a:buAutoNum type="romanUcPeriod"/>
             </a:pPr>
             <a:r>
-              <a:rPr lang="es-MX" sz="2400" dirty="0">
+              <a:rPr lang="es-MX" sz="2400" dirty="0" smtClean="0">
                 <a:latin typeface="Times New Roman" panose="02020603050405020304" pitchFamily="18" charset="0"/>
                 <a:cs typeface="Times New Roman" panose="02020603050405020304" pitchFamily="18" charset="0"/>
               </a:rPr>
               <a:t>Antecedentes</a:t>
             </a:r>
+            <a:endParaRPr lang="es-MX" sz="2400" dirty="0">
+              <a:latin typeface="Times New Roman" panose="02020603050405020304" pitchFamily="18" charset="0"/>
+              <a:cs typeface="Times New Roman" panose="02020603050405020304" pitchFamily="18" charset="0"/>
+            </a:endParaRPr>
           </a:p>
           <a:p>
             <a:pPr marL="571500" indent="-571500">
@@ -27974,12 +28144,40 @@
               <a:buAutoNum type="romanUcPeriod"/>
             </a:pPr>
             <a:r>
+              <a:rPr lang="es-MX" sz="2400" dirty="0" smtClean="0">
+                <a:latin typeface="Times New Roman" panose="02020603050405020304" pitchFamily="18" charset="0"/>
+                <a:cs typeface="Times New Roman" panose="02020603050405020304" pitchFamily="18" charset="0"/>
+              </a:rPr>
+              <a:t>Estado </a:t>
+            </a:r>
+            <a:r>
               <a:rPr lang="es-MX" sz="2400" dirty="0">
                 <a:latin typeface="Times New Roman" panose="02020603050405020304" pitchFamily="18" charset="0"/>
                 <a:cs typeface="Times New Roman" panose="02020603050405020304" pitchFamily="18" charset="0"/>
               </a:rPr>
-              <a:t>Estado del arte </a:t>
+              <a:t>del arte </a:t>
             </a:r>
+            <a:endParaRPr lang="es-MX" sz="2400" dirty="0" smtClean="0">
+              <a:latin typeface="Times New Roman" panose="02020603050405020304" pitchFamily="18" charset="0"/>
+              <a:cs typeface="Times New Roman" panose="02020603050405020304" pitchFamily="18" charset="0"/>
+            </a:endParaRPr>
+          </a:p>
+          <a:p>
+            <a:pPr marL="571500" indent="-571500">
+              <a:buFont typeface="+mj-lt"/>
+              <a:buAutoNum type="romanUcPeriod"/>
+            </a:pPr>
+            <a:r>
+              <a:rPr lang="es-MX" sz="2400" dirty="0" smtClean="0">
+                <a:latin typeface="Times New Roman" panose="02020603050405020304" pitchFamily="18" charset="0"/>
+                <a:cs typeface="Times New Roman" panose="02020603050405020304" pitchFamily="18" charset="0"/>
+              </a:rPr>
+              <a:t>Marco teórico</a:t>
+            </a:r>
+            <a:endParaRPr lang="es-MX" sz="2400" dirty="0">
+              <a:latin typeface="Times New Roman" panose="02020603050405020304" pitchFamily="18" charset="0"/>
+              <a:cs typeface="Times New Roman" panose="02020603050405020304" pitchFamily="18" charset="0"/>
+            </a:endParaRPr>
           </a:p>
           <a:p>
             <a:pPr marL="571500" indent="-571500">
@@ -28076,7 +28274,7 @@
           <p:cNvPr id="11" name="Imagen 10">
             <a:extLst>
               <a:ext uri="{FF2B5EF4-FFF2-40B4-BE49-F238E27FC236}">
-                <a16:creationId xmlns:a16="http://schemas.microsoft.com/office/drawing/2014/main" xmlns="" id="{0D66D670-FACF-9D43-855E-DD4781E3E832}"/>
+                <a16:creationId xmlns="" xmlns:a16="http://schemas.microsoft.com/office/drawing/2014/main" id="{0D66D670-FACF-9D43-855E-DD4781E3E832}"/>
               </a:ext>
             </a:extLst>
           </p:cNvPr>
@@ -28086,7 +28284,7 @@
           <p:nvPr/>
         </p:nvPicPr>
         <p:blipFill>
-          <a:blip r:embed="rId2"/>
+          <a:blip r:embed="rId3"/>
           <a:srcRect l="15844" t="4523" r="73930"/>
           <a:stretch/>
         </p:blipFill>
@@ -28121,7 +28319,7 @@
         <p:cNvPr id="1" name="">
           <a:extLst>
             <a:ext uri="{FF2B5EF4-FFF2-40B4-BE49-F238E27FC236}">
-              <a16:creationId xmlns:a16="http://schemas.microsoft.com/office/drawing/2014/main" xmlns="" id="{7DE8187A-AC8C-8F50-8227-8C54EE546935}"/>
+              <a16:creationId xmlns="" xmlns:a16="http://schemas.microsoft.com/office/drawing/2014/main" id="{7DE8187A-AC8C-8F50-8227-8C54EE546935}"/>
             </a:ext>
           </a:extLst>
         </p:cNvPr>
@@ -28141,7 +28339,7 @@
           <p:cNvPr id="2" name="Título 1">
             <a:extLst>
               <a:ext uri="{FF2B5EF4-FFF2-40B4-BE49-F238E27FC236}">
-                <a16:creationId xmlns:a16="http://schemas.microsoft.com/office/drawing/2014/main" xmlns="" id="{98EC0236-D3A6-A3F8-3561-E49E7DD877FB}"/>
+                <a16:creationId xmlns="" xmlns:a16="http://schemas.microsoft.com/office/drawing/2014/main" id="{98EC0236-D3A6-A3F8-3561-E49E7DD877FB}"/>
               </a:ext>
             </a:extLst>
           </p:cNvPr>
@@ -28164,8 +28362,12 @@
                 <a:latin typeface="Times New Roman" panose="02020603050405020304" pitchFamily="18" charset="0"/>
                 <a:cs typeface="Times New Roman" panose="02020603050405020304" pitchFamily="18" charset="0"/>
               </a:rPr>
-              <a:t>Estado del arte</a:t>
+              <a:t>Marco Teórico</a:t>
             </a:r>
+            <a:endParaRPr lang="es-MX" sz="3400" dirty="0">
+              <a:latin typeface="Times New Roman" panose="02020603050405020304" pitchFamily="18" charset="0"/>
+              <a:cs typeface="Times New Roman" panose="02020603050405020304" pitchFamily="18" charset="0"/>
+            </a:endParaRPr>
           </a:p>
         </p:txBody>
       </p:sp>
@@ -28176,7 +28378,7 @@
               <p:cNvPr id="3" name="Marcador de contenido 2">
                 <a:extLst>
                   <a:ext uri="{FF2B5EF4-FFF2-40B4-BE49-F238E27FC236}">
-                    <a16:creationId xmlns:a16="http://schemas.microsoft.com/office/drawing/2014/main" xmlns="" id="{C70A1B2C-DFC1-80F9-36F4-F2F7301F4104}"/>
+                    <a16:creationId xmlns="" xmlns:a16="http://schemas.microsoft.com/office/drawing/2014/main" id="{C70A1B2C-DFC1-80F9-36F4-F2F7301F4104}"/>
                   </a:ext>
                 </a:extLst>
               </p:cNvPr>
@@ -28410,7 +28612,7 @@
               <p:cNvPr id="6" name="CuadroTexto 5">
                 <a:extLst>
                   <a:ext uri="{FF2B5EF4-FFF2-40B4-BE49-F238E27FC236}">
-                    <a16:creationId xmlns:a16="http://schemas.microsoft.com/office/drawing/2014/main" xmlns="" id="{410BBDC9-E3F1-2002-B2C7-9704710BA29F}"/>
+                    <a16:creationId xmlns="" xmlns:a16="http://schemas.microsoft.com/office/drawing/2014/main" id="{410BBDC9-E3F1-2002-B2C7-9704710BA29F}"/>
                   </a:ext>
                 </a:extLst>
               </p:cNvPr>
@@ -28640,7 +28842,7 @@
           <p:cNvPr id="9" name="CuadroTexto 8">
             <a:extLst>
               <a:ext uri="{FF2B5EF4-FFF2-40B4-BE49-F238E27FC236}">
-                <a16:creationId xmlns:a16="http://schemas.microsoft.com/office/drawing/2014/main" xmlns="" id="{47EF9DBC-CB34-DCDE-DD74-4991A2A483C1}"/>
+                <a16:creationId xmlns="" xmlns:a16="http://schemas.microsoft.com/office/drawing/2014/main" id="{47EF9DBC-CB34-DCDE-DD74-4991A2A483C1}"/>
               </a:ext>
             </a:extLst>
           </p:cNvPr>
@@ -28675,7 +28877,7 @@
           <p:cNvPr id="15" name="CuadroTexto 14">
             <a:extLst>
               <a:ext uri="{FF2B5EF4-FFF2-40B4-BE49-F238E27FC236}">
-                <a16:creationId xmlns:a16="http://schemas.microsoft.com/office/drawing/2014/main" xmlns="" id="{C6F6B4B7-46A1-3CE5-B7D4-6C313AE0EAF2}"/>
+                <a16:creationId xmlns="" xmlns:a16="http://schemas.microsoft.com/office/drawing/2014/main" id="{C6F6B4B7-46A1-3CE5-B7D4-6C313AE0EAF2}"/>
               </a:ext>
             </a:extLst>
           </p:cNvPr>
@@ -28712,7 +28914,7 @@
               <p:cNvPr id="16" name="CuadroTexto 15">
                 <a:extLst>
                   <a:ext uri="{FF2B5EF4-FFF2-40B4-BE49-F238E27FC236}">
-                    <a16:creationId xmlns:a16="http://schemas.microsoft.com/office/drawing/2014/main" xmlns="" id="{02D32BC2-C1F3-35ED-0933-68D1476B532A}"/>
+                    <a16:creationId xmlns="" xmlns:a16="http://schemas.microsoft.com/office/drawing/2014/main" id="{02D32BC2-C1F3-35ED-0933-68D1476B532A}"/>
                   </a:ext>
                 </a:extLst>
               </p:cNvPr>
@@ -29238,7 +29440,7 @@
           <p:cNvPr id="18" name="Conector recto de flecha 17">
             <a:extLst>
               <a:ext uri="{FF2B5EF4-FFF2-40B4-BE49-F238E27FC236}">
-                <a16:creationId xmlns:a16="http://schemas.microsoft.com/office/drawing/2014/main" xmlns="" id="{0E9BFD8F-6B3E-26EE-2BF1-6407B0B47A58}"/>
+                <a16:creationId xmlns="" xmlns:a16="http://schemas.microsoft.com/office/drawing/2014/main" id="{0E9BFD8F-6B3E-26EE-2BF1-6407B0B47A58}"/>
               </a:ext>
             </a:extLst>
           </p:cNvPr>
@@ -29296,7 +29498,7 @@
         <p:cNvPr id="1" name="">
           <a:extLst>
             <a:ext uri="{FF2B5EF4-FFF2-40B4-BE49-F238E27FC236}">
-              <a16:creationId xmlns:a16="http://schemas.microsoft.com/office/drawing/2014/main" xmlns="" id="{2E5A3AC1-9758-9150-5203-9C30480DE327}"/>
+              <a16:creationId xmlns="" xmlns:a16="http://schemas.microsoft.com/office/drawing/2014/main" id="{2E5A3AC1-9758-9150-5203-9C30480DE327}"/>
             </a:ext>
           </a:extLst>
         </p:cNvPr>
@@ -29316,7 +29518,7 @@
           <p:cNvPr id="2" name="Título 1">
             <a:extLst>
               <a:ext uri="{FF2B5EF4-FFF2-40B4-BE49-F238E27FC236}">
-                <a16:creationId xmlns:a16="http://schemas.microsoft.com/office/drawing/2014/main" xmlns="" id="{A2C8FEF7-3396-2018-4430-A9D0D963228B}"/>
+                <a16:creationId xmlns="" xmlns:a16="http://schemas.microsoft.com/office/drawing/2014/main" id="{A2C8FEF7-3396-2018-4430-A9D0D963228B}"/>
               </a:ext>
             </a:extLst>
           </p:cNvPr>
@@ -29339,8 +29541,12 @@
                 <a:latin typeface="Times New Roman" panose="02020603050405020304" pitchFamily="18" charset="0"/>
                 <a:cs typeface="Times New Roman" panose="02020603050405020304" pitchFamily="18" charset="0"/>
               </a:rPr>
-              <a:t>Estado del arte</a:t>
+              <a:t>Marco Teórico</a:t>
             </a:r>
+            <a:endParaRPr lang="es-MX" sz="3400" dirty="0">
+              <a:latin typeface="Times New Roman" panose="02020603050405020304" pitchFamily="18" charset="0"/>
+              <a:cs typeface="Times New Roman" panose="02020603050405020304" pitchFamily="18" charset="0"/>
+            </a:endParaRPr>
           </a:p>
         </p:txBody>
       </p:sp>
@@ -29349,7 +29555,7 @@
           <p:cNvPr id="3" name="Marcador de contenido 2">
             <a:extLst>
               <a:ext uri="{FF2B5EF4-FFF2-40B4-BE49-F238E27FC236}">
-                <a16:creationId xmlns:a16="http://schemas.microsoft.com/office/drawing/2014/main" xmlns="" id="{E075B645-FF15-BB61-FEF9-776AA72DC856}"/>
+                <a16:creationId xmlns="" xmlns:a16="http://schemas.microsoft.com/office/drawing/2014/main" id="{E075B645-FF15-BB61-FEF9-776AA72DC856}"/>
               </a:ext>
             </a:extLst>
           </p:cNvPr>
@@ -29418,7 +29624,7 @@
               <p:cNvPr id="5" name="CuadroTexto 4">
                 <a:extLst>
                   <a:ext uri="{FF2B5EF4-FFF2-40B4-BE49-F238E27FC236}">
-                    <a16:creationId xmlns:a16="http://schemas.microsoft.com/office/drawing/2014/main" xmlns="" id="{7AF4B05A-D5E4-26B6-D1F5-B36146BC5D32}"/>
+                    <a16:creationId xmlns="" xmlns:a16="http://schemas.microsoft.com/office/drawing/2014/main" id="{7AF4B05A-D5E4-26B6-D1F5-B36146BC5D32}"/>
                   </a:ext>
                 </a:extLst>
               </p:cNvPr>
@@ -29682,7 +29888,7 @@
               <p:cNvPr id="7" name="CuadroTexto 6">
                 <a:extLst>
                   <a:ext uri="{FF2B5EF4-FFF2-40B4-BE49-F238E27FC236}">
-                    <a16:creationId xmlns:a16="http://schemas.microsoft.com/office/drawing/2014/main" xmlns="" id="{78503BFD-F808-9E0C-94FE-B0A1B2AD1DC3}"/>
+                    <a16:creationId xmlns="" xmlns:a16="http://schemas.microsoft.com/office/drawing/2014/main" id="{78503BFD-F808-9E0C-94FE-B0A1B2AD1DC3}"/>
                   </a:ext>
                 </a:extLst>
               </p:cNvPr>
@@ -30101,7 +30307,7 @@
           <p:cNvPr id="8" name="CuadroTexto 7">
             <a:extLst>
               <a:ext uri="{FF2B5EF4-FFF2-40B4-BE49-F238E27FC236}">
-                <a16:creationId xmlns:a16="http://schemas.microsoft.com/office/drawing/2014/main" xmlns="" id="{33F1A92E-653E-8142-C3FA-B2F9E291FEAC}"/>
+                <a16:creationId xmlns="" xmlns:a16="http://schemas.microsoft.com/office/drawing/2014/main" id="{33F1A92E-653E-8142-C3FA-B2F9E291FEAC}"/>
               </a:ext>
             </a:extLst>
           </p:cNvPr>
@@ -30139,7 +30345,7 @@
               <p:cNvPr id="10" name="CuadroTexto 9">
                 <a:extLst>
                   <a:ext uri="{FF2B5EF4-FFF2-40B4-BE49-F238E27FC236}">
-                    <a16:creationId xmlns:a16="http://schemas.microsoft.com/office/drawing/2014/main" xmlns="" id="{5CFC48CF-4E60-C4C2-3DB1-35B37E35CE92}"/>
+                    <a16:creationId xmlns="" xmlns:a16="http://schemas.microsoft.com/office/drawing/2014/main" id="{5CFC48CF-4E60-C4C2-3DB1-35B37E35CE92}"/>
                   </a:ext>
                 </a:extLst>
               </p:cNvPr>
@@ -30277,7 +30483,7 @@
           <p:cNvPr id="12" name="CuadroTexto 11">
             <a:extLst>
               <a:ext uri="{FF2B5EF4-FFF2-40B4-BE49-F238E27FC236}">
-                <a16:creationId xmlns:a16="http://schemas.microsoft.com/office/drawing/2014/main" xmlns="" id="{C4452984-929E-56D5-2C55-3E251F270087}"/>
+                <a16:creationId xmlns="" xmlns:a16="http://schemas.microsoft.com/office/drawing/2014/main" id="{C4452984-929E-56D5-2C55-3E251F270087}"/>
               </a:ext>
             </a:extLst>
           </p:cNvPr>
@@ -30331,7 +30537,7 @@
         <p:cNvPr id="1" name="">
           <a:extLst>
             <a:ext uri="{FF2B5EF4-FFF2-40B4-BE49-F238E27FC236}">
-              <a16:creationId xmlns:a16="http://schemas.microsoft.com/office/drawing/2014/main" xmlns="" id="{8074EF4C-4739-6E9B-E888-AC6FD3A6EFC2}"/>
+              <a16:creationId xmlns="" xmlns:a16="http://schemas.microsoft.com/office/drawing/2014/main" id="{8074EF4C-4739-6E9B-E888-AC6FD3A6EFC2}"/>
             </a:ext>
           </a:extLst>
         </p:cNvPr>
@@ -30351,7 +30557,7 @@
           <p:cNvPr id="2" name="Título 1">
             <a:extLst>
               <a:ext uri="{FF2B5EF4-FFF2-40B4-BE49-F238E27FC236}">
-                <a16:creationId xmlns:a16="http://schemas.microsoft.com/office/drawing/2014/main" xmlns="" id="{05ED1FE7-B29A-73C2-DE91-6C986BE3BCF0}"/>
+                <a16:creationId xmlns="" xmlns:a16="http://schemas.microsoft.com/office/drawing/2014/main" id="{05ED1FE7-B29A-73C2-DE91-6C986BE3BCF0}"/>
               </a:ext>
             </a:extLst>
           </p:cNvPr>
@@ -30374,8 +30580,12 @@
                 <a:latin typeface="Times New Roman" panose="02020603050405020304" pitchFamily="18" charset="0"/>
                 <a:cs typeface="Times New Roman" panose="02020603050405020304" pitchFamily="18" charset="0"/>
               </a:rPr>
-              <a:t>Estado del arte</a:t>
+              <a:t>Marco Teórico</a:t>
             </a:r>
+            <a:endParaRPr lang="es-MX" sz="3400" dirty="0">
+              <a:latin typeface="Times New Roman" panose="02020603050405020304" pitchFamily="18" charset="0"/>
+              <a:cs typeface="Times New Roman" panose="02020603050405020304" pitchFamily="18" charset="0"/>
+            </a:endParaRPr>
           </a:p>
         </p:txBody>
       </p:sp>
@@ -30384,7 +30594,7 @@
           <p:cNvPr id="3" name="Marcador de contenido 2">
             <a:extLst>
               <a:ext uri="{FF2B5EF4-FFF2-40B4-BE49-F238E27FC236}">
-                <a16:creationId xmlns:a16="http://schemas.microsoft.com/office/drawing/2014/main" xmlns="" id="{2616CED8-7C07-0B4C-671D-1EA20A33296D}"/>
+                <a16:creationId xmlns="" xmlns:a16="http://schemas.microsoft.com/office/drawing/2014/main" id="{2616CED8-7C07-0B4C-671D-1EA20A33296D}"/>
               </a:ext>
             </a:extLst>
           </p:cNvPr>
@@ -30472,7 +30682,7 @@
           <p:cNvPr id="4" name="Imagen 3">
             <a:extLst>
               <a:ext uri="{FF2B5EF4-FFF2-40B4-BE49-F238E27FC236}">
-                <a16:creationId xmlns:a16="http://schemas.microsoft.com/office/drawing/2014/main" xmlns="" id="{2CB9313E-0F43-6417-BAFA-2547AFB70CD1}"/>
+                <a16:creationId xmlns="" xmlns:a16="http://schemas.microsoft.com/office/drawing/2014/main" id="{2CB9313E-0F43-6417-BAFA-2547AFB70CD1}"/>
               </a:ext>
             </a:extLst>
           </p:cNvPr>
@@ -30502,7 +30712,7 @@
           <p:cNvPr id="6" name="CuadroTexto 5">
             <a:extLst>
               <a:ext uri="{FF2B5EF4-FFF2-40B4-BE49-F238E27FC236}">
-                <a16:creationId xmlns:a16="http://schemas.microsoft.com/office/drawing/2014/main" xmlns="" id="{19B34EE8-2CF2-0DD9-765D-352D4FEDDD62}"/>
+                <a16:creationId xmlns="" xmlns:a16="http://schemas.microsoft.com/office/drawing/2014/main" id="{19B34EE8-2CF2-0DD9-765D-352D4FEDDD62}"/>
               </a:ext>
             </a:extLst>
           </p:cNvPr>
@@ -30561,7 +30771,7 @@
         <p:cNvPr id="1" name="">
           <a:extLst>
             <a:ext uri="{FF2B5EF4-FFF2-40B4-BE49-F238E27FC236}">
-              <a16:creationId xmlns:a16="http://schemas.microsoft.com/office/drawing/2014/main" xmlns="" id="{F30A0042-776C-5DE5-5335-5443911DF414}"/>
+              <a16:creationId xmlns="" xmlns:a16="http://schemas.microsoft.com/office/drawing/2014/main" id="{F30A0042-776C-5DE5-5335-5443911DF414}"/>
             </a:ext>
           </a:extLst>
         </p:cNvPr>
@@ -30581,7 +30791,7 @@
           <p:cNvPr id="7" name="Imagen 6">
             <a:extLst>
               <a:ext uri="{FF2B5EF4-FFF2-40B4-BE49-F238E27FC236}">
-                <a16:creationId xmlns:a16="http://schemas.microsoft.com/office/drawing/2014/main" xmlns="" id="{61C3486E-67B9-41E5-927F-A06A2A7CCCB3}"/>
+                <a16:creationId xmlns="" xmlns:a16="http://schemas.microsoft.com/office/drawing/2014/main" id="{61C3486E-67B9-41E5-927F-A06A2A7CCCB3}"/>
               </a:ext>
             </a:extLst>
           </p:cNvPr>
@@ -30611,7 +30821,7 @@
           <p:cNvPr id="2" name="Título 1">
             <a:extLst>
               <a:ext uri="{FF2B5EF4-FFF2-40B4-BE49-F238E27FC236}">
-                <a16:creationId xmlns:a16="http://schemas.microsoft.com/office/drawing/2014/main" xmlns="" id="{DE2ABD54-94C9-4039-8709-F7AABC5500A2}"/>
+                <a16:creationId xmlns="" xmlns:a16="http://schemas.microsoft.com/office/drawing/2014/main" id="{DE2ABD54-94C9-4039-8709-F7AABC5500A2}"/>
               </a:ext>
             </a:extLst>
           </p:cNvPr>
@@ -30634,8 +30844,12 @@
                 <a:latin typeface="Times New Roman" panose="02020603050405020304" pitchFamily="18" charset="0"/>
                 <a:cs typeface="Times New Roman" panose="02020603050405020304" pitchFamily="18" charset="0"/>
               </a:rPr>
-              <a:t>Estado del arte</a:t>
+              <a:t>Marco Teórico</a:t>
             </a:r>
+            <a:endParaRPr lang="es-MX" sz="3400" dirty="0">
+              <a:latin typeface="Times New Roman" panose="02020603050405020304" pitchFamily="18" charset="0"/>
+              <a:cs typeface="Times New Roman" panose="02020603050405020304" pitchFamily="18" charset="0"/>
+            </a:endParaRPr>
           </a:p>
         </p:txBody>
       </p:sp>
@@ -30644,7 +30858,7 @@
           <p:cNvPr id="3" name="Marcador de contenido 2">
             <a:extLst>
               <a:ext uri="{FF2B5EF4-FFF2-40B4-BE49-F238E27FC236}">
-                <a16:creationId xmlns:a16="http://schemas.microsoft.com/office/drawing/2014/main" xmlns="" id="{0DCB2DF4-D1C6-3A32-9536-B61DB744626E}"/>
+                <a16:creationId xmlns="" xmlns:a16="http://schemas.microsoft.com/office/drawing/2014/main" id="{0DCB2DF4-D1C6-3A32-9536-B61DB744626E}"/>
               </a:ext>
             </a:extLst>
           </p:cNvPr>
@@ -30744,7 +30958,7 @@
           <p:cNvPr id="6" name="CuadroTexto 5">
             <a:extLst>
               <a:ext uri="{FF2B5EF4-FFF2-40B4-BE49-F238E27FC236}">
-                <a16:creationId xmlns:a16="http://schemas.microsoft.com/office/drawing/2014/main" xmlns="" id="{54E234FD-24E6-29C8-EEE1-774C713E5E42}"/>
+                <a16:creationId xmlns="" xmlns:a16="http://schemas.microsoft.com/office/drawing/2014/main" id="{54E234FD-24E6-29C8-EEE1-774C713E5E42}"/>
               </a:ext>
             </a:extLst>
           </p:cNvPr>
@@ -30803,7 +31017,7 @@
         <p:cNvPr id="1" name="">
           <a:extLst>
             <a:ext uri="{FF2B5EF4-FFF2-40B4-BE49-F238E27FC236}">
-              <a16:creationId xmlns:a16="http://schemas.microsoft.com/office/drawing/2014/main" xmlns="" id="{B5F2B7EE-3335-92C9-0E55-22A60CC22400}"/>
+              <a16:creationId xmlns="" xmlns:a16="http://schemas.microsoft.com/office/drawing/2014/main" id="{B5F2B7EE-3335-92C9-0E55-22A60CC22400}"/>
             </a:ext>
           </a:extLst>
         </p:cNvPr>
@@ -30823,7 +31037,7 @@
           <p:cNvPr id="2" name="Título 1">
             <a:extLst>
               <a:ext uri="{FF2B5EF4-FFF2-40B4-BE49-F238E27FC236}">
-                <a16:creationId xmlns:a16="http://schemas.microsoft.com/office/drawing/2014/main" xmlns="" id="{554DD44F-7A5C-1A2E-3082-DE72FFBBDB7F}"/>
+                <a16:creationId xmlns="" xmlns:a16="http://schemas.microsoft.com/office/drawing/2014/main" id="{554DD44F-7A5C-1A2E-3082-DE72FFBBDB7F}"/>
               </a:ext>
             </a:extLst>
           </p:cNvPr>
@@ -30846,8 +31060,12 @@
                 <a:latin typeface="Times New Roman" panose="02020603050405020304" pitchFamily="18" charset="0"/>
                 <a:cs typeface="Times New Roman" panose="02020603050405020304" pitchFamily="18" charset="0"/>
               </a:rPr>
-              <a:t>Estado del arte</a:t>
+              <a:t>Marco Teórico</a:t>
             </a:r>
+            <a:endParaRPr lang="es-MX" sz="3400" dirty="0">
+              <a:latin typeface="Times New Roman" panose="02020603050405020304" pitchFamily="18" charset="0"/>
+              <a:cs typeface="Times New Roman" panose="02020603050405020304" pitchFamily="18" charset="0"/>
+            </a:endParaRPr>
           </a:p>
         </p:txBody>
       </p:sp>
@@ -30856,7 +31074,7 @@
           <p:cNvPr id="3" name="Marcador de contenido 2">
             <a:extLst>
               <a:ext uri="{FF2B5EF4-FFF2-40B4-BE49-F238E27FC236}">
-                <a16:creationId xmlns:a16="http://schemas.microsoft.com/office/drawing/2014/main" xmlns="" id="{07D4B520-6184-889E-5103-B1DC45632F21}"/>
+                <a16:creationId xmlns="" xmlns:a16="http://schemas.microsoft.com/office/drawing/2014/main" id="{07D4B520-6184-889E-5103-B1DC45632F21}"/>
               </a:ext>
             </a:extLst>
           </p:cNvPr>
@@ -30922,7 +31140,7 @@
         <p:cNvPr id="1" name="">
           <a:extLst>
             <a:ext uri="{FF2B5EF4-FFF2-40B4-BE49-F238E27FC236}">
-              <a16:creationId xmlns:a16="http://schemas.microsoft.com/office/drawing/2014/main" xmlns="" id="{7AFE3564-88D8-7E40-6ACE-149C1305325B}"/>
+              <a16:creationId xmlns="" xmlns:a16="http://schemas.microsoft.com/office/drawing/2014/main" id="{7AFE3564-88D8-7E40-6ACE-149C1305325B}"/>
             </a:ext>
           </a:extLst>
         </p:cNvPr>
@@ -30942,7 +31160,7 @@
           <p:cNvPr id="2" name="Título 1">
             <a:extLst>
               <a:ext uri="{FF2B5EF4-FFF2-40B4-BE49-F238E27FC236}">
-                <a16:creationId xmlns:a16="http://schemas.microsoft.com/office/drawing/2014/main" xmlns="" id="{22D84546-14C8-57FD-2016-7D653833002F}"/>
+                <a16:creationId xmlns="" xmlns:a16="http://schemas.microsoft.com/office/drawing/2014/main" id="{22D84546-14C8-57FD-2016-7D653833002F}"/>
               </a:ext>
             </a:extLst>
           </p:cNvPr>
@@ -30965,8 +31183,12 @@
                 <a:latin typeface="Times New Roman" panose="02020603050405020304" pitchFamily="18" charset="0"/>
                 <a:cs typeface="Times New Roman" panose="02020603050405020304" pitchFamily="18" charset="0"/>
               </a:rPr>
-              <a:t>Estado del arte</a:t>
+              <a:t>Marco Teórico</a:t>
             </a:r>
+            <a:endParaRPr lang="es-MX" sz="3400" dirty="0">
+              <a:latin typeface="Times New Roman" panose="02020603050405020304" pitchFamily="18" charset="0"/>
+              <a:cs typeface="Times New Roman" panose="02020603050405020304" pitchFamily="18" charset="0"/>
+            </a:endParaRPr>
           </a:p>
         </p:txBody>
       </p:sp>
@@ -30975,7 +31197,7 @@
           <p:cNvPr id="3" name="Marcador de contenido 2">
             <a:extLst>
               <a:ext uri="{FF2B5EF4-FFF2-40B4-BE49-F238E27FC236}">
-                <a16:creationId xmlns:a16="http://schemas.microsoft.com/office/drawing/2014/main" xmlns="" id="{5DD3A9A3-7310-4D8A-4B34-9552F9CB11A5}"/>
+                <a16:creationId xmlns="" xmlns:a16="http://schemas.microsoft.com/office/drawing/2014/main" id="{5DD3A9A3-7310-4D8A-4B34-9552F9CB11A5}"/>
               </a:ext>
             </a:extLst>
           </p:cNvPr>
@@ -31052,7 +31274,7 @@
           <p:cNvPr id="6" name="CuadroTexto 5">
             <a:extLst>
               <a:ext uri="{FF2B5EF4-FFF2-40B4-BE49-F238E27FC236}">
-                <a16:creationId xmlns:a16="http://schemas.microsoft.com/office/drawing/2014/main" xmlns="" id="{67DBC678-A344-425F-B839-565054235668}"/>
+                <a16:creationId xmlns="" xmlns:a16="http://schemas.microsoft.com/office/drawing/2014/main" id="{67DBC678-A344-425F-B839-565054235668}"/>
               </a:ext>
             </a:extLst>
           </p:cNvPr>
@@ -31095,7 +31317,7 @@
           <p:cNvPr id="5" name="Imagen 4">
             <a:extLst>
               <a:ext uri="{FF2B5EF4-FFF2-40B4-BE49-F238E27FC236}">
-                <a16:creationId xmlns:a16="http://schemas.microsoft.com/office/drawing/2014/main" xmlns="" id="{C654CC55-1D2E-5123-A43C-9698E330771C}"/>
+                <a16:creationId xmlns="" xmlns:a16="http://schemas.microsoft.com/office/drawing/2014/main" id="{C654CC55-1D2E-5123-A43C-9698E330771C}"/>
               </a:ext>
             </a:extLst>
           </p:cNvPr>
@@ -31141,7 +31363,7 @@
         <p:cNvPr id="1" name="">
           <a:extLst>
             <a:ext uri="{FF2B5EF4-FFF2-40B4-BE49-F238E27FC236}">
-              <a16:creationId xmlns:a16="http://schemas.microsoft.com/office/drawing/2014/main" xmlns="" id="{06FF8CE7-9D49-E9E5-7DB2-1F1140C296DB}"/>
+              <a16:creationId xmlns="" xmlns:a16="http://schemas.microsoft.com/office/drawing/2014/main" id="{06FF8CE7-9D49-E9E5-7DB2-1F1140C296DB}"/>
             </a:ext>
           </a:extLst>
         </p:cNvPr>
@@ -31161,7 +31383,7 @@
           <p:cNvPr id="2" name="Título 1">
             <a:extLst>
               <a:ext uri="{FF2B5EF4-FFF2-40B4-BE49-F238E27FC236}">
-                <a16:creationId xmlns:a16="http://schemas.microsoft.com/office/drawing/2014/main" xmlns="" id="{5C47E731-71E0-BB96-6C2F-B99B711C4C90}"/>
+                <a16:creationId xmlns="" xmlns:a16="http://schemas.microsoft.com/office/drawing/2014/main" id="{5C47E731-71E0-BB96-6C2F-B99B711C4C90}"/>
               </a:ext>
             </a:extLst>
           </p:cNvPr>
@@ -31184,8 +31406,12 @@
                 <a:latin typeface="Times New Roman" panose="02020603050405020304" pitchFamily="18" charset="0"/>
                 <a:cs typeface="Times New Roman" panose="02020603050405020304" pitchFamily="18" charset="0"/>
               </a:rPr>
-              <a:t>Estado del arte</a:t>
+              <a:t>Marco Teórico</a:t>
             </a:r>
+            <a:endParaRPr lang="es-MX" sz="3400" dirty="0">
+              <a:latin typeface="Times New Roman" panose="02020603050405020304" pitchFamily="18" charset="0"/>
+              <a:cs typeface="Times New Roman" panose="02020603050405020304" pitchFamily="18" charset="0"/>
+            </a:endParaRPr>
           </a:p>
         </p:txBody>
       </p:sp>
@@ -31194,7 +31420,7 @@
           <p:cNvPr id="3" name="Marcador de contenido 2">
             <a:extLst>
               <a:ext uri="{FF2B5EF4-FFF2-40B4-BE49-F238E27FC236}">
-                <a16:creationId xmlns:a16="http://schemas.microsoft.com/office/drawing/2014/main" xmlns="" id="{095D61F4-82C9-3AF4-140D-010A219F40CD}"/>
+                <a16:creationId xmlns="" xmlns:a16="http://schemas.microsoft.com/office/drawing/2014/main" id="{095D61F4-82C9-3AF4-140D-010A219F40CD}"/>
               </a:ext>
             </a:extLst>
           </p:cNvPr>
@@ -31260,7 +31486,7 @@
         <p:cNvPr id="1" name="">
           <a:extLst>
             <a:ext uri="{FF2B5EF4-FFF2-40B4-BE49-F238E27FC236}">
-              <a16:creationId xmlns:a16="http://schemas.microsoft.com/office/drawing/2014/main" xmlns="" id="{5884AAD3-992E-0AFC-2394-43B9AD463341}"/>
+              <a16:creationId xmlns="" xmlns:a16="http://schemas.microsoft.com/office/drawing/2014/main" id="{5884AAD3-992E-0AFC-2394-43B9AD463341}"/>
             </a:ext>
           </a:extLst>
         </p:cNvPr>
@@ -31280,7 +31506,7 @@
           <p:cNvPr id="2" name="Título 1">
             <a:extLst>
               <a:ext uri="{FF2B5EF4-FFF2-40B4-BE49-F238E27FC236}">
-                <a16:creationId xmlns:a16="http://schemas.microsoft.com/office/drawing/2014/main" xmlns="" id="{41081D6E-7CB5-4019-CB00-A117705E11B1}"/>
+                <a16:creationId xmlns="" xmlns:a16="http://schemas.microsoft.com/office/drawing/2014/main" id="{41081D6E-7CB5-4019-CB00-A117705E11B1}"/>
               </a:ext>
             </a:extLst>
           </p:cNvPr>
@@ -31303,8 +31529,12 @@
                 <a:latin typeface="Times New Roman" panose="02020603050405020304" pitchFamily="18" charset="0"/>
                 <a:cs typeface="Times New Roman" panose="02020603050405020304" pitchFamily="18" charset="0"/>
               </a:rPr>
-              <a:t>Estado del arte</a:t>
+              <a:t>Marco Teórico</a:t>
             </a:r>
+            <a:endParaRPr lang="es-MX" sz="3400" dirty="0">
+              <a:latin typeface="Times New Roman" panose="02020603050405020304" pitchFamily="18" charset="0"/>
+              <a:cs typeface="Times New Roman" panose="02020603050405020304" pitchFamily="18" charset="0"/>
+            </a:endParaRPr>
           </a:p>
         </p:txBody>
       </p:sp>
@@ -31313,7 +31543,7 @@
           <p:cNvPr id="3" name="Marcador de contenido 2">
             <a:extLst>
               <a:ext uri="{FF2B5EF4-FFF2-40B4-BE49-F238E27FC236}">
-                <a16:creationId xmlns:a16="http://schemas.microsoft.com/office/drawing/2014/main" xmlns="" id="{BC480A00-0A21-4367-700C-E009991B6D69}"/>
+                <a16:creationId xmlns="" xmlns:a16="http://schemas.microsoft.com/office/drawing/2014/main" id="{BC480A00-0A21-4367-700C-E009991B6D69}"/>
               </a:ext>
             </a:extLst>
           </p:cNvPr>
@@ -31379,7 +31609,7 @@
         <p:cNvPr id="1" name="">
           <a:extLst>
             <a:ext uri="{FF2B5EF4-FFF2-40B4-BE49-F238E27FC236}">
-              <a16:creationId xmlns:a16="http://schemas.microsoft.com/office/drawing/2014/main" xmlns="" id="{619A8279-F2C7-EF83-0B18-F69ED4157015}"/>
+              <a16:creationId xmlns="" xmlns:a16="http://schemas.microsoft.com/office/drawing/2014/main" id="{619A8279-F2C7-EF83-0B18-F69ED4157015}"/>
             </a:ext>
           </a:extLst>
         </p:cNvPr>
@@ -31399,7 +31629,7 @@
           <p:cNvPr id="2" name="Título 1">
             <a:extLst>
               <a:ext uri="{FF2B5EF4-FFF2-40B4-BE49-F238E27FC236}">
-                <a16:creationId xmlns:a16="http://schemas.microsoft.com/office/drawing/2014/main" xmlns="" id="{20D59896-C85B-852E-698C-D506FB62DF06}"/>
+                <a16:creationId xmlns="" xmlns:a16="http://schemas.microsoft.com/office/drawing/2014/main" id="{20D59896-C85B-852E-698C-D506FB62DF06}"/>
               </a:ext>
             </a:extLst>
           </p:cNvPr>
@@ -31432,7 +31662,7 @@
           <p:cNvPr id="3" name="Marcador de contenido 2">
             <a:extLst>
               <a:ext uri="{FF2B5EF4-FFF2-40B4-BE49-F238E27FC236}">
-                <a16:creationId xmlns:a16="http://schemas.microsoft.com/office/drawing/2014/main" xmlns="" id="{DE950F92-179A-6A18-9630-BAB1FD13673F}"/>
+                <a16:creationId xmlns="" xmlns:a16="http://schemas.microsoft.com/office/drawing/2014/main" id="{DE950F92-179A-6A18-9630-BAB1FD13673F}"/>
               </a:ext>
             </a:extLst>
           </p:cNvPr>
@@ -31506,7 +31736,7 @@
           <p:cNvPr id="4" name="Marcador de contenido 3">
             <a:extLst>
               <a:ext uri="{FF2B5EF4-FFF2-40B4-BE49-F238E27FC236}">
-                <a16:creationId xmlns:a16="http://schemas.microsoft.com/office/drawing/2014/main" xmlns="" id="{A5CEACF8-E932-108E-7ABE-547DAAA851ED}"/>
+                <a16:creationId xmlns="" xmlns:a16="http://schemas.microsoft.com/office/drawing/2014/main" id="{A5CEACF8-E932-108E-7ABE-547DAAA851ED}"/>
               </a:ext>
             </a:extLst>
           </p:cNvPr>
@@ -31659,7 +31889,7 @@
         <p:cNvPr id="1" name="">
           <a:extLst>
             <a:ext uri="{FF2B5EF4-FFF2-40B4-BE49-F238E27FC236}">
-              <a16:creationId xmlns:a16="http://schemas.microsoft.com/office/drawing/2014/main" xmlns="" id="{BE571F52-05EF-1021-3347-CDB2E8EB7C99}"/>
+              <a16:creationId xmlns="" xmlns:a16="http://schemas.microsoft.com/office/drawing/2014/main" id="{BE571F52-05EF-1021-3347-CDB2E8EB7C99}"/>
             </a:ext>
           </a:extLst>
         </p:cNvPr>
@@ -31679,7 +31909,7 @@
           <p:cNvPr id="2" name="Título 1">
             <a:extLst>
               <a:ext uri="{FF2B5EF4-FFF2-40B4-BE49-F238E27FC236}">
-                <a16:creationId xmlns:a16="http://schemas.microsoft.com/office/drawing/2014/main" xmlns="" id="{5DF2C60B-4C6E-7437-4245-1CC0A26AA7B3}"/>
+                <a16:creationId xmlns="" xmlns:a16="http://schemas.microsoft.com/office/drawing/2014/main" id="{5DF2C60B-4C6E-7437-4245-1CC0A26AA7B3}"/>
               </a:ext>
             </a:extLst>
           </p:cNvPr>
@@ -31709,7 +31939,7 @@
           <p:cNvPr id="6" name="Marcador de contenido 3">
             <a:extLst>
               <a:ext uri="{FF2B5EF4-FFF2-40B4-BE49-F238E27FC236}">
-                <a16:creationId xmlns:a16="http://schemas.microsoft.com/office/drawing/2014/main" xmlns="" id="{A5CEACF8-E932-108E-7ABE-547DAAA851ED}"/>
+                <a16:creationId xmlns="" xmlns:a16="http://schemas.microsoft.com/office/drawing/2014/main" id="{A5CEACF8-E932-108E-7ABE-547DAAA851ED}"/>
               </a:ext>
             </a:extLst>
           </p:cNvPr>
@@ -31881,7 +32111,7 @@
           <p:cNvPr id="2" name="Título 1">
             <a:extLst>
               <a:ext uri="{FF2B5EF4-FFF2-40B4-BE49-F238E27FC236}">
-                <a16:creationId xmlns:a16="http://schemas.microsoft.com/office/drawing/2014/main" xmlns="" id="{670F0C23-FE50-8839-B107-C21CD5459C01}"/>
+                <a16:creationId xmlns="" xmlns:a16="http://schemas.microsoft.com/office/drawing/2014/main" id="{670F0C23-FE50-8839-B107-C21CD5459C01}"/>
               </a:ext>
             </a:extLst>
           </p:cNvPr>
@@ -31926,7 +32156,7 @@
           <p:cNvPr id="3" name="Marcador de contenido 2">
             <a:extLst>
               <a:ext uri="{FF2B5EF4-FFF2-40B4-BE49-F238E27FC236}">
-                <a16:creationId xmlns:a16="http://schemas.microsoft.com/office/drawing/2014/main" xmlns="" id="{3D773A57-4E75-6D1E-BD6A-ACA49DF5A864}"/>
+                <a16:creationId xmlns="" xmlns:a16="http://schemas.microsoft.com/office/drawing/2014/main" id="{3D773A57-4E75-6D1E-BD6A-ACA49DF5A864}"/>
               </a:ext>
             </a:extLst>
           </p:cNvPr>
@@ -32027,7 +32257,7 @@
           <p:cNvPr id="4" name="Marcador de contenido 3">
             <a:extLst>
               <a:ext uri="{FF2B5EF4-FFF2-40B4-BE49-F238E27FC236}">
-                <a16:creationId xmlns:a16="http://schemas.microsoft.com/office/drawing/2014/main" xmlns="" id="{3AE55076-95D7-6938-72E0-C14CE7451679}"/>
+                <a16:creationId xmlns="" xmlns:a16="http://schemas.microsoft.com/office/drawing/2014/main" id="{3AE55076-95D7-6938-72E0-C14CE7451679}"/>
               </a:ext>
             </a:extLst>
           </p:cNvPr>
@@ -32173,7 +32403,7 @@
         <p:cNvPr id="1" name="">
           <a:extLst>
             <a:ext uri="{FF2B5EF4-FFF2-40B4-BE49-F238E27FC236}">
-              <a16:creationId xmlns:a16="http://schemas.microsoft.com/office/drawing/2014/main" xmlns="" id="{BAA8E253-6747-9B1F-FBE9-E6CD87C5A445}"/>
+              <a16:creationId xmlns="" xmlns:a16="http://schemas.microsoft.com/office/drawing/2014/main" id="{BAA8E253-6747-9B1F-FBE9-E6CD87C5A445}"/>
             </a:ext>
           </a:extLst>
         </p:cNvPr>
@@ -32193,7 +32423,7 @@
           <p:cNvPr id="2" name="Título 1">
             <a:extLst>
               <a:ext uri="{FF2B5EF4-FFF2-40B4-BE49-F238E27FC236}">
-                <a16:creationId xmlns:a16="http://schemas.microsoft.com/office/drawing/2014/main" xmlns="" id="{6396FCE1-269E-47E7-6B0B-83CB1C803157}"/>
+                <a16:creationId xmlns="" xmlns:a16="http://schemas.microsoft.com/office/drawing/2014/main" id="{6396FCE1-269E-47E7-6B0B-83CB1C803157}"/>
               </a:ext>
             </a:extLst>
           </p:cNvPr>
@@ -32223,7 +32453,7 @@
           <p:cNvPr id="3" name="Marcador de contenido 2">
             <a:extLst>
               <a:ext uri="{FF2B5EF4-FFF2-40B4-BE49-F238E27FC236}">
-                <a16:creationId xmlns:a16="http://schemas.microsoft.com/office/drawing/2014/main" xmlns="" id="{65EDB4A7-80AE-EB79-5B23-32C347FD2312}"/>
+                <a16:creationId xmlns="" xmlns:a16="http://schemas.microsoft.com/office/drawing/2014/main" id="{65EDB4A7-80AE-EB79-5B23-32C347FD2312}"/>
               </a:ext>
             </a:extLst>
           </p:cNvPr>
@@ -32251,7 +32481,7 @@
           <p:cNvPr id="4" name="Marcador de contenido 3">
             <a:extLst>
               <a:ext uri="{FF2B5EF4-FFF2-40B4-BE49-F238E27FC236}">
-                <a16:creationId xmlns:a16="http://schemas.microsoft.com/office/drawing/2014/main" xmlns="" id="{1D6431B4-69A1-CB17-CB70-D9632CC15269}"/>
+                <a16:creationId xmlns="" xmlns:a16="http://schemas.microsoft.com/office/drawing/2014/main" id="{1D6431B4-69A1-CB17-CB70-D9632CC15269}"/>
               </a:ext>
             </a:extLst>
           </p:cNvPr>
@@ -32311,7 +32541,7 @@
         <p:cNvPr id="1" name="">
           <a:extLst>
             <a:ext uri="{FF2B5EF4-FFF2-40B4-BE49-F238E27FC236}">
-              <a16:creationId xmlns:a16="http://schemas.microsoft.com/office/drawing/2014/main" xmlns="" id="{1B05AE3F-3E46-25CF-7795-E72C123AB1CA}"/>
+              <a16:creationId xmlns="" xmlns:a16="http://schemas.microsoft.com/office/drawing/2014/main" id="{1B05AE3F-3E46-25CF-7795-E72C123AB1CA}"/>
             </a:ext>
           </a:extLst>
         </p:cNvPr>
@@ -32331,7 +32561,7 @@
           <p:cNvPr id="2" name="Título 1">
             <a:extLst>
               <a:ext uri="{FF2B5EF4-FFF2-40B4-BE49-F238E27FC236}">
-                <a16:creationId xmlns:a16="http://schemas.microsoft.com/office/drawing/2014/main" xmlns="" id="{D86BF721-CFA0-0B79-12AE-967BA8A80533}"/>
+                <a16:creationId xmlns="" xmlns:a16="http://schemas.microsoft.com/office/drawing/2014/main" id="{D86BF721-CFA0-0B79-12AE-967BA8A80533}"/>
               </a:ext>
             </a:extLst>
           </p:cNvPr>
@@ -32361,7 +32591,7 @@
           <p:cNvPr id="3" name="Marcador de contenido 2">
             <a:extLst>
               <a:ext uri="{FF2B5EF4-FFF2-40B4-BE49-F238E27FC236}">
-                <a16:creationId xmlns:a16="http://schemas.microsoft.com/office/drawing/2014/main" xmlns="" id="{1A4A8CD1-135B-E096-AE71-BC1C655CF49F}"/>
+                <a16:creationId xmlns="" xmlns:a16="http://schemas.microsoft.com/office/drawing/2014/main" id="{1A4A8CD1-135B-E096-AE71-BC1C655CF49F}"/>
               </a:ext>
             </a:extLst>
           </p:cNvPr>
@@ -32389,7 +32619,7 @@
           <p:cNvPr id="4" name="Marcador de contenido 3">
             <a:extLst>
               <a:ext uri="{FF2B5EF4-FFF2-40B4-BE49-F238E27FC236}">
-                <a16:creationId xmlns:a16="http://schemas.microsoft.com/office/drawing/2014/main" xmlns="" id="{8A49EB46-BCFB-0531-809D-2CF4707CCB6C}"/>
+                <a16:creationId xmlns="" xmlns:a16="http://schemas.microsoft.com/office/drawing/2014/main" id="{8A49EB46-BCFB-0531-809D-2CF4707CCB6C}"/>
               </a:ext>
             </a:extLst>
           </p:cNvPr>
@@ -32453,7 +32683,7 @@
           <p:cNvPr id="2" name="Título 1">
             <a:extLst>
               <a:ext uri="{FF2B5EF4-FFF2-40B4-BE49-F238E27FC236}">
-                <a16:creationId xmlns:a16="http://schemas.microsoft.com/office/drawing/2014/main" xmlns="" id="{BAB3C702-D01F-22C8-A53B-ED6B01BB12EA}"/>
+                <a16:creationId xmlns="" xmlns:a16="http://schemas.microsoft.com/office/drawing/2014/main" id="{BAB3C702-D01F-22C8-A53B-ED6B01BB12EA}"/>
               </a:ext>
             </a:extLst>
           </p:cNvPr>
@@ -32486,7 +32716,7 @@
           <p:cNvPr id="3" name="Marcador de contenido 2">
             <a:extLst>
               <a:ext uri="{FF2B5EF4-FFF2-40B4-BE49-F238E27FC236}">
-                <a16:creationId xmlns:a16="http://schemas.microsoft.com/office/drawing/2014/main" xmlns="" id="{2D8CD9DD-E26B-97A0-50D8-9A66444B9BE2}"/>
+                <a16:creationId xmlns="" xmlns:a16="http://schemas.microsoft.com/office/drawing/2014/main" id="{2D8CD9DD-E26B-97A0-50D8-9A66444B9BE2}"/>
               </a:ext>
             </a:extLst>
           </p:cNvPr>
@@ -32978,7 +33208,7 @@
         <p:cNvPr id="1" name="">
           <a:extLst>
             <a:ext uri="{FF2B5EF4-FFF2-40B4-BE49-F238E27FC236}">
-              <a16:creationId xmlns:a16="http://schemas.microsoft.com/office/drawing/2014/main" xmlns="" id="{31C6875D-C95D-1D74-F9EE-216415E755A6}"/>
+              <a16:creationId xmlns="" xmlns:a16="http://schemas.microsoft.com/office/drawing/2014/main" id="{31C6875D-C95D-1D74-F9EE-216415E755A6}"/>
             </a:ext>
           </a:extLst>
         </p:cNvPr>
@@ -32998,7 +33228,7 @@
           <p:cNvPr id="10" name="Imagen 9">
             <a:extLst>
               <a:ext uri="{FF2B5EF4-FFF2-40B4-BE49-F238E27FC236}">
-                <a16:creationId xmlns:a16="http://schemas.microsoft.com/office/drawing/2014/main" xmlns="" id="{8AD9506E-FD56-EBC8-13F7-CB8F7C5F557C}"/>
+                <a16:creationId xmlns="" xmlns:a16="http://schemas.microsoft.com/office/drawing/2014/main" id="{8AD9506E-FD56-EBC8-13F7-CB8F7C5F557C}"/>
               </a:ext>
             </a:extLst>
           </p:cNvPr>
@@ -33027,7 +33257,7 @@
           <p:cNvPr id="2" name="Título 1">
             <a:extLst>
               <a:ext uri="{FF2B5EF4-FFF2-40B4-BE49-F238E27FC236}">
-                <a16:creationId xmlns:a16="http://schemas.microsoft.com/office/drawing/2014/main" xmlns="" id="{AC643883-C073-62C1-5633-BFD9AB76F757}"/>
+                <a16:creationId xmlns="" xmlns:a16="http://schemas.microsoft.com/office/drawing/2014/main" id="{AC643883-C073-62C1-5633-BFD9AB76F757}"/>
               </a:ext>
             </a:extLst>
           </p:cNvPr>
@@ -33046,12 +33276,16 @@
           <a:lstStyle/>
           <a:p>
             <a:r>
-              <a:rPr lang="es-MX" sz="3400" dirty="0">
+              <a:rPr lang="es-MX" sz="3400" dirty="0" smtClean="0">
                 <a:latin typeface="Times New Roman" panose="02020603050405020304" pitchFamily="18" charset="0"/>
                 <a:cs typeface="Times New Roman" panose="02020603050405020304" pitchFamily="18" charset="0"/>
               </a:rPr>
-              <a:t>Estado del arte</a:t>
+              <a:t>Marco Teórico</a:t>
             </a:r>
+            <a:endParaRPr lang="es-MX" sz="3400" dirty="0">
+              <a:latin typeface="Times New Roman" panose="02020603050405020304" pitchFamily="18" charset="0"/>
+              <a:cs typeface="Times New Roman" panose="02020603050405020304" pitchFamily="18" charset="0"/>
+            </a:endParaRPr>
           </a:p>
         </p:txBody>
       </p:sp>
@@ -33060,7 +33294,7 @@
           <p:cNvPr id="3" name="Marcador de contenido 2">
             <a:extLst>
               <a:ext uri="{FF2B5EF4-FFF2-40B4-BE49-F238E27FC236}">
-                <a16:creationId xmlns:a16="http://schemas.microsoft.com/office/drawing/2014/main" xmlns="" id="{2685F9AA-AC6D-61A2-78E4-7AC46AF7ACB5}"/>
+                <a16:creationId xmlns="" xmlns:a16="http://schemas.microsoft.com/office/drawing/2014/main" id="{2685F9AA-AC6D-61A2-78E4-7AC46AF7ACB5}"/>
               </a:ext>
             </a:extLst>
           </p:cNvPr>
@@ -33139,7 +33373,7 @@
           <p:cNvPr id="4" name="Marcador de contenido 3">
             <a:extLst>
               <a:ext uri="{FF2B5EF4-FFF2-40B4-BE49-F238E27FC236}">
-                <a16:creationId xmlns:a16="http://schemas.microsoft.com/office/drawing/2014/main" xmlns="" id="{2CC351AA-7BF7-138C-B3C7-5032644CF2DE}"/>
+                <a16:creationId xmlns="" xmlns:a16="http://schemas.microsoft.com/office/drawing/2014/main" id="{2CC351AA-7BF7-138C-B3C7-5032644CF2DE}"/>
               </a:ext>
             </a:extLst>
           </p:cNvPr>
@@ -33201,7 +33435,7 @@
           <p:cNvPr id="5" name="Chart 2">
             <a:extLst>
               <a:ext uri="{FF2B5EF4-FFF2-40B4-BE49-F238E27FC236}">
-                <a16:creationId xmlns:a16="http://schemas.microsoft.com/office/drawing/2014/main" xmlns="" id="{5E28E901-0E6D-7A41-49E7-C7B810DB2845}"/>
+                <a16:creationId xmlns="" xmlns:a16="http://schemas.microsoft.com/office/drawing/2014/main" id="{5E28E901-0E6D-7A41-49E7-C7B810DB2845}"/>
               </a:ext>
             </a:extLst>
           </p:cNvPr>
@@ -33233,7 +33467,7 @@
               <p:cNvPr id="6" name="CuadroTexto 5">
                 <a:extLst>
                   <a:ext uri="{FF2B5EF4-FFF2-40B4-BE49-F238E27FC236}">
-                    <a16:creationId xmlns:a16="http://schemas.microsoft.com/office/drawing/2014/main" xmlns="" id="{61FA3746-FE94-2D6A-C0C9-5B8C833E10A9}"/>
+                    <a16:creationId xmlns="" xmlns:a16="http://schemas.microsoft.com/office/drawing/2014/main" id="{61FA3746-FE94-2D6A-C0C9-5B8C833E10A9}"/>
                   </a:ext>
                 </a:extLst>
               </p:cNvPr>
@@ -33423,7 +33657,7 @@
               <p:cNvPr id="7" name="CuadroTexto 6">
                 <a:extLst>
                   <a:ext uri="{FF2B5EF4-FFF2-40B4-BE49-F238E27FC236}">
-                    <a16:creationId xmlns:a16="http://schemas.microsoft.com/office/drawing/2014/main" xmlns="" id="{C7CD6F09-E80E-CC70-CFFD-ECC62F245C4A}"/>
+                    <a16:creationId xmlns="" xmlns:a16="http://schemas.microsoft.com/office/drawing/2014/main" id="{C7CD6F09-E80E-CC70-CFFD-ECC62F245C4A}"/>
                   </a:ext>
                 </a:extLst>
               </p:cNvPr>
@@ -33686,7 +33920,7 @@
               <p:cNvPr id="8" name="CuadroTexto 7">
                 <a:extLst>
                   <a:ext uri="{FF2B5EF4-FFF2-40B4-BE49-F238E27FC236}">
-                    <a16:creationId xmlns:a16="http://schemas.microsoft.com/office/drawing/2014/main" xmlns="" id="{0E12C880-5F16-BC4D-02C5-BBB868263AAD}"/>
+                    <a16:creationId xmlns="" xmlns:a16="http://schemas.microsoft.com/office/drawing/2014/main" id="{0E12C880-5F16-BC4D-02C5-BBB868263AAD}"/>
                   </a:ext>
                 </a:extLst>
               </p:cNvPr>
@@ -34046,7 +34280,7 @@
           <p:cNvPr id="13" name="CuadroTexto 12">
             <a:extLst>
               <a:ext uri="{FF2B5EF4-FFF2-40B4-BE49-F238E27FC236}">
-                <a16:creationId xmlns:a16="http://schemas.microsoft.com/office/drawing/2014/main" xmlns="" id="{0C21B8DD-7ABD-2A11-C645-94BBE1F7B2CE}"/>
+                <a16:creationId xmlns="" xmlns:a16="http://schemas.microsoft.com/office/drawing/2014/main" id="{0C21B8DD-7ABD-2A11-C645-94BBE1F7B2CE}"/>
               </a:ext>
             </a:extLst>
           </p:cNvPr>
@@ -34081,7 +34315,7 @@
           <p:cNvPr id="14" name="CuadroTexto 13">
             <a:extLst>
               <a:ext uri="{FF2B5EF4-FFF2-40B4-BE49-F238E27FC236}">
-                <a16:creationId xmlns:a16="http://schemas.microsoft.com/office/drawing/2014/main" xmlns="" id="{7B174281-B4B3-1CB6-86AE-440AD45CFA13}"/>
+                <a16:creationId xmlns="" xmlns:a16="http://schemas.microsoft.com/office/drawing/2014/main" id="{7B174281-B4B3-1CB6-86AE-440AD45CFA13}"/>
               </a:ext>
             </a:extLst>
           </p:cNvPr>
@@ -34140,7 +34374,7 @@
         <p:cNvPr id="1" name="">
           <a:extLst>
             <a:ext uri="{FF2B5EF4-FFF2-40B4-BE49-F238E27FC236}">
-              <a16:creationId xmlns:a16="http://schemas.microsoft.com/office/drawing/2014/main" xmlns="" id="{D819ECBA-0FE3-A262-6DF8-976C93CBBDA3}"/>
+              <a16:creationId xmlns="" xmlns:a16="http://schemas.microsoft.com/office/drawing/2014/main" id="{D819ECBA-0FE3-A262-6DF8-976C93CBBDA3}"/>
             </a:ext>
           </a:extLst>
         </p:cNvPr>
@@ -34160,7 +34394,7 @@
           <p:cNvPr id="2" name="Título 1">
             <a:extLst>
               <a:ext uri="{FF2B5EF4-FFF2-40B4-BE49-F238E27FC236}">
-                <a16:creationId xmlns:a16="http://schemas.microsoft.com/office/drawing/2014/main" xmlns="" id="{8B3DFA6D-9F9C-65BA-1D43-48404335AA47}"/>
+                <a16:creationId xmlns="" xmlns:a16="http://schemas.microsoft.com/office/drawing/2014/main" id="{8B3DFA6D-9F9C-65BA-1D43-48404335AA47}"/>
               </a:ext>
             </a:extLst>
           </p:cNvPr>
@@ -34183,8 +34417,12 @@
                 <a:latin typeface="Times New Roman" panose="02020603050405020304" pitchFamily="18" charset="0"/>
                 <a:cs typeface="Times New Roman" panose="02020603050405020304" pitchFamily="18" charset="0"/>
               </a:rPr>
-              <a:t>Estado del arte</a:t>
+              <a:t>Marco Teórico</a:t>
             </a:r>
+            <a:endParaRPr lang="es-MX" sz="3400" dirty="0">
+              <a:latin typeface="Times New Roman" panose="02020603050405020304" pitchFamily="18" charset="0"/>
+              <a:cs typeface="Times New Roman" panose="02020603050405020304" pitchFamily="18" charset="0"/>
+            </a:endParaRPr>
           </a:p>
         </p:txBody>
       </p:sp>
@@ -34195,7 +34433,7 @@
               <p:cNvPr id="3" name="Marcador de contenido 2">
                 <a:extLst>
                   <a:ext uri="{FF2B5EF4-FFF2-40B4-BE49-F238E27FC236}">
-                    <a16:creationId xmlns:a16="http://schemas.microsoft.com/office/drawing/2014/main" xmlns="" id="{9D212CE2-B569-5765-664D-52BD84671B53}"/>
+                    <a16:creationId xmlns="" xmlns:a16="http://schemas.microsoft.com/office/drawing/2014/main" id="{9D212CE2-B569-5765-664D-52BD84671B53}"/>
                   </a:ext>
                 </a:extLst>
               </p:cNvPr>
@@ -35035,7 +35273,7 @@
           <p:cNvPr id="11" name="Imagen 10">
             <a:extLst>
               <a:ext uri="{FF2B5EF4-FFF2-40B4-BE49-F238E27FC236}">
-                <a16:creationId xmlns:a16="http://schemas.microsoft.com/office/drawing/2014/main" xmlns="" id="{4171342F-33BD-9E54-AFF9-8592B2450642}"/>
+                <a16:creationId xmlns="" xmlns:a16="http://schemas.microsoft.com/office/drawing/2014/main" id="{4171342F-33BD-9E54-AFF9-8592B2450642}"/>
               </a:ext>
             </a:extLst>
           </p:cNvPr>
@@ -35065,7 +35303,7 @@
           <p:cNvPr id="13" name="Abrir llave 12">
             <a:extLst>
               <a:ext uri="{FF2B5EF4-FFF2-40B4-BE49-F238E27FC236}">
-                <a16:creationId xmlns:a16="http://schemas.microsoft.com/office/drawing/2014/main" xmlns="" id="{E0BBBB8D-80D2-0277-2D83-5839EDB6890E}"/>
+                <a16:creationId xmlns="" xmlns:a16="http://schemas.microsoft.com/office/drawing/2014/main" id="{E0BBBB8D-80D2-0277-2D83-5839EDB6890E}"/>
               </a:ext>
             </a:extLst>
           </p:cNvPr>
@@ -35109,7 +35347,7 @@
           <p:cNvPr id="14" name="Abrir llave 13">
             <a:extLst>
               <a:ext uri="{FF2B5EF4-FFF2-40B4-BE49-F238E27FC236}">
-                <a16:creationId xmlns:a16="http://schemas.microsoft.com/office/drawing/2014/main" xmlns="" id="{B01E28D3-F041-7B60-80A1-C1D466F0E5E1}"/>
+                <a16:creationId xmlns="" xmlns:a16="http://schemas.microsoft.com/office/drawing/2014/main" id="{B01E28D3-F041-7B60-80A1-C1D466F0E5E1}"/>
               </a:ext>
             </a:extLst>
           </p:cNvPr>
@@ -35153,7 +35391,7 @@
           <p:cNvPr id="15" name="CuadroTexto 14">
             <a:extLst>
               <a:ext uri="{FF2B5EF4-FFF2-40B4-BE49-F238E27FC236}">
-                <a16:creationId xmlns:a16="http://schemas.microsoft.com/office/drawing/2014/main" xmlns="" id="{71392D05-5CB3-995F-825F-28AD09643899}"/>
+                <a16:creationId xmlns="" xmlns:a16="http://schemas.microsoft.com/office/drawing/2014/main" id="{71392D05-5CB3-995F-825F-28AD09643899}"/>
               </a:ext>
             </a:extLst>
           </p:cNvPr>
@@ -35189,7 +35427,7 @@
           <p:cNvPr id="16" name="CuadroTexto 15">
             <a:extLst>
               <a:ext uri="{FF2B5EF4-FFF2-40B4-BE49-F238E27FC236}">
-                <a16:creationId xmlns:a16="http://schemas.microsoft.com/office/drawing/2014/main" xmlns="" id="{071E4AFD-07EF-C366-4ACD-3295252BC030}"/>
+                <a16:creationId xmlns="" xmlns:a16="http://schemas.microsoft.com/office/drawing/2014/main" id="{071E4AFD-07EF-C366-4ACD-3295252BC030}"/>
               </a:ext>
             </a:extLst>
           </p:cNvPr>
@@ -35225,7 +35463,7 @@
           <p:cNvPr id="19" name="CuadroTexto 18">
             <a:extLst>
               <a:ext uri="{FF2B5EF4-FFF2-40B4-BE49-F238E27FC236}">
-                <a16:creationId xmlns:a16="http://schemas.microsoft.com/office/drawing/2014/main" xmlns="" id="{6E4EF6AD-030C-D1D9-14FB-843EC4460BEB}"/>
+                <a16:creationId xmlns="" xmlns:a16="http://schemas.microsoft.com/office/drawing/2014/main" id="{6E4EF6AD-030C-D1D9-14FB-843EC4460BEB}"/>
               </a:ext>
             </a:extLst>
           </p:cNvPr>
@@ -35284,7 +35522,7 @@
         <p:cNvPr id="1" name="">
           <a:extLst>
             <a:ext uri="{FF2B5EF4-FFF2-40B4-BE49-F238E27FC236}">
-              <a16:creationId xmlns:a16="http://schemas.microsoft.com/office/drawing/2014/main" xmlns="" id="{6BFCBCE7-4227-3A4F-7553-65FB8C0E2E15}"/>
+              <a16:creationId xmlns="" xmlns:a16="http://schemas.microsoft.com/office/drawing/2014/main" id="{6BFCBCE7-4227-3A4F-7553-65FB8C0E2E15}"/>
             </a:ext>
           </a:extLst>
         </p:cNvPr>
@@ -35304,7 +35542,7 @@
           <p:cNvPr id="2" name="Título 1">
             <a:extLst>
               <a:ext uri="{FF2B5EF4-FFF2-40B4-BE49-F238E27FC236}">
-                <a16:creationId xmlns:a16="http://schemas.microsoft.com/office/drawing/2014/main" xmlns="" id="{2845A44F-A3CC-A535-578F-D1159003EE11}"/>
+                <a16:creationId xmlns="" xmlns:a16="http://schemas.microsoft.com/office/drawing/2014/main" id="{2845A44F-A3CC-A535-578F-D1159003EE11}"/>
               </a:ext>
             </a:extLst>
           </p:cNvPr>
@@ -35327,19 +35565,23 @@
                 <a:latin typeface="Times New Roman" panose="02020603050405020304" pitchFamily="18" charset="0"/>
                 <a:cs typeface="Times New Roman" panose="02020603050405020304" pitchFamily="18" charset="0"/>
               </a:rPr>
-              <a:t>Estado del arte</a:t>
+              <a:t>Marco Teórico</a:t>
             </a:r>
+            <a:endParaRPr lang="es-MX" sz="3400" dirty="0">
+              <a:latin typeface="Times New Roman" panose="02020603050405020304" pitchFamily="18" charset="0"/>
+              <a:cs typeface="Times New Roman" panose="02020603050405020304" pitchFamily="18" charset="0"/>
+            </a:endParaRPr>
           </a:p>
         </p:txBody>
       </p:sp>
-      <mc:AlternateContent xmlns:mc="http://schemas.openxmlformats.org/markup-compatibility/2006" xmlns:a14="http://schemas.microsoft.com/office/drawing/2010/main">
-        <mc:Choice Requires="a14">
+      <mc:AlternateContent xmlns:mc="http://schemas.openxmlformats.org/markup-compatibility/2006">
+        <mc:Choice xmlns:a14="http://schemas.microsoft.com/office/drawing/2010/main" Requires="a14">
           <p:sp>
             <p:nvSpPr>
               <p:cNvPr id="3" name="Marcador de contenido 2">
                 <a:extLst>
                   <a:ext uri="{FF2B5EF4-FFF2-40B4-BE49-F238E27FC236}">
-                    <a16:creationId xmlns:a16="http://schemas.microsoft.com/office/drawing/2014/main" xmlns="" id="{9B47C1CA-1FBE-412A-E933-F868B5095F17}"/>
+                    <a16:creationId xmlns="" xmlns:a16="http://schemas.microsoft.com/office/drawing/2014/main" id="{9B47C1CA-1FBE-412A-E933-F868B5095F17}"/>
                   </a:ext>
                 </a:extLst>
               </p:cNvPr>
@@ -35352,7 +35594,7 @@
             </p:nvSpPr>
             <p:spPr>
               <a:xfrm>
-                <a:off x="838200" y="1690688"/>
+                <a:off x="777387" y="1529191"/>
                 <a:ext cx="5181600" cy="4486275"/>
               </a:xfrm>
             </p:spPr>
@@ -35645,13 +35887,13 @@
             </p:txBody>
           </p:sp>
         </mc:Choice>
-        <mc:Fallback xmlns="">
+        <mc:Fallback>
           <p:sp>
             <p:nvSpPr>
               <p:cNvPr id="3" name="Marcador de contenido 2">
                 <a:extLst>
                   <a:ext uri="{FF2B5EF4-FFF2-40B4-BE49-F238E27FC236}">
-                    <a16:creationId xmlns:a16="http://schemas.microsoft.com/office/drawing/2014/main" id="{9B47C1CA-1FBE-412A-E933-F868B5095F17}"/>
+                    <a16:creationId xmlns="" xmlns:a16="http://schemas.microsoft.com/office/drawing/2014/main" xmlns:a14="http://schemas.microsoft.com/office/drawing/2010/main" id="{9B47C1CA-1FBE-412A-E933-F868B5095F17}"/>
                   </a:ext>
                 </a:extLst>
               </p:cNvPr>
@@ -35664,10 +35906,10 @@
             </p:nvSpPr>
             <p:spPr>
               <a:xfrm>
-                <a:off x="838200" y="1690688"/>
+                <a:off x="777387" y="1529191"/>
                 <a:ext cx="5181600" cy="4486275"/>
               </a:xfrm>
-              <a:blipFill>
+              <a:blipFill rotWithShape="0">
                 <a:blip r:embed="rId3"/>
                 <a:stretch>
                   <a:fillRect l="-1882" t="-1902"/>
@@ -35679,7 +35921,7 @@
               <a:lstStyle/>
               <a:p>
                 <a:r>
-                  <a:rPr lang="es-MX">
+                  <a:rPr lang="en-US">
                     <a:noFill/>
                   </a:rPr>
                   <a:t> </a:t>
@@ -35696,7 +35938,7 @@
               <p:cNvPr id="4" name="Marcador de contenido 3">
                 <a:extLst>
                   <a:ext uri="{FF2B5EF4-FFF2-40B4-BE49-F238E27FC236}">
-                    <a16:creationId xmlns:a16="http://schemas.microsoft.com/office/drawing/2014/main" xmlns="" id="{33376411-7794-DBE3-8CFD-7FD77FD9B7E1}"/>
+                    <a16:creationId xmlns="" xmlns:a16="http://schemas.microsoft.com/office/drawing/2014/main" id="{33376411-7794-DBE3-8CFD-7FD77FD9B7E1}"/>
                   </a:ext>
                 </a:extLst>
               </p:cNvPr>
@@ -35823,14 +36065,14 @@
           </p:sp>
         </mc:Fallback>
       </mc:AlternateContent>
-      <mc:AlternateContent xmlns:mc="http://schemas.openxmlformats.org/markup-compatibility/2006" xmlns:a14="http://schemas.microsoft.com/office/drawing/2010/main">
-        <mc:Choice Requires="a14">
+      <mc:AlternateContent xmlns:mc="http://schemas.openxmlformats.org/markup-compatibility/2006">
+        <mc:Choice xmlns:a14="http://schemas.microsoft.com/office/drawing/2010/main" Requires="a14">
           <p:graphicFrame>
             <p:nvGraphicFramePr>
               <p:cNvPr id="9" name="Tabla 8">
                 <a:extLst>
                   <a:ext uri="{FF2B5EF4-FFF2-40B4-BE49-F238E27FC236}">
-                    <a16:creationId xmlns:a16="http://schemas.microsoft.com/office/drawing/2014/main" xmlns="" id="{98CA1BFB-021D-ADE1-A02E-3506BDC1A908}"/>
+                    <a16:creationId xmlns="" xmlns:a16="http://schemas.microsoft.com/office/drawing/2014/main" id="{98CA1BFB-021D-ADE1-A02E-3506BDC1A908}"/>
                   </a:ext>
                 </a:extLst>
               </p:cNvPr>
@@ -35840,13 +36082,13 @@
               <p:nvPr>
                 <p:extLst>
                   <p:ext uri="{D42A27DB-BD31-4B8C-83A1-F6EECF244321}">
-                    <p14:modId xmlns:p14="http://schemas.microsoft.com/office/powerpoint/2010/main" val="1380693578"/>
+                    <p14:modId xmlns:p14="http://schemas.microsoft.com/office/powerpoint/2010/main" val="2697544056"/>
                   </p:ext>
                 </p:extLst>
               </p:nvPr>
             </p:nvGraphicFramePr>
             <p:xfrm>
-              <a:off x="838200" y="4060613"/>
+              <a:off x="838200" y="3811133"/>
               <a:ext cx="6261821" cy="2660406"/>
             </p:xfrm>
             <a:graphic>
@@ -35859,28 +36101,28 @@
                     <a:gridCol w="1207135">
                       <a:extLst>
                         <a:ext uri="{9D8B030D-6E8A-4147-A177-3AD203B41FA5}">
-                          <a16:colId xmlns:a16="http://schemas.microsoft.com/office/drawing/2014/main" xmlns="" val="4231280534"/>
+                          <a16:colId xmlns="" xmlns:a16="http://schemas.microsoft.com/office/drawing/2014/main" val="4231280534"/>
                         </a:ext>
                       </a:extLst>
                     </a:gridCol>
                     <a:gridCol w="1170305">
                       <a:extLst>
                         <a:ext uri="{9D8B030D-6E8A-4147-A177-3AD203B41FA5}">
-                          <a16:colId xmlns:a16="http://schemas.microsoft.com/office/drawing/2014/main" xmlns="" val="1923169229"/>
+                          <a16:colId xmlns="" xmlns:a16="http://schemas.microsoft.com/office/drawing/2014/main" val="1923169229"/>
                         </a:ext>
                       </a:extLst>
                     </a:gridCol>
                     <a:gridCol w="2041144">
                       <a:extLst>
                         <a:ext uri="{9D8B030D-6E8A-4147-A177-3AD203B41FA5}">
-                          <a16:colId xmlns:a16="http://schemas.microsoft.com/office/drawing/2014/main" xmlns="" val="3299784387"/>
+                          <a16:colId xmlns="" xmlns:a16="http://schemas.microsoft.com/office/drawing/2014/main" val="3299784387"/>
                         </a:ext>
                       </a:extLst>
                     </a:gridCol>
                     <a:gridCol w="1843237">
                       <a:extLst>
                         <a:ext uri="{9D8B030D-6E8A-4147-A177-3AD203B41FA5}">
-                          <a16:colId xmlns:a16="http://schemas.microsoft.com/office/drawing/2014/main" xmlns="" val="2309885579"/>
+                          <a16:colId xmlns="" xmlns:a16="http://schemas.microsoft.com/office/drawing/2014/main" val="2309885579"/>
                         </a:ext>
                       </a:extLst>
                     </a:gridCol>
@@ -36060,7 +36302,7 @@
                     </a:tc>
                     <a:extLst>
                       <a:ext uri="{0D108BD9-81ED-4DB2-BD59-A6C34878D82A}">
-                        <a16:rowId xmlns:a16="http://schemas.microsoft.com/office/drawing/2014/main" xmlns="" val="1334428884"/>
+                        <a16:rowId xmlns="" xmlns:a16="http://schemas.microsoft.com/office/drawing/2014/main" val="1334428884"/>
                       </a:ext>
                     </a:extLst>
                   </a:tr>
@@ -36196,7 +36438,7 @@
                     </a:tc>
                     <a:extLst>
                       <a:ext uri="{0D108BD9-81ED-4DB2-BD59-A6C34878D82A}">
-                        <a16:rowId xmlns:a16="http://schemas.microsoft.com/office/drawing/2014/main" xmlns="" val="3115401656"/>
+                        <a16:rowId xmlns="" xmlns:a16="http://schemas.microsoft.com/office/drawing/2014/main" val="3115401656"/>
                       </a:ext>
                     </a:extLst>
                   </a:tr>
@@ -36331,7 +36573,7 @@
                     </a:tc>
                     <a:extLst>
                       <a:ext uri="{0D108BD9-81ED-4DB2-BD59-A6C34878D82A}">
-                        <a16:rowId xmlns:a16="http://schemas.microsoft.com/office/drawing/2014/main" xmlns="" val="1033675829"/>
+                        <a16:rowId xmlns="" xmlns:a16="http://schemas.microsoft.com/office/drawing/2014/main" val="1033675829"/>
                       </a:ext>
                     </a:extLst>
                   </a:tr>
@@ -36467,7 +36709,7 @@
                     </a:tc>
                     <a:extLst>
                       <a:ext uri="{0D108BD9-81ED-4DB2-BD59-A6C34878D82A}">
-                        <a16:rowId xmlns:a16="http://schemas.microsoft.com/office/drawing/2014/main" xmlns="" val="2867198737"/>
+                        <a16:rowId xmlns="" xmlns:a16="http://schemas.microsoft.com/office/drawing/2014/main" val="2867198737"/>
                       </a:ext>
                     </a:extLst>
                   </a:tr>
@@ -36602,7 +36844,7 @@
                     </a:tc>
                     <a:extLst>
                       <a:ext uri="{0D108BD9-81ED-4DB2-BD59-A6C34878D82A}">
-                        <a16:rowId xmlns:a16="http://schemas.microsoft.com/office/drawing/2014/main" xmlns="" val="2125488404"/>
+                        <a16:rowId xmlns="" xmlns:a16="http://schemas.microsoft.com/office/drawing/2014/main" val="2125488404"/>
                       </a:ext>
                     </a:extLst>
                   </a:tr>
@@ -36611,13 +36853,13 @@
             </a:graphic>
           </p:graphicFrame>
         </mc:Choice>
-        <mc:Fallback xmlns="">
+        <mc:Fallback>
           <p:graphicFrame>
             <p:nvGraphicFramePr>
               <p:cNvPr id="9" name="Tabla 8">
                 <a:extLst>
                   <a:ext uri="{FF2B5EF4-FFF2-40B4-BE49-F238E27FC236}">
-                    <a16:creationId xmlns:a16="http://schemas.microsoft.com/office/drawing/2014/main" id="{98CA1BFB-021D-ADE1-A02E-3506BDC1A908}"/>
+                    <a16:creationId xmlns="" xmlns:a16="http://schemas.microsoft.com/office/drawing/2014/main" xmlns:a14="http://schemas.microsoft.com/office/drawing/2010/main" id="{98CA1BFB-021D-ADE1-A02E-3506BDC1A908}"/>
                   </a:ext>
                 </a:extLst>
               </p:cNvPr>
@@ -36627,14 +36869,14 @@
               <p:nvPr>
                 <p:extLst>
                   <p:ext uri="{D42A27DB-BD31-4B8C-83A1-F6EECF244321}">
-                    <p14:modId xmlns:p14="http://schemas.microsoft.com/office/powerpoint/2010/main" val="1380693578"/>
+                    <p14:modId xmlns:p14="http://schemas.microsoft.com/office/powerpoint/2010/main" val="2697544056"/>
                   </p:ext>
                 </p:extLst>
               </p:nvPr>
             </p:nvGraphicFramePr>
             <p:xfrm>
-              <a:off x="838200" y="4060613"/>
-              <a:ext cx="6261821" cy="1847606"/>
+              <a:off x="838200" y="3811133"/>
+              <a:ext cx="6261821" cy="2660406"/>
             </p:xfrm>
             <a:graphic>
               <a:graphicData uri="http://schemas.openxmlformats.org/drawingml/2006/table">
@@ -36646,33 +36888,33 @@
                     <a:gridCol w="1207135">
                       <a:extLst>
                         <a:ext uri="{9D8B030D-6E8A-4147-A177-3AD203B41FA5}">
-                          <a16:colId xmlns:a16="http://schemas.microsoft.com/office/drawing/2014/main" val="4231280534"/>
+                          <a16:colId xmlns="" xmlns:a16="http://schemas.microsoft.com/office/drawing/2014/main" xmlns:a14="http://schemas.microsoft.com/office/drawing/2010/main" val="4231280534"/>
                         </a:ext>
                       </a:extLst>
                     </a:gridCol>
                     <a:gridCol w="1170305">
                       <a:extLst>
                         <a:ext uri="{9D8B030D-6E8A-4147-A177-3AD203B41FA5}">
-                          <a16:colId xmlns:a16="http://schemas.microsoft.com/office/drawing/2014/main" val="1923169229"/>
+                          <a16:colId xmlns="" xmlns:a16="http://schemas.microsoft.com/office/drawing/2014/main" xmlns:a14="http://schemas.microsoft.com/office/drawing/2010/main" val="1923169229"/>
                         </a:ext>
                       </a:extLst>
                     </a:gridCol>
                     <a:gridCol w="2041144">
                       <a:extLst>
                         <a:ext uri="{9D8B030D-6E8A-4147-A177-3AD203B41FA5}">
-                          <a16:colId xmlns:a16="http://schemas.microsoft.com/office/drawing/2014/main" val="3299784387"/>
+                          <a16:colId xmlns="" xmlns:a16="http://schemas.microsoft.com/office/drawing/2014/main" xmlns:a14="http://schemas.microsoft.com/office/drawing/2010/main" val="3299784387"/>
                         </a:ext>
                       </a:extLst>
                     </a:gridCol>
                     <a:gridCol w="1843237">
                       <a:extLst>
                         <a:ext uri="{9D8B030D-6E8A-4147-A177-3AD203B41FA5}">
-                          <a16:colId xmlns:a16="http://schemas.microsoft.com/office/drawing/2014/main" val="2309885579"/>
+                          <a16:colId xmlns="" xmlns:a16="http://schemas.microsoft.com/office/drawing/2014/main" xmlns:a14="http://schemas.microsoft.com/office/drawing/2010/main" val="2309885579"/>
                         </a:ext>
                       </a:extLst>
                     </a:gridCol>
                   </a:tblGrid>
-                  <a:tr h="365760">
+                  <a:tr h="640080">
                     <a:tc>
                       <a:txBody>
                         <a:bodyPr/>
@@ -36790,7 +37032,7 @@
                         <a:bodyPr/>
                         <a:lstStyle/>
                         <a:p>
-                          <a:endParaRPr lang="es-MX"/>
+                          <a:endParaRPr lang="en-US"/>
                         </a:p>
                       </a:txBody>
                       <a:tcPr>
@@ -36803,17 +37045,17 @@
                           <a:headEnd type="none" w="med" len="med"/>
                           <a:tailEnd type="none" w="med" len="med"/>
                         </a:lnB>
-                        <a:blipFill>
+                        <a:blipFill rotWithShape="0">
                           <a:blip r:embed="rId5"/>
                           <a:stretch>
-                            <a:fillRect l="-239274" t="-6667" r="-330" b="-431667"/>
+                            <a:fillRect l="-239274" t="-3810" r="-330" b="-331429"/>
                           </a:stretch>
                         </a:blipFill>
                       </a:tcPr>
                     </a:tc>
                     <a:extLst>
                       <a:ext uri="{0D108BD9-81ED-4DB2-BD59-A6C34878D82A}">
-                        <a16:rowId xmlns:a16="http://schemas.microsoft.com/office/drawing/2014/main" val="1334428884"/>
+                        <a16:rowId xmlns="" xmlns:a16="http://schemas.microsoft.com/office/drawing/2014/main" xmlns:a14="http://schemas.microsoft.com/office/drawing/2010/main" val="1334428884"/>
                       </a:ext>
                     </a:extLst>
                   </a:tr>
@@ -36949,11 +37191,11 @@
                     </a:tc>
                     <a:extLst>
                       <a:ext uri="{0D108BD9-81ED-4DB2-BD59-A6C34878D82A}">
-                        <a16:rowId xmlns:a16="http://schemas.microsoft.com/office/drawing/2014/main" val="3115401656"/>
+                        <a16:rowId xmlns="" xmlns:a16="http://schemas.microsoft.com/office/drawing/2014/main" xmlns:a14="http://schemas.microsoft.com/office/drawing/2010/main" val="3115401656"/>
                       </a:ext>
                     </a:extLst>
                   </a:tr>
-                  <a:tr h="370840">
+                  <a:tr h="640080">
                     <a:tc>
                       <a:txBody>
                         <a:bodyPr/>
@@ -37084,11 +37326,11 @@
                     </a:tc>
                     <a:extLst>
                       <a:ext uri="{0D108BD9-81ED-4DB2-BD59-A6C34878D82A}">
-                        <a16:rowId xmlns:a16="http://schemas.microsoft.com/office/drawing/2014/main" val="1033675829"/>
+                        <a16:rowId xmlns="" xmlns:a16="http://schemas.microsoft.com/office/drawing/2014/main" xmlns:a14="http://schemas.microsoft.com/office/drawing/2010/main" val="1033675829"/>
                       </a:ext>
                     </a:extLst>
                   </a:tr>
-                  <a:tr h="370840">
+                  <a:tr h="640080">
                     <a:tc>
                       <a:txBody>
                         <a:bodyPr/>
@@ -37220,7 +37462,7 @@
                     </a:tc>
                     <a:extLst>
                       <a:ext uri="{0D108BD9-81ED-4DB2-BD59-A6C34878D82A}">
-                        <a16:rowId xmlns:a16="http://schemas.microsoft.com/office/drawing/2014/main" val="2867198737"/>
+                        <a16:rowId xmlns="" xmlns:a16="http://schemas.microsoft.com/office/drawing/2014/main" xmlns:a14="http://schemas.microsoft.com/office/drawing/2010/main" val="2867198737"/>
                       </a:ext>
                     </a:extLst>
                   </a:tr>
@@ -37355,7 +37597,7 @@
                     </a:tc>
                     <a:extLst>
                       <a:ext uri="{0D108BD9-81ED-4DB2-BD59-A6C34878D82A}">
-                        <a16:rowId xmlns:a16="http://schemas.microsoft.com/office/drawing/2014/main" val="2125488404"/>
+                        <a16:rowId xmlns="" xmlns:a16="http://schemas.microsoft.com/office/drawing/2014/main" xmlns:a14="http://schemas.microsoft.com/office/drawing/2010/main" val="2125488404"/>
                       </a:ext>
                     </a:extLst>
                   </a:tr>
@@ -37370,7 +37612,7 @@
           <p:cNvPr id="11" name="Rectángulo 10">
             <a:extLst>
               <a:ext uri="{FF2B5EF4-FFF2-40B4-BE49-F238E27FC236}">
-                <a16:creationId xmlns:a16="http://schemas.microsoft.com/office/drawing/2014/main" xmlns="" id="{5095EFC9-E205-7BDE-EED9-84ACF52F2416}"/>
+                <a16:creationId xmlns="" xmlns:a16="http://schemas.microsoft.com/office/drawing/2014/main" id="{5095EFC9-E205-7BDE-EED9-84ACF52F2416}"/>
               </a:ext>
             </a:extLst>
           </p:cNvPr>
@@ -37419,7 +37661,7 @@
           <p:cNvPr id="12" name="Rectángulo 11">
             <a:extLst>
               <a:ext uri="{FF2B5EF4-FFF2-40B4-BE49-F238E27FC236}">
-                <a16:creationId xmlns:a16="http://schemas.microsoft.com/office/drawing/2014/main" xmlns="" id="{F1920D2E-75E3-40C4-47B1-53C315C071B7}"/>
+                <a16:creationId xmlns="" xmlns:a16="http://schemas.microsoft.com/office/drawing/2014/main" id="{F1920D2E-75E3-40C4-47B1-53C315C071B7}"/>
               </a:ext>
             </a:extLst>
           </p:cNvPr>
@@ -37469,7 +37711,7 @@
           <p:cNvPr id="14" name="Conector recto 13">
             <a:extLst>
               <a:ext uri="{FF2B5EF4-FFF2-40B4-BE49-F238E27FC236}">
-                <a16:creationId xmlns:a16="http://schemas.microsoft.com/office/drawing/2014/main" xmlns="" id="{1EE5BF10-512B-83CF-68A9-867146FAA8B4}"/>
+                <a16:creationId xmlns="" xmlns:a16="http://schemas.microsoft.com/office/drawing/2014/main" id="{1EE5BF10-512B-83CF-68A9-867146FAA8B4}"/>
               </a:ext>
             </a:extLst>
           </p:cNvPr>
@@ -37508,7 +37750,7 @@
           <p:cNvPr id="17" name="Conector recto 16">
             <a:extLst>
               <a:ext uri="{FF2B5EF4-FFF2-40B4-BE49-F238E27FC236}">
-                <a16:creationId xmlns:a16="http://schemas.microsoft.com/office/drawing/2014/main" xmlns="" id="{F8835413-E296-86F1-2413-0044EA33819B}"/>
+                <a16:creationId xmlns="" xmlns:a16="http://schemas.microsoft.com/office/drawing/2014/main" id="{F8835413-E296-86F1-2413-0044EA33819B}"/>
               </a:ext>
             </a:extLst>
           </p:cNvPr>
@@ -37547,7 +37789,7 @@
           <p:cNvPr id="19" name="Conector recto 18">
             <a:extLst>
               <a:ext uri="{FF2B5EF4-FFF2-40B4-BE49-F238E27FC236}">
-                <a16:creationId xmlns:a16="http://schemas.microsoft.com/office/drawing/2014/main" xmlns="" id="{1B2D845B-7087-3602-3CA9-E2B8E95AB6E8}"/>
+                <a16:creationId xmlns="" xmlns:a16="http://schemas.microsoft.com/office/drawing/2014/main" id="{1B2D845B-7087-3602-3CA9-E2B8E95AB6E8}"/>
               </a:ext>
             </a:extLst>
           </p:cNvPr>
@@ -37586,7 +37828,7 @@
           <p:cNvPr id="22" name="Conector recto 21">
             <a:extLst>
               <a:ext uri="{FF2B5EF4-FFF2-40B4-BE49-F238E27FC236}">
-                <a16:creationId xmlns:a16="http://schemas.microsoft.com/office/drawing/2014/main" xmlns="" id="{11AB5E83-A8AA-0B74-F944-196109C24502}"/>
+                <a16:creationId xmlns="" xmlns:a16="http://schemas.microsoft.com/office/drawing/2014/main" id="{11AB5E83-A8AA-0B74-F944-196109C24502}"/>
               </a:ext>
             </a:extLst>
           </p:cNvPr>
@@ -37625,7 +37867,7 @@
           <p:cNvPr id="25" name="Conector recto 24">
             <a:extLst>
               <a:ext uri="{FF2B5EF4-FFF2-40B4-BE49-F238E27FC236}">
-                <a16:creationId xmlns:a16="http://schemas.microsoft.com/office/drawing/2014/main" xmlns="" id="{4F5F5433-B5F6-7D1B-3AB2-64E901A5EDD7}"/>
+                <a16:creationId xmlns="" xmlns:a16="http://schemas.microsoft.com/office/drawing/2014/main" id="{4F5F5433-B5F6-7D1B-3AB2-64E901A5EDD7}"/>
               </a:ext>
             </a:extLst>
           </p:cNvPr>
@@ -37664,7 +37906,7 @@
           <p:cNvPr id="28" name="Conector recto 27">
             <a:extLst>
               <a:ext uri="{FF2B5EF4-FFF2-40B4-BE49-F238E27FC236}">
-                <a16:creationId xmlns:a16="http://schemas.microsoft.com/office/drawing/2014/main" xmlns="" id="{E5664ADB-503E-0D4D-FC40-F342CB76DE76}"/>
+                <a16:creationId xmlns="" xmlns:a16="http://schemas.microsoft.com/office/drawing/2014/main" id="{E5664ADB-503E-0D4D-FC40-F342CB76DE76}"/>
               </a:ext>
             </a:extLst>
           </p:cNvPr>
@@ -37703,7 +37945,7 @@
           <p:cNvPr id="32" name="Conector recto 31">
             <a:extLst>
               <a:ext uri="{FF2B5EF4-FFF2-40B4-BE49-F238E27FC236}">
-                <a16:creationId xmlns:a16="http://schemas.microsoft.com/office/drawing/2014/main" xmlns="" id="{41689905-FEF3-814B-2CEF-8D2C69CF4D71}"/>
+                <a16:creationId xmlns="" xmlns:a16="http://schemas.microsoft.com/office/drawing/2014/main" id="{41689905-FEF3-814B-2CEF-8D2C69CF4D71}"/>
               </a:ext>
             </a:extLst>
           </p:cNvPr>
@@ -37742,7 +37984,7 @@
           <p:cNvPr id="35" name="Conector recto 34">
             <a:extLst>
               <a:ext uri="{FF2B5EF4-FFF2-40B4-BE49-F238E27FC236}">
-                <a16:creationId xmlns:a16="http://schemas.microsoft.com/office/drawing/2014/main" xmlns="" id="{2A1609FC-EA89-E8CE-5936-3D54BD98D145}"/>
+                <a16:creationId xmlns="" xmlns:a16="http://schemas.microsoft.com/office/drawing/2014/main" id="{2A1609FC-EA89-E8CE-5936-3D54BD98D145}"/>
               </a:ext>
             </a:extLst>
           </p:cNvPr>
@@ -37781,7 +38023,7 @@
           <p:cNvPr id="38" name="CuadroTexto 37">
             <a:extLst>
               <a:ext uri="{FF2B5EF4-FFF2-40B4-BE49-F238E27FC236}">
-                <a16:creationId xmlns:a16="http://schemas.microsoft.com/office/drawing/2014/main" xmlns="" id="{5FCB0778-1654-B6B4-8BA1-3D5727A1CC3D}"/>
+                <a16:creationId xmlns="" xmlns:a16="http://schemas.microsoft.com/office/drawing/2014/main" id="{5FCB0778-1654-B6B4-8BA1-3D5727A1CC3D}"/>
               </a:ext>
             </a:extLst>
           </p:cNvPr>
@@ -37816,7 +38058,7 @@
           <p:cNvPr id="39" name="CuadroTexto 38">
             <a:extLst>
               <a:ext uri="{FF2B5EF4-FFF2-40B4-BE49-F238E27FC236}">
-                <a16:creationId xmlns:a16="http://schemas.microsoft.com/office/drawing/2014/main" xmlns="" id="{17CEBE75-1994-6BCE-472F-8E7809BDADF8}"/>
+                <a16:creationId xmlns="" xmlns:a16="http://schemas.microsoft.com/office/drawing/2014/main" id="{17CEBE75-1994-6BCE-472F-8E7809BDADF8}"/>
               </a:ext>
             </a:extLst>
           </p:cNvPr>
@@ -37851,7 +38093,7 @@
           <p:cNvPr id="40" name="CuadroTexto 39">
             <a:extLst>
               <a:ext uri="{FF2B5EF4-FFF2-40B4-BE49-F238E27FC236}">
-                <a16:creationId xmlns:a16="http://schemas.microsoft.com/office/drawing/2014/main" xmlns="" id="{5D1A0A17-21C4-C698-DA37-49B7314640A8}"/>
+                <a16:creationId xmlns="" xmlns:a16="http://schemas.microsoft.com/office/drawing/2014/main" id="{5D1A0A17-21C4-C698-DA37-49B7314640A8}"/>
               </a:ext>
             </a:extLst>
           </p:cNvPr>
@@ -37886,7 +38128,7 @@
           <p:cNvPr id="41" name="CuadroTexto 40">
             <a:extLst>
               <a:ext uri="{FF2B5EF4-FFF2-40B4-BE49-F238E27FC236}">
-                <a16:creationId xmlns:a16="http://schemas.microsoft.com/office/drawing/2014/main" xmlns="" id="{1EB65284-6CAB-4A7D-CEC5-E9DB0295E301}"/>
+                <a16:creationId xmlns="" xmlns:a16="http://schemas.microsoft.com/office/drawing/2014/main" id="{1EB65284-6CAB-4A7D-CEC5-E9DB0295E301}"/>
               </a:ext>
             </a:extLst>
           </p:cNvPr>
@@ -37945,7 +38187,7 @@
         <p:cNvPr id="1" name="">
           <a:extLst>
             <a:ext uri="{FF2B5EF4-FFF2-40B4-BE49-F238E27FC236}">
-              <a16:creationId xmlns:a16="http://schemas.microsoft.com/office/drawing/2014/main" xmlns="" id="{872BFE6A-2DB1-E0D0-9400-F02E1069CC92}"/>
+              <a16:creationId xmlns="" xmlns:a16="http://schemas.microsoft.com/office/drawing/2014/main" id="{872BFE6A-2DB1-E0D0-9400-F02E1069CC92}"/>
             </a:ext>
           </a:extLst>
         </p:cNvPr>
@@ -37965,7 +38207,7 @@
           <p:cNvPr id="2" name="Título 1">
             <a:extLst>
               <a:ext uri="{FF2B5EF4-FFF2-40B4-BE49-F238E27FC236}">
-                <a16:creationId xmlns:a16="http://schemas.microsoft.com/office/drawing/2014/main" xmlns="" id="{734A44EE-5DC6-76A6-8360-7880E3E694E1}"/>
+                <a16:creationId xmlns="" xmlns:a16="http://schemas.microsoft.com/office/drawing/2014/main" id="{734A44EE-5DC6-76A6-8360-7880E3E694E1}"/>
               </a:ext>
             </a:extLst>
           </p:cNvPr>
@@ -37988,8 +38230,12 @@
                 <a:latin typeface="Times New Roman" panose="02020603050405020304" pitchFamily="18" charset="0"/>
                 <a:cs typeface="Times New Roman" panose="02020603050405020304" pitchFamily="18" charset="0"/>
               </a:rPr>
-              <a:t>Estado del arte</a:t>
+              <a:t>Marco Teórico</a:t>
             </a:r>
+            <a:endParaRPr lang="es-MX" sz="3400" dirty="0">
+              <a:latin typeface="Times New Roman" panose="02020603050405020304" pitchFamily="18" charset="0"/>
+              <a:cs typeface="Times New Roman" panose="02020603050405020304" pitchFamily="18" charset="0"/>
+            </a:endParaRPr>
           </a:p>
         </p:txBody>
       </p:sp>
@@ -38000,7 +38246,7 @@
               <p:cNvPr id="3" name="Marcador de contenido 2">
                 <a:extLst>
                   <a:ext uri="{FF2B5EF4-FFF2-40B4-BE49-F238E27FC236}">
-                    <a16:creationId xmlns:a16="http://schemas.microsoft.com/office/drawing/2014/main" xmlns="" id="{33643874-1905-7EFB-B2A0-9A8BC1D7A8BD}"/>
+                    <a16:creationId xmlns="" xmlns:a16="http://schemas.microsoft.com/office/drawing/2014/main" id="{33643874-1905-7EFB-B2A0-9A8BC1D7A8BD}"/>
                   </a:ext>
                 </a:extLst>
               </p:cNvPr>
@@ -38863,7 +39109,7 @@
               <p:cNvPr id="4" name="Marcador de contenido 3">
                 <a:extLst>
                   <a:ext uri="{FF2B5EF4-FFF2-40B4-BE49-F238E27FC236}">
-                    <a16:creationId xmlns:a16="http://schemas.microsoft.com/office/drawing/2014/main" xmlns="" id="{317D7AD1-7B06-B41D-A2C7-6563599477F1}"/>
+                    <a16:creationId xmlns="" xmlns:a16="http://schemas.microsoft.com/office/drawing/2014/main" id="{317D7AD1-7B06-B41D-A2C7-6563599477F1}"/>
                   </a:ext>
                 </a:extLst>
               </p:cNvPr>
@@ -39217,7 +39463,7 @@
           <p:cNvPr id="9" name="Abrir llave 8">
             <a:extLst>
               <a:ext uri="{FF2B5EF4-FFF2-40B4-BE49-F238E27FC236}">
-                <a16:creationId xmlns:a16="http://schemas.microsoft.com/office/drawing/2014/main" xmlns="" id="{6D1EF346-10A7-B9BA-E281-E0BE0F7E0702}"/>
+                <a16:creationId xmlns="" xmlns:a16="http://schemas.microsoft.com/office/drawing/2014/main" id="{6D1EF346-10A7-B9BA-E281-E0BE0F7E0702}"/>
               </a:ext>
             </a:extLst>
           </p:cNvPr>
@@ -39261,7 +39507,7 @@
           <p:cNvPr id="11" name="CuadroTexto 10">
             <a:extLst>
               <a:ext uri="{FF2B5EF4-FFF2-40B4-BE49-F238E27FC236}">
-                <a16:creationId xmlns:a16="http://schemas.microsoft.com/office/drawing/2014/main" xmlns="" id="{300D47FF-0E73-F6FD-1E6D-F93C30936340}"/>
+                <a16:creationId xmlns="" xmlns:a16="http://schemas.microsoft.com/office/drawing/2014/main" id="{300D47FF-0E73-F6FD-1E6D-F93C30936340}"/>
               </a:ext>
             </a:extLst>
           </p:cNvPr>
@@ -39296,7 +39542,7 @@
           <p:cNvPr id="14" name="CuadroTexto 13">
             <a:extLst>
               <a:ext uri="{FF2B5EF4-FFF2-40B4-BE49-F238E27FC236}">
-                <a16:creationId xmlns:a16="http://schemas.microsoft.com/office/drawing/2014/main" xmlns="" id="{383A969F-4553-4EEA-7F8A-103791D6F8D7}"/>
+                <a16:creationId xmlns="" xmlns:a16="http://schemas.microsoft.com/office/drawing/2014/main" id="{383A969F-4553-4EEA-7F8A-103791D6F8D7}"/>
               </a:ext>
             </a:extLst>
           </p:cNvPr>
@@ -39331,7 +39577,7 @@
           <p:cNvPr id="16" name="Imagen 15">
             <a:extLst>
               <a:ext uri="{FF2B5EF4-FFF2-40B4-BE49-F238E27FC236}">
-                <a16:creationId xmlns:a16="http://schemas.microsoft.com/office/drawing/2014/main" xmlns="" id="{944F5E01-6509-6391-1291-62C2B4838CCD}"/>
+                <a16:creationId xmlns="" xmlns:a16="http://schemas.microsoft.com/office/drawing/2014/main" id="{944F5E01-6509-6391-1291-62C2B4838CCD}"/>
               </a:ext>
             </a:extLst>
           </p:cNvPr>
@@ -39377,7 +39623,7 @@
         <p:cNvPr id="1" name="">
           <a:extLst>
             <a:ext uri="{FF2B5EF4-FFF2-40B4-BE49-F238E27FC236}">
-              <a16:creationId xmlns:a16="http://schemas.microsoft.com/office/drawing/2014/main" xmlns="" id="{D8811552-CF54-B7B0-228A-FCC1759885BF}"/>
+              <a16:creationId xmlns="" xmlns:a16="http://schemas.microsoft.com/office/drawing/2014/main" id="{D8811552-CF54-B7B0-228A-FCC1759885BF}"/>
             </a:ext>
           </a:extLst>
         </p:cNvPr>
@@ -39397,7 +39643,7 @@
           <p:cNvPr id="2" name="Título 1">
             <a:extLst>
               <a:ext uri="{FF2B5EF4-FFF2-40B4-BE49-F238E27FC236}">
-                <a16:creationId xmlns:a16="http://schemas.microsoft.com/office/drawing/2014/main" xmlns="" id="{C6DE340F-FCED-4F7D-FE84-7B279ABAD467}"/>
+                <a16:creationId xmlns="" xmlns:a16="http://schemas.microsoft.com/office/drawing/2014/main" id="{C6DE340F-FCED-4F7D-FE84-7B279ABAD467}"/>
               </a:ext>
             </a:extLst>
           </p:cNvPr>
@@ -39420,8 +39666,12 @@
                 <a:latin typeface="Times New Roman" panose="02020603050405020304" pitchFamily="18" charset="0"/>
                 <a:cs typeface="Times New Roman" panose="02020603050405020304" pitchFamily="18" charset="0"/>
               </a:rPr>
-              <a:t>Estado del arte</a:t>
+              <a:t>Marco Teórico</a:t>
             </a:r>
+            <a:endParaRPr lang="es-MX" sz="3400" dirty="0">
+              <a:latin typeface="Times New Roman" panose="02020603050405020304" pitchFamily="18" charset="0"/>
+              <a:cs typeface="Times New Roman" panose="02020603050405020304" pitchFamily="18" charset="0"/>
+            </a:endParaRPr>
           </a:p>
         </p:txBody>
       </p:sp>
@@ -39430,7 +39680,7 @@
           <p:cNvPr id="16" name="Imagen 15">
             <a:extLst>
               <a:ext uri="{FF2B5EF4-FFF2-40B4-BE49-F238E27FC236}">
-                <a16:creationId xmlns:a16="http://schemas.microsoft.com/office/drawing/2014/main" xmlns="" id="{D673634D-3F76-0399-4602-730EAA99ABBB}"/>
+                <a16:creationId xmlns="" xmlns:a16="http://schemas.microsoft.com/office/drawing/2014/main" id="{D673634D-3F76-0399-4602-730EAA99ABBB}"/>
               </a:ext>
             </a:extLst>
           </p:cNvPr>
